--- a/results/AGV_Report.pptx
+++ b/results/AGV_Report.pptx
@@ -18,9 +18,11 @@
     <p:sldId id="266" r:id="rId12"/>
     <p:sldId id="267" r:id="rId13"/>
     <p:sldId id="268" r:id="rId14"/>
+    <p:sldId id="269" r:id="rId15"/>
+    <p:sldId id="270" r:id="rId16"/>
   </p:sldIdLst>
   <p:notesMasterIdLst>
-    <p:notesMasterId r:id="rId15"/>
+    <p:notesMasterId r:id="rId17"/>
   </p:notesMasterIdLst>
   <p:sldSz cx="12192000" cy="6858000"/>
   <p:notesSz cx="6858000" cy="12192000"/>
@@ -890,6 +892,182 @@
             <a:fld id="{F7021451-1387-4CA6-816F-3879F97B5CBC}" type="slidenum">
               <a:rPr lang="en-US"/>
               <a:t>13</a:t>
+            </a:fld>
+            <a:endParaRPr lang="en-US"/>
+          </a:p>
+        </p:txBody>
+      </p:sp>
+    </p:spTree>
+    <p:extLst>
+      <p:ext uri="{BB962C8B-B14F-4D97-AF65-F5344CB8AC3E}">
+        <p14:creationId xmlns:p14="http://schemas.microsoft.com/office/powerpoint/2010/main" val="1024086991"/>
+      </p:ext>
+    </p:extLst>
+  </p:cSld>
+  <p:clrMapOvr>
+    <a:masterClrMapping/>
+  </p:clrMapOvr>
+</p:notes>
+</file>
+
+<file path=ppt/notesSlides/notesSlide14.xml><?xml version="1.0" encoding="utf-8"?>
+<p:notes xmlns:a="http://schemas.openxmlformats.org/drawingml/2006/main" xmlns:r="http://schemas.openxmlformats.org/officeDocument/2006/relationships" xmlns:p="http://schemas.openxmlformats.org/presentationml/2006/main">
+  <p:cSld>
+    <p:spTree>
+      <p:nvGrpSpPr>
+        <p:cNvPr id="1" name=""/>
+        <p:cNvGrpSpPr/>
+        <p:nvPr/>
+      </p:nvGrpSpPr>
+      <p:grpSpPr>
+        <a:xfrm>
+          <a:off x="0" y="0"/>
+          <a:ext cx="0" cy="0"/>
+          <a:chOff x="0" y="0"/>
+          <a:chExt cx="0" cy="0"/>
+        </a:xfrm>
+      </p:grpSpPr>
+      <p:sp>
+        <p:nvSpPr>
+          <p:cNvPr id="2" name="Slide Image Placeholder 1"/>
+          <p:cNvSpPr>
+            <a:spLocks noGrp="1" noRot="1" noChangeAspect="1"/>
+          </p:cNvSpPr>
+          <p:nvPr>
+            <p:ph type="sldImg"/>
+          </p:nvPr>
+        </p:nvSpPr>
+        <p:spPr/>
+      </p:sp>
+      <p:sp>
+        <p:nvSpPr>
+          <p:cNvPr id="3" name="Notes Placeholder 2"/>
+          <p:cNvSpPr>
+            <a:spLocks noGrp="1"/>
+          </p:cNvSpPr>
+          <p:nvPr>
+            <p:ph type="body" idx="1"/>
+          </p:nvPr>
+        </p:nvSpPr>
+        <p:spPr/>
+        <p:txBody>
+          <a:bodyPr/>
+          <a:lstStyle/>
+          <a:p>
+            <a:r>
+              <a:rPr lang="en-US" dirty="0"/>
+              <a:t/>
+            </a:r>
+            <a:endParaRPr lang="en-US" dirty="0"/>
+          </a:p>
+        </p:txBody>
+      </p:sp>
+      <p:sp>
+        <p:nvSpPr>
+          <p:cNvPr id="4" name="Slide Number Placeholder 3"/>
+          <p:cNvSpPr>
+            <a:spLocks noGrp="1"/>
+          </p:cNvSpPr>
+          <p:nvPr>
+            <p:ph type="sldNum" sz="quarter" idx="10"/>
+          </p:nvPr>
+        </p:nvSpPr>
+        <p:spPr/>
+        <p:txBody>
+          <a:bodyPr/>
+          <a:lstStyle/>
+          <a:p>
+            <a:fld id="{F7021451-1387-4CA6-816F-3879F97B5CBC}" type="slidenum">
+              <a:rPr lang="en-US"/>
+              <a:t>14</a:t>
+            </a:fld>
+            <a:endParaRPr lang="en-US"/>
+          </a:p>
+        </p:txBody>
+      </p:sp>
+    </p:spTree>
+    <p:extLst>
+      <p:ext uri="{BB962C8B-B14F-4D97-AF65-F5344CB8AC3E}">
+        <p14:creationId xmlns:p14="http://schemas.microsoft.com/office/powerpoint/2010/main" val="1024086991"/>
+      </p:ext>
+    </p:extLst>
+  </p:cSld>
+  <p:clrMapOvr>
+    <a:masterClrMapping/>
+  </p:clrMapOvr>
+</p:notes>
+</file>
+
+<file path=ppt/notesSlides/notesSlide15.xml><?xml version="1.0" encoding="utf-8"?>
+<p:notes xmlns:a="http://schemas.openxmlformats.org/drawingml/2006/main" xmlns:r="http://schemas.openxmlformats.org/officeDocument/2006/relationships" xmlns:p="http://schemas.openxmlformats.org/presentationml/2006/main">
+  <p:cSld>
+    <p:spTree>
+      <p:nvGrpSpPr>
+        <p:cNvPr id="1" name=""/>
+        <p:cNvGrpSpPr/>
+        <p:nvPr/>
+      </p:nvGrpSpPr>
+      <p:grpSpPr>
+        <a:xfrm>
+          <a:off x="0" y="0"/>
+          <a:ext cx="0" cy="0"/>
+          <a:chOff x="0" y="0"/>
+          <a:chExt cx="0" cy="0"/>
+        </a:xfrm>
+      </p:grpSpPr>
+      <p:sp>
+        <p:nvSpPr>
+          <p:cNvPr id="2" name="Slide Image Placeholder 1"/>
+          <p:cNvSpPr>
+            <a:spLocks noGrp="1" noRot="1" noChangeAspect="1"/>
+          </p:cNvSpPr>
+          <p:nvPr>
+            <p:ph type="sldImg"/>
+          </p:nvPr>
+        </p:nvSpPr>
+        <p:spPr/>
+      </p:sp>
+      <p:sp>
+        <p:nvSpPr>
+          <p:cNvPr id="3" name="Notes Placeholder 2"/>
+          <p:cNvSpPr>
+            <a:spLocks noGrp="1"/>
+          </p:cNvSpPr>
+          <p:nvPr>
+            <p:ph type="body" idx="1"/>
+          </p:nvPr>
+        </p:nvSpPr>
+        <p:spPr/>
+        <p:txBody>
+          <a:bodyPr/>
+          <a:lstStyle/>
+          <a:p>
+            <a:r>
+              <a:rPr lang="en-US" dirty="0"/>
+              <a:t/>
+            </a:r>
+            <a:endParaRPr lang="en-US" dirty="0"/>
+          </a:p>
+        </p:txBody>
+      </p:sp>
+      <p:sp>
+        <p:nvSpPr>
+          <p:cNvPr id="4" name="Slide Number Placeholder 3"/>
+          <p:cNvSpPr>
+            <a:spLocks noGrp="1"/>
+          </p:cNvSpPr>
+          <p:nvPr>
+            <p:ph type="sldNum" sz="quarter" idx="10"/>
+          </p:nvPr>
+        </p:nvSpPr>
+        <p:spPr/>
+        <p:txBody>
+          <a:bodyPr/>
+          <a:lstStyle/>
+          <a:p>
+            <a:fld id="{F7021451-1387-4CA6-816F-3879F97B5CBC}" type="slidenum">
+              <a:rPr lang="en-US"/>
+              <a:t>15</a:t>
             </a:fld>
             <a:endParaRPr lang="en-US"/>
           </a:p>
@@ -4887,9 +5065,48 @@
                 <a:ea typeface="Malgun Gothic" pitchFamily="34" charset="-122"/>
                 <a:cs typeface="Malgun Gothic" pitchFamily="34" charset="-120"/>
               </a:rPr>
-              <a:t>09  실험 조건 최적화 과정 — 의미 있는 결과를 위한 반복 수정</a:t>
+              <a:t>09  실험 조건 최적화 과정 ① — Step 0→5 타임라인</a:t>
             </a:r>
             <a:endParaRPr lang="en-US" sz="1700" dirty="0"/>
+          </a:p>
+        </p:txBody>
+      </p:sp>
+      <p:sp>
+        <p:nvSpPr>
+          <p:cNvPr id="5" name="Text 3"/>
+          <p:cNvSpPr/>
+          <p:nvPr/>
+        </p:nvSpPr>
+        <p:spPr>
+          <a:xfrm>
+            <a:off x="274320" y="777240"/>
+            <a:ext cx="8595360" cy="292608"/>
+          </a:xfrm>
+          <a:prstGeom prst="rect">
+            <a:avLst/>
+          </a:prstGeom>
+          <a:noFill/>
+          <a:ln/>
+        </p:spPr>
+        <p:txBody>
+          <a:bodyPr wrap="square" rtlCol="0" anchor="ctr"/>
+          <a:lstStyle/>
+          <a:p>
+            <a:pPr indent="0" marL="0">
+              <a:buNone/>
+            </a:pPr>
+            <a:r>
+              <a:rPr lang="en-US" sz="1050" i="1" dirty="0">
+                <a:solidFill>
+                  <a:srgbClr val="767676"/>
+                </a:solidFill>
+                <a:latin typeface="Malgun Gothic" pitchFamily="34" charset="0"/>
+                <a:ea typeface="Malgun Gothic" pitchFamily="34" charset="-122"/>
+                <a:cs typeface="Malgun Gothic" pitchFamily="34" charset="-120"/>
+              </a:rPr>
+              <a:t>6단계 반복 수정을 통해 Safety Reward가 실질적으로 작동하는 환경 조건을 도출</a:t>
+            </a:r>
+            <a:endParaRPr lang="en-US" sz="1050" dirty="0"/>
           </a:p>
         </p:txBody>
       </p:sp>
@@ -4908,7 +5125,7 @@
           </p:nvPr>
         </p:nvGraphicFramePr>
         <p:xfrm>
-          <a:off x="182880" y="804672"/>
+          <a:off x="182880" y="1097280"/>
           <a:ext cx="8778240" cy="914400"/>
         </p:xfrm>
         <a:graphic>
@@ -4916,12 +5133,13 @@
             <a:tbl>
               <a:tblPr/>
               <a:tblGrid>
+                <a:gridCol w="1463040"/>
+                <a:gridCol w="2468880"/>
+                <a:gridCol w="2606040"/>
+                <a:gridCol w="1005840"/>
                 <a:gridCol w="1234440"/>
-                <a:gridCol w="1920240"/>
-                <a:gridCol w="2011680"/>
-                <a:gridCol w="3611880"/>
               </a:tblGrid>
-              <a:tr h="347472">
+              <a:tr h="320040">
                 <a:tc>
                   <a:txBody>
                     <a:bodyPr/>
@@ -5075,7 +5293,7 @@
                           <a:ea typeface="Malgun Gothic" pitchFamily="34" charset="-122"/>
                           <a:cs typeface="Malgun Gothic" pitchFamily="34" charset="-120"/>
                         </a:rPr>
-                        <a:t>실제 결과</a:t>
+                        <a:t>결과 요약</a:t>
                       </a:r>
                       <a:endParaRPr lang="en-US" sz="950" dirty="0">
                         <a:latin typeface="Malgun Gothic" charset="0"/>
@@ -5143,7 +5361,7 @@
                           <a:ea typeface="Malgun Gothic" pitchFamily="34" charset="-122"/>
                           <a:cs typeface="Malgun Gothic" pitchFamily="34" charset="-120"/>
                         </a:rPr>
-                        <a:t>문제 / 결론</a:t>
+                        <a:t>판정</a:t>
                       </a:r>
                       <a:endParaRPr lang="en-US" sz="950" dirty="0">
                         <a:latin typeface="Malgun Gothic" charset="0"/>
@@ -5194,8 +5412,76 @@
                     </a:solidFill>
                   </a:tcPr>
                 </a:tc>
+                <a:tc>
+                  <a:txBody>
+                    <a:bodyPr/>
+                    <a:lstStyle/>
+                    <a:p>
+                      <a:pPr indent="0" marL="0">
+                        <a:buNone/>
+                      </a:pPr>
+                      <a:r>
+                        <a:rPr lang="en-US" sz="950" b="1" dirty="0">
+                          <a:solidFill>
+                            <a:srgbClr val="FFFFFF"/>
+                          </a:solidFill>
+                          <a:latin typeface="Malgun Gothic" pitchFamily="34" charset="0"/>
+                          <a:ea typeface="Malgun Gothic" pitchFamily="34" charset="-122"/>
+                          <a:cs typeface="Malgun Gothic" pitchFamily="34" charset="-120"/>
+                        </a:rPr>
+                        <a:t>진행</a:t>
+                      </a:r>
+                      <a:endParaRPr lang="en-US" sz="950" dirty="0">
+                        <a:latin typeface="Malgun Gothic" charset="0"/>
+                        <a:ea typeface="Malgun Gothic" charset="0"/>
+                        <a:cs typeface="Malgun Gothic" charset="0"/>
+                      </a:endParaRPr>
+                    </a:p>
+                  </a:txBody>
+                  <a:tcPr marL="91440" marR="91440" marT="45720" marB="45720">
+                    <a:lnL w="12700" cap="flat" cmpd="sng" algn="ctr">
+                      <a:solidFill>
+                        <a:srgbClr val="DDDDDD"/>
+                      </a:solidFill>
+                      <a:prstDash val="solid"/>
+                      <a:round/>
+                      <a:headEnd type="none" w="med" len="med"/>
+                      <a:tailEnd type="none" w="med" len="med"/>
+                    </a:lnL>
+                    <a:lnR w="12700" cap="flat" cmpd="sng" algn="ctr">
+                      <a:solidFill>
+                        <a:srgbClr val="DDDDDD"/>
+                      </a:solidFill>
+                      <a:prstDash val="solid"/>
+                      <a:round/>
+                      <a:headEnd type="none" w="med" len="med"/>
+                      <a:tailEnd type="none" w="med" len="med"/>
+                    </a:lnR>
+                    <a:lnT w="12700" cap="flat" cmpd="sng" algn="ctr">
+                      <a:solidFill>
+                        <a:srgbClr val="DDDDDD"/>
+                      </a:solidFill>
+                      <a:prstDash val="solid"/>
+                      <a:round/>
+                      <a:headEnd type="none" w="med" len="med"/>
+                      <a:tailEnd type="none" w="med" len="med"/>
+                    </a:lnT>
+                    <a:lnB w="12700" cap="flat" cmpd="sng" algn="ctr">
+                      <a:solidFill>
+                        <a:srgbClr val="DDDDDD"/>
+                      </a:solidFill>
+                      <a:prstDash val="solid"/>
+                      <a:round/>
+                      <a:headEnd type="none" w="med" len="med"/>
+                      <a:tailEnd type="none" w="med" len="med"/>
+                    </a:lnB>
+                    <a:solidFill>
+                      <a:srgbClr val="1A1A1A"/>
+                    </a:solidFill>
+                  </a:tcPr>
+                </a:tc>
               </a:tr>
-              <a:tr h="566928">
+              <a:tr h="548640">
                 <a:tc>
                   <a:txBody>
                     <a:bodyPr/>
@@ -5281,7 +5567,7 @@
                       <a:tailEnd type="none" w="med" len="med"/>
                     </a:lnB>
                     <a:solidFill>
-                      <a:srgbClr val="FFF0F0"/>
+                      <a:srgbClr val="FDECEA"/>
                     </a:solidFill>
                   </a:tcPr>
                 </a:tc>
@@ -5302,49 +5588,7 @@
                           <a:ea typeface="Malgun Gothic" pitchFamily="34" charset="-122"/>
                           <a:cs typeface="Malgun Gothic" pitchFamily="34" charset="-120"/>
                         </a:rPr>
-                        <a:t>10×10 PyTorch</a:t>
-                      </a:r>
-                      <a:endParaRPr lang="en-US" sz="950" dirty="0">
-                        <a:latin typeface="Malgun Gothic" charset="0"/>
-                        <a:ea typeface="Malgun Gothic" charset="0"/>
-                        <a:cs typeface="Malgun Gothic" charset="0"/>
-                      </a:endParaRPr>
-                    </a:p>
-                    <a:p>
-                      <a:pPr indent="0" marL="0">
-                        <a:buNone/>
-                      </a:pPr>
-                      <a:r>
-                        <a:rPr lang="en-US" sz="950" dirty="0">
-                          <a:solidFill>
-                            <a:srgbClr val="000000"/>
-                          </a:solidFill>
-                          <a:latin typeface="Malgun Gothic" pitchFamily="34" charset="0"/>
-                          <a:ea typeface="Malgun Gothic" pitchFamily="34" charset="-122"/>
-                          <a:cs typeface="Malgun Gothic" pitchFamily="34" charset="-120"/>
-                        </a:rPr>
-                        <a:t>매 스텝 학습</a:t>
-                      </a:r>
-                      <a:endParaRPr lang="en-US" sz="950" dirty="0">
-                        <a:latin typeface="Malgun Gothic" charset="0"/>
-                        <a:ea typeface="Malgun Gothic" charset="0"/>
-                        <a:cs typeface="Malgun Gothic" charset="0"/>
-                      </a:endParaRPr>
-                    </a:p>
-                    <a:p>
-                      <a:pPr indent="0" marL="0">
-                        <a:buNone/>
-                      </a:pPr>
-                      <a:r>
-                        <a:rPr lang="en-US" sz="950" dirty="0">
-                          <a:solidFill>
-                            <a:srgbClr val="000000"/>
-                          </a:solidFill>
-                          <a:latin typeface="Malgun Gothic" pitchFamily="34" charset="0"/>
-                          <a:ea typeface="Malgun Gothic" pitchFamily="34" charset="-122"/>
-                          <a:cs typeface="Malgun Gothic" pitchFamily="34" charset="-120"/>
-                        </a:rPr>
-                        <a:t>랜덤 시작/목표</a:t>
+                        <a:t>10×10 / PyTorch / 매 스텝 학습 / 랜덤 시작</a:t>
                       </a:r>
                       <a:endParaRPr lang="en-US" sz="950" dirty="0">
                         <a:latin typeface="Malgun Gothic" charset="0"/>
@@ -5391,96 +5635,7 @@
                       <a:tailEnd type="none" w="med" len="med"/>
                     </a:lnB>
                     <a:solidFill>
-                      <a:srgbClr val="FFF0F0"/>
-                    </a:solidFill>
-                  </a:tcPr>
-                </a:tc>
-                <a:tc>
-                  <a:txBody>
-                    <a:bodyPr/>
-                    <a:lstStyle/>
-                    <a:p>
-                      <a:pPr indent="0" marL="0">
-                        <a:buNone/>
-                      </a:pPr>
-                      <a:r>
-                        <a:rPr lang="en-US" sz="950" b="1" dirty="0">
-                          <a:solidFill>
-                            <a:srgbClr val="CC0000"/>
-                          </a:solidFill>
-                          <a:latin typeface="Malgun Gothic" pitchFamily="34" charset="0"/>
-                          <a:ea typeface="Malgun Gothic" pitchFamily="34" charset="-122"/>
-                          <a:cs typeface="Malgun Gothic" pitchFamily="34" charset="-120"/>
-                        </a:rPr>
-                        <a:t>⏱ 97분 이상</a:t>
-                      </a:r>
-                      <a:endParaRPr lang="en-US" sz="950" dirty="0">
-                        <a:latin typeface="Malgun Gothic" charset="0"/>
-                        <a:ea typeface="Malgun Gothic" charset="0"/>
-                        <a:cs typeface="Malgun Gothic" charset="0"/>
-                      </a:endParaRPr>
-                    </a:p>
-                    <a:p>
-                      <a:pPr indent="0" marL="0">
-                        <a:buNone/>
-                      </a:pPr>
-                      <a:r>
-                        <a:rPr lang="en-US" sz="950" b="1" dirty="0">
-                          <a:solidFill>
-                            <a:srgbClr val="CC0000"/>
-                          </a:solidFill>
-                          <a:latin typeface="Malgun Gothic" pitchFamily="34" charset="0"/>
-                          <a:ea typeface="Malgun Gothic" pitchFamily="34" charset="-122"/>
-                          <a:cs typeface="Malgun Gothic" pitchFamily="34" charset="-120"/>
-                        </a:rPr>
-                        <a:t>실험 완료 불가</a:t>
-                      </a:r>
-                      <a:endParaRPr lang="en-US" sz="950" dirty="0">
-                        <a:latin typeface="Malgun Gothic" charset="0"/>
-                        <a:ea typeface="Malgun Gothic" charset="0"/>
-                        <a:cs typeface="Malgun Gothic" charset="0"/>
-                      </a:endParaRPr>
-                    </a:p>
-                  </a:txBody>
-                  <a:tcPr marL="91440" marR="91440" marT="45720" marB="45720">
-                    <a:lnL w="12700" cap="flat" cmpd="sng" algn="ctr">
-                      <a:solidFill>
-                        <a:srgbClr val="DDDDDD"/>
-                      </a:solidFill>
-                      <a:prstDash val="solid"/>
-                      <a:round/>
-                      <a:headEnd type="none" w="med" len="med"/>
-                      <a:tailEnd type="none" w="med" len="med"/>
-                    </a:lnL>
-                    <a:lnR w="12700" cap="flat" cmpd="sng" algn="ctr">
-                      <a:solidFill>
-                        <a:srgbClr val="DDDDDD"/>
-                      </a:solidFill>
-                      <a:prstDash val="solid"/>
-                      <a:round/>
-                      <a:headEnd type="none" w="med" len="med"/>
-                      <a:tailEnd type="none" w="med" len="med"/>
-                    </a:lnR>
-                    <a:lnT w="12700" cap="flat" cmpd="sng" algn="ctr">
-                      <a:solidFill>
-                        <a:srgbClr val="DDDDDD"/>
-                      </a:solidFill>
-                      <a:prstDash val="solid"/>
-                      <a:round/>
-                      <a:headEnd type="none" w="med" len="med"/>
-                      <a:tailEnd type="none" w="med" len="med"/>
-                    </a:lnT>
-                    <a:lnB w="12700" cap="flat" cmpd="sng" algn="ctr">
-                      <a:solidFill>
-                        <a:srgbClr val="DDDDDD"/>
-                      </a:solidFill>
-                      <a:prstDash val="solid"/>
-                      <a:round/>
-                      <a:headEnd type="none" w="med" len="med"/>
-                      <a:tailEnd type="none" w="med" len="med"/>
-                    </a:lnB>
-                    <a:solidFill>
-                      <a:srgbClr val="FFF0F0"/>
+                      <a:srgbClr val="FDECEA"/>
                     </a:solidFill>
                   </a:tcPr>
                 </a:tc>
@@ -5495,13 +5650,13 @@
                       <a:r>
                         <a:rPr lang="en-US" sz="950" dirty="0">
                           <a:solidFill>
-                            <a:srgbClr val="000000"/>
+                            <a:srgbClr val="CC0000"/>
                           </a:solidFill>
                           <a:latin typeface="Malgun Gothic" pitchFamily="34" charset="0"/>
                           <a:ea typeface="Malgun Gothic" pitchFamily="34" charset="-122"/>
                           <a:cs typeface="Malgun Gothic" pitchFamily="34" charset="-120"/>
                         </a:rPr>
-                        <a:t>환경이 너무 무거움</a:t>
+                        <a:t>97분 이상 — 실험 완료 불가</a:t>
                       </a:r>
                       <a:endParaRPr lang="en-US" sz="950" dirty="0">
                         <a:latin typeface="Malgun Gothic" charset="0"/>
@@ -5509,8 +5664,123 @@
                         <a:cs typeface="Malgun Gothic" charset="0"/>
                       </a:endParaRPr>
                     </a:p>
+                  </a:txBody>
+                  <a:tcPr marL="91440" marR="91440" marT="45720" marB="45720">
+                    <a:lnL w="12700" cap="flat" cmpd="sng" algn="ctr">
+                      <a:solidFill>
+                        <a:srgbClr val="DDDDDD"/>
+                      </a:solidFill>
+                      <a:prstDash val="solid"/>
+                      <a:round/>
+                      <a:headEnd type="none" w="med" len="med"/>
+                      <a:tailEnd type="none" w="med" len="med"/>
+                    </a:lnL>
+                    <a:lnR w="12700" cap="flat" cmpd="sng" algn="ctr">
+                      <a:solidFill>
+                        <a:srgbClr val="DDDDDD"/>
+                      </a:solidFill>
+                      <a:prstDash val="solid"/>
+                      <a:round/>
+                      <a:headEnd type="none" w="med" len="med"/>
+                      <a:tailEnd type="none" w="med" len="med"/>
+                    </a:lnR>
+                    <a:lnT w="12700" cap="flat" cmpd="sng" algn="ctr">
+                      <a:solidFill>
+                        <a:srgbClr val="DDDDDD"/>
+                      </a:solidFill>
+                      <a:prstDash val="solid"/>
+                      <a:round/>
+                      <a:headEnd type="none" w="med" len="med"/>
+                      <a:tailEnd type="none" w="med" len="med"/>
+                    </a:lnT>
+                    <a:lnB w="12700" cap="flat" cmpd="sng" algn="ctr">
+                      <a:solidFill>
+                        <a:srgbClr val="DDDDDD"/>
+                      </a:solidFill>
+                      <a:prstDash val="solid"/>
+                      <a:round/>
+                      <a:headEnd type="none" w="med" len="med"/>
+                      <a:tailEnd type="none" w="med" len="med"/>
+                    </a:lnB>
+                    <a:solidFill>
+                      <a:srgbClr val="FDECEA"/>
+                    </a:solidFill>
+                  </a:tcPr>
+                </a:tc>
+                <a:tc>
+                  <a:txBody>
+                    <a:bodyPr/>
+                    <a:lstStyle/>
                     <a:p>
-                      <a:pPr indent="0" marL="0">
+                      <a:pPr algn="ctr" indent="0" marL="0">
+                        <a:buNone/>
+                      </a:pPr>
+                      <a:r>
+                        <a:rPr lang="en-US" sz="950" b="1" dirty="0">
+                          <a:solidFill>
+                            <a:srgbClr val="CC0000"/>
+                          </a:solidFill>
+                          <a:latin typeface="Malgun Gothic" pitchFamily="34" charset="0"/>
+                          <a:ea typeface="Malgun Gothic" pitchFamily="34" charset="-122"/>
+                          <a:cs typeface="Malgun Gothic" pitchFamily="34" charset="-120"/>
+                        </a:rPr>
+                        <a:t>❌ 실패</a:t>
+                      </a:r>
+                      <a:endParaRPr lang="en-US" sz="950" dirty="0">
+                        <a:latin typeface="Malgun Gothic" charset="0"/>
+                        <a:ea typeface="Malgun Gothic" charset="0"/>
+                        <a:cs typeface="Malgun Gothic" charset="0"/>
+                      </a:endParaRPr>
+                    </a:p>
+                  </a:txBody>
+                  <a:tcPr marL="91440" marR="91440" marT="45720" marB="45720">
+                    <a:lnL w="12700" cap="flat" cmpd="sng" algn="ctr">
+                      <a:solidFill>
+                        <a:srgbClr val="DDDDDD"/>
+                      </a:solidFill>
+                      <a:prstDash val="solid"/>
+                      <a:round/>
+                      <a:headEnd type="none" w="med" len="med"/>
+                      <a:tailEnd type="none" w="med" len="med"/>
+                    </a:lnL>
+                    <a:lnR w="12700" cap="flat" cmpd="sng" algn="ctr">
+                      <a:solidFill>
+                        <a:srgbClr val="DDDDDD"/>
+                      </a:solidFill>
+                      <a:prstDash val="solid"/>
+                      <a:round/>
+                      <a:headEnd type="none" w="med" len="med"/>
+                      <a:tailEnd type="none" w="med" len="med"/>
+                    </a:lnR>
+                    <a:lnT w="12700" cap="flat" cmpd="sng" algn="ctr">
+                      <a:solidFill>
+                        <a:srgbClr val="DDDDDD"/>
+                      </a:solidFill>
+                      <a:prstDash val="solid"/>
+                      <a:round/>
+                      <a:headEnd type="none" w="med" len="med"/>
+                      <a:tailEnd type="none" w="med" len="med"/>
+                    </a:lnT>
+                    <a:lnB w="12700" cap="flat" cmpd="sng" algn="ctr">
+                      <a:solidFill>
+                        <a:srgbClr val="DDDDDD"/>
+                      </a:solidFill>
+                      <a:prstDash val="solid"/>
+                      <a:round/>
+                      <a:headEnd type="none" w="med" len="med"/>
+                      <a:tailEnd type="none" w="med" len="med"/>
+                    </a:lnB>
+                    <a:solidFill>
+                      <a:srgbClr val="FDECEA"/>
+                    </a:solidFill>
+                  </a:tcPr>
+                </a:tc>
+                <a:tc>
+                  <a:txBody>
+                    <a:bodyPr/>
+                    <a:lstStyle/>
+                    <a:p>
+                      <a:pPr algn="ctr" indent="0" marL="0">
                         <a:buNone/>
                       </a:pPr>
                       <a:r>
@@ -5522,7 +5792,7 @@
                           <a:ea typeface="Malgun Gothic" pitchFamily="34" charset="-122"/>
                           <a:cs typeface="Malgun Gothic" pitchFamily="34" charset="-120"/>
                         </a:rPr>
-                        <a:t>→ 경량화 필수</a:t>
+                        <a:t>환경 경량화</a:t>
                       </a:r>
                       <a:endParaRPr lang="en-US" sz="950" dirty="0">
                         <a:latin typeface="Malgun Gothic" charset="0"/>
@@ -5569,12 +5839,12 @@
                       <a:tailEnd type="none" w="med" len="med"/>
                     </a:lnB>
                     <a:solidFill>
-                      <a:srgbClr val="FFF0F0"/>
+                      <a:srgbClr val="FDECEA"/>
                     </a:solidFill>
                   </a:tcPr>
                 </a:tc>
               </a:tr>
-              <a:tr h="566928">
+              <a:tr h="548640">
                 <a:tc>
                   <a:txBody>
                     <a:bodyPr/>
@@ -5681,138 +5951,7 @@
                           <a:ea typeface="Malgun Gothic" pitchFamily="34" charset="-122"/>
                           <a:cs typeface="Malgun Gothic" pitchFamily="34" charset="-120"/>
                         </a:rPr>
-                        <a:t>7×7 NumPy 구현</a:t>
-                      </a:r>
-                      <a:endParaRPr lang="en-US" sz="950" dirty="0">
-                        <a:latin typeface="Malgun Gothic" charset="0"/>
-                        <a:ea typeface="Malgun Gothic" charset="0"/>
-                        <a:cs typeface="Malgun Gothic" charset="0"/>
-                      </a:endParaRPr>
-                    </a:p>
-                    <a:p>
-                      <a:pPr indent="0" marL="0">
-                        <a:buNone/>
-                      </a:pPr>
-                      <a:r>
-                        <a:rPr lang="en-US" sz="950" dirty="0">
-                          <a:solidFill>
-                            <a:srgbClr val="000000"/>
-                          </a:solidFill>
-                          <a:latin typeface="Malgun Gothic" pitchFamily="34" charset="0"/>
-                          <a:ea typeface="Malgun Gothic" pitchFamily="34" charset="-122"/>
-                          <a:cs typeface="Malgun Gothic" pitchFamily="34" charset="-120"/>
-                        </a:rPr>
-                        <a:t>4스텝마다 학습</a:t>
-                      </a:r>
-                      <a:endParaRPr lang="en-US" sz="950" dirty="0">
-                        <a:latin typeface="Malgun Gothic" charset="0"/>
-                        <a:ea typeface="Malgun Gothic" charset="0"/>
-                        <a:cs typeface="Malgun Gothic" charset="0"/>
-                      </a:endParaRPr>
-                    </a:p>
-                    <a:p>
-                      <a:pPr indent="0" marL="0">
-                        <a:buNone/>
-                      </a:pPr>
-                      <a:r>
-                        <a:rPr lang="en-US" sz="950" dirty="0">
-                          <a:solidFill>
-                            <a:srgbClr val="000000"/>
-                          </a:solidFill>
-                          <a:latin typeface="Malgun Gothic" pitchFamily="34" charset="0"/>
-                          <a:ea typeface="Malgun Gothic" pitchFamily="34" charset="-122"/>
-                          <a:cs typeface="Malgun Gothic" pitchFamily="34" charset="-120"/>
-                        </a:rPr>
-                        <a:t>시작 (3,3) 고정</a:t>
-                      </a:r>
-                      <a:endParaRPr lang="en-US" sz="950" dirty="0">
-                        <a:latin typeface="Malgun Gothic" charset="0"/>
-                        <a:ea typeface="Malgun Gothic" charset="0"/>
-                        <a:cs typeface="Malgun Gothic" charset="0"/>
-                      </a:endParaRPr>
-                    </a:p>
-                  </a:txBody>
-                  <a:tcPr marL="91440" marR="91440" marT="45720" marB="45720">
-                    <a:lnL w="12700" cap="flat" cmpd="sng" algn="ctr">
-                      <a:solidFill>
-                        <a:srgbClr val="DDDDDD"/>
-                      </a:solidFill>
-                      <a:prstDash val="solid"/>
-                      <a:round/>
-                      <a:headEnd type="none" w="med" len="med"/>
-                      <a:tailEnd type="none" w="med" len="med"/>
-                    </a:lnL>
-                    <a:lnR w="12700" cap="flat" cmpd="sng" algn="ctr">
-                      <a:solidFill>
-                        <a:srgbClr val="DDDDDD"/>
-                      </a:solidFill>
-                      <a:prstDash val="solid"/>
-                      <a:round/>
-                      <a:headEnd type="none" w="med" len="med"/>
-                      <a:tailEnd type="none" w="med" len="med"/>
-                    </a:lnR>
-                    <a:lnT w="12700" cap="flat" cmpd="sng" algn="ctr">
-                      <a:solidFill>
-                        <a:srgbClr val="DDDDDD"/>
-                      </a:solidFill>
-                      <a:prstDash val="solid"/>
-                      <a:round/>
-                      <a:headEnd type="none" w="med" len="med"/>
-                      <a:tailEnd type="none" w="med" len="med"/>
-                    </a:lnT>
-                    <a:lnB w="12700" cap="flat" cmpd="sng" algn="ctr">
-                      <a:solidFill>
-                        <a:srgbClr val="DDDDDD"/>
-                      </a:solidFill>
-                      <a:prstDash val="solid"/>
-                      <a:round/>
-                      <a:headEnd type="none" w="med" len="med"/>
-                      <a:tailEnd type="none" w="med" len="med"/>
-                    </a:lnB>
-                    <a:solidFill>
-                      <a:srgbClr val="FFF8E1"/>
-                    </a:solidFill>
-                  </a:tcPr>
-                </a:tc>
-                <a:tc>
-                  <a:txBody>
-                    <a:bodyPr/>
-                    <a:lstStyle/>
-                    <a:p>
-                      <a:pPr indent="0" marL="0">
-                        <a:buNone/>
-                      </a:pPr>
-                      <a:r>
-                        <a:rPr lang="en-US" sz="950" b="1" dirty="0">
-                          <a:solidFill>
-                            <a:srgbClr val="1E8A47"/>
-                          </a:solidFill>
-                          <a:latin typeface="Malgun Gothic" pitchFamily="34" charset="0"/>
-                          <a:ea typeface="Malgun Gothic" pitchFamily="34" charset="-122"/>
-                          <a:cs typeface="Malgun Gothic" pitchFamily="34" charset="-120"/>
-                        </a:rPr>
-                        <a:t>✅ 55 ep/s</a:t>
-                      </a:r>
-                      <a:endParaRPr lang="en-US" sz="950" dirty="0">
-                        <a:latin typeface="Malgun Gothic" charset="0"/>
-                        <a:ea typeface="Malgun Gothic" charset="0"/>
-                        <a:cs typeface="Malgun Gothic" charset="0"/>
-                      </a:endParaRPr>
-                    </a:p>
-                    <a:p>
-                      <a:pPr indent="0" marL="0">
-                        <a:buNone/>
-                      </a:pPr>
-                      <a:r>
-                        <a:rPr lang="en-US" sz="950" b="1" dirty="0">
-                          <a:solidFill>
-                            <a:srgbClr val="1E8A47"/>
-                          </a:solidFill>
-                          <a:latin typeface="Malgun Gothic" pitchFamily="34" charset="0"/>
-                          <a:ea typeface="Malgun Gothic" pitchFamily="34" charset="-122"/>
-                          <a:cs typeface="Malgun Gothic" pitchFamily="34" charset="-120"/>
-                        </a:rPr>
-                        <a:t>9분 완료</a:t>
+                        <a:t>7×7 / NumPy / 4스텝마다 학습 / 시작 (3,3) 고정</a:t>
                       </a:r>
                       <a:endParaRPr lang="en-US" sz="950" dirty="0">
                         <a:latin typeface="Malgun Gothic" charset="0"/>
@@ -5874,13 +6013,13 @@
                       <a:r>
                         <a:rPr lang="en-US" sz="950" dirty="0">
                           <a:solidFill>
-                            <a:srgbClr val="000000"/>
+                            <a:srgbClr val="1E8A47"/>
                           </a:solidFill>
                           <a:latin typeface="Malgun Gothic" pitchFamily="34" charset="0"/>
                           <a:ea typeface="Malgun Gothic" pitchFamily="34" charset="-122"/>
                           <a:cs typeface="Malgun Gothic" pitchFamily="34" charset="-120"/>
                         </a:rPr>
-                        <a:t>속도 해결</a:t>
+                        <a:t>55 ep/s — 9분 완료</a:t>
                       </a:r>
                       <a:endParaRPr lang="en-US" sz="950" dirty="0">
                         <a:latin typeface="Malgun Gothic" charset="0"/>
@@ -5888,8 +6027,123 @@
                         <a:cs typeface="Malgun Gothic" charset="0"/>
                       </a:endParaRPr>
                     </a:p>
+                  </a:txBody>
+                  <a:tcPr marL="91440" marR="91440" marT="45720" marB="45720">
+                    <a:lnL w="12700" cap="flat" cmpd="sng" algn="ctr">
+                      <a:solidFill>
+                        <a:srgbClr val="DDDDDD"/>
+                      </a:solidFill>
+                      <a:prstDash val="solid"/>
+                      <a:round/>
+                      <a:headEnd type="none" w="med" len="med"/>
+                      <a:tailEnd type="none" w="med" len="med"/>
+                    </a:lnL>
+                    <a:lnR w="12700" cap="flat" cmpd="sng" algn="ctr">
+                      <a:solidFill>
+                        <a:srgbClr val="DDDDDD"/>
+                      </a:solidFill>
+                      <a:prstDash val="solid"/>
+                      <a:round/>
+                      <a:headEnd type="none" w="med" len="med"/>
+                      <a:tailEnd type="none" w="med" len="med"/>
+                    </a:lnR>
+                    <a:lnT w="12700" cap="flat" cmpd="sng" algn="ctr">
+                      <a:solidFill>
+                        <a:srgbClr val="DDDDDD"/>
+                      </a:solidFill>
+                      <a:prstDash val="solid"/>
+                      <a:round/>
+                      <a:headEnd type="none" w="med" len="med"/>
+                      <a:tailEnd type="none" w="med" len="med"/>
+                    </a:lnT>
+                    <a:lnB w="12700" cap="flat" cmpd="sng" algn="ctr">
+                      <a:solidFill>
+                        <a:srgbClr val="DDDDDD"/>
+                      </a:solidFill>
+                      <a:prstDash val="solid"/>
+                      <a:round/>
+                      <a:headEnd type="none" w="med" len="med"/>
+                      <a:tailEnd type="none" w="med" len="med"/>
+                    </a:lnB>
+                    <a:solidFill>
+                      <a:srgbClr val="FFF8E1"/>
+                    </a:solidFill>
+                  </a:tcPr>
+                </a:tc>
+                <a:tc>
+                  <a:txBody>
+                    <a:bodyPr/>
+                    <a:lstStyle/>
                     <a:p>
-                      <a:pPr indent="0" marL="0">
+                      <a:pPr algn="ctr" indent="0" marL="0">
+                        <a:buNone/>
+                      </a:pPr>
+                      <a:r>
+                        <a:rPr lang="en-US" sz="950" b="1" dirty="0">
+                          <a:solidFill>
+                            <a:srgbClr val="1E8A47"/>
+                          </a:solidFill>
+                          <a:latin typeface="Malgun Gothic" pitchFamily="34" charset="0"/>
+                          <a:ea typeface="Malgun Gothic" pitchFamily="34" charset="-122"/>
+                          <a:cs typeface="Malgun Gothic" pitchFamily="34" charset="-120"/>
+                        </a:rPr>
+                        <a:t>✅ 속도 해결</a:t>
+                      </a:r>
+                      <a:endParaRPr lang="en-US" sz="950" dirty="0">
+                        <a:latin typeface="Malgun Gothic" charset="0"/>
+                        <a:ea typeface="Malgun Gothic" charset="0"/>
+                        <a:cs typeface="Malgun Gothic" charset="0"/>
+                      </a:endParaRPr>
+                    </a:p>
+                  </a:txBody>
+                  <a:tcPr marL="91440" marR="91440" marT="45720" marB="45720">
+                    <a:lnL w="12700" cap="flat" cmpd="sng" algn="ctr">
+                      <a:solidFill>
+                        <a:srgbClr val="DDDDDD"/>
+                      </a:solidFill>
+                      <a:prstDash val="solid"/>
+                      <a:round/>
+                      <a:headEnd type="none" w="med" len="med"/>
+                      <a:tailEnd type="none" w="med" len="med"/>
+                    </a:lnL>
+                    <a:lnR w="12700" cap="flat" cmpd="sng" algn="ctr">
+                      <a:solidFill>
+                        <a:srgbClr val="DDDDDD"/>
+                      </a:solidFill>
+                      <a:prstDash val="solid"/>
+                      <a:round/>
+                      <a:headEnd type="none" w="med" len="med"/>
+                      <a:tailEnd type="none" w="med" len="med"/>
+                    </a:lnR>
+                    <a:lnT w="12700" cap="flat" cmpd="sng" algn="ctr">
+                      <a:solidFill>
+                        <a:srgbClr val="DDDDDD"/>
+                      </a:solidFill>
+                      <a:prstDash val="solid"/>
+                      <a:round/>
+                      <a:headEnd type="none" w="med" len="med"/>
+                      <a:tailEnd type="none" w="med" len="med"/>
+                    </a:lnT>
+                    <a:lnB w="12700" cap="flat" cmpd="sng" algn="ctr">
+                      <a:solidFill>
+                        <a:srgbClr val="DDDDDD"/>
+                      </a:solidFill>
+                      <a:prstDash val="solid"/>
+                      <a:round/>
+                      <a:headEnd type="none" w="med" len="med"/>
+                      <a:tailEnd type="none" w="med" len="med"/>
+                    </a:lnB>
+                    <a:solidFill>
+                      <a:srgbClr val="FFF8E1"/>
+                    </a:solidFill>
+                  </a:tcPr>
+                </a:tc>
+                <a:tc>
+                  <a:txBody>
+                    <a:bodyPr/>
+                    <a:lstStyle/>
+                    <a:p>
+                      <a:pPr algn="ctr" indent="0" marL="0">
                         <a:buNone/>
                       </a:pPr>
                       <a:r>
@@ -5901,7 +6155,7 @@
                           <a:ea typeface="Malgun Gothic" pitchFamily="34" charset="-122"/>
                           <a:cs typeface="Malgun Gothic" pitchFamily="34" charset="-120"/>
                         </a:rPr>
-                        <a:t>→ 보상 조건 최적화 필요</a:t>
+                        <a:t>보상 설계로</a:t>
                       </a:r>
                       <a:endParaRPr lang="en-US" sz="950" dirty="0">
                         <a:latin typeface="Malgun Gothic" charset="0"/>
@@ -5953,7 +6207,7 @@
                   </a:tcPr>
                 </a:tc>
               </a:tr>
-              <a:tr h="566928">
+              <a:tr h="548640">
                 <a:tc>
                   <a:txBody>
                     <a:bodyPr/>
@@ -5992,28 +6246,7 @@
                           <a:ea typeface="Malgun Gothic" pitchFamily="34" charset="-122"/>
                           <a:cs typeface="Malgun Gothic" pitchFamily="34" charset="-120"/>
                         </a:rPr>
-                        <a:t>DRAIN=1</a:t>
-                      </a:r>
-                      <a:endParaRPr lang="en-US" sz="950" dirty="0">
-                        <a:latin typeface="Malgun Gothic" charset="0"/>
-                        <a:ea typeface="Malgun Gothic" charset="0"/>
-                        <a:cs typeface="Malgun Gothic" charset="0"/>
-                      </a:endParaRPr>
-                    </a:p>
-                    <a:p>
-                      <a:pPr indent="0" marL="0">
-                        <a:buNone/>
-                      </a:pPr>
-                      <a:r>
-                        <a:rPr lang="en-US" sz="950" b="1" dirty="0">
-                          <a:solidFill>
-                            <a:srgbClr val="000000"/>
-                          </a:solidFill>
-                          <a:latin typeface="Malgun Gothic" pitchFamily="34" charset="0"/>
-                          <a:ea typeface="Malgun Gothic" pitchFamily="34" charset="-122"/>
-                          <a:cs typeface="Malgun Gothic" pitchFamily="34" charset="-120"/>
-                        </a:rPr>
-                        <a:t>WARN=20</a:t>
+                        <a:t>DRAIN=1 / WARN=20</a:t>
                       </a:r>
                       <a:endParaRPr lang="en-US" sz="950" dirty="0">
                         <a:latin typeface="Malgun Gothic" charset="0"/>
@@ -6060,7 +6293,7 @@
                       <a:tailEnd type="none" w="med" len="med"/>
                     </a:lnB>
                     <a:solidFill>
-                      <a:srgbClr val="FFF0F0"/>
+                      <a:srgbClr val="FDECEA"/>
                     </a:solidFill>
                   </a:tcPr>
                 </a:tc>
@@ -6081,49 +6314,7 @@
                           <a:ea typeface="Malgun Gothic" pitchFamily="34" charset="-122"/>
                           <a:cs typeface="Malgun Gothic" pitchFamily="34" charset="-120"/>
                         </a:rPr>
-                        <a:t>스텝당 배터리 -1</a:t>
-                      </a:r>
-                      <a:endParaRPr lang="en-US" sz="950" dirty="0">
-                        <a:latin typeface="Malgun Gothic" charset="0"/>
-                        <a:ea typeface="Malgun Gothic" charset="0"/>
-                        <a:cs typeface="Malgun Gothic" charset="0"/>
-                      </a:endParaRPr>
-                    </a:p>
-                    <a:p>
-                      <a:pPr indent="0" marL="0">
-                        <a:buNone/>
-                      </a:pPr>
-                      <a:r>
-                        <a:rPr lang="en-US" sz="950" dirty="0">
-                          <a:solidFill>
-                            <a:srgbClr val="000000"/>
-                          </a:solidFill>
-                          <a:latin typeface="Malgun Gothic" pitchFamily="34" charset="0"/>
-                          <a:ea typeface="Malgun Gothic" pitchFamily="34" charset="-122"/>
-                          <a:cs typeface="Malgun Gothic" pitchFamily="34" charset="-120"/>
-                        </a:rPr>
-                        <a:t>(100스텝 지속)</a:t>
-                      </a:r>
-                      <a:endParaRPr lang="en-US" sz="950" dirty="0">
-                        <a:latin typeface="Malgun Gothic" charset="0"/>
-                        <a:ea typeface="Malgun Gothic" charset="0"/>
-                        <a:cs typeface="Malgun Gothic" charset="0"/>
-                      </a:endParaRPr>
-                    </a:p>
-                    <a:p>
-                      <a:pPr indent="0" marL="0">
-                        <a:buNone/>
-                      </a:pPr>
-                      <a:r>
-                        <a:rPr lang="en-US" sz="950" dirty="0">
-                          <a:solidFill>
-                            <a:srgbClr val="000000"/>
-                          </a:solidFill>
-                          <a:latin typeface="Malgun Gothic" pitchFamily="34" charset="0"/>
-                          <a:ea typeface="Malgun Gothic" pitchFamily="34" charset="-122"/>
-                          <a:cs typeface="Malgun Gothic" pitchFamily="34" charset="-120"/>
-                        </a:rPr>
-                        <a:t>WARNING 20%</a:t>
+                        <a:t>스텝당 -1 (100스텝 지속) / WARNING 배터리 20%</a:t>
                       </a:r>
                       <a:endParaRPr lang="en-US" sz="950" dirty="0">
                         <a:latin typeface="Malgun Gothic" charset="0"/>
@@ -6170,117 +6361,7 @@
                       <a:tailEnd type="none" w="med" len="med"/>
                     </a:lnB>
                     <a:solidFill>
-                      <a:srgbClr val="FFF0F0"/>
-                    </a:solidFill>
-                  </a:tcPr>
-                </a:tc>
-                <a:tc>
-                  <a:txBody>
-                    <a:bodyPr/>
-                    <a:lstStyle/>
-                    <a:p>
-                      <a:pPr indent="0" marL="0">
-                        <a:buNone/>
-                      </a:pPr>
-                      <a:r>
-                        <a:rPr lang="en-US" sz="950" b="1" dirty="0">
-                          <a:solidFill>
-                            <a:srgbClr val="CC0000"/>
-                          </a:solidFill>
-                          <a:latin typeface="Malgun Gothic" pitchFamily="34" charset="0"/>
-                          <a:ea typeface="Malgun Gothic" pitchFamily="34" charset="-122"/>
-                          <a:cs typeface="Malgun Gothic" pitchFamily="34" charset="-120"/>
-                        </a:rPr>
-                        <a:t>Safety 보상</a:t>
-                      </a:r>
-                      <a:endParaRPr lang="en-US" sz="950" dirty="0">
-                        <a:latin typeface="Malgun Gothic" charset="0"/>
-                        <a:ea typeface="Malgun Gothic" charset="0"/>
-                        <a:cs typeface="Malgun Gothic" charset="0"/>
-                      </a:endParaRPr>
-                    </a:p>
-                    <a:p>
-                      <a:pPr indent="0" marL="0">
-                        <a:buNone/>
-                      </a:pPr>
-                      <a:r>
-                        <a:rPr lang="en-US" sz="950" b="1" dirty="0">
-                          <a:solidFill>
-                            <a:srgbClr val="CC0000"/>
-                          </a:solidFill>
-                          <a:latin typeface="Malgun Gothic" pitchFamily="34" charset="0"/>
-                          <a:ea typeface="Malgun Gothic" pitchFamily="34" charset="-122"/>
-                          <a:cs typeface="Malgun Gothic" pitchFamily="34" charset="-120"/>
-                        </a:rPr>
-                        <a:t>발동율 ≈ 0%</a:t>
-                      </a:r>
-                      <a:endParaRPr lang="en-US" sz="950" dirty="0">
-                        <a:latin typeface="Malgun Gothic" charset="0"/>
-                        <a:ea typeface="Malgun Gothic" charset="0"/>
-                        <a:cs typeface="Malgun Gothic" charset="0"/>
-                      </a:endParaRPr>
-                    </a:p>
-                    <a:p>
-                      <a:pPr indent="0" marL="0">
-                        <a:buNone/>
-                      </a:pPr>
-                      <a:r>
-                        <a:rPr lang="en-US" sz="950" b="1" dirty="0">
-                          <a:solidFill>
-                            <a:srgbClr val="CC0000"/>
-                          </a:solidFill>
-                          <a:latin typeface="Malgun Gothic" pitchFamily="34" charset="0"/>
-                          <a:ea typeface="Malgun Gothic" pitchFamily="34" charset="-122"/>
-                          <a:cs typeface="Malgun Gothic" pitchFamily="34" charset="-120"/>
-                        </a:rPr>
-                        <a:t>차이 미미</a:t>
-                      </a:r>
-                      <a:endParaRPr lang="en-US" sz="950" dirty="0">
-                        <a:latin typeface="Malgun Gothic" charset="0"/>
-                        <a:ea typeface="Malgun Gothic" charset="0"/>
-                        <a:cs typeface="Malgun Gothic" charset="0"/>
-                      </a:endParaRPr>
-                    </a:p>
-                  </a:txBody>
-                  <a:tcPr marL="91440" marR="91440" marT="45720" marB="45720">
-                    <a:lnL w="12700" cap="flat" cmpd="sng" algn="ctr">
-                      <a:solidFill>
-                        <a:srgbClr val="DDDDDD"/>
-                      </a:solidFill>
-                      <a:prstDash val="solid"/>
-                      <a:round/>
-                      <a:headEnd type="none" w="med" len="med"/>
-                      <a:tailEnd type="none" w="med" len="med"/>
-                    </a:lnL>
-                    <a:lnR w="12700" cap="flat" cmpd="sng" algn="ctr">
-                      <a:solidFill>
-                        <a:srgbClr val="DDDDDD"/>
-                      </a:solidFill>
-                      <a:prstDash val="solid"/>
-                      <a:round/>
-                      <a:headEnd type="none" w="med" len="med"/>
-                      <a:tailEnd type="none" w="med" len="med"/>
-                    </a:lnR>
-                    <a:lnT w="12700" cap="flat" cmpd="sng" algn="ctr">
-                      <a:solidFill>
-                        <a:srgbClr val="DDDDDD"/>
-                      </a:solidFill>
-                      <a:prstDash val="solid"/>
-                      <a:round/>
-                      <a:headEnd type="none" w="med" len="med"/>
-                      <a:tailEnd type="none" w="med" len="med"/>
-                    </a:lnT>
-                    <a:lnB w="12700" cap="flat" cmpd="sng" algn="ctr">
-                      <a:solidFill>
-                        <a:srgbClr val="DDDDDD"/>
-                      </a:solidFill>
-                      <a:prstDash val="solid"/>
-                      <a:round/>
-                      <a:headEnd type="none" w="med" len="med"/>
-                      <a:tailEnd type="none" w="med" len="med"/>
-                    </a:lnB>
-                    <a:solidFill>
-                      <a:srgbClr val="FFF0F0"/>
+                      <a:srgbClr val="FDECEA"/>
                     </a:solidFill>
                   </a:tcPr>
                 </a:tc>
@@ -6295,13 +6376,13 @@
                       <a:r>
                         <a:rPr lang="en-US" sz="950" dirty="0">
                           <a:solidFill>
-                            <a:srgbClr val="000000"/>
+                            <a:srgbClr val="CC0000"/>
                           </a:solidFill>
                           <a:latin typeface="Malgun Gothic" pitchFamily="34" charset="0"/>
                           <a:ea typeface="Malgun Gothic" pitchFamily="34" charset="-122"/>
                           <a:cs typeface="Malgun Gothic" pitchFamily="34" charset="-120"/>
                         </a:rPr>
-                        <a:t>80스텝 이동 후 발동</a:t>
+                        <a:t>Safety 보상 발동율 ≈ 0% / Proposed -23.1 vs Baseline -70.4</a:t>
                       </a:r>
                       <a:endParaRPr lang="en-US" sz="950" dirty="0">
                         <a:latin typeface="Malgun Gothic" charset="0"/>
@@ -6309,8 +6390,123 @@
                         <a:cs typeface="Malgun Gothic" charset="0"/>
                       </a:endParaRPr>
                     </a:p>
+                  </a:txBody>
+                  <a:tcPr marL="91440" marR="91440" marT="45720" marB="45720">
+                    <a:lnL w="12700" cap="flat" cmpd="sng" algn="ctr">
+                      <a:solidFill>
+                        <a:srgbClr val="DDDDDD"/>
+                      </a:solidFill>
+                      <a:prstDash val="solid"/>
+                      <a:round/>
+                      <a:headEnd type="none" w="med" len="med"/>
+                      <a:tailEnd type="none" w="med" len="med"/>
+                    </a:lnL>
+                    <a:lnR w="12700" cap="flat" cmpd="sng" algn="ctr">
+                      <a:solidFill>
+                        <a:srgbClr val="DDDDDD"/>
+                      </a:solidFill>
+                      <a:prstDash val="solid"/>
+                      <a:round/>
+                      <a:headEnd type="none" w="med" len="med"/>
+                      <a:tailEnd type="none" w="med" len="med"/>
+                    </a:lnR>
+                    <a:lnT w="12700" cap="flat" cmpd="sng" algn="ctr">
+                      <a:solidFill>
+                        <a:srgbClr val="DDDDDD"/>
+                      </a:solidFill>
+                      <a:prstDash val="solid"/>
+                      <a:round/>
+                      <a:headEnd type="none" w="med" len="med"/>
+                      <a:tailEnd type="none" w="med" len="med"/>
+                    </a:lnT>
+                    <a:lnB w="12700" cap="flat" cmpd="sng" algn="ctr">
+                      <a:solidFill>
+                        <a:srgbClr val="DDDDDD"/>
+                      </a:solidFill>
+                      <a:prstDash val="solid"/>
+                      <a:round/>
+                      <a:headEnd type="none" w="med" len="med"/>
+                      <a:tailEnd type="none" w="med" len="med"/>
+                    </a:lnB>
+                    <a:solidFill>
+                      <a:srgbClr val="FDECEA"/>
+                    </a:solidFill>
+                  </a:tcPr>
+                </a:tc>
+                <a:tc>
+                  <a:txBody>
+                    <a:bodyPr/>
+                    <a:lstStyle/>
                     <a:p>
-                      <a:pPr indent="0" marL="0">
+                      <a:pPr algn="ctr" indent="0" marL="0">
+                        <a:buNone/>
+                      </a:pPr>
+                      <a:r>
+                        <a:rPr lang="en-US" sz="950" b="1" dirty="0">
+                          <a:solidFill>
+                            <a:srgbClr val="CC6600"/>
+                          </a:solidFill>
+                          <a:latin typeface="Malgun Gothic" pitchFamily="34" charset="0"/>
+                          <a:ea typeface="Malgun Gothic" pitchFamily="34" charset="-122"/>
+                          <a:cs typeface="Malgun Gothic" pitchFamily="34" charset="-120"/>
+                        </a:rPr>
+                        <a:t>⚠ 미미</a:t>
+                      </a:r>
+                      <a:endParaRPr lang="en-US" sz="950" dirty="0">
+                        <a:latin typeface="Malgun Gothic" charset="0"/>
+                        <a:ea typeface="Malgun Gothic" charset="0"/>
+                        <a:cs typeface="Malgun Gothic" charset="0"/>
+                      </a:endParaRPr>
+                    </a:p>
+                  </a:txBody>
+                  <a:tcPr marL="91440" marR="91440" marT="45720" marB="45720">
+                    <a:lnL w="12700" cap="flat" cmpd="sng" algn="ctr">
+                      <a:solidFill>
+                        <a:srgbClr val="DDDDDD"/>
+                      </a:solidFill>
+                      <a:prstDash val="solid"/>
+                      <a:round/>
+                      <a:headEnd type="none" w="med" len="med"/>
+                      <a:tailEnd type="none" w="med" len="med"/>
+                    </a:lnL>
+                    <a:lnR w="12700" cap="flat" cmpd="sng" algn="ctr">
+                      <a:solidFill>
+                        <a:srgbClr val="DDDDDD"/>
+                      </a:solidFill>
+                      <a:prstDash val="solid"/>
+                      <a:round/>
+                      <a:headEnd type="none" w="med" len="med"/>
+                      <a:tailEnd type="none" w="med" len="med"/>
+                    </a:lnR>
+                    <a:lnT w="12700" cap="flat" cmpd="sng" algn="ctr">
+                      <a:solidFill>
+                        <a:srgbClr val="DDDDDD"/>
+                      </a:solidFill>
+                      <a:prstDash val="solid"/>
+                      <a:round/>
+                      <a:headEnd type="none" w="med" len="med"/>
+                      <a:tailEnd type="none" w="med" len="med"/>
+                    </a:lnT>
+                    <a:lnB w="12700" cap="flat" cmpd="sng" algn="ctr">
+                      <a:solidFill>
+                        <a:srgbClr val="DDDDDD"/>
+                      </a:solidFill>
+                      <a:prstDash val="solid"/>
+                      <a:round/>
+                      <a:headEnd type="none" w="med" len="med"/>
+                      <a:tailEnd type="none" w="med" len="med"/>
+                    </a:lnB>
+                    <a:solidFill>
+                      <a:srgbClr val="FDECEA"/>
+                    </a:solidFill>
+                  </a:tcPr>
+                </a:tc>
+                <a:tc>
+                  <a:txBody>
+                    <a:bodyPr/>
+                    <a:lstStyle/>
+                    <a:p>
+                      <a:pPr algn="ctr" indent="0" marL="0">
                         <a:buNone/>
                       </a:pPr>
                       <a:r>
@@ -6322,28 +6518,7 @@
                           <a:ea typeface="Malgun Gothic" pitchFamily="34" charset="-122"/>
                           <a:cs typeface="Malgun Gothic" pitchFamily="34" charset="-120"/>
                         </a:rPr>
-                        <a:t>→ 대부분 에피소드가</a:t>
-                      </a:r>
-                      <a:endParaRPr lang="en-US" sz="950" dirty="0">
-                        <a:latin typeface="Malgun Gothic" charset="0"/>
-                        <a:ea typeface="Malgun Gothic" charset="0"/>
-                        <a:cs typeface="Malgun Gothic" charset="0"/>
-                      </a:endParaRPr>
-                    </a:p>
-                    <a:p>
-                      <a:pPr indent="0" marL="0">
-                        <a:buNone/>
-                      </a:pPr>
-                      <a:r>
-                        <a:rPr lang="en-US" sz="950" dirty="0">
-                          <a:solidFill>
-                            <a:srgbClr val="000000"/>
-                          </a:solidFill>
-                          <a:latin typeface="Malgun Gothic" pitchFamily="34" charset="0"/>
-                          <a:ea typeface="Malgun Gothic" pitchFamily="34" charset="-122"/>
-                          <a:cs typeface="Malgun Gothic" pitchFamily="34" charset="-120"/>
-                        </a:rPr>
-                        <a:t>먼저 종료</a:t>
+                        <a:t>압박 강화</a:t>
                       </a:r>
                       <a:endParaRPr lang="en-US" sz="950" dirty="0">
                         <a:latin typeface="Malgun Gothic" charset="0"/>
@@ -6390,12 +6565,12 @@
                       <a:tailEnd type="none" w="med" len="med"/>
                     </a:lnB>
                     <a:solidFill>
-                      <a:srgbClr val="FFF0F0"/>
+                      <a:srgbClr val="FDECEA"/>
                     </a:solidFill>
                   </a:tcPr>
                 </a:tc>
               </a:tr>
-              <a:tr h="566928">
+              <a:tr h="594360">
                 <a:tc>
                   <a:txBody>
                     <a:bodyPr/>
@@ -6434,7 +6609,7 @@
                           <a:ea typeface="Malgun Gothic" pitchFamily="34" charset="-122"/>
                           <a:cs typeface="Malgun Gothic" pitchFamily="34" charset="-120"/>
                         </a:rPr>
-                        <a:t>DRAIN=2</a:t>
+                        <a:t>DRAIN=2 / WARN=40</a:t>
                       </a:r>
                       <a:endParaRPr lang="en-US" sz="950" dirty="0">
                         <a:latin typeface="Malgun Gothic" charset="0"/>
@@ -6455,28 +6630,7 @@
                           <a:ea typeface="Malgun Gothic" pitchFamily="34" charset="-122"/>
                           <a:cs typeface="Malgun Gothic" pitchFamily="34" charset="-120"/>
                         </a:rPr>
-                        <a:t>WARN=40</a:t>
-                      </a:r>
-                      <a:endParaRPr lang="en-US" sz="950" dirty="0">
-                        <a:latin typeface="Malgun Gothic" charset="0"/>
-                        <a:ea typeface="Malgun Gothic" charset="0"/>
-                        <a:cs typeface="Malgun Gothic" charset="0"/>
-                      </a:endParaRPr>
-                    </a:p>
-                    <a:p>
-                      <a:pPr indent="0" marL="0">
-                        <a:buNone/>
-                      </a:pPr>
-                      <a:r>
-                        <a:rPr lang="en-US" sz="950" b="1" dirty="0">
-                          <a:solidFill>
-                            <a:srgbClr val="000000"/>
-                          </a:solidFill>
-                          <a:latin typeface="Malgun Gothic" pitchFamily="34" charset="0"/>
-                          <a:ea typeface="Malgun Gothic" pitchFamily="34" charset="-122"/>
-                          <a:cs typeface="Malgun Gothic" pitchFamily="34" charset="-120"/>
-                        </a:rPr>
-                        <a:t>WASTE=-10</a:t>
+                        <a:t>WASTE=−10</a:t>
                       </a:r>
                       <a:endParaRPr lang="en-US" sz="950" dirty="0">
                         <a:latin typeface="Malgun Gothic" charset="0"/>
@@ -6523,7 +6677,7 @@
                       <a:tailEnd type="none" w="med" len="med"/>
                     </a:lnB>
                     <a:solidFill>
-                      <a:srgbClr val="FFF0F0"/>
+                      <a:srgbClr val="FDECEA"/>
                     </a:solidFill>
                   </a:tcPr>
                 </a:tc>
@@ -6544,49 +6698,7 @@
                           <a:ea typeface="Malgun Gothic" pitchFamily="34" charset="-122"/>
                           <a:cs typeface="Malgun Gothic" pitchFamily="34" charset="-120"/>
                         </a:rPr>
-                        <a:t>스텝당 -2 (50스텝)</a:t>
-                      </a:r>
-                      <a:endParaRPr lang="en-US" sz="950" dirty="0">
-                        <a:latin typeface="Malgun Gothic" charset="0"/>
-                        <a:ea typeface="Malgun Gothic" charset="0"/>
-                        <a:cs typeface="Malgun Gothic" charset="0"/>
-                      </a:endParaRPr>
-                    </a:p>
-                    <a:p>
-                      <a:pPr indent="0" marL="0">
-                        <a:buNone/>
-                      </a:pPr>
-                      <a:r>
-                        <a:rPr lang="en-US" sz="950" dirty="0">
-                          <a:solidFill>
-                            <a:srgbClr val="000000"/>
-                          </a:solidFill>
-                          <a:latin typeface="Malgun Gothic" pitchFamily="34" charset="0"/>
-                          <a:ea typeface="Malgun Gothic" pitchFamily="34" charset="-122"/>
-                          <a:cs typeface="Malgun Gothic" pitchFamily="34" charset="-120"/>
-                        </a:rPr>
-                        <a:t>WARNING 40%</a:t>
-                      </a:r>
-                      <a:endParaRPr lang="en-US" sz="950" dirty="0">
-                        <a:latin typeface="Malgun Gothic" charset="0"/>
-                        <a:ea typeface="Malgun Gothic" charset="0"/>
-                        <a:cs typeface="Malgun Gothic" charset="0"/>
-                      </a:endParaRPr>
-                    </a:p>
-                    <a:p>
-                      <a:pPr indent="0" marL="0">
-                        <a:buNone/>
-                      </a:pPr>
-                      <a:r>
-                        <a:rPr lang="en-US" sz="950" dirty="0">
-                          <a:solidFill>
-                            <a:srgbClr val="000000"/>
-                          </a:solidFill>
-                          <a:latin typeface="Malgun Gothic" pitchFamily="34" charset="0"/>
-                          <a:ea typeface="Malgun Gothic" pitchFamily="34" charset="-122"/>
-                          <a:cs typeface="Malgun Gothic" pitchFamily="34" charset="-120"/>
-                        </a:rPr>
-                        <a:t>낭비 패널티 -10</a:t>
+                        <a:t>스텝당 -2 (50스텝) / 낭비 패널티 -10 추가</a:t>
                       </a:r>
                       <a:endParaRPr lang="en-US" sz="950" dirty="0">
                         <a:latin typeface="Malgun Gothic" charset="0"/>
@@ -6633,7 +6745,7 @@
                       <a:tailEnd type="none" w="med" len="med"/>
                     </a:lnB>
                     <a:solidFill>
-                      <a:srgbClr val="FFF0F0"/>
+                      <a:srgbClr val="FDECEA"/>
                     </a:solidFill>
                   </a:tcPr>
                 </a:tc>
@@ -6654,7 +6766,7 @@
                           <a:ea typeface="Malgun Gothic" pitchFamily="34" charset="-122"/>
                           <a:cs typeface="Malgun Gothic" pitchFamily="34" charset="-120"/>
                         </a:rPr>
-                        <a:t>Proposed 총방전</a:t>
+                        <a:t>Proposed 총방전 277 &gt; Baseline 265 — 역효과!</a:t>
                       </a:r>
                       <a:endParaRPr lang="en-US" sz="950" dirty="0">
                         <a:latin typeface="Malgun Gothic" charset="0"/>
@@ -6662,8 +6774,55 @@
                         <a:cs typeface="Malgun Gothic" charset="0"/>
                       </a:endParaRPr>
                     </a:p>
+                  </a:txBody>
+                  <a:tcPr marL="91440" marR="91440" marT="45720" marB="45720">
+                    <a:lnL w="12700" cap="flat" cmpd="sng" algn="ctr">
+                      <a:solidFill>
+                        <a:srgbClr val="DDDDDD"/>
+                      </a:solidFill>
+                      <a:prstDash val="solid"/>
+                      <a:round/>
+                      <a:headEnd type="none" w="med" len="med"/>
+                      <a:tailEnd type="none" w="med" len="med"/>
+                    </a:lnL>
+                    <a:lnR w="12700" cap="flat" cmpd="sng" algn="ctr">
+                      <a:solidFill>
+                        <a:srgbClr val="DDDDDD"/>
+                      </a:solidFill>
+                      <a:prstDash val="solid"/>
+                      <a:round/>
+                      <a:headEnd type="none" w="med" len="med"/>
+                      <a:tailEnd type="none" w="med" len="med"/>
+                    </a:lnR>
+                    <a:lnT w="12700" cap="flat" cmpd="sng" algn="ctr">
+                      <a:solidFill>
+                        <a:srgbClr val="DDDDDD"/>
+                      </a:solidFill>
+                      <a:prstDash val="solid"/>
+                      <a:round/>
+                      <a:headEnd type="none" w="med" len="med"/>
+                      <a:tailEnd type="none" w="med" len="med"/>
+                    </a:lnT>
+                    <a:lnB w="12700" cap="flat" cmpd="sng" algn="ctr">
+                      <a:solidFill>
+                        <a:srgbClr val="DDDDDD"/>
+                      </a:solidFill>
+                      <a:prstDash val="solid"/>
+                      <a:round/>
+                      <a:headEnd type="none" w="med" len="med"/>
+                      <a:tailEnd type="none" w="med" len="med"/>
+                    </a:lnB>
+                    <a:solidFill>
+                      <a:srgbClr val="FDECEA"/>
+                    </a:solidFill>
+                  </a:tcPr>
+                </a:tc>
+                <a:tc>
+                  <a:txBody>
+                    <a:bodyPr/>
+                    <a:lstStyle/>
                     <a:p>
-                      <a:pPr indent="0" marL="0">
+                      <a:pPr algn="ctr" indent="0" marL="0">
                         <a:buNone/>
                       </a:pPr>
                       <a:r>
@@ -6675,28 +6834,7 @@
                           <a:ea typeface="Malgun Gothic" pitchFamily="34" charset="-122"/>
                           <a:cs typeface="Malgun Gothic" pitchFamily="34" charset="-120"/>
                         </a:rPr>
-                        <a:t>277 &gt; Baseline 265</a:t>
-                      </a:r>
-                      <a:endParaRPr lang="en-US" sz="950" dirty="0">
-                        <a:latin typeface="Malgun Gothic" charset="0"/>
-                        <a:ea typeface="Malgun Gothic" charset="0"/>
-                        <a:cs typeface="Malgun Gothic" charset="0"/>
-                      </a:endParaRPr>
-                    </a:p>
-                    <a:p>
-                      <a:pPr indent="0" marL="0">
-                        <a:buNone/>
-                      </a:pPr>
-                      <a:r>
-                        <a:rPr lang="en-US" sz="950" b="1" dirty="0">
-                          <a:solidFill>
-                            <a:srgbClr val="CC0000"/>
-                          </a:solidFill>
-                          <a:latin typeface="Malgun Gothic" pitchFamily="34" charset="0"/>
-                          <a:ea typeface="Malgun Gothic" pitchFamily="34" charset="-122"/>
-                          <a:cs typeface="Malgun Gothic" pitchFamily="34" charset="-120"/>
-                        </a:rPr>
-                        <a:t>역효과!</a:t>
+                        <a:t>❌ 역효과</a:t>
                       </a:r>
                       <a:endParaRPr lang="en-US" sz="950" dirty="0">
                         <a:latin typeface="Malgun Gothic" charset="0"/>
@@ -6743,7 +6881,7 @@
                       <a:tailEnd type="none" w="med" len="med"/>
                     </a:lnB>
                     <a:solidFill>
-                      <a:srgbClr val="FFF0F0"/>
+                      <a:srgbClr val="FDECEA"/>
                     </a:solidFill>
                   </a:tcPr>
                 </a:tc>
@@ -6752,7 +6890,7 @@
                     <a:bodyPr/>
                     <a:lstStyle/>
                     <a:p>
-                      <a:pPr indent="0" marL="0">
+                      <a:pPr algn="ctr" indent="0" marL="0">
                         <a:buNone/>
                       </a:pPr>
                       <a:r>
@@ -6764,49 +6902,7 @@
                           <a:ea typeface="Malgun Gothic" pitchFamily="34" charset="-122"/>
                           <a:cs typeface="Malgun Gothic" pitchFamily="34" charset="-120"/>
                         </a:rPr>
-                        <a:t>WASTE=-10이</a:t>
-                      </a:r>
-                      <a:endParaRPr lang="en-US" sz="950" dirty="0">
-                        <a:latin typeface="Malgun Gothic" charset="0"/>
-                        <a:ea typeface="Malgun Gothic" charset="0"/>
-                        <a:cs typeface="Malgun Gothic" charset="0"/>
-                      </a:endParaRPr>
-                    </a:p>
-                    <a:p>
-                      <a:pPr indent="0" marL="0">
-                        <a:buNone/>
-                      </a:pPr>
-                      <a:r>
-                        <a:rPr lang="en-US" sz="950" dirty="0">
-                          <a:solidFill>
-                            <a:srgbClr val="000000"/>
-                          </a:solidFill>
-                          <a:latin typeface="Malgun Gothic" pitchFamily="34" charset="0"/>
-                          <a:ea typeface="Malgun Gothic" pitchFamily="34" charset="-122"/>
-                          <a:cs typeface="Malgun Gothic" pitchFamily="34" charset="-120"/>
-                        </a:rPr>
-                        <a:t>ep100~200 구간에서</a:t>
-                      </a:r>
-                      <a:endParaRPr lang="en-US" sz="950" dirty="0">
-                        <a:latin typeface="Malgun Gothic" charset="0"/>
-                        <a:ea typeface="Malgun Gothic" charset="0"/>
-                        <a:cs typeface="Malgun Gothic" charset="0"/>
-                      </a:endParaRPr>
-                    </a:p>
-                    <a:p>
-                      <a:pPr indent="0" marL="0">
-                        <a:buNone/>
-                      </a:pPr>
-                      <a:r>
-                        <a:rPr lang="en-US" sz="950" dirty="0">
-                          <a:solidFill>
-                            <a:srgbClr val="000000"/>
-                          </a:solidFill>
-                          <a:latin typeface="Malgun Gothic" pitchFamily="34" charset="0"/>
-                          <a:ea typeface="Malgun Gothic" pitchFamily="34" charset="-122"/>
-                          <a:cs typeface="Malgun Gothic" pitchFamily="34" charset="-120"/>
-                        </a:rPr>
-                        <a:t>충전소 회피 유발</a:t>
+                        <a:t>패널티 제거</a:t>
                       </a:r>
                       <a:endParaRPr lang="en-US" sz="950" dirty="0">
                         <a:latin typeface="Malgun Gothic" charset="0"/>
@@ -6853,12 +6949,12 @@
                       <a:tailEnd type="none" w="med" len="med"/>
                     </a:lnB>
                     <a:solidFill>
-                      <a:srgbClr val="FFF0F0"/>
+                      <a:srgbClr val="FDECEA"/>
                     </a:solidFill>
                   </a:tcPr>
                 </a:tc>
               </a:tr>
-              <a:tr h="566928">
+              <a:tr h="548640">
                 <a:tc>
                   <a:txBody>
                     <a:bodyPr/>
@@ -6944,7 +7040,7 @@
                       <a:tailEnd type="none" w="med" len="med"/>
                     </a:lnB>
                     <a:solidFill>
-                      <a:srgbClr val="FFF0F0"/>
+                      <a:srgbClr val="FDECEA"/>
                     </a:solidFill>
                   </a:tcPr>
                 </a:tc>
@@ -6965,28 +7061,7 @@
                           <a:ea typeface="Malgun Gothic" pitchFamily="34" charset="-122"/>
                           <a:cs typeface="Malgun Gothic" pitchFamily="34" charset="-120"/>
                         </a:rPr>
-                        <a:t>낭비 패널티 삭제</a:t>
-                      </a:r>
-                      <a:endParaRPr lang="en-US" sz="950" dirty="0">
-                        <a:latin typeface="Malgun Gothic" charset="0"/>
-                        <a:ea typeface="Malgun Gothic" charset="0"/>
-                        <a:cs typeface="Malgun Gothic" charset="0"/>
-                      </a:endParaRPr>
-                    </a:p>
-                    <a:p>
-                      <a:pPr indent="0" marL="0">
-                        <a:buNone/>
-                      </a:pPr>
-                      <a:r>
-                        <a:rPr lang="en-US" sz="950" dirty="0">
-                          <a:solidFill>
-                            <a:srgbClr val="000000"/>
-                          </a:solidFill>
-                          <a:latin typeface="Malgun Gothic" pitchFamily="34" charset="0"/>
-                          <a:ea typeface="Malgun Gothic" pitchFamily="34" charset="-122"/>
-                          <a:cs typeface="Malgun Gothic" pitchFamily="34" charset="-120"/>
-                        </a:rPr>
-                        <a:t>(긍정 보상만 유지)</a:t>
+                        <a:t>낭비 패널티(-10) 삭제 — 긍정 보상만 유지</a:t>
                       </a:r>
                       <a:endParaRPr lang="en-US" sz="950" dirty="0">
                         <a:latin typeface="Malgun Gothic" charset="0"/>
@@ -7033,7 +7108,7 @@
                       <a:tailEnd type="none" w="med" len="med"/>
                     </a:lnB>
                     <a:solidFill>
-                      <a:srgbClr val="FFF0F0"/>
+                      <a:srgbClr val="FDECEA"/>
                     </a:solidFill>
                   </a:tcPr>
                 </a:tc>
@@ -7054,7 +7129,7 @@
                           <a:ea typeface="Malgun Gothic" pitchFamily="34" charset="-122"/>
                           <a:cs typeface="Malgun Gothic" pitchFamily="34" charset="-120"/>
                         </a:rPr>
-                        <a:t>Proposed 총방전</a:t>
+                        <a:t>Proposed 총방전 236 &gt; Baseline 224 — 여전히 역전</a:t>
                       </a:r>
                       <a:endParaRPr lang="en-US" sz="950" dirty="0">
                         <a:latin typeface="Malgun Gothic" charset="0"/>
@@ -7062,8 +7137,55 @@
                         <a:cs typeface="Malgun Gothic" charset="0"/>
                       </a:endParaRPr>
                     </a:p>
+                  </a:txBody>
+                  <a:tcPr marL="91440" marR="91440" marT="45720" marB="45720">
+                    <a:lnL w="12700" cap="flat" cmpd="sng" algn="ctr">
+                      <a:solidFill>
+                        <a:srgbClr val="DDDDDD"/>
+                      </a:solidFill>
+                      <a:prstDash val="solid"/>
+                      <a:round/>
+                      <a:headEnd type="none" w="med" len="med"/>
+                      <a:tailEnd type="none" w="med" len="med"/>
+                    </a:lnL>
+                    <a:lnR w="12700" cap="flat" cmpd="sng" algn="ctr">
+                      <a:solidFill>
+                        <a:srgbClr val="DDDDDD"/>
+                      </a:solidFill>
+                      <a:prstDash val="solid"/>
+                      <a:round/>
+                      <a:headEnd type="none" w="med" len="med"/>
+                      <a:tailEnd type="none" w="med" len="med"/>
+                    </a:lnR>
+                    <a:lnT w="12700" cap="flat" cmpd="sng" algn="ctr">
+                      <a:solidFill>
+                        <a:srgbClr val="DDDDDD"/>
+                      </a:solidFill>
+                      <a:prstDash val="solid"/>
+                      <a:round/>
+                      <a:headEnd type="none" w="med" len="med"/>
+                      <a:tailEnd type="none" w="med" len="med"/>
+                    </a:lnT>
+                    <a:lnB w="12700" cap="flat" cmpd="sng" algn="ctr">
+                      <a:solidFill>
+                        <a:srgbClr val="DDDDDD"/>
+                      </a:solidFill>
+                      <a:prstDash val="solid"/>
+                      <a:round/>
+                      <a:headEnd type="none" w="med" len="med"/>
+                      <a:tailEnd type="none" w="med" len="med"/>
+                    </a:lnB>
+                    <a:solidFill>
+                      <a:srgbClr val="FDECEA"/>
+                    </a:solidFill>
+                  </a:tcPr>
+                </a:tc>
+                <a:tc>
+                  <a:txBody>
+                    <a:bodyPr/>
+                    <a:lstStyle/>
                     <a:p>
-                      <a:pPr indent="0" marL="0">
+                      <a:pPr algn="ctr" indent="0" marL="0">
                         <a:buNone/>
                       </a:pPr>
                       <a:r>
@@ -7075,28 +7197,7 @@
                           <a:ea typeface="Malgun Gothic" pitchFamily="34" charset="-122"/>
                           <a:cs typeface="Malgun Gothic" pitchFamily="34" charset="-120"/>
                         </a:rPr>
-                        <a:t>236 &gt; Baseline 224</a:t>
-                      </a:r>
-                      <a:endParaRPr lang="en-US" sz="950" dirty="0">
-                        <a:latin typeface="Malgun Gothic" charset="0"/>
-                        <a:ea typeface="Malgun Gothic" charset="0"/>
-                        <a:cs typeface="Malgun Gothic" charset="0"/>
-                      </a:endParaRPr>
-                    </a:p>
-                    <a:p>
-                      <a:pPr indent="0" marL="0">
-                        <a:buNone/>
-                      </a:pPr>
-                      <a:r>
-                        <a:rPr lang="en-US" sz="950" b="1" dirty="0">
-                          <a:solidFill>
-                            <a:srgbClr val="CC0000"/>
-                          </a:solidFill>
-                          <a:latin typeface="Malgun Gothic" pitchFamily="34" charset="0"/>
-                          <a:ea typeface="Malgun Gothic" pitchFamily="34" charset="-122"/>
-                          <a:cs typeface="Malgun Gothic" pitchFamily="34" charset="-120"/>
-                        </a:rPr>
-                        <a:t>여전히 역전</a:t>
+                        <a:t>❌ 미해결</a:t>
                       </a:r>
                       <a:endParaRPr lang="en-US" sz="950" dirty="0">
                         <a:latin typeface="Malgun Gothic" charset="0"/>
@@ -7143,7 +7244,7 @@
                       <a:tailEnd type="none" w="med" len="med"/>
                     </a:lnB>
                     <a:solidFill>
-                      <a:srgbClr val="FFF0F0"/>
+                      <a:srgbClr val="FDECEA"/>
                     </a:solidFill>
                   </a:tcPr>
                 </a:tc>
@@ -7152,7 +7253,7 @@
                     <a:bodyPr/>
                     <a:lstStyle/>
                     <a:p>
-                      <a:pPr indent="0" marL="0">
+                      <a:pPr algn="ctr" indent="0" marL="0">
                         <a:buNone/>
                       </a:pPr>
                       <a:r>
@@ -7164,49 +7265,7 @@
                           <a:ea typeface="Malgun Gothic" pitchFamily="34" charset="-122"/>
                           <a:cs typeface="Malgun Gothic" pitchFamily="34" charset="-120"/>
                         </a:rPr>
-                        <a:t>DRAIN=2는 목표까지</a:t>
-                      </a:r>
-                      <a:endParaRPr lang="en-US" sz="950" dirty="0">
-                        <a:latin typeface="Malgun Gothic" charset="0"/>
-                        <a:ea typeface="Malgun Gothic" charset="0"/>
-                        <a:cs typeface="Malgun Gothic" charset="0"/>
-                      </a:endParaRPr>
-                    </a:p>
-                    <a:p>
-                      <a:pPr indent="0" marL="0">
-                        <a:buNone/>
-                      </a:pPr>
-                      <a:r>
-                        <a:rPr lang="en-US" sz="950" dirty="0">
-                          <a:solidFill>
-                            <a:srgbClr val="000000"/>
-                          </a:solidFill>
-                          <a:latin typeface="Malgun Gothic" pitchFamily="34" charset="0"/>
-                          <a:ea typeface="Malgun Gothic" pitchFamily="34" charset="-122"/>
-                          <a:cs typeface="Malgun Gothic" pitchFamily="34" charset="-120"/>
-                        </a:rPr>
-                        <a:t>충전 없이 도달 가능</a:t>
-                      </a:r>
-                      <a:endParaRPr lang="en-US" sz="950" dirty="0">
-                        <a:latin typeface="Malgun Gothic" charset="0"/>
-                        <a:ea typeface="Malgun Gothic" charset="0"/>
-                        <a:cs typeface="Malgun Gothic" charset="0"/>
-                      </a:endParaRPr>
-                    </a:p>
-                    <a:p>
-                      <a:pPr indent="0" marL="0">
-                        <a:buNone/>
-                      </a:pPr>
-                      <a:r>
-                        <a:rPr lang="en-US" sz="950" dirty="0">
-                          <a:solidFill>
-                            <a:srgbClr val="000000"/>
-                          </a:solidFill>
-                          <a:latin typeface="Malgun Gothic" pitchFamily="34" charset="0"/>
-                          <a:ea typeface="Malgun Gothic" pitchFamily="34" charset="-122"/>
-                          <a:cs typeface="Malgun Gothic" pitchFamily="34" charset="-120"/>
-                        </a:rPr>
-                        <a:t>→ Baseline도 수렴</a:t>
+                        <a:t>압박 최대화</a:t>
                       </a:r>
                       <a:endParaRPr lang="en-US" sz="950" dirty="0">
                         <a:latin typeface="Malgun Gothic" charset="0"/>
@@ -7253,12 +7312,12 @@
                       <a:tailEnd type="none" w="med" len="med"/>
                     </a:lnB>
                     <a:solidFill>
-                      <a:srgbClr val="FFF0F0"/>
+                      <a:srgbClr val="FDECEA"/>
                     </a:solidFill>
                   </a:tcPr>
                 </a:tc>
               </a:tr>
-              <a:tr h="566928">
+              <a:tr h="548640">
                 <a:tc>
                   <a:txBody>
                     <a:bodyPr/>
@@ -7297,28 +7356,7 @@
                           <a:ea typeface="Malgun Gothic" pitchFamily="34" charset="-122"/>
                           <a:cs typeface="Malgun Gothic" pitchFamily="34" charset="-120"/>
                         </a:rPr>
-                        <a:t>DRAIN=3</a:t>
-                      </a:r>
-                      <a:endParaRPr lang="en-US" sz="950" dirty="0">
-                        <a:latin typeface="Malgun Gothic" charset="0"/>
-                        <a:ea typeface="Malgun Gothic" charset="0"/>
-                        <a:cs typeface="Malgun Gothic" charset="0"/>
-                      </a:endParaRPr>
-                    </a:p>
-                    <a:p>
-                      <a:pPr indent="0" marL="0">
-                        <a:buNone/>
-                      </a:pPr>
-                      <a:r>
-                        <a:rPr lang="en-US" sz="950" b="1" dirty="0">
-                          <a:solidFill>
-                            <a:srgbClr val="000000"/>
-                          </a:solidFill>
-                          <a:latin typeface="Malgun Gothic" pitchFamily="34" charset="0"/>
-                          <a:ea typeface="Malgun Gothic" pitchFamily="34" charset="-122"/>
-                          <a:cs typeface="Malgun Gothic" pitchFamily="34" charset="-120"/>
-                        </a:rPr>
-                        <a:t>WARN=40</a:t>
+                        <a:t>DRAIN=3 / WARN=40</a:t>
                       </a:r>
                       <a:endParaRPr lang="en-US" sz="950" dirty="0">
                         <a:latin typeface="Malgun Gothic" charset="0"/>
@@ -7386,28 +7424,7 @@
                           <a:ea typeface="Malgun Gothic" pitchFamily="34" charset="-122"/>
                           <a:cs typeface="Malgun Gothic" pitchFamily="34" charset="-120"/>
                         </a:rPr>
-                        <a:t>스텝당 -3 (33스텝)</a:t>
-                      </a:r>
-                      <a:endParaRPr lang="en-US" sz="950" dirty="0">
-                        <a:latin typeface="Malgun Gothic" charset="0"/>
-                        <a:ea typeface="Malgun Gothic" charset="0"/>
-                        <a:cs typeface="Malgun Gothic" charset="0"/>
-                      </a:endParaRPr>
-                    </a:p>
-                    <a:p>
-                      <a:pPr indent="0" marL="0">
-                        <a:buNone/>
-                      </a:pPr>
-                      <a:r>
-                        <a:rPr lang="en-US" sz="950" dirty="0">
-                          <a:solidFill>
-                            <a:srgbClr val="000000"/>
-                          </a:solidFill>
-                          <a:latin typeface="Malgun Gothic" pitchFamily="34" charset="0"/>
-                          <a:ea typeface="Malgun Gothic" pitchFamily="34" charset="-122"/>
-                          <a:cs typeface="Malgun Gothic" pitchFamily="34" charset="-120"/>
-                        </a:rPr>
-                        <a:t>→ 반드시 충전 필요</a:t>
+                        <a:t>스텝당 -3 (33스텝) — 반드시 충전 필요한 환경</a:t>
                       </a:r>
                       <a:endParaRPr lang="en-US" sz="950" dirty="0">
                         <a:latin typeface="Malgun Gothic" charset="0"/>
@@ -7475,7 +7492,7 @@
                           <a:ea typeface="Malgun Gothic" pitchFamily="34" charset="-122"/>
                           <a:cs typeface="Malgun Gothic" pitchFamily="34" charset="-120"/>
                         </a:rPr>
-                        <a:t>✅ 총방전 471→415</a:t>
+                        <a:t>총방전 471→415 / 말기방전율 70%↓ / 평균보상 +148p</a:t>
                       </a:r>
                       <a:endParaRPr lang="en-US" sz="950" dirty="0">
                         <a:latin typeface="Malgun Gothic" charset="0"/>
@@ -7483,8 +7500,55 @@
                         <a:cs typeface="Malgun Gothic" charset="0"/>
                       </a:endParaRPr>
                     </a:p>
+                  </a:txBody>
+                  <a:tcPr marL="91440" marR="91440" marT="45720" marB="45720">
+                    <a:lnL w="12700" cap="flat" cmpd="sng" algn="ctr">
+                      <a:solidFill>
+                        <a:srgbClr val="DDDDDD"/>
+                      </a:solidFill>
+                      <a:prstDash val="solid"/>
+                      <a:round/>
+                      <a:headEnd type="none" w="med" len="med"/>
+                      <a:tailEnd type="none" w="med" len="med"/>
+                    </a:lnL>
+                    <a:lnR w="12700" cap="flat" cmpd="sng" algn="ctr">
+                      <a:solidFill>
+                        <a:srgbClr val="DDDDDD"/>
+                      </a:solidFill>
+                      <a:prstDash val="solid"/>
+                      <a:round/>
+                      <a:headEnd type="none" w="med" len="med"/>
+                      <a:tailEnd type="none" w="med" len="med"/>
+                    </a:lnR>
+                    <a:lnT w="12700" cap="flat" cmpd="sng" algn="ctr">
+                      <a:solidFill>
+                        <a:srgbClr val="DDDDDD"/>
+                      </a:solidFill>
+                      <a:prstDash val="solid"/>
+                      <a:round/>
+                      <a:headEnd type="none" w="med" len="med"/>
+                      <a:tailEnd type="none" w="med" len="med"/>
+                    </a:lnT>
+                    <a:lnB w="12700" cap="flat" cmpd="sng" algn="ctr">
+                      <a:solidFill>
+                        <a:srgbClr val="DDDDDD"/>
+                      </a:solidFill>
+                      <a:prstDash val="solid"/>
+                      <a:round/>
+                      <a:headEnd type="none" w="med" len="med"/>
+                      <a:tailEnd type="none" w="med" len="med"/>
+                    </a:lnB>
+                    <a:solidFill>
+                      <a:srgbClr val="E8F5E9"/>
+                    </a:solidFill>
+                  </a:tcPr>
+                </a:tc>
+                <a:tc>
+                  <a:txBody>
+                    <a:bodyPr/>
+                    <a:lstStyle/>
                     <a:p>
-                      <a:pPr indent="0" marL="0">
+                      <a:pPr algn="ctr" indent="0" marL="0">
                         <a:buNone/>
                       </a:pPr>
                       <a:r>
@@ -7496,28 +7560,7 @@
                           <a:ea typeface="Malgun Gothic" pitchFamily="34" charset="-122"/>
                           <a:cs typeface="Malgun Gothic" pitchFamily="34" charset="-120"/>
                         </a:rPr>
-                        <a:t>말기방전율 70%↓</a:t>
-                      </a:r>
-                      <a:endParaRPr lang="en-US" sz="950" dirty="0">
-                        <a:latin typeface="Malgun Gothic" charset="0"/>
-                        <a:ea typeface="Malgun Gothic" charset="0"/>
-                        <a:cs typeface="Malgun Gothic" charset="0"/>
-                      </a:endParaRPr>
-                    </a:p>
-                    <a:p>
-                      <a:pPr indent="0" marL="0">
-                        <a:buNone/>
-                      </a:pPr>
-                      <a:r>
-                        <a:rPr lang="en-US" sz="950" b="1" dirty="0">
-                          <a:solidFill>
-                            <a:srgbClr val="1E8A47"/>
-                          </a:solidFill>
-                          <a:latin typeface="Malgun Gothic" pitchFamily="34" charset="0"/>
-                          <a:ea typeface="Malgun Gothic" pitchFamily="34" charset="-122"/>
-                          <a:cs typeface="Malgun Gothic" pitchFamily="34" charset="-120"/>
-                        </a:rPr>
-                        <a:t>평균보상 +148p</a:t>
+                        <a:t>✅ 최종 채택</a:t>
                       </a:r>
                       <a:endParaRPr lang="en-US" sz="950" dirty="0">
                         <a:latin typeface="Malgun Gothic" charset="0"/>
@@ -7573,11 +7616,11 @@
                     <a:bodyPr/>
                     <a:lstStyle/>
                     <a:p>
-                      <a:pPr indent="0" marL="0">
+                      <a:pPr algn="ctr" indent="0" marL="0">
                         <a:buNone/>
                       </a:pPr>
                       <a:r>
-                        <a:rPr lang="en-US" sz="950" b="1" dirty="0">
+                        <a:rPr lang="en-US" sz="950" dirty="0">
                           <a:solidFill>
                             <a:srgbClr val="000000"/>
                           </a:solidFill>
@@ -7585,49 +7628,7 @@
                           <a:ea typeface="Malgun Gothic" pitchFamily="34" charset="-122"/>
                           <a:cs typeface="Malgun Gothic" pitchFamily="34" charset="-120"/>
                         </a:rPr>
-                        <a:t>Baseline은 끝까지</a:t>
-                      </a:r>
-                      <a:endParaRPr lang="en-US" sz="950" dirty="0">
-                        <a:latin typeface="Malgun Gothic" charset="0"/>
-                        <a:ea typeface="Malgun Gothic" charset="0"/>
-                        <a:cs typeface="Malgun Gothic" charset="0"/>
-                      </a:endParaRPr>
-                    </a:p>
-                    <a:p>
-                      <a:pPr indent="0" marL="0">
-                        <a:buNone/>
-                      </a:pPr>
-                      <a:r>
-                        <a:rPr lang="en-US" sz="950" b="1" dirty="0">
-                          <a:solidFill>
-                            <a:srgbClr val="000000"/>
-                          </a:solidFill>
-                          <a:latin typeface="Malgun Gothic" pitchFamily="34" charset="0"/>
-                          <a:ea typeface="Malgun Gothic" pitchFamily="34" charset="-122"/>
-                          <a:cs typeface="Malgun Gothic" pitchFamily="34" charset="-120"/>
-                        </a:rPr>
-                        <a:t>방전 지속 (2.0/100ep)</a:t>
-                      </a:r>
-                      <a:endParaRPr lang="en-US" sz="950" dirty="0">
-                        <a:latin typeface="Malgun Gothic" charset="0"/>
-                        <a:ea typeface="Malgun Gothic" charset="0"/>
-                        <a:cs typeface="Malgun Gothic" charset="0"/>
-                      </a:endParaRPr>
-                    </a:p>
-                    <a:p>
-                      <a:pPr indent="0" marL="0">
-                        <a:buNone/>
-                      </a:pPr>
-                      <a:r>
-                        <a:rPr lang="en-US" sz="950" b="1" dirty="0">
-                          <a:solidFill>
-                            <a:srgbClr val="000000"/>
-                          </a:solidFill>
-                          <a:latin typeface="Malgun Gothic" pitchFamily="34" charset="0"/>
-                          <a:ea typeface="Malgun Gothic" pitchFamily="34" charset="-122"/>
-                          <a:cs typeface="Malgun Gothic" pitchFamily="34" charset="-120"/>
-                        </a:rPr>
-                        <a:t>Proposed 수렴 ✓</a:t>
+                        <a:t>—</a:t>
                       </a:r>
                       <a:endParaRPr lang="en-US" sz="950" dirty="0">
                         <a:latin typeface="Malgun Gothic" charset="0"/>
@@ -7685,14 +7686,14 @@
       </p:graphicFrame>
       <p:sp>
         <p:nvSpPr>
-          <p:cNvPr id="6" name="Shape 3"/>
+          <p:cNvPr id="7" name="Shape 4"/>
           <p:cNvSpPr/>
           <p:nvPr/>
         </p:nvSpPr>
         <p:spPr>
           <a:xfrm>
-            <a:off x="182880" y="5742432"/>
-            <a:ext cx="8778240" cy="566928"/>
+            <a:off x="182880" y="5760720"/>
+            <a:ext cx="8778240" cy="502920"/>
           </a:xfrm>
           <a:prstGeom prst="rect">
             <a:avLst/>
@@ -7710,14 +7711,14 @@
       </p:sp>
       <p:sp>
         <p:nvSpPr>
-          <p:cNvPr id="7" name="Text 4"/>
+          <p:cNvPr id="8" name="Text 5"/>
           <p:cNvSpPr/>
           <p:nvPr/>
         </p:nvSpPr>
         <p:spPr>
           <a:xfrm>
-            <a:off x="182880" y="5760720"/>
-            <a:ext cx="8778240" cy="530352"/>
+            <a:off x="182880" y="5779008"/>
+            <a:ext cx="8778240" cy="466344"/>
           </a:xfrm>
           <a:prstGeom prst="rect">
             <a:avLst/>
@@ -7733,7 +7734,7 @@
               <a:buNone/>
             </a:pPr>
             <a:r>
-              <a:rPr lang="en-US" sz="950" dirty="0">
+              <a:rPr lang="en-US" sz="1000" b="1" dirty="0">
                 <a:solidFill>
                   <a:srgbClr val="FFFFFF"/>
                 </a:solidFill>
@@ -7741,26 +7742,9 @@
                 <a:ea typeface="Malgun Gothic" pitchFamily="34" charset="-122"/>
                 <a:cs typeface="Malgun Gothic" pitchFamily="34" charset="-120"/>
               </a:rPr>
-              <a:t>핵심 교훈:  배터리가 생존의 병목이 될 때(DRAIN=3) Safety Reward의 차별적 가치가 드러난다.</a:t>
+              <a:t>핵심 교훈: 배터리가 생존의 병목이 될 때(DRAIN=3) Safety Reward의 차별적 가치가 드러난다.  →  다음 슬라이드에서 실패 원인과 수렴 증거를 상세 분석</a:t>
             </a:r>
-            <a:endParaRPr lang="en-US" sz="950" dirty="0"/>
-          </a:p>
-          <a:p>
-            <a:pPr algn="ctr" indent="0" marL="0">
-              <a:buNone/>
-            </a:pPr>
-            <a:r>
-              <a:rPr lang="en-US" sz="950" dirty="0">
-                <a:solidFill>
-                  <a:srgbClr val="FFFFFF"/>
-                </a:solidFill>
-                <a:latin typeface="Malgun Gothic" pitchFamily="34" charset="0"/>
-                <a:ea typeface="Malgun Gothic" pitchFamily="34" charset="-122"/>
-                <a:cs typeface="Malgun Gothic" pitchFamily="34" charset="-120"/>
-              </a:rPr>
-              <a:t>Reward 설계는 환경 난이도와 함께 조율해야 한다 — 너무 쉬운 환경에서는 Safety 신호가 불필요해진다.</a:t>
-            </a:r>
-            <a:endParaRPr lang="en-US" sz="950" dirty="0"/>
+            <a:endParaRPr lang="en-US" sz="1000" dirty="0"/>
           </a:p>
         </p:txBody>
       </p:sp>
@@ -7872,7 +7856,6723 @@
                 <a:ea typeface="Malgun Gothic" pitchFamily="34" charset="-122"/>
                 <a:cs typeface="Malgun Gothic" pitchFamily="34" charset="-120"/>
               </a:rPr>
-              <a:t>10  토의 — Safe RL 관점 해석</a:t>
+              <a:t>10  실험 조건 최적화 과정 ② — 핵심 실패 원인 분석</a:t>
+            </a:r>
+            <a:endParaRPr lang="en-US" sz="1700" dirty="0"/>
+          </a:p>
+        </p:txBody>
+      </p:sp>
+      <p:sp>
+        <p:nvSpPr>
+          <p:cNvPr id="5" name="Shape 3"/>
+          <p:cNvSpPr/>
+          <p:nvPr/>
+        </p:nvSpPr>
+        <p:spPr>
+          <a:xfrm>
+            <a:off x="182880" y="804672"/>
+            <a:ext cx="8778240" cy="320040"/>
+          </a:xfrm>
+          <a:prstGeom prst="rect">
+            <a:avLst/>
+          </a:prstGeom>
+          <a:solidFill>
+            <a:srgbClr val="FDECEA"/>
+          </a:solidFill>
+          <a:ln w="12700">
+            <a:solidFill>
+              <a:srgbClr val="CC0000"/>
+            </a:solidFill>
+            <a:prstDash val="solid"/>
+          </a:ln>
+        </p:spPr>
+      </p:sp>
+      <p:sp>
+        <p:nvSpPr>
+          <p:cNvPr id="6" name="Text 4"/>
+          <p:cNvSpPr/>
+          <p:nvPr/>
+        </p:nvSpPr>
+        <p:spPr>
+          <a:xfrm>
+            <a:off x="182880" y="822960"/>
+            <a:ext cx="8778240" cy="283464"/>
+          </a:xfrm>
+          <a:prstGeom prst="rect">
+            <a:avLst/>
+          </a:prstGeom>
+          <a:noFill/>
+          <a:ln/>
+        </p:spPr>
+        <p:txBody>
+          <a:bodyPr wrap="square" rtlCol="0" anchor="ctr"/>
+          <a:lstStyle/>
+          <a:p>
+            <a:pPr indent="0" marL="0">
+              <a:buNone/>
+            </a:pPr>
+            <a:r>
+              <a:rPr lang="en-US" sz="1100" b="1" dirty="0">
+                <a:solidFill>
+                  <a:srgbClr val="CC0000"/>
+                </a:solidFill>
+                <a:latin typeface="Malgun Gothic" pitchFamily="34" charset="0"/>
+                <a:ea typeface="Malgun Gothic" pitchFamily="34" charset="-122"/>
+                <a:cs typeface="Malgun Gothic" pitchFamily="34" charset="-120"/>
+              </a:rPr>
+              <a:t>원인 ① Step 2 — Safety 보상이 에피소드 내에서 거의 발동하지 않음 (DRAIN=1, WARNING=20)</a:t>
+            </a:r>
+            <a:endParaRPr lang="en-US" sz="1100" dirty="0"/>
+          </a:p>
+        </p:txBody>
+      </p:sp>
+      <p:graphicFrame>
+        <p:nvGraphicFramePr>
+          <p:cNvPr id="13" name="Table 0"/>
+          <p:cNvGraphicFramePr>
+            <a:graphicFrameLocks noGrp="1"/>
+          </p:cNvGraphicFramePr>
+          <p:nvPr>
+            <p:extLst>
+              <p:ext uri="{D42A27DB-BD31-4B8C-83A1-F6EECF244321}">
+                <p14:modId xmlns:p14="http://schemas.microsoft.com/office/powerpoint/2010/main" val="1579011935"/>
+              </p:ext>
+            </p:extLst>
+          </p:nvPr>
+        </p:nvGraphicFramePr>
+        <p:xfrm>
+          <a:off x="182880" y="1161288"/>
+          <a:ext cx="8778240" cy="914400"/>
+        </p:xfrm>
+        <a:graphic>
+          <a:graphicData uri="http://schemas.openxmlformats.org/drawingml/2006/table">
+            <a:tbl>
+              <a:tblPr/>
+              <a:tblGrid>
+                <a:gridCol w="2926080"/>
+                <a:gridCol w="5852160"/>
+              </a:tblGrid>
+              <a:tr h="292608">
+                <a:tc>
+                  <a:txBody>
+                    <a:bodyPr/>
+                    <a:lstStyle/>
+                    <a:p>
+                      <a:pPr indent="0" marL="0">
+                        <a:buNone/>
+                      </a:pPr>
+                      <a:r>
+                        <a:rPr lang="en-US" sz="1050" b="1" dirty="0">
+                          <a:solidFill>
+                            <a:srgbClr val="FFFFFF"/>
+                          </a:solidFill>
+                          <a:latin typeface="Malgun Gothic" pitchFamily="34" charset="0"/>
+                          <a:ea typeface="Malgun Gothic" pitchFamily="34" charset="-122"/>
+                          <a:cs typeface="Malgun Gothic" pitchFamily="34" charset="-120"/>
+                        </a:rPr>
+                        <a:t>항목</a:t>
+                      </a:r>
+                      <a:endParaRPr lang="en-US" sz="1050" dirty="0">
+                        <a:latin typeface="Malgun Gothic" charset="0"/>
+                        <a:ea typeface="Malgun Gothic" charset="0"/>
+                        <a:cs typeface="Malgun Gothic" charset="0"/>
+                      </a:endParaRPr>
+                    </a:p>
+                  </a:txBody>
+                  <a:tcPr marL="91440" marR="91440" marT="45720" marB="45720">
+                    <a:lnL w="12700" cap="flat" cmpd="sng" algn="ctr">
+                      <a:solidFill>
+                        <a:srgbClr val="DDDDDD"/>
+                      </a:solidFill>
+                      <a:prstDash val="solid"/>
+                      <a:round/>
+                      <a:headEnd type="none" w="med" len="med"/>
+                      <a:tailEnd type="none" w="med" len="med"/>
+                    </a:lnL>
+                    <a:lnR w="12700" cap="flat" cmpd="sng" algn="ctr">
+                      <a:solidFill>
+                        <a:srgbClr val="DDDDDD"/>
+                      </a:solidFill>
+                      <a:prstDash val="solid"/>
+                      <a:round/>
+                      <a:headEnd type="none" w="med" len="med"/>
+                      <a:tailEnd type="none" w="med" len="med"/>
+                    </a:lnR>
+                    <a:lnT w="12700" cap="flat" cmpd="sng" algn="ctr">
+                      <a:solidFill>
+                        <a:srgbClr val="DDDDDD"/>
+                      </a:solidFill>
+                      <a:prstDash val="solid"/>
+                      <a:round/>
+                      <a:headEnd type="none" w="med" len="med"/>
+                      <a:tailEnd type="none" w="med" len="med"/>
+                    </a:lnT>
+                    <a:lnB w="12700" cap="flat" cmpd="sng" algn="ctr">
+                      <a:solidFill>
+                        <a:srgbClr val="DDDDDD"/>
+                      </a:solidFill>
+                      <a:prstDash val="solid"/>
+                      <a:round/>
+                      <a:headEnd type="none" w="med" len="med"/>
+                      <a:tailEnd type="none" w="med" len="med"/>
+                    </a:lnB>
+                    <a:solidFill>
+                      <a:srgbClr val="1A1A1A"/>
+                    </a:solidFill>
+                  </a:tcPr>
+                </a:tc>
+                <a:tc>
+                  <a:txBody>
+                    <a:bodyPr/>
+                    <a:lstStyle/>
+                    <a:p>
+                      <a:pPr indent="0" marL="0">
+                        <a:buNone/>
+                      </a:pPr>
+                      <a:r>
+                        <a:rPr lang="en-US" sz="1050" b="1" dirty="0">
+                          <a:solidFill>
+                            <a:srgbClr val="FFFFFF"/>
+                          </a:solidFill>
+                          <a:latin typeface="Malgun Gothic" pitchFamily="34" charset="0"/>
+                          <a:ea typeface="Malgun Gothic" pitchFamily="34" charset="-122"/>
+                          <a:cs typeface="Malgun Gothic" pitchFamily="34" charset="-120"/>
+                        </a:rPr>
+                        <a:t>수치 / 분석</a:t>
+                      </a:r>
+                      <a:endParaRPr lang="en-US" sz="1050" dirty="0">
+                        <a:latin typeface="Malgun Gothic" charset="0"/>
+                        <a:ea typeface="Malgun Gothic" charset="0"/>
+                        <a:cs typeface="Malgun Gothic" charset="0"/>
+                      </a:endParaRPr>
+                    </a:p>
+                  </a:txBody>
+                  <a:tcPr marL="91440" marR="91440" marT="45720" marB="45720">
+                    <a:lnL w="12700" cap="flat" cmpd="sng" algn="ctr">
+                      <a:solidFill>
+                        <a:srgbClr val="DDDDDD"/>
+                      </a:solidFill>
+                      <a:prstDash val="solid"/>
+                      <a:round/>
+                      <a:headEnd type="none" w="med" len="med"/>
+                      <a:tailEnd type="none" w="med" len="med"/>
+                    </a:lnL>
+                    <a:lnR w="12700" cap="flat" cmpd="sng" algn="ctr">
+                      <a:solidFill>
+                        <a:srgbClr val="DDDDDD"/>
+                      </a:solidFill>
+                      <a:prstDash val="solid"/>
+                      <a:round/>
+                      <a:headEnd type="none" w="med" len="med"/>
+                      <a:tailEnd type="none" w="med" len="med"/>
+                    </a:lnR>
+                    <a:lnT w="12700" cap="flat" cmpd="sng" algn="ctr">
+                      <a:solidFill>
+                        <a:srgbClr val="DDDDDD"/>
+                      </a:solidFill>
+                      <a:prstDash val="solid"/>
+                      <a:round/>
+                      <a:headEnd type="none" w="med" len="med"/>
+                      <a:tailEnd type="none" w="med" len="med"/>
+                    </a:lnT>
+                    <a:lnB w="12700" cap="flat" cmpd="sng" algn="ctr">
+                      <a:solidFill>
+                        <a:srgbClr val="DDDDDD"/>
+                      </a:solidFill>
+                      <a:prstDash val="solid"/>
+                      <a:round/>
+                      <a:headEnd type="none" w="med" len="med"/>
+                      <a:tailEnd type="none" w="med" len="med"/>
+                    </a:lnB>
+                    <a:solidFill>
+                      <a:srgbClr val="1A1A1A"/>
+                    </a:solidFill>
+                  </a:tcPr>
+                </a:tc>
+              </a:tr>
+              <a:tr h="347472">
+                <a:tc>
+                  <a:txBody>
+                    <a:bodyPr/>
+                    <a:lstStyle/>
+                    <a:p>
+                      <a:pPr indent="0" marL="0">
+                        <a:buNone/>
+                      </a:pPr>
+                      <a:r>
+                        <a:rPr lang="en-US" sz="1050" dirty="0">
+                          <a:solidFill>
+                            <a:srgbClr val="000000"/>
+                          </a:solidFill>
+                          <a:latin typeface="Malgun Gothic" pitchFamily="34" charset="0"/>
+                          <a:ea typeface="Malgun Gothic" pitchFamily="34" charset="-122"/>
+                          <a:cs typeface="Malgun Gothic" pitchFamily="34" charset="-120"/>
+                        </a:rPr>
+                        <a:t>배터리 WARNING 도달 조건</a:t>
+                      </a:r>
+                      <a:endParaRPr lang="en-US" sz="1050" dirty="0">
+                        <a:latin typeface="Malgun Gothic" charset="0"/>
+                        <a:ea typeface="Malgun Gothic" charset="0"/>
+                        <a:cs typeface="Malgun Gothic" charset="0"/>
+                      </a:endParaRPr>
+                    </a:p>
+                  </a:txBody>
+                  <a:tcPr marL="91440" marR="91440" marT="45720" marB="45720">
+                    <a:lnL w="12700" cap="flat" cmpd="sng" algn="ctr">
+                      <a:solidFill>
+                        <a:srgbClr val="DDDDDD"/>
+                      </a:solidFill>
+                      <a:prstDash val="solid"/>
+                      <a:round/>
+                      <a:headEnd type="none" w="med" len="med"/>
+                      <a:tailEnd type="none" w="med" len="med"/>
+                    </a:lnL>
+                    <a:lnR w="12700" cap="flat" cmpd="sng" algn="ctr">
+                      <a:solidFill>
+                        <a:srgbClr val="DDDDDD"/>
+                      </a:solidFill>
+                      <a:prstDash val="solid"/>
+                      <a:round/>
+                      <a:headEnd type="none" w="med" len="med"/>
+                      <a:tailEnd type="none" w="med" len="med"/>
+                    </a:lnR>
+                    <a:lnT w="12700" cap="flat" cmpd="sng" algn="ctr">
+                      <a:solidFill>
+                        <a:srgbClr val="DDDDDD"/>
+                      </a:solidFill>
+                      <a:prstDash val="solid"/>
+                      <a:round/>
+                      <a:headEnd type="none" w="med" len="med"/>
+                      <a:tailEnd type="none" w="med" len="med"/>
+                    </a:lnT>
+                    <a:lnB w="12700" cap="flat" cmpd="sng" algn="ctr">
+                      <a:solidFill>
+                        <a:srgbClr val="DDDDDD"/>
+                      </a:solidFill>
+                      <a:prstDash val="solid"/>
+                      <a:round/>
+                      <a:headEnd type="none" w="med" len="med"/>
+                      <a:tailEnd type="none" w="med" len="med"/>
+                    </a:lnB>
+                    <a:solidFill>
+                      <a:srgbClr val="F5F5F5"/>
+                    </a:solidFill>
+                  </a:tcPr>
+                </a:tc>
+                <a:tc>
+                  <a:txBody>
+                    <a:bodyPr/>
+                    <a:lstStyle/>
+                    <a:p>
+                      <a:pPr indent="0" marL="0">
+                        <a:buNone/>
+                      </a:pPr>
+                      <a:r>
+                        <a:rPr lang="en-US" sz="1050" dirty="0">
+                          <a:solidFill>
+                            <a:srgbClr val="000000"/>
+                          </a:solidFill>
+                          <a:latin typeface="Malgun Gothic" pitchFamily="34" charset="0"/>
+                          <a:ea typeface="Malgun Gothic" pitchFamily="34" charset="-122"/>
+                          <a:cs typeface="Malgun Gothic" pitchFamily="34" charset="-120"/>
+                        </a:rPr>
+                        <a:t>100 → 20 : 80스텝 이동 필요 (DRAIN=1)</a:t>
+                      </a:r>
+                      <a:endParaRPr lang="en-US" sz="1050" dirty="0">
+                        <a:latin typeface="Malgun Gothic" charset="0"/>
+                        <a:ea typeface="Malgun Gothic" charset="0"/>
+                        <a:cs typeface="Malgun Gothic" charset="0"/>
+                      </a:endParaRPr>
+                    </a:p>
+                  </a:txBody>
+                  <a:tcPr marL="91440" marR="91440" marT="45720" marB="45720">
+                    <a:lnL w="12700" cap="flat" cmpd="sng" algn="ctr">
+                      <a:solidFill>
+                        <a:srgbClr val="DDDDDD"/>
+                      </a:solidFill>
+                      <a:prstDash val="solid"/>
+                      <a:round/>
+                      <a:headEnd type="none" w="med" len="med"/>
+                      <a:tailEnd type="none" w="med" len="med"/>
+                    </a:lnL>
+                    <a:lnR w="12700" cap="flat" cmpd="sng" algn="ctr">
+                      <a:solidFill>
+                        <a:srgbClr val="DDDDDD"/>
+                      </a:solidFill>
+                      <a:prstDash val="solid"/>
+                      <a:round/>
+                      <a:headEnd type="none" w="med" len="med"/>
+                      <a:tailEnd type="none" w="med" len="med"/>
+                    </a:lnR>
+                    <a:lnT w="12700" cap="flat" cmpd="sng" algn="ctr">
+                      <a:solidFill>
+                        <a:srgbClr val="DDDDDD"/>
+                      </a:solidFill>
+                      <a:prstDash val="solid"/>
+                      <a:round/>
+                      <a:headEnd type="none" w="med" len="med"/>
+                      <a:tailEnd type="none" w="med" len="med"/>
+                    </a:lnT>
+                    <a:lnB w="12700" cap="flat" cmpd="sng" algn="ctr">
+                      <a:solidFill>
+                        <a:srgbClr val="DDDDDD"/>
+                      </a:solidFill>
+                      <a:prstDash val="solid"/>
+                      <a:round/>
+                      <a:headEnd type="none" w="med" len="med"/>
+                      <a:tailEnd type="none" w="med" len="med"/>
+                    </a:lnB>
+                    <a:solidFill>
+                      <a:srgbClr val="F5F5F5"/>
+                    </a:solidFill>
+                  </a:tcPr>
+                </a:tc>
+              </a:tr>
+              <a:tr h="438912">
+                <a:tc>
+                  <a:txBody>
+                    <a:bodyPr/>
+                    <a:lstStyle/>
+                    <a:p>
+                      <a:pPr indent="0" marL="0">
+                        <a:buNone/>
+                      </a:pPr>
+                      <a:r>
+                        <a:rPr lang="en-US" sz="1050" dirty="0">
+                          <a:solidFill>
+                            <a:srgbClr val="000000"/>
+                          </a:solidFill>
+                          <a:latin typeface="Malgun Gothic" pitchFamily="34" charset="0"/>
+                          <a:ea typeface="Malgun Gothic" pitchFamily="34" charset="-122"/>
+                          <a:cs typeface="Malgun Gothic" pitchFamily="34" charset="-120"/>
+                        </a:rPr>
+                        <a:t>7×7 최적 경로 길이</a:t>
+                      </a:r>
+                      <a:endParaRPr lang="en-US" sz="1050" dirty="0">
+                        <a:latin typeface="Malgun Gothic" charset="0"/>
+                        <a:ea typeface="Malgun Gothic" charset="0"/>
+                        <a:cs typeface="Malgun Gothic" charset="0"/>
+                      </a:endParaRPr>
+                    </a:p>
+                  </a:txBody>
+                  <a:tcPr marL="91440" marR="91440" marT="45720" marB="45720">
+                    <a:lnL w="12700" cap="flat" cmpd="sng" algn="ctr">
+                      <a:solidFill>
+                        <a:srgbClr val="DDDDDD"/>
+                      </a:solidFill>
+                      <a:prstDash val="solid"/>
+                      <a:round/>
+                      <a:headEnd type="none" w="med" len="med"/>
+                      <a:tailEnd type="none" w="med" len="med"/>
+                    </a:lnL>
+                    <a:lnR w="12700" cap="flat" cmpd="sng" algn="ctr">
+                      <a:solidFill>
+                        <a:srgbClr val="DDDDDD"/>
+                      </a:solidFill>
+                      <a:prstDash val="solid"/>
+                      <a:round/>
+                      <a:headEnd type="none" w="med" len="med"/>
+                      <a:tailEnd type="none" w="med" len="med"/>
+                    </a:lnR>
+                    <a:lnT w="12700" cap="flat" cmpd="sng" algn="ctr">
+                      <a:solidFill>
+                        <a:srgbClr val="DDDDDD"/>
+                      </a:solidFill>
+                      <a:prstDash val="solid"/>
+                      <a:round/>
+                      <a:headEnd type="none" w="med" len="med"/>
+                      <a:tailEnd type="none" w="med" len="med"/>
+                    </a:lnT>
+                    <a:lnB w="12700" cap="flat" cmpd="sng" algn="ctr">
+                      <a:solidFill>
+                        <a:srgbClr val="DDDDDD"/>
+                      </a:solidFill>
+                      <a:prstDash val="solid"/>
+                      <a:round/>
+                      <a:headEnd type="none" w="med" len="med"/>
+                      <a:tailEnd type="none" w="med" len="med"/>
+                    </a:lnB>
+                    <a:solidFill>
+                      <a:srgbClr val="F5F5F5"/>
+                    </a:solidFill>
+                  </a:tcPr>
+                </a:tc>
+                <a:tc>
+                  <a:txBody>
+                    <a:bodyPr/>
+                    <a:lstStyle/>
+                    <a:p>
+                      <a:pPr indent="0" marL="0">
+                        <a:buNone/>
+                      </a:pPr>
+                      <a:r>
+                        <a:rPr lang="en-US" sz="1050" dirty="0">
+                          <a:solidFill>
+                            <a:srgbClr val="000000"/>
+                          </a:solidFill>
+                          <a:latin typeface="Malgun Gothic" pitchFamily="34" charset="0"/>
+                          <a:ea typeface="Malgun Gothic" pitchFamily="34" charset="-122"/>
+                          <a:cs typeface="Malgun Gothic" pitchFamily="34" charset="-120"/>
+                        </a:rPr>
+                        <a:t>4~12스텝 → 대부분 에피소드가 목표 도달 또는 Max Step(150)으로 종료</a:t>
+                      </a:r>
+                      <a:endParaRPr lang="en-US" sz="1050" dirty="0">
+                        <a:latin typeface="Malgun Gothic" charset="0"/>
+                        <a:ea typeface="Malgun Gothic" charset="0"/>
+                        <a:cs typeface="Malgun Gothic" charset="0"/>
+                      </a:endParaRPr>
+                    </a:p>
+                  </a:txBody>
+                  <a:tcPr marL="91440" marR="91440" marT="45720" marB="45720">
+                    <a:lnL w="12700" cap="flat" cmpd="sng" algn="ctr">
+                      <a:solidFill>
+                        <a:srgbClr val="DDDDDD"/>
+                      </a:solidFill>
+                      <a:prstDash val="solid"/>
+                      <a:round/>
+                      <a:headEnd type="none" w="med" len="med"/>
+                      <a:tailEnd type="none" w="med" len="med"/>
+                    </a:lnL>
+                    <a:lnR w="12700" cap="flat" cmpd="sng" algn="ctr">
+                      <a:solidFill>
+                        <a:srgbClr val="DDDDDD"/>
+                      </a:solidFill>
+                      <a:prstDash val="solid"/>
+                      <a:round/>
+                      <a:headEnd type="none" w="med" len="med"/>
+                      <a:tailEnd type="none" w="med" len="med"/>
+                    </a:lnR>
+                    <a:lnT w="12700" cap="flat" cmpd="sng" algn="ctr">
+                      <a:solidFill>
+                        <a:srgbClr val="DDDDDD"/>
+                      </a:solidFill>
+                      <a:prstDash val="solid"/>
+                      <a:round/>
+                      <a:headEnd type="none" w="med" len="med"/>
+                      <a:tailEnd type="none" w="med" len="med"/>
+                    </a:lnT>
+                    <a:lnB w="12700" cap="flat" cmpd="sng" algn="ctr">
+                      <a:solidFill>
+                        <a:srgbClr val="DDDDDD"/>
+                      </a:solidFill>
+                      <a:prstDash val="solid"/>
+                      <a:round/>
+                      <a:headEnd type="none" w="med" len="med"/>
+                      <a:tailEnd type="none" w="med" len="med"/>
+                    </a:lnB>
+                    <a:solidFill>
+                      <a:srgbClr val="F5F5F5"/>
+                    </a:solidFill>
+                  </a:tcPr>
+                </a:tc>
+              </a:tr>
+              <a:tr h="347472">
+                <a:tc>
+                  <a:txBody>
+                    <a:bodyPr/>
+                    <a:lstStyle/>
+                    <a:p>
+                      <a:pPr indent="0" marL="0">
+                        <a:buNone/>
+                      </a:pPr>
+                      <a:r>
+                        <a:rPr lang="en-US" sz="1050" dirty="0">
+                          <a:solidFill>
+                            <a:srgbClr val="000000"/>
+                          </a:solidFill>
+                          <a:latin typeface="Malgun Gothic" pitchFamily="34" charset="0"/>
+                          <a:ea typeface="Malgun Gothic" pitchFamily="34" charset="-122"/>
+                          <a:cs typeface="Malgun Gothic" pitchFamily="34" charset="-120"/>
+                        </a:rPr>
+                        <a:t>Safety 보상 실제 발동율</a:t>
+                      </a:r>
+                      <a:endParaRPr lang="en-US" sz="1050" dirty="0">
+                        <a:latin typeface="Malgun Gothic" charset="0"/>
+                        <a:ea typeface="Malgun Gothic" charset="0"/>
+                        <a:cs typeface="Malgun Gothic" charset="0"/>
+                      </a:endParaRPr>
+                    </a:p>
+                  </a:txBody>
+                  <a:tcPr marL="91440" marR="91440" marT="45720" marB="45720">
+                    <a:lnL w="12700" cap="flat" cmpd="sng" algn="ctr">
+                      <a:solidFill>
+                        <a:srgbClr val="DDDDDD"/>
+                      </a:solidFill>
+                      <a:prstDash val="solid"/>
+                      <a:round/>
+                      <a:headEnd type="none" w="med" len="med"/>
+                      <a:tailEnd type="none" w="med" len="med"/>
+                    </a:lnL>
+                    <a:lnR w="12700" cap="flat" cmpd="sng" algn="ctr">
+                      <a:solidFill>
+                        <a:srgbClr val="DDDDDD"/>
+                      </a:solidFill>
+                      <a:prstDash val="solid"/>
+                      <a:round/>
+                      <a:headEnd type="none" w="med" len="med"/>
+                      <a:tailEnd type="none" w="med" len="med"/>
+                    </a:lnR>
+                    <a:lnT w="12700" cap="flat" cmpd="sng" algn="ctr">
+                      <a:solidFill>
+                        <a:srgbClr val="DDDDDD"/>
+                      </a:solidFill>
+                      <a:prstDash val="solid"/>
+                      <a:round/>
+                      <a:headEnd type="none" w="med" len="med"/>
+                      <a:tailEnd type="none" w="med" len="med"/>
+                    </a:lnT>
+                    <a:lnB w="12700" cap="flat" cmpd="sng" algn="ctr">
+                      <a:solidFill>
+                        <a:srgbClr val="DDDDDD"/>
+                      </a:solidFill>
+                      <a:prstDash val="solid"/>
+                      <a:round/>
+                      <a:headEnd type="none" w="med" len="med"/>
+                      <a:tailEnd type="none" w="med" len="med"/>
+                    </a:lnB>
+                    <a:solidFill>
+                      <a:srgbClr val="F5F5F5"/>
+                    </a:solidFill>
+                  </a:tcPr>
+                </a:tc>
+                <a:tc>
+                  <a:txBody>
+                    <a:bodyPr/>
+                    <a:lstStyle/>
+                    <a:p>
+                      <a:pPr indent="0" marL="0">
+                        <a:buNone/>
+                      </a:pPr>
+                      <a:r>
+                        <a:rPr lang="en-US" sz="1050" dirty="0">
+                          <a:solidFill>
+                            <a:srgbClr val="000000"/>
+                          </a:solidFill>
+                          <a:latin typeface="Malgun Gothic" pitchFamily="34" charset="0"/>
+                          <a:ea typeface="Malgun Gothic" pitchFamily="34" charset="-122"/>
+                          <a:cs typeface="Malgun Gothic" pitchFamily="34" charset="-120"/>
+                        </a:rPr>
+                        <a:t>에피소드의 ~0% — 사실상 Proposed ≈ Baseline (reward 차이 미미)</a:t>
+                      </a:r>
+                      <a:endParaRPr lang="en-US" sz="1050" dirty="0">
+                        <a:latin typeface="Malgun Gothic" charset="0"/>
+                        <a:ea typeface="Malgun Gothic" charset="0"/>
+                        <a:cs typeface="Malgun Gothic" charset="0"/>
+                      </a:endParaRPr>
+                    </a:p>
+                  </a:txBody>
+                  <a:tcPr marL="91440" marR="91440" marT="45720" marB="45720">
+                    <a:lnL w="12700" cap="flat" cmpd="sng" algn="ctr">
+                      <a:solidFill>
+                        <a:srgbClr val="DDDDDD"/>
+                      </a:solidFill>
+                      <a:prstDash val="solid"/>
+                      <a:round/>
+                      <a:headEnd type="none" w="med" len="med"/>
+                      <a:tailEnd type="none" w="med" len="med"/>
+                    </a:lnL>
+                    <a:lnR w="12700" cap="flat" cmpd="sng" algn="ctr">
+                      <a:solidFill>
+                        <a:srgbClr val="DDDDDD"/>
+                      </a:solidFill>
+                      <a:prstDash val="solid"/>
+                      <a:round/>
+                      <a:headEnd type="none" w="med" len="med"/>
+                      <a:tailEnd type="none" w="med" len="med"/>
+                    </a:lnR>
+                    <a:lnT w="12700" cap="flat" cmpd="sng" algn="ctr">
+                      <a:solidFill>
+                        <a:srgbClr val="DDDDDD"/>
+                      </a:solidFill>
+                      <a:prstDash val="solid"/>
+                      <a:round/>
+                      <a:headEnd type="none" w="med" len="med"/>
+                      <a:tailEnd type="none" w="med" len="med"/>
+                    </a:lnT>
+                    <a:lnB w="12700" cap="flat" cmpd="sng" algn="ctr">
+                      <a:solidFill>
+                        <a:srgbClr val="DDDDDD"/>
+                      </a:solidFill>
+                      <a:prstDash val="solid"/>
+                      <a:round/>
+                      <a:headEnd type="none" w="med" len="med"/>
+                      <a:tailEnd type="none" w="med" len="med"/>
+                    </a:lnB>
+                    <a:solidFill>
+                      <a:srgbClr val="F5F5F5"/>
+                    </a:solidFill>
+                  </a:tcPr>
+                </a:tc>
+              </a:tr>
+              <a:tr h="292608">
+                <a:tc>
+                  <a:txBody>
+                    <a:bodyPr/>
+                    <a:lstStyle/>
+                    <a:p>
+                      <a:pPr indent="0" marL="0">
+                        <a:buNone/>
+                      </a:pPr>
+                      <a:r>
+                        <a:rPr lang="en-US" sz="1050" dirty="0">
+                          <a:solidFill>
+                            <a:srgbClr val="000000"/>
+                          </a:solidFill>
+                          <a:latin typeface="Malgun Gothic" pitchFamily="34" charset="0"/>
+                          <a:ea typeface="Malgun Gothic" pitchFamily="34" charset="-122"/>
+                          <a:cs typeface="Malgun Gothic" pitchFamily="34" charset="-120"/>
+                        </a:rPr>
+                        <a:t>Baseline 평균 보상 (말기)</a:t>
+                      </a:r>
+                      <a:endParaRPr lang="en-US" sz="1050" dirty="0">
+                        <a:latin typeface="Malgun Gothic" charset="0"/>
+                        <a:ea typeface="Malgun Gothic" charset="0"/>
+                        <a:cs typeface="Malgun Gothic" charset="0"/>
+                      </a:endParaRPr>
+                    </a:p>
+                  </a:txBody>
+                  <a:tcPr marL="91440" marR="91440" marT="45720" marB="45720">
+                    <a:lnL w="12700" cap="flat" cmpd="sng" algn="ctr">
+                      <a:solidFill>
+                        <a:srgbClr val="DDDDDD"/>
+                      </a:solidFill>
+                      <a:prstDash val="solid"/>
+                      <a:round/>
+                      <a:headEnd type="none" w="med" len="med"/>
+                      <a:tailEnd type="none" w="med" len="med"/>
+                    </a:lnL>
+                    <a:lnR w="12700" cap="flat" cmpd="sng" algn="ctr">
+                      <a:solidFill>
+                        <a:srgbClr val="DDDDDD"/>
+                      </a:solidFill>
+                      <a:prstDash val="solid"/>
+                      <a:round/>
+                      <a:headEnd type="none" w="med" len="med"/>
+                      <a:tailEnd type="none" w="med" len="med"/>
+                    </a:lnR>
+                    <a:lnT w="12700" cap="flat" cmpd="sng" algn="ctr">
+                      <a:solidFill>
+                        <a:srgbClr val="DDDDDD"/>
+                      </a:solidFill>
+                      <a:prstDash val="solid"/>
+                      <a:round/>
+                      <a:headEnd type="none" w="med" len="med"/>
+                      <a:tailEnd type="none" w="med" len="med"/>
+                    </a:lnT>
+                    <a:lnB w="12700" cap="flat" cmpd="sng" algn="ctr">
+                      <a:solidFill>
+                        <a:srgbClr val="DDDDDD"/>
+                      </a:solidFill>
+                      <a:prstDash val="solid"/>
+                      <a:round/>
+                      <a:headEnd type="none" w="med" len="med"/>
+                      <a:tailEnd type="none" w="med" len="med"/>
+                    </a:lnB>
+                    <a:solidFill>
+                      <a:srgbClr val="F5F5F5"/>
+                    </a:solidFill>
+                  </a:tcPr>
+                </a:tc>
+                <a:tc>
+                  <a:txBody>
+                    <a:bodyPr/>
+                    <a:lstStyle/>
+                    <a:p>
+                      <a:pPr indent="0" marL="0">
+                        <a:buNone/>
+                      </a:pPr>
+                      <a:r>
+                        <a:rPr lang="en-US" sz="1050" dirty="0">
+                          <a:solidFill>
+                            <a:srgbClr val="000000"/>
+                          </a:solidFill>
+                          <a:latin typeface="Malgun Gothic" pitchFamily="34" charset="0"/>
+                          <a:ea typeface="Malgun Gothic" pitchFamily="34" charset="-122"/>
+                          <a:cs typeface="Malgun Gothic" pitchFamily="34" charset="-120"/>
+                        </a:rPr>
+                        <a:t>-70.4</a:t>
+                      </a:r>
+                      <a:endParaRPr lang="en-US" sz="1050" dirty="0">
+                        <a:latin typeface="Malgun Gothic" charset="0"/>
+                        <a:ea typeface="Malgun Gothic" charset="0"/>
+                        <a:cs typeface="Malgun Gothic" charset="0"/>
+                      </a:endParaRPr>
+                    </a:p>
+                  </a:txBody>
+                  <a:tcPr marL="91440" marR="91440" marT="45720" marB="45720">
+                    <a:lnL w="12700" cap="flat" cmpd="sng" algn="ctr">
+                      <a:solidFill>
+                        <a:srgbClr val="DDDDDD"/>
+                      </a:solidFill>
+                      <a:prstDash val="solid"/>
+                      <a:round/>
+                      <a:headEnd type="none" w="med" len="med"/>
+                      <a:tailEnd type="none" w="med" len="med"/>
+                    </a:lnL>
+                    <a:lnR w="12700" cap="flat" cmpd="sng" algn="ctr">
+                      <a:solidFill>
+                        <a:srgbClr val="DDDDDD"/>
+                      </a:solidFill>
+                      <a:prstDash val="solid"/>
+                      <a:round/>
+                      <a:headEnd type="none" w="med" len="med"/>
+                      <a:tailEnd type="none" w="med" len="med"/>
+                    </a:lnR>
+                    <a:lnT w="12700" cap="flat" cmpd="sng" algn="ctr">
+                      <a:solidFill>
+                        <a:srgbClr val="DDDDDD"/>
+                      </a:solidFill>
+                      <a:prstDash val="solid"/>
+                      <a:round/>
+                      <a:headEnd type="none" w="med" len="med"/>
+                      <a:tailEnd type="none" w="med" len="med"/>
+                    </a:lnT>
+                    <a:lnB w="12700" cap="flat" cmpd="sng" algn="ctr">
+                      <a:solidFill>
+                        <a:srgbClr val="DDDDDD"/>
+                      </a:solidFill>
+                      <a:prstDash val="solid"/>
+                      <a:round/>
+                      <a:headEnd type="none" w="med" len="med"/>
+                      <a:tailEnd type="none" w="med" len="med"/>
+                    </a:lnB>
+                    <a:solidFill>
+                      <a:srgbClr val="F5F5F5"/>
+                    </a:solidFill>
+                  </a:tcPr>
+                </a:tc>
+              </a:tr>
+              <a:tr h="292608">
+                <a:tc>
+                  <a:txBody>
+                    <a:bodyPr/>
+                    <a:lstStyle/>
+                    <a:p>
+                      <a:pPr indent="0" marL="0">
+                        <a:buNone/>
+                      </a:pPr>
+                      <a:r>
+                        <a:rPr lang="en-US" sz="1050" dirty="0">
+                          <a:solidFill>
+                            <a:srgbClr val="000000"/>
+                          </a:solidFill>
+                          <a:latin typeface="Malgun Gothic" pitchFamily="34" charset="0"/>
+                          <a:ea typeface="Malgun Gothic" pitchFamily="34" charset="-122"/>
+                          <a:cs typeface="Malgun Gothic" pitchFamily="34" charset="-120"/>
+                        </a:rPr>
+                        <a:t>Proposed 평균 보상 (말기)</a:t>
+                      </a:r>
+                      <a:endParaRPr lang="en-US" sz="1050" dirty="0">
+                        <a:latin typeface="Malgun Gothic" charset="0"/>
+                        <a:ea typeface="Malgun Gothic" charset="0"/>
+                        <a:cs typeface="Malgun Gothic" charset="0"/>
+                      </a:endParaRPr>
+                    </a:p>
+                  </a:txBody>
+                  <a:tcPr marL="91440" marR="91440" marT="45720" marB="45720">
+                    <a:lnL w="12700" cap="flat" cmpd="sng" algn="ctr">
+                      <a:solidFill>
+                        <a:srgbClr val="DDDDDD"/>
+                      </a:solidFill>
+                      <a:prstDash val="solid"/>
+                      <a:round/>
+                      <a:headEnd type="none" w="med" len="med"/>
+                      <a:tailEnd type="none" w="med" len="med"/>
+                    </a:lnL>
+                    <a:lnR w="12700" cap="flat" cmpd="sng" algn="ctr">
+                      <a:solidFill>
+                        <a:srgbClr val="DDDDDD"/>
+                      </a:solidFill>
+                      <a:prstDash val="solid"/>
+                      <a:round/>
+                      <a:headEnd type="none" w="med" len="med"/>
+                      <a:tailEnd type="none" w="med" len="med"/>
+                    </a:lnR>
+                    <a:lnT w="12700" cap="flat" cmpd="sng" algn="ctr">
+                      <a:solidFill>
+                        <a:srgbClr val="DDDDDD"/>
+                      </a:solidFill>
+                      <a:prstDash val="solid"/>
+                      <a:round/>
+                      <a:headEnd type="none" w="med" len="med"/>
+                      <a:tailEnd type="none" w="med" len="med"/>
+                    </a:lnT>
+                    <a:lnB w="12700" cap="flat" cmpd="sng" algn="ctr">
+                      <a:solidFill>
+                        <a:srgbClr val="DDDDDD"/>
+                      </a:solidFill>
+                      <a:prstDash val="solid"/>
+                      <a:round/>
+                      <a:headEnd type="none" w="med" len="med"/>
+                      <a:tailEnd type="none" w="med" len="med"/>
+                    </a:lnB>
+                    <a:solidFill>
+                      <a:srgbClr val="F5F5F5"/>
+                    </a:solidFill>
+                  </a:tcPr>
+                </a:tc>
+                <a:tc>
+                  <a:txBody>
+                    <a:bodyPr/>
+                    <a:lstStyle/>
+                    <a:p>
+                      <a:pPr indent="0" marL="0">
+                        <a:buNone/>
+                      </a:pPr>
+                      <a:r>
+                        <a:rPr lang="en-US" sz="1050" dirty="0">
+                          <a:solidFill>
+                            <a:srgbClr val="000000"/>
+                          </a:solidFill>
+                          <a:latin typeface="Malgun Gothic" pitchFamily="34" charset="0"/>
+                          <a:ea typeface="Malgun Gothic" pitchFamily="34" charset="-122"/>
+                          <a:cs typeface="Malgun Gothic" pitchFamily="34" charset="-120"/>
+                        </a:rPr>
+                        <a:t>-23.1  (차이는 있으나 방전 횟수 개선 불충분)</a:t>
+                      </a:r>
+                      <a:endParaRPr lang="en-US" sz="1050" dirty="0">
+                        <a:latin typeface="Malgun Gothic" charset="0"/>
+                        <a:ea typeface="Malgun Gothic" charset="0"/>
+                        <a:cs typeface="Malgun Gothic" charset="0"/>
+                      </a:endParaRPr>
+                    </a:p>
+                  </a:txBody>
+                  <a:tcPr marL="91440" marR="91440" marT="45720" marB="45720">
+                    <a:lnL w="12700" cap="flat" cmpd="sng" algn="ctr">
+                      <a:solidFill>
+                        <a:srgbClr val="DDDDDD"/>
+                      </a:solidFill>
+                      <a:prstDash val="solid"/>
+                      <a:round/>
+                      <a:headEnd type="none" w="med" len="med"/>
+                      <a:tailEnd type="none" w="med" len="med"/>
+                    </a:lnL>
+                    <a:lnR w="12700" cap="flat" cmpd="sng" algn="ctr">
+                      <a:solidFill>
+                        <a:srgbClr val="DDDDDD"/>
+                      </a:solidFill>
+                      <a:prstDash val="solid"/>
+                      <a:round/>
+                      <a:headEnd type="none" w="med" len="med"/>
+                      <a:tailEnd type="none" w="med" len="med"/>
+                    </a:lnR>
+                    <a:lnT w="12700" cap="flat" cmpd="sng" algn="ctr">
+                      <a:solidFill>
+                        <a:srgbClr val="DDDDDD"/>
+                      </a:solidFill>
+                      <a:prstDash val="solid"/>
+                      <a:round/>
+                      <a:headEnd type="none" w="med" len="med"/>
+                      <a:tailEnd type="none" w="med" len="med"/>
+                    </a:lnT>
+                    <a:lnB w="12700" cap="flat" cmpd="sng" algn="ctr">
+                      <a:solidFill>
+                        <a:srgbClr val="DDDDDD"/>
+                      </a:solidFill>
+                      <a:prstDash val="solid"/>
+                      <a:round/>
+                      <a:headEnd type="none" w="med" len="med"/>
+                      <a:tailEnd type="none" w="med" len="med"/>
+                    </a:lnB>
+                    <a:solidFill>
+                      <a:srgbClr val="F5F5F5"/>
+                    </a:solidFill>
+                  </a:tcPr>
+                </a:tc>
+              </a:tr>
+            </a:tbl>
+          </a:graphicData>
+        </a:graphic>
+      </p:graphicFrame>
+      <p:sp>
+        <p:nvSpPr>
+          <p:cNvPr id="8" name="Shape 5"/>
+          <p:cNvSpPr/>
+          <p:nvPr/>
+        </p:nvSpPr>
+        <p:spPr>
+          <a:xfrm>
+            <a:off x="182880" y="2926080"/>
+            <a:ext cx="8778240" cy="320040"/>
+          </a:xfrm>
+          <a:prstGeom prst="rect">
+            <a:avLst/>
+          </a:prstGeom>
+          <a:solidFill>
+            <a:srgbClr val="FDECEA"/>
+          </a:solidFill>
+          <a:ln w="12700">
+            <a:solidFill>
+              <a:srgbClr val="CC0000"/>
+            </a:solidFill>
+            <a:prstDash val="solid"/>
+          </a:ln>
+        </p:spPr>
+      </p:sp>
+      <p:sp>
+        <p:nvSpPr>
+          <p:cNvPr id="9" name="Text 6"/>
+          <p:cNvSpPr/>
+          <p:nvPr/>
+        </p:nvSpPr>
+        <p:spPr>
+          <a:xfrm>
+            <a:off x="182880" y="2944368"/>
+            <a:ext cx="8778240" cy="283464"/>
+          </a:xfrm>
+          <a:prstGeom prst="rect">
+            <a:avLst/>
+          </a:prstGeom>
+          <a:noFill/>
+          <a:ln/>
+        </p:spPr>
+        <p:txBody>
+          <a:bodyPr wrap="square" rtlCol="0" anchor="ctr"/>
+          <a:lstStyle/>
+          <a:p>
+            <a:pPr indent="0" marL="0">
+              <a:buNone/>
+            </a:pPr>
+            <a:r>
+              <a:rPr lang="en-US" sz="1100" b="1" dirty="0">
+                <a:solidFill>
+                  <a:srgbClr val="CC0000"/>
+                </a:solidFill>
+                <a:latin typeface="Malgun Gothic" pitchFamily="34" charset="0"/>
+                <a:ea typeface="Malgun Gothic" pitchFamily="34" charset="-122"/>
+                <a:cs typeface="Malgun Gothic" pitchFamily="34" charset="-120"/>
+              </a:rPr>
+              <a:t>원인 ② Step 3 — R_CHARGE_WASTE(-10)가 학습 초기 충전소 회피 행동을 역유발</a:t>
+            </a:r>
+            <a:endParaRPr lang="en-US" sz="1100" dirty="0"/>
+          </a:p>
+        </p:txBody>
+      </p:sp>
+      <p:graphicFrame>
+        <p:nvGraphicFramePr>
+          <p:cNvPr id="25" name="Table 1"/>
+          <p:cNvGraphicFramePr>
+            <a:graphicFrameLocks noGrp="1"/>
+          </p:cNvGraphicFramePr>
+          <p:nvPr>
+            <p:extLst>
+              <p:ext uri="{D42A27DB-BD31-4B8C-83A1-F6EECF244321}">
+                <p14:modId xmlns:p14="http://schemas.microsoft.com/office/powerpoint/2010/main" val="1579011935"/>
+              </p:ext>
+            </p:extLst>
+          </p:nvPr>
+        </p:nvGraphicFramePr>
+        <p:xfrm>
+          <a:off x="182880" y="3282696"/>
+          <a:ext cx="8778240" cy="914400"/>
+        </p:xfrm>
+        <a:graphic>
+          <a:graphicData uri="http://schemas.openxmlformats.org/drawingml/2006/table">
+            <a:tbl>
+              <a:tblPr/>
+              <a:tblGrid>
+                <a:gridCol w="2377440"/>
+                <a:gridCol w="1645920"/>
+                <a:gridCol w="1645920"/>
+                <a:gridCol w="3108960"/>
+              </a:tblGrid>
+              <a:tr h="301752">
+                <a:tc>
+                  <a:txBody>
+                    <a:bodyPr/>
+                    <a:lstStyle/>
+                    <a:p>
+                      <a:pPr indent="0" marL="0">
+                        <a:buNone/>
+                      </a:pPr>
+                      <a:r>
+                        <a:rPr lang="en-US" sz="1050" b="1" dirty="0">
+                          <a:solidFill>
+                            <a:srgbClr val="FFFFFF"/>
+                          </a:solidFill>
+                          <a:latin typeface="Malgun Gothic" pitchFamily="34" charset="0"/>
+                          <a:ea typeface="Malgun Gothic" pitchFamily="34" charset="-122"/>
+                          <a:cs typeface="Malgun Gothic" pitchFamily="34" charset="-120"/>
+                        </a:rPr>
+                        <a:t>구간 (ep)</a:t>
+                      </a:r>
+                      <a:endParaRPr lang="en-US" sz="1050" dirty="0">
+                        <a:latin typeface="Malgun Gothic" charset="0"/>
+                        <a:ea typeface="Malgun Gothic" charset="0"/>
+                        <a:cs typeface="Malgun Gothic" charset="0"/>
+                      </a:endParaRPr>
+                    </a:p>
+                  </a:txBody>
+                  <a:tcPr marL="91440" marR="91440" marT="45720" marB="45720">
+                    <a:lnL w="12700" cap="flat" cmpd="sng" algn="ctr">
+                      <a:solidFill>
+                        <a:srgbClr val="DDDDDD"/>
+                      </a:solidFill>
+                      <a:prstDash val="solid"/>
+                      <a:round/>
+                      <a:headEnd type="none" w="med" len="med"/>
+                      <a:tailEnd type="none" w="med" len="med"/>
+                    </a:lnL>
+                    <a:lnR w="12700" cap="flat" cmpd="sng" algn="ctr">
+                      <a:solidFill>
+                        <a:srgbClr val="DDDDDD"/>
+                      </a:solidFill>
+                      <a:prstDash val="solid"/>
+                      <a:round/>
+                      <a:headEnd type="none" w="med" len="med"/>
+                      <a:tailEnd type="none" w="med" len="med"/>
+                    </a:lnR>
+                    <a:lnT w="12700" cap="flat" cmpd="sng" algn="ctr">
+                      <a:solidFill>
+                        <a:srgbClr val="DDDDDD"/>
+                      </a:solidFill>
+                      <a:prstDash val="solid"/>
+                      <a:round/>
+                      <a:headEnd type="none" w="med" len="med"/>
+                      <a:tailEnd type="none" w="med" len="med"/>
+                    </a:lnT>
+                    <a:lnB w="12700" cap="flat" cmpd="sng" algn="ctr">
+                      <a:solidFill>
+                        <a:srgbClr val="DDDDDD"/>
+                      </a:solidFill>
+                      <a:prstDash val="solid"/>
+                      <a:round/>
+                      <a:headEnd type="none" w="med" len="med"/>
+                      <a:tailEnd type="none" w="med" len="med"/>
+                    </a:lnB>
+                    <a:solidFill>
+                      <a:srgbClr val="1A1A1A"/>
+                    </a:solidFill>
+                  </a:tcPr>
+                </a:tc>
+                <a:tc>
+                  <a:txBody>
+                    <a:bodyPr/>
+                    <a:lstStyle/>
+                    <a:p>
+                      <a:pPr indent="0" marL="0">
+                        <a:buNone/>
+                      </a:pPr>
+                      <a:r>
+                        <a:rPr lang="en-US" sz="1050" b="1" dirty="0">
+                          <a:solidFill>
+                            <a:srgbClr val="FFFFFF"/>
+                          </a:solidFill>
+                          <a:latin typeface="Malgun Gothic" pitchFamily="34" charset="0"/>
+                          <a:ea typeface="Malgun Gothic" pitchFamily="34" charset="-122"/>
+                          <a:cs typeface="Malgun Gothic" pitchFamily="34" charset="-120"/>
+                        </a:rPr>
+                        <a:t>Baseline 방전 횟수</a:t>
+                      </a:r>
+                      <a:endParaRPr lang="en-US" sz="1050" dirty="0">
+                        <a:latin typeface="Malgun Gothic" charset="0"/>
+                        <a:ea typeface="Malgun Gothic" charset="0"/>
+                        <a:cs typeface="Malgun Gothic" charset="0"/>
+                      </a:endParaRPr>
+                    </a:p>
+                  </a:txBody>
+                  <a:tcPr marL="91440" marR="91440" marT="45720" marB="45720">
+                    <a:lnL w="12700" cap="flat" cmpd="sng" algn="ctr">
+                      <a:solidFill>
+                        <a:srgbClr val="DDDDDD"/>
+                      </a:solidFill>
+                      <a:prstDash val="solid"/>
+                      <a:round/>
+                      <a:headEnd type="none" w="med" len="med"/>
+                      <a:tailEnd type="none" w="med" len="med"/>
+                    </a:lnL>
+                    <a:lnR w="12700" cap="flat" cmpd="sng" algn="ctr">
+                      <a:solidFill>
+                        <a:srgbClr val="DDDDDD"/>
+                      </a:solidFill>
+                      <a:prstDash val="solid"/>
+                      <a:round/>
+                      <a:headEnd type="none" w="med" len="med"/>
+                      <a:tailEnd type="none" w="med" len="med"/>
+                    </a:lnR>
+                    <a:lnT w="12700" cap="flat" cmpd="sng" algn="ctr">
+                      <a:solidFill>
+                        <a:srgbClr val="DDDDDD"/>
+                      </a:solidFill>
+                      <a:prstDash val="solid"/>
+                      <a:round/>
+                      <a:headEnd type="none" w="med" len="med"/>
+                      <a:tailEnd type="none" w="med" len="med"/>
+                    </a:lnT>
+                    <a:lnB w="12700" cap="flat" cmpd="sng" algn="ctr">
+                      <a:solidFill>
+                        <a:srgbClr val="DDDDDD"/>
+                      </a:solidFill>
+                      <a:prstDash val="solid"/>
+                      <a:round/>
+                      <a:headEnd type="none" w="med" len="med"/>
+                      <a:tailEnd type="none" w="med" len="med"/>
+                    </a:lnB>
+                    <a:solidFill>
+                      <a:srgbClr val="CC3300"/>
+                    </a:solidFill>
+                  </a:tcPr>
+                </a:tc>
+                <a:tc>
+                  <a:txBody>
+                    <a:bodyPr/>
+                    <a:lstStyle/>
+                    <a:p>
+                      <a:pPr indent="0" marL="0">
+                        <a:buNone/>
+                      </a:pPr>
+                      <a:r>
+                        <a:rPr lang="en-US" sz="1050" b="1" dirty="0">
+                          <a:solidFill>
+                            <a:srgbClr val="FFFFFF"/>
+                          </a:solidFill>
+                          <a:latin typeface="Malgun Gothic" pitchFamily="34" charset="0"/>
+                          <a:ea typeface="Malgun Gothic" pitchFamily="34" charset="-122"/>
+                          <a:cs typeface="Malgun Gothic" pitchFamily="34" charset="-120"/>
+                        </a:rPr>
+                        <a:t>Proposed 방전 횟수</a:t>
+                      </a:r>
+                      <a:endParaRPr lang="en-US" sz="1050" dirty="0">
+                        <a:latin typeface="Malgun Gothic" charset="0"/>
+                        <a:ea typeface="Malgun Gothic" charset="0"/>
+                        <a:cs typeface="Malgun Gothic" charset="0"/>
+                      </a:endParaRPr>
+                    </a:p>
+                  </a:txBody>
+                  <a:tcPr marL="91440" marR="91440" marT="45720" marB="45720">
+                    <a:lnL w="12700" cap="flat" cmpd="sng" algn="ctr">
+                      <a:solidFill>
+                        <a:srgbClr val="DDDDDD"/>
+                      </a:solidFill>
+                      <a:prstDash val="solid"/>
+                      <a:round/>
+                      <a:headEnd type="none" w="med" len="med"/>
+                      <a:tailEnd type="none" w="med" len="med"/>
+                    </a:lnL>
+                    <a:lnR w="12700" cap="flat" cmpd="sng" algn="ctr">
+                      <a:solidFill>
+                        <a:srgbClr val="DDDDDD"/>
+                      </a:solidFill>
+                      <a:prstDash val="solid"/>
+                      <a:round/>
+                      <a:headEnd type="none" w="med" len="med"/>
+                      <a:tailEnd type="none" w="med" len="med"/>
+                    </a:lnR>
+                    <a:lnT w="12700" cap="flat" cmpd="sng" algn="ctr">
+                      <a:solidFill>
+                        <a:srgbClr val="DDDDDD"/>
+                      </a:solidFill>
+                      <a:prstDash val="solid"/>
+                      <a:round/>
+                      <a:headEnd type="none" w="med" len="med"/>
+                      <a:tailEnd type="none" w="med" len="med"/>
+                    </a:lnT>
+                    <a:lnB w="12700" cap="flat" cmpd="sng" algn="ctr">
+                      <a:solidFill>
+                        <a:srgbClr val="DDDDDD"/>
+                      </a:solidFill>
+                      <a:prstDash val="solid"/>
+                      <a:round/>
+                      <a:headEnd type="none" w="med" len="med"/>
+                      <a:tailEnd type="none" w="med" len="med"/>
+                    </a:lnB>
+                    <a:solidFill>
+                      <a:srgbClr val="005BAC"/>
+                    </a:solidFill>
+                  </a:tcPr>
+                </a:tc>
+                <a:tc>
+                  <a:txBody>
+                    <a:bodyPr/>
+                    <a:lstStyle/>
+                    <a:p>
+                      <a:pPr indent="0" marL="0">
+                        <a:buNone/>
+                      </a:pPr>
+                      <a:r>
+                        <a:rPr lang="en-US" sz="1050" b="1" dirty="0">
+                          <a:solidFill>
+                            <a:srgbClr val="FFFFFF"/>
+                          </a:solidFill>
+                          <a:latin typeface="Malgun Gothic" pitchFamily="34" charset="0"/>
+                          <a:ea typeface="Malgun Gothic" pitchFamily="34" charset="-122"/>
+                          <a:cs typeface="Malgun Gothic" pitchFamily="34" charset="-120"/>
+                        </a:rPr>
+                        <a:t>판정 / 원인</a:t>
+                      </a:r>
+                      <a:endParaRPr lang="en-US" sz="1050" dirty="0">
+                        <a:latin typeface="Malgun Gothic" charset="0"/>
+                        <a:ea typeface="Malgun Gothic" charset="0"/>
+                        <a:cs typeface="Malgun Gothic" charset="0"/>
+                      </a:endParaRPr>
+                    </a:p>
+                  </a:txBody>
+                  <a:tcPr marL="91440" marR="91440" marT="45720" marB="45720">
+                    <a:lnL w="12700" cap="flat" cmpd="sng" algn="ctr">
+                      <a:solidFill>
+                        <a:srgbClr val="DDDDDD"/>
+                      </a:solidFill>
+                      <a:prstDash val="solid"/>
+                      <a:round/>
+                      <a:headEnd type="none" w="med" len="med"/>
+                      <a:tailEnd type="none" w="med" len="med"/>
+                    </a:lnL>
+                    <a:lnR w="12700" cap="flat" cmpd="sng" algn="ctr">
+                      <a:solidFill>
+                        <a:srgbClr val="DDDDDD"/>
+                      </a:solidFill>
+                      <a:prstDash val="solid"/>
+                      <a:round/>
+                      <a:headEnd type="none" w="med" len="med"/>
+                      <a:tailEnd type="none" w="med" len="med"/>
+                    </a:lnR>
+                    <a:lnT w="12700" cap="flat" cmpd="sng" algn="ctr">
+                      <a:solidFill>
+                        <a:srgbClr val="DDDDDD"/>
+                      </a:solidFill>
+                      <a:prstDash val="solid"/>
+                      <a:round/>
+                      <a:headEnd type="none" w="med" len="med"/>
+                      <a:tailEnd type="none" w="med" len="med"/>
+                    </a:lnT>
+                    <a:lnB w="12700" cap="flat" cmpd="sng" algn="ctr">
+                      <a:solidFill>
+                        <a:srgbClr val="DDDDDD"/>
+                      </a:solidFill>
+                      <a:prstDash val="solid"/>
+                      <a:round/>
+                      <a:headEnd type="none" w="med" len="med"/>
+                      <a:tailEnd type="none" w="med" len="med"/>
+                    </a:lnB>
+                    <a:solidFill>
+                      <a:srgbClr val="1A1A1A"/>
+                    </a:solidFill>
+                  </a:tcPr>
+                </a:tc>
+              </a:tr>
+              <a:tr h="347472">
+                <a:tc>
+                  <a:txBody>
+                    <a:bodyPr/>
+                    <a:lstStyle/>
+                    <a:p>
+                      <a:pPr indent="0" marL="0">
+                        <a:buNone/>
+                      </a:pPr>
+                      <a:r>
+                        <a:rPr lang="en-US" sz="1050" dirty="0">
+                          <a:solidFill>
+                            <a:srgbClr val="000000"/>
+                          </a:solidFill>
+                          <a:latin typeface="Malgun Gothic" pitchFamily="34" charset="0"/>
+                          <a:ea typeface="Malgun Gothic" pitchFamily="34" charset="-122"/>
+                          <a:cs typeface="Malgun Gothic" pitchFamily="34" charset="-120"/>
+                        </a:rPr>
+                        <a:t>ep 1~100 (탐색기)</a:t>
+                      </a:r>
+                      <a:endParaRPr lang="en-US" sz="1050" dirty="0">
+                        <a:latin typeface="Malgun Gothic" charset="0"/>
+                        <a:ea typeface="Malgun Gothic" charset="0"/>
+                        <a:cs typeface="Malgun Gothic" charset="0"/>
+                      </a:endParaRPr>
+                    </a:p>
+                  </a:txBody>
+                  <a:tcPr marL="91440" marR="91440" marT="45720" marB="45720">
+                    <a:lnL w="12700" cap="flat" cmpd="sng" algn="ctr">
+                      <a:solidFill>
+                        <a:srgbClr val="DDDDDD"/>
+                      </a:solidFill>
+                      <a:prstDash val="solid"/>
+                      <a:round/>
+                      <a:headEnd type="none" w="med" len="med"/>
+                      <a:tailEnd type="none" w="med" len="med"/>
+                    </a:lnL>
+                    <a:lnR w="12700" cap="flat" cmpd="sng" algn="ctr">
+                      <a:solidFill>
+                        <a:srgbClr val="DDDDDD"/>
+                      </a:solidFill>
+                      <a:prstDash val="solid"/>
+                      <a:round/>
+                      <a:headEnd type="none" w="med" len="med"/>
+                      <a:tailEnd type="none" w="med" len="med"/>
+                    </a:lnR>
+                    <a:lnT w="12700" cap="flat" cmpd="sng" algn="ctr">
+                      <a:solidFill>
+                        <a:srgbClr val="DDDDDD"/>
+                      </a:solidFill>
+                      <a:prstDash val="solid"/>
+                      <a:round/>
+                      <a:headEnd type="none" w="med" len="med"/>
+                      <a:tailEnd type="none" w="med" len="med"/>
+                    </a:lnT>
+                    <a:lnB w="12700" cap="flat" cmpd="sng" algn="ctr">
+                      <a:solidFill>
+                        <a:srgbClr val="DDDDDD"/>
+                      </a:solidFill>
+                      <a:prstDash val="solid"/>
+                      <a:round/>
+                      <a:headEnd type="none" w="med" len="med"/>
+                      <a:tailEnd type="none" w="med" len="med"/>
+                    </a:lnB>
+                    <a:solidFill>
+                      <a:srgbClr val="F5F5F5"/>
+                    </a:solidFill>
+                  </a:tcPr>
+                </a:tc>
+                <a:tc>
+                  <a:txBody>
+                    <a:bodyPr/>
+                    <a:lstStyle/>
+                    <a:p>
+                      <a:pPr indent="0" marL="0">
+                        <a:buNone/>
+                      </a:pPr>
+                      <a:r>
+                        <a:rPr lang="en-US" sz="1050" dirty="0">
+                          <a:solidFill>
+                            <a:srgbClr val="000000"/>
+                          </a:solidFill>
+                          <a:latin typeface="Malgun Gothic" pitchFamily="34" charset="0"/>
+                          <a:ea typeface="Malgun Gothic" pitchFamily="34" charset="-122"/>
+                          <a:cs typeface="Malgun Gothic" pitchFamily="34" charset="-120"/>
+                        </a:rPr>
+                        <a:t>39.2회</a:t>
+                      </a:r>
+                      <a:endParaRPr lang="en-US" sz="1050" dirty="0">
+                        <a:latin typeface="Malgun Gothic" charset="0"/>
+                        <a:ea typeface="Malgun Gothic" charset="0"/>
+                        <a:cs typeface="Malgun Gothic" charset="0"/>
+                      </a:endParaRPr>
+                    </a:p>
+                  </a:txBody>
+                  <a:tcPr marL="91440" marR="91440" marT="45720" marB="45720">
+                    <a:lnL w="12700" cap="flat" cmpd="sng" algn="ctr">
+                      <a:solidFill>
+                        <a:srgbClr val="DDDDDD"/>
+                      </a:solidFill>
+                      <a:prstDash val="solid"/>
+                      <a:round/>
+                      <a:headEnd type="none" w="med" len="med"/>
+                      <a:tailEnd type="none" w="med" len="med"/>
+                    </a:lnL>
+                    <a:lnR w="12700" cap="flat" cmpd="sng" algn="ctr">
+                      <a:solidFill>
+                        <a:srgbClr val="DDDDDD"/>
+                      </a:solidFill>
+                      <a:prstDash val="solid"/>
+                      <a:round/>
+                      <a:headEnd type="none" w="med" len="med"/>
+                      <a:tailEnd type="none" w="med" len="med"/>
+                    </a:lnR>
+                    <a:lnT w="12700" cap="flat" cmpd="sng" algn="ctr">
+                      <a:solidFill>
+                        <a:srgbClr val="DDDDDD"/>
+                      </a:solidFill>
+                      <a:prstDash val="solid"/>
+                      <a:round/>
+                      <a:headEnd type="none" w="med" len="med"/>
+                      <a:tailEnd type="none" w="med" len="med"/>
+                    </a:lnT>
+                    <a:lnB w="12700" cap="flat" cmpd="sng" algn="ctr">
+                      <a:solidFill>
+                        <a:srgbClr val="DDDDDD"/>
+                      </a:solidFill>
+                      <a:prstDash val="solid"/>
+                      <a:round/>
+                      <a:headEnd type="none" w="med" len="med"/>
+                      <a:tailEnd type="none" w="med" len="med"/>
+                    </a:lnB>
+                    <a:solidFill>
+                      <a:srgbClr val="F5F5F5"/>
+                    </a:solidFill>
+                  </a:tcPr>
+                </a:tc>
+                <a:tc>
+                  <a:txBody>
+                    <a:bodyPr/>
+                    <a:lstStyle/>
+                    <a:p>
+                      <a:pPr indent="0" marL="0">
+                        <a:buNone/>
+                      </a:pPr>
+                      <a:r>
+                        <a:rPr lang="en-US" sz="1050" dirty="0">
+                          <a:solidFill>
+                            <a:srgbClr val="000000"/>
+                          </a:solidFill>
+                          <a:latin typeface="Malgun Gothic" pitchFamily="34" charset="0"/>
+                          <a:ea typeface="Malgun Gothic" pitchFamily="34" charset="-122"/>
+                          <a:cs typeface="Malgun Gothic" pitchFamily="34" charset="-120"/>
+                        </a:rPr>
+                        <a:t>39.4회</a:t>
+                      </a:r>
+                      <a:endParaRPr lang="en-US" sz="1050" dirty="0">
+                        <a:latin typeface="Malgun Gothic" charset="0"/>
+                        <a:ea typeface="Malgun Gothic" charset="0"/>
+                        <a:cs typeface="Malgun Gothic" charset="0"/>
+                      </a:endParaRPr>
+                    </a:p>
+                  </a:txBody>
+                  <a:tcPr marL="91440" marR="91440" marT="45720" marB="45720">
+                    <a:lnL w="12700" cap="flat" cmpd="sng" algn="ctr">
+                      <a:solidFill>
+                        <a:srgbClr val="DDDDDD"/>
+                      </a:solidFill>
+                      <a:prstDash val="solid"/>
+                      <a:round/>
+                      <a:headEnd type="none" w="med" len="med"/>
+                      <a:tailEnd type="none" w="med" len="med"/>
+                    </a:lnL>
+                    <a:lnR w="12700" cap="flat" cmpd="sng" algn="ctr">
+                      <a:solidFill>
+                        <a:srgbClr val="DDDDDD"/>
+                      </a:solidFill>
+                      <a:prstDash val="solid"/>
+                      <a:round/>
+                      <a:headEnd type="none" w="med" len="med"/>
+                      <a:tailEnd type="none" w="med" len="med"/>
+                    </a:lnR>
+                    <a:lnT w="12700" cap="flat" cmpd="sng" algn="ctr">
+                      <a:solidFill>
+                        <a:srgbClr val="DDDDDD"/>
+                      </a:solidFill>
+                      <a:prstDash val="solid"/>
+                      <a:round/>
+                      <a:headEnd type="none" w="med" len="med"/>
+                      <a:tailEnd type="none" w="med" len="med"/>
+                    </a:lnT>
+                    <a:lnB w="12700" cap="flat" cmpd="sng" algn="ctr">
+                      <a:solidFill>
+                        <a:srgbClr val="DDDDDD"/>
+                      </a:solidFill>
+                      <a:prstDash val="solid"/>
+                      <a:round/>
+                      <a:headEnd type="none" w="med" len="med"/>
+                      <a:tailEnd type="none" w="med" len="med"/>
+                    </a:lnB>
+                    <a:solidFill>
+                      <a:srgbClr val="F5F5F5"/>
+                    </a:solidFill>
+                  </a:tcPr>
+                </a:tc>
+                <a:tc>
+                  <a:txBody>
+                    <a:bodyPr/>
+                    <a:lstStyle/>
+                    <a:p>
+                      <a:pPr indent="0" marL="0">
+                        <a:buNone/>
+                      </a:pPr>
+                      <a:r>
+                        <a:rPr lang="en-US" sz="1050" dirty="0">
+                          <a:solidFill>
+                            <a:srgbClr val="000000"/>
+                          </a:solidFill>
+                          <a:latin typeface="Malgun Gothic" pitchFamily="34" charset="0"/>
+                          <a:ea typeface="Malgun Gothic" pitchFamily="34" charset="-122"/>
+                          <a:cs typeface="Malgun Gothic" pitchFamily="34" charset="-120"/>
+                        </a:rPr>
+                        <a:t>≈ 동일 — epsilon ≈ 1.0, 완전 랜덤</a:t>
+                      </a:r>
+                      <a:endParaRPr lang="en-US" sz="1050" dirty="0">
+                        <a:latin typeface="Malgun Gothic" charset="0"/>
+                        <a:ea typeface="Malgun Gothic" charset="0"/>
+                        <a:cs typeface="Malgun Gothic" charset="0"/>
+                      </a:endParaRPr>
+                    </a:p>
+                  </a:txBody>
+                  <a:tcPr marL="91440" marR="91440" marT="45720" marB="45720">
+                    <a:lnL w="12700" cap="flat" cmpd="sng" algn="ctr">
+                      <a:solidFill>
+                        <a:srgbClr val="DDDDDD"/>
+                      </a:solidFill>
+                      <a:prstDash val="solid"/>
+                      <a:round/>
+                      <a:headEnd type="none" w="med" len="med"/>
+                      <a:tailEnd type="none" w="med" len="med"/>
+                    </a:lnL>
+                    <a:lnR w="12700" cap="flat" cmpd="sng" algn="ctr">
+                      <a:solidFill>
+                        <a:srgbClr val="DDDDDD"/>
+                      </a:solidFill>
+                      <a:prstDash val="solid"/>
+                      <a:round/>
+                      <a:headEnd type="none" w="med" len="med"/>
+                      <a:tailEnd type="none" w="med" len="med"/>
+                    </a:lnR>
+                    <a:lnT w="12700" cap="flat" cmpd="sng" algn="ctr">
+                      <a:solidFill>
+                        <a:srgbClr val="DDDDDD"/>
+                      </a:solidFill>
+                      <a:prstDash val="solid"/>
+                      <a:round/>
+                      <a:headEnd type="none" w="med" len="med"/>
+                      <a:tailEnd type="none" w="med" len="med"/>
+                    </a:lnT>
+                    <a:lnB w="12700" cap="flat" cmpd="sng" algn="ctr">
+                      <a:solidFill>
+                        <a:srgbClr val="DDDDDD"/>
+                      </a:solidFill>
+                      <a:prstDash val="solid"/>
+                      <a:round/>
+                      <a:headEnd type="none" w="med" len="med"/>
+                      <a:tailEnd type="none" w="med" len="med"/>
+                    </a:lnB>
+                    <a:solidFill>
+                      <a:srgbClr val="F5F5F5"/>
+                    </a:solidFill>
+                  </a:tcPr>
+                </a:tc>
+              </a:tr>
+              <a:tr h="475488">
+                <a:tc>
+                  <a:txBody>
+                    <a:bodyPr/>
+                    <a:lstStyle/>
+                    <a:p>
+                      <a:pPr indent="0" marL="0">
+                        <a:buNone/>
+                      </a:pPr>
+                      <a:r>
+                        <a:rPr lang="en-US" sz="1050" b="1" dirty="0">
+                          <a:solidFill>
+                            <a:srgbClr val="000000"/>
+                          </a:solidFill>
+                          <a:latin typeface="Malgun Gothic" pitchFamily="34" charset="0"/>
+                          <a:ea typeface="Malgun Gothic" pitchFamily="34" charset="-122"/>
+                          <a:cs typeface="Malgun Gothic" pitchFamily="34" charset="-120"/>
+                        </a:rPr>
+                        <a:t>ep 101~200 (반학습, ε≈0.7)</a:t>
+                      </a:r>
+                      <a:endParaRPr lang="en-US" sz="1050" dirty="0">
+                        <a:latin typeface="Malgun Gothic" charset="0"/>
+                        <a:ea typeface="Malgun Gothic" charset="0"/>
+                        <a:cs typeface="Malgun Gothic" charset="0"/>
+                      </a:endParaRPr>
+                    </a:p>
+                  </a:txBody>
+                  <a:tcPr marL="91440" marR="91440" marT="45720" marB="45720">
+                    <a:lnL w="12700" cap="flat" cmpd="sng" algn="ctr">
+                      <a:solidFill>
+                        <a:srgbClr val="DDDDDD"/>
+                      </a:solidFill>
+                      <a:prstDash val="solid"/>
+                      <a:round/>
+                      <a:headEnd type="none" w="med" len="med"/>
+                      <a:tailEnd type="none" w="med" len="med"/>
+                    </a:lnL>
+                    <a:lnR w="12700" cap="flat" cmpd="sng" algn="ctr">
+                      <a:solidFill>
+                        <a:srgbClr val="DDDDDD"/>
+                      </a:solidFill>
+                      <a:prstDash val="solid"/>
+                      <a:round/>
+                      <a:headEnd type="none" w="med" len="med"/>
+                      <a:tailEnd type="none" w="med" len="med"/>
+                    </a:lnR>
+                    <a:lnT w="12700" cap="flat" cmpd="sng" algn="ctr">
+                      <a:solidFill>
+                        <a:srgbClr val="DDDDDD"/>
+                      </a:solidFill>
+                      <a:prstDash val="solid"/>
+                      <a:round/>
+                      <a:headEnd type="none" w="med" len="med"/>
+                      <a:tailEnd type="none" w="med" len="med"/>
+                    </a:lnT>
+                    <a:lnB w="12700" cap="flat" cmpd="sng" algn="ctr">
+                      <a:solidFill>
+                        <a:srgbClr val="DDDDDD"/>
+                      </a:solidFill>
+                      <a:prstDash val="solid"/>
+                      <a:round/>
+                      <a:headEnd type="none" w="med" len="med"/>
+                      <a:tailEnd type="none" w="med" len="med"/>
+                    </a:lnB>
+                    <a:solidFill>
+                      <a:srgbClr val="F5F5F5"/>
+                    </a:solidFill>
+                  </a:tcPr>
+                </a:tc>
+                <a:tc>
+                  <a:txBody>
+                    <a:bodyPr/>
+                    <a:lstStyle/>
+                    <a:p>
+                      <a:pPr indent="0" marL="0">
+                        <a:buNone/>
+                      </a:pPr>
+                      <a:r>
+                        <a:rPr lang="en-US" sz="1050" dirty="0">
+                          <a:solidFill>
+                            <a:srgbClr val="1E8A47"/>
+                          </a:solidFill>
+                          <a:latin typeface="Malgun Gothic" pitchFamily="34" charset="0"/>
+                          <a:ea typeface="Malgun Gothic" pitchFamily="34" charset="-122"/>
+                          <a:cs typeface="Malgun Gothic" pitchFamily="34" charset="-120"/>
+                        </a:rPr>
+                        <a:t>4.4회</a:t>
+                      </a:r>
+                      <a:endParaRPr lang="en-US" sz="1050" dirty="0">
+                        <a:latin typeface="Malgun Gothic" charset="0"/>
+                        <a:ea typeface="Malgun Gothic" charset="0"/>
+                        <a:cs typeface="Malgun Gothic" charset="0"/>
+                      </a:endParaRPr>
+                    </a:p>
+                  </a:txBody>
+                  <a:tcPr marL="91440" marR="91440" marT="45720" marB="45720">
+                    <a:lnL w="12700" cap="flat" cmpd="sng" algn="ctr">
+                      <a:solidFill>
+                        <a:srgbClr val="DDDDDD"/>
+                      </a:solidFill>
+                      <a:prstDash val="solid"/>
+                      <a:round/>
+                      <a:headEnd type="none" w="med" len="med"/>
+                      <a:tailEnd type="none" w="med" len="med"/>
+                    </a:lnL>
+                    <a:lnR w="12700" cap="flat" cmpd="sng" algn="ctr">
+                      <a:solidFill>
+                        <a:srgbClr val="DDDDDD"/>
+                      </a:solidFill>
+                      <a:prstDash val="solid"/>
+                      <a:round/>
+                      <a:headEnd type="none" w="med" len="med"/>
+                      <a:tailEnd type="none" w="med" len="med"/>
+                    </a:lnR>
+                    <a:lnT w="12700" cap="flat" cmpd="sng" algn="ctr">
+                      <a:solidFill>
+                        <a:srgbClr val="DDDDDD"/>
+                      </a:solidFill>
+                      <a:prstDash val="solid"/>
+                      <a:round/>
+                      <a:headEnd type="none" w="med" len="med"/>
+                      <a:tailEnd type="none" w="med" len="med"/>
+                    </a:lnT>
+                    <a:lnB w="12700" cap="flat" cmpd="sng" algn="ctr">
+                      <a:solidFill>
+                        <a:srgbClr val="DDDDDD"/>
+                      </a:solidFill>
+                      <a:prstDash val="solid"/>
+                      <a:round/>
+                      <a:headEnd type="none" w="med" len="med"/>
+                      <a:tailEnd type="none" w="med" len="med"/>
+                    </a:lnB>
+                    <a:solidFill>
+                      <a:srgbClr val="F5F5F5"/>
+                    </a:solidFill>
+                  </a:tcPr>
+                </a:tc>
+                <a:tc>
+                  <a:txBody>
+                    <a:bodyPr/>
+                    <a:lstStyle/>
+                    <a:p>
+                      <a:pPr indent="0" marL="0">
+                        <a:buNone/>
+                      </a:pPr>
+                      <a:r>
+                        <a:rPr lang="en-US" sz="1050" b="1" dirty="0">
+                          <a:solidFill>
+                            <a:srgbClr val="CC0000"/>
+                          </a:solidFill>
+                          <a:latin typeface="Malgun Gothic" pitchFamily="34" charset="0"/>
+                          <a:ea typeface="Malgun Gothic" pitchFamily="34" charset="-122"/>
+                          <a:cs typeface="Malgun Gothic" pitchFamily="34" charset="-120"/>
+                        </a:rPr>
+                        <a:t>10.6회</a:t>
+                      </a:r>
+                      <a:endParaRPr lang="en-US" sz="1050" dirty="0">
+                        <a:latin typeface="Malgun Gothic" charset="0"/>
+                        <a:ea typeface="Malgun Gothic" charset="0"/>
+                        <a:cs typeface="Malgun Gothic" charset="0"/>
+                      </a:endParaRPr>
+                    </a:p>
+                  </a:txBody>
+                  <a:tcPr marL="91440" marR="91440" marT="45720" marB="45720">
+                    <a:lnL w="12700" cap="flat" cmpd="sng" algn="ctr">
+                      <a:solidFill>
+                        <a:srgbClr val="DDDDDD"/>
+                      </a:solidFill>
+                      <a:prstDash val="solid"/>
+                      <a:round/>
+                      <a:headEnd type="none" w="med" len="med"/>
+                      <a:tailEnd type="none" w="med" len="med"/>
+                    </a:lnL>
+                    <a:lnR w="12700" cap="flat" cmpd="sng" algn="ctr">
+                      <a:solidFill>
+                        <a:srgbClr val="DDDDDD"/>
+                      </a:solidFill>
+                      <a:prstDash val="solid"/>
+                      <a:round/>
+                      <a:headEnd type="none" w="med" len="med"/>
+                      <a:tailEnd type="none" w="med" len="med"/>
+                    </a:lnR>
+                    <a:lnT w="12700" cap="flat" cmpd="sng" algn="ctr">
+                      <a:solidFill>
+                        <a:srgbClr val="DDDDDD"/>
+                      </a:solidFill>
+                      <a:prstDash val="solid"/>
+                      <a:round/>
+                      <a:headEnd type="none" w="med" len="med"/>
+                      <a:tailEnd type="none" w="med" len="med"/>
+                    </a:lnT>
+                    <a:lnB w="12700" cap="flat" cmpd="sng" algn="ctr">
+                      <a:solidFill>
+                        <a:srgbClr val="DDDDDD"/>
+                      </a:solidFill>
+                      <a:prstDash val="solid"/>
+                      <a:round/>
+                      <a:headEnd type="none" w="med" len="med"/>
+                      <a:tailEnd type="none" w="med" len="med"/>
+                    </a:lnB>
+                    <a:solidFill>
+                      <a:srgbClr val="F5F5F5"/>
+                    </a:solidFill>
+                  </a:tcPr>
+                </a:tc>
+                <a:tc>
+                  <a:txBody>
+                    <a:bodyPr/>
+                    <a:lstStyle/>
+                    <a:p>
+                      <a:pPr indent="0" marL="0">
+                        <a:buNone/>
+                      </a:pPr>
+                      <a:r>
+                        <a:rPr lang="en-US" sz="1050" dirty="0">
+                          <a:solidFill>
+                            <a:srgbClr val="000000"/>
+                          </a:solidFill>
+                          <a:latin typeface="Malgun Gothic" pitchFamily="34" charset="0"/>
+                          <a:ea typeface="Malgun Gothic" pitchFamily="34" charset="-122"/>
+                          <a:cs typeface="Malgun Gothic" pitchFamily="34" charset="-120"/>
+                        </a:rPr>
+                        <a:t>Proposed 2.4× 나쁨! — WASTE=-10 먼저 학습 → 충전소 회피 행동 강화</a:t>
+                      </a:r>
+                      <a:endParaRPr lang="en-US" sz="1050" dirty="0">
+                        <a:latin typeface="Malgun Gothic" charset="0"/>
+                        <a:ea typeface="Malgun Gothic" charset="0"/>
+                        <a:cs typeface="Malgun Gothic" charset="0"/>
+                      </a:endParaRPr>
+                    </a:p>
+                  </a:txBody>
+                  <a:tcPr marL="91440" marR="91440" marT="45720" marB="45720">
+                    <a:lnL w="12700" cap="flat" cmpd="sng" algn="ctr">
+                      <a:solidFill>
+                        <a:srgbClr val="DDDDDD"/>
+                      </a:solidFill>
+                      <a:prstDash val="solid"/>
+                      <a:round/>
+                      <a:headEnd type="none" w="med" len="med"/>
+                      <a:tailEnd type="none" w="med" len="med"/>
+                    </a:lnL>
+                    <a:lnR w="12700" cap="flat" cmpd="sng" algn="ctr">
+                      <a:solidFill>
+                        <a:srgbClr val="DDDDDD"/>
+                      </a:solidFill>
+                      <a:prstDash val="solid"/>
+                      <a:round/>
+                      <a:headEnd type="none" w="med" len="med"/>
+                      <a:tailEnd type="none" w="med" len="med"/>
+                    </a:lnR>
+                    <a:lnT w="12700" cap="flat" cmpd="sng" algn="ctr">
+                      <a:solidFill>
+                        <a:srgbClr val="DDDDDD"/>
+                      </a:solidFill>
+                      <a:prstDash val="solid"/>
+                      <a:round/>
+                      <a:headEnd type="none" w="med" len="med"/>
+                      <a:tailEnd type="none" w="med" len="med"/>
+                    </a:lnT>
+                    <a:lnB w="12700" cap="flat" cmpd="sng" algn="ctr">
+                      <a:solidFill>
+                        <a:srgbClr val="DDDDDD"/>
+                      </a:solidFill>
+                      <a:prstDash val="solid"/>
+                      <a:round/>
+                      <a:headEnd type="none" w="med" len="med"/>
+                      <a:tailEnd type="none" w="med" len="med"/>
+                    </a:lnB>
+                    <a:solidFill>
+                      <a:srgbClr val="F5F5F5"/>
+                    </a:solidFill>
+                  </a:tcPr>
+                </a:tc>
+              </a:tr>
+              <a:tr h="347472">
+                <a:tc>
+                  <a:txBody>
+                    <a:bodyPr/>
+                    <a:lstStyle/>
+                    <a:p>
+                      <a:pPr indent="0" marL="0">
+                        <a:buNone/>
+                      </a:pPr>
+                      <a:r>
+                        <a:rPr lang="en-US" sz="1050" dirty="0">
+                          <a:solidFill>
+                            <a:srgbClr val="000000"/>
+                          </a:solidFill>
+                          <a:latin typeface="Malgun Gothic" pitchFamily="34" charset="0"/>
+                          <a:ea typeface="Malgun Gothic" pitchFamily="34" charset="-122"/>
+                          <a:cs typeface="Malgun Gothic" pitchFamily="34" charset="-120"/>
+                        </a:rPr>
+                        <a:t>ep 200~ (수렴 후)</a:t>
+                      </a:r>
+                      <a:endParaRPr lang="en-US" sz="1050" dirty="0">
+                        <a:latin typeface="Malgun Gothic" charset="0"/>
+                        <a:ea typeface="Malgun Gothic" charset="0"/>
+                        <a:cs typeface="Malgun Gothic" charset="0"/>
+                      </a:endParaRPr>
+                    </a:p>
+                  </a:txBody>
+                  <a:tcPr marL="91440" marR="91440" marT="45720" marB="45720">
+                    <a:lnL w="12700" cap="flat" cmpd="sng" algn="ctr">
+                      <a:solidFill>
+                        <a:srgbClr val="DDDDDD"/>
+                      </a:solidFill>
+                      <a:prstDash val="solid"/>
+                      <a:round/>
+                      <a:headEnd type="none" w="med" len="med"/>
+                      <a:tailEnd type="none" w="med" len="med"/>
+                    </a:lnL>
+                    <a:lnR w="12700" cap="flat" cmpd="sng" algn="ctr">
+                      <a:solidFill>
+                        <a:srgbClr val="DDDDDD"/>
+                      </a:solidFill>
+                      <a:prstDash val="solid"/>
+                      <a:round/>
+                      <a:headEnd type="none" w="med" len="med"/>
+                      <a:tailEnd type="none" w="med" len="med"/>
+                    </a:lnR>
+                    <a:lnT w="12700" cap="flat" cmpd="sng" algn="ctr">
+                      <a:solidFill>
+                        <a:srgbClr val="DDDDDD"/>
+                      </a:solidFill>
+                      <a:prstDash val="solid"/>
+                      <a:round/>
+                      <a:headEnd type="none" w="med" len="med"/>
+                      <a:tailEnd type="none" w="med" len="med"/>
+                    </a:lnT>
+                    <a:lnB w="12700" cap="flat" cmpd="sng" algn="ctr">
+                      <a:solidFill>
+                        <a:srgbClr val="DDDDDD"/>
+                      </a:solidFill>
+                      <a:prstDash val="solid"/>
+                      <a:round/>
+                      <a:headEnd type="none" w="med" len="med"/>
+                      <a:tailEnd type="none" w="med" len="med"/>
+                    </a:lnB>
+                    <a:solidFill>
+                      <a:srgbClr val="F5F5F5"/>
+                    </a:solidFill>
+                  </a:tcPr>
+                </a:tc>
+                <a:tc>
+                  <a:txBody>
+                    <a:bodyPr/>
+                    <a:lstStyle/>
+                    <a:p>
+                      <a:pPr indent="0" marL="0">
+                        <a:buNone/>
+                      </a:pPr>
+                      <a:r>
+                        <a:rPr lang="en-US" sz="1050" dirty="0">
+                          <a:solidFill>
+                            <a:srgbClr val="000000"/>
+                          </a:solidFill>
+                          <a:latin typeface="Malgun Gothic" pitchFamily="34" charset="0"/>
+                          <a:ea typeface="Malgun Gothic" pitchFamily="34" charset="-122"/>
+                          <a:cs typeface="Malgun Gothic" pitchFamily="34" charset="-120"/>
+                        </a:rPr>
+                        <a:t>1~2회/100ep</a:t>
+                      </a:r>
+                      <a:endParaRPr lang="en-US" sz="1050" dirty="0">
+                        <a:latin typeface="Malgun Gothic" charset="0"/>
+                        <a:ea typeface="Malgun Gothic" charset="0"/>
+                        <a:cs typeface="Malgun Gothic" charset="0"/>
+                      </a:endParaRPr>
+                    </a:p>
+                  </a:txBody>
+                  <a:tcPr marL="91440" marR="91440" marT="45720" marB="45720">
+                    <a:lnL w="12700" cap="flat" cmpd="sng" algn="ctr">
+                      <a:solidFill>
+                        <a:srgbClr val="DDDDDD"/>
+                      </a:solidFill>
+                      <a:prstDash val="solid"/>
+                      <a:round/>
+                      <a:headEnd type="none" w="med" len="med"/>
+                      <a:tailEnd type="none" w="med" len="med"/>
+                    </a:lnL>
+                    <a:lnR w="12700" cap="flat" cmpd="sng" algn="ctr">
+                      <a:solidFill>
+                        <a:srgbClr val="DDDDDD"/>
+                      </a:solidFill>
+                      <a:prstDash val="solid"/>
+                      <a:round/>
+                      <a:headEnd type="none" w="med" len="med"/>
+                      <a:tailEnd type="none" w="med" len="med"/>
+                    </a:lnR>
+                    <a:lnT w="12700" cap="flat" cmpd="sng" algn="ctr">
+                      <a:solidFill>
+                        <a:srgbClr val="DDDDDD"/>
+                      </a:solidFill>
+                      <a:prstDash val="solid"/>
+                      <a:round/>
+                      <a:headEnd type="none" w="med" len="med"/>
+                      <a:tailEnd type="none" w="med" len="med"/>
+                    </a:lnT>
+                    <a:lnB w="12700" cap="flat" cmpd="sng" algn="ctr">
+                      <a:solidFill>
+                        <a:srgbClr val="DDDDDD"/>
+                      </a:solidFill>
+                      <a:prstDash val="solid"/>
+                      <a:round/>
+                      <a:headEnd type="none" w="med" len="med"/>
+                      <a:tailEnd type="none" w="med" len="med"/>
+                    </a:lnB>
+                    <a:solidFill>
+                      <a:srgbClr val="F5F5F5"/>
+                    </a:solidFill>
+                  </a:tcPr>
+                </a:tc>
+                <a:tc>
+                  <a:txBody>
+                    <a:bodyPr/>
+                    <a:lstStyle/>
+                    <a:p>
+                      <a:pPr indent="0" marL="0">
+                        <a:buNone/>
+                      </a:pPr>
+                      <a:r>
+                        <a:rPr lang="en-US" sz="1050" dirty="0">
+                          <a:solidFill>
+                            <a:srgbClr val="000000"/>
+                          </a:solidFill>
+                          <a:latin typeface="Malgun Gothic" pitchFamily="34" charset="0"/>
+                          <a:ea typeface="Malgun Gothic" pitchFamily="34" charset="-122"/>
+                          <a:cs typeface="Malgun Gothic" pitchFamily="34" charset="-120"/>
+                        </a:rPr>
+                        <a:t>0~1회/100ep</a:t>
+                      </a:r>
+                      <a:endParaRPr lang="en-US" sz="1050" dirty="0">
+                        <a:latin typeface="Malgun Gothic" charset="0"/>
+                        <a:ea typeface="Malgun Gothic" charset="0"/>
+                        <a:cs typeface="Malgun Gothic" charset="0"/>
+                      </a:endParaRPr>
+                    </a:p>
+                  </a:txBody>
+                  <a:tcPr marL="91440" marR="91440" marT="45720" marB="45720">
+                    <a:lnL w="12700" cap="flat" cmpd="sng" algn="ctr">
+                      <a:solidFill>
+                        <a:srgbClr val="DDDDDD"/>
+                      </a:solidFill>
+                      <a:prstDash val="solid"/>
+                      <a:round/>
+                      <a:headEnd type="none" w="med" len="med"/>
+                      <a:tailEnd type="none" w="med" len="med"/>
+                    </a:lnL>
+                    <a:lnR w="12700" cap="flat" cmpd="sng" algn="ctr">
+                      <a:solidFill>
+                        <a:srgbClr val="DDDDDD"/>
+                      </a:solidFill>
+                      <a:prstDash val="solid"/>
+                      <a:round/>
+                      <a:headEnd type="none" w="med" len="med"/>
+                      <a:tailEnd type="none" w="med" len="med"/>
+                    </a:lnR>
+                    <a:lnT w="12700" cap="flat" cmpd="sng" algn="ctr">
+                      <a:solidFill>
+                        <a:srgbClr val="DDDDDD"/>
+                      </a:solidFill>
+                      <a:prstDash val="solid"/>
+                      <a:round/>
+                      <a:headEnd type="none" w="med" len="med"/>
+                      <a:tailEnd type="none" w="med" len="med"/>
+                    </a:lnT>
+                    <a:lnB w="12700" cap="flat" cmpd="sng" algn="ctr">
+                      <a:solidFill>
+                        <a:srgbClr val="DDDDDD"/>
+                      </a:solidFill>
+                      <a:prstDash val="solid"/>
+                      <a:round/>
+                      <a:headEnd type="none" w="med" len="med"/>
+                      <a:tailEnd type="none" w="med" len="med"/>
+                    </a:lnB>
+                    <a:solidFill>
+                      <a:srgbClr val="F5F5F5"/>
+                    </a:solidFill>
+                  </a:tcPr>
+                </a:tc>
+                <a:tc>
+                  <a:txBody>
+                    <a:bodyPr/>
+                    <a:lstStyle/>
+                    <a:p>
+                      <a:pPr indent="0" marL="0">
+                        <a:buNone/>
+                      </a:pPr>
+                      <a:r>
+                        <a:rPr lang="en-US" sz="1050" dirty="0">
+                          <a:solidFill>
+                            <a:srgbClr val="000000"/>
+                          </a:solidFill>
+                          <a:latin typeface="Malgun Gothic" pitchFamily="34" charset="0"/>
+                          <a:ea typeface="Malgun Gothic" pitchFamily="34" charset="-122"/>
+                          <a:cs typeface="Malgun Gothic" pitchFamily="34" charset="-120"/>
+                        </a:rPr>
+                        <a:t>뒤늦게 역전 — 그러나 초반 손실 누적</a:t>
+                      </a:r>
+                      <a:endParaRPr lang="en-US" sz="1050" dirty="0">
+                        <a:latin typeface="Malgun Gothic" charset="0"/>
+                        <a:ea typeface="Malgun Gothic" charset="0"/>
+                        <a:cs typeface="Malgun Gothic" charset="0"/>
+                      </a:endParaRPr>
+                    </a:p>
+                  </a:txBody>
+                  <a:tcPr marL="91440" marR="91440" marT="45720" marB="45720">
+                    <a:lnL w="12700" cap="flat" cmpd="sng" algn="ctr">
+                      <a:solidFill>
+                        <a:srgbClr val="DDDDDD"/>
+                      </a:solidFill>
+                      <a:prstDash val="solid"/>
+                      <a:round/>
+                      <a:headEnd type="none" w="med" len="med"/>
+                      <a:tailEnd type="none" w="med" len="med"/>
+                    </a:lnL>
+                    <a:lnR w="12700" cap="flat" cmpd="sng" algn="ctr">
+                      <a:solidFill>
+                        <a:srgbClr val="DDDDDD"/>
+                      </a:solidFill>
+                      <a:prstDash val="solid"/>
+                      <a:round/>
+                      <a:headEnd type="none" w="med" len="med"/>
+                      <a:tailEnd type="none" w="med" len="med"/>
+                    </a:lnR>
+                    <a:lnT w="12700" cap="flat" cmpd="sng" algn="ctr">
+                      <a:solidFill>
+                        <a:srgbClr val="DDDDDD"/>
+                      </a:solidFill>
+                      <a:prstDash val="solid"/>
+                      <a:round/>
+                      <a:headEnd type="none" w="med" len="med"/>
+                      <a:tailEnd type="none" w="med" len="med"/>
+                    </a:lnT>
+                    <a:lnB w="12700" cap="flat" cmpd="sng" algn="ctr">
+                      <a:solidFill>
+                        <a:srgbClr val="DDDDDD"/>
+                      </a:solidFill>
+                      <a:prstDash val="solid"/>
+                      <a:round/>
+                      <a:headEnd type="none" w="med" len="med"/>
+                      <a:tailEnd type="none" w="med" len="med"/>
+                    </a:lnB>
+                    <a:solidFill>
+                      <a:srgbClr val="F5F5F5"/>
+                    </a:solidFill>
+                  </a:tcPr>
+                </a:tc>
+              </a:tr>
+              <a:tr h="347472">
+                <a:tc>
+                  <a:txBody>
+                    <a:bodyPr/>
+                    <a:lstStyle/>
+                    <a:p>
+                      <a:pPr indent="0" marL="0">
+                        <a:buNone/>
+                      </a:pPr>
+                      <a:r>
+                        <a:rPr lang="en-US" sz="1050" dirty="0">
+                          <a:solidFill>
+                            <a:srgbClr val="000000"/>
+                          </a:solidFill>
+                          <a:latin typeface="Malgun Gothic" pitchFamily="34" charset="0"/>
+                          <a:ea typeface="Malgun Gothic" pitchFamily="34" charset="-122"/>
+                          <a:cs typeface="Malgun Gothic" pitchFamily="34" charset="-120"/>
+                        </a:rPr>
+                        <a:t>5 seed 총계</a:t>
+                      </a:r>
+                      <a:endParaRPr lang="en-US" sz="1050" dirty="0">
+                        <a:latin typeface="Malgun Gothic" charset="0"/>
+                        <a:ea typeface="Malgun Gothic" charset="0"/>
+                        <a:cs typeface="Malgun Gothic" charset="0"/>
+                      </a:endParaRPr>
+                    </a:p>
+                  </a:txBody>
+                  <a:tcPr marL="91440" marR="91440" marT="45720" marB="45720">
+                    <a:lnL w="12700" cap="flat" cmpd="sng" algn="ctr">
+                      <a:solidFill>
+                        <a:srgbClr val="DDDDDD"/>
+                      </a:solidFill>
+                      <a:prstDash val="solid"/>
+                      <a:round/>
+                      <a:headEnd type="none" w="med" len="med"/>
+                      <a:tailEnd type="none" w="med" len="med"/>
+                    </a:lnL>
+                    <a:lnR w="12700" cap="flat" cmpd="sng" algn="ctr">
+                      <a:solidFill>
+                        <a:srgbClr val="DDDDDD"/>
+                      </a:solidFill>
+                      <a:prstDash val="solid"/>
+                      <a:round/>
+                      <a:headEnd type="none" w="med" len="med"/>
+                      <a:tailEnd type="none" w="med" len="med"/>
+                    </a:lnR>
+                    <a:lnT w="12700" cap="flat" cmpd="sng" algn="ctr">
+                      <a:solidFill>
+                        <a:srgbClr val="DDDDDD"/>
+                      </a:solidFill>
+                      <a:prstDash val="solid"/>
+                      <a:round/>
+                      <a:headEnd type="none" w="med" len="med"/>
+                      <a:tailEnd type="none" w="med" len="med"/>
+                    </a:lnT>
+                    <a:lnB w="12700" cap="flat" cmpd="sng" algn="ctr">
+                      <a:solidFill>
+                        <a:srgbClr val="DDDDDD"/>
+                      </a:solidFill>
+                      <a:prstDash val="solid"/>
+                      <a:round/>
+                      <a:headEnd type="none" w="med" len="med"/>
+                      <a:tailEnd type="none" w="med" len="med"/>
+                    </a:lnB>
+                    <a:solidFill>
+                      <a:srgbClr val="F5F5F5"/>
+                    </a:solidFill>
+                  </a:tcPr>
+                </a:tc>
+                <a:tc>
+                  <a:txBody>
+                    <a:bodyPr/>
+                    <a:lstStyle/>
+                    <a:p>
+                      <a:pPr indent="0" marL="0">
+                        <a:buNone/>
+                      </a:pPr>
+                      <a:r>
+                        <a:rPr lang="en-US" sz="1050" dirty="0">
+                          <a:solidFill>
+                            <a:srgbClr val="000000"/>
+                          </a:solidFill>
+                          <a:latin typeface="Malgun Gothic" pitchFamily="34" charset="0"/>
+                          <a:ea typeface="Malgun Gothic" pitchFamily="34" charset="-122"/>
+                          <a:cs typeface="Malgun Gothic" pitchFamily="34" charset="-120"/>
+                        </a:rPr>
+                        <a:t>265회</a:t>
+                      </a:r>
+                      <a:endParaRPr lang="en-US" sz="1050" dirty="0">
+                        <a:latin typeface="Malgun Gothic" charset="0"/>
+                        <a:ea typeface="Malgun Gothic" charset="0"/>
+                        <a:cs typeface="Malgun Gothic" charset="0"/>
+                      </a:endParaRPr>
+                    </a:p>
+                  </a:txBody>
+                  <a:tcPr marL="91440" marR="91440" marT="45720" marB="45720">
+                    <a:lnL w="12700" cap="flat" cmpd="sng" algn="ctr">
+                      <a:solidFill>
+                        <a:srgbClr val="DDDDDD"/>
+                      </a:solidFill>
+                      <a:prstDash val="solid"/>
+                      <a:round/>
+                      <a:headEnd type="none" w="med" len="med"/>
+                      <a:tailEnd type="none" w="med" len="med"/>
+                    </a:lnL>
+                    <a:lnR w="12700" cap="flat" cmpd="sng" algn="ctr">
+                      <a:solidFill>
+                        <a:srgbClr val="DDDDDD"/>
+                      </a:solidFill>
+                      <a:prstDash val="solid"/>
+                      <a:round/>
+                      <a:headEnd type="none" w="med" len="med"/>
+                      <a:tailEnd type="none" w="med" len="med"/>
+                    </a:lnR>
+                    <a:lnT w="12700" cap="flat" cmpd="sng" algn="ctr">
+                      <a:solidFill>
+                        <a:srgbClr val="DDDDDD"/>
+                      </a:solidFill>
+                      <a:prstDash val="solid"/>
+                      <a:round/>
+                      <a:headEnd type="none" w="med" len="med"/>
+                      <a:tailEnd type="none" w="med" len="med"/>
+                    </a:lnT>
+                    <a:lnB w="12700" cap="flat" cmpd="sng" algn="ctr">
+                      <a:solidFill>
+                        <a:srgbClr val="DDDDDD"/>
+                      </a:solidFill>
+                      <a:prstDash val="solid"/>
+                      <a:round/>
+                      <a:headEnd type="none" w="med" len="med"/>
+                      <a:tailEnd type="none" w="med" len="med"/>
+                    </a:lnB>
+                    <a:solidFill>
+                      <a:srgbClr val="F5F5F5"/>
+                    </a:solidFill>
+                  </a:tcPr>
+                </a:tc>
+                <a:tc>
+                  <a:txBody>
+                    <a:bodyPr/>
+                    <a:lstStyle/>
+                    <a:p>
+                      <a:pPr indent="0" marL="0">
+                        <a:buNone/>
+                      </a:pPr>
+                      <a:r>
+                        <a:rPr lang="en-US" sz="1050" dirty="0">
+                          <a:solidFill>
+                            <a:srgbClr val="000000"/>
+                          </a:solidFill>
+                          <a:latin typeface="Malgun Gothic" pitchFamily="34" charset="0"/>
+                          <a:ea typeface="Malgun Gothic" pitchFamily="34" charset="-122"/>
+                          <a:cs typeface="Malgun Gothic" pitchFamily="34" charset="-120"/>
+                        </a:rPr>
+                        <a:t>277회 ← Proposed 더 많음</a:t>
+                      </a:r>
+                      <a:endParaRPr lang="en-US" sz="1050" dirty="0">
+                        <a:latin typeface="Malgun Gothic" charset="0"/>
+                        <a:ea typeface="Malgun Gothic" charset="0"/>
+                        <a:cs typeface="Malgun Gothic" charset="0"/>
+                      </a:endParaRPr>
+                    </a:p>
+                  </a:txBody>
+                  <a:tcPr marL="91440" marR="91440" marT="45720" marB="45720">
+                    <a:lnL w="12700" cap="flat" cmpd="sng" algn="ctr">
+                      <a:solidFill>
+                        <a:srgbClr val="DDDDDD"/>
+                      </a:solidFill>
+                      <a:prstDash val="solid"/>
+                      <a:round/>
+                      <a:headEnd type="none" w="med" len="med"/>
+                      <a:tailEnd type="none" w="med" len="med"/>
+                    </a:lnL>
+                    <a:lnR w="12700" cap="flat" cmpd="sng" algn="ctr">
+                      <a:solidFill>
+                        <a:srgbClr val="DDDDDD"/>
+                      </a:solidFill>
+                      <a:prstDash val="solid"/>
+                      <a:round/>
+                      <a:headEnd type="none" w="med" len="med"/>
+                      <a:tailEnd type="none" w="med" len="med"/>
+                    </a:lnR>
+                    <a:lnT w="12700" cap="flat" cmpd="sng" algn="ctr">
+                      <a:solidFill>
+                        <a:srgbClr val="DDDDDD"/>
+                      </a:solidFill>
+                      <a:prstDash val="solid"/>
+                      <a:round/>
+                      <a:headEnd type="none" w="med" len="med"/>
+                      <a:tailEnd type="none" w="med" len="med"/>
+                    </a:lnT>
+                    <a:lnB w="12700" cap="flat" cmpd="sng" algn="ctr">
+                      <a:solidFill>
+                        <a:srgbClr val="DDDDDD"/>
+                      </a:solidFill>
+                      <a:prstDash val="solid"/>
+                      <a:round/>
+                      <a:headEnd type="none" w="med" len="med"/>
+                      <a:tailEnd type="none" w="med" len="med"/>
+                    </a:lnB>
+                    <a:solidFill>
+                      <a:srgbClr val="F5F5F5"/>
+                    </a:solidFill>
+                  </a:tcPr>
+                </a:tc>
+                <a:tc>
+                  <a:txBody>
+                    <a:bodyPr/>
+                    <a:lstStyle/>
+                    <a:p>
+                      <a:pPr indent="0" marL="0">
+                        <a:buNone/>
+                      </a:pPr>
+                      <a:r>
+                        <a:rPr lang="en-US" sz="1050" dirty="0">
+                          <a:solidFill>
+                            <a:srgbClr val="000000"/>
+                          </a:solidFill>
+                          <a:latin typeface="Malgun Gothic" pitchFamily="34" charset="0"/>
+                          <a:ea typeface="Malgun Gothic" pitchFamily="34" charset="-122"/>
+                          <a:cs typeface="Malgun Gothic" pitchFamily="34" charset="-120"/>
+                        </a:rPr>
+                        <a:t>❌ 전체 합산에서 역효과 확정</a:t>
+                      </a:r>
+                      <a:endParaRPr lang="en-US" sz="1050" dirty="0">
+                        <a:latin typeface="Malgun Gothic" charset="0"/>
+                        <a:ea typeface="Malgun Gothic" charset="0"/>
+                        <a:cs typeface="Malgun Gothic" charset="0"/>
+                      </a:endParaRPr>
+                    </a:p>
+                  </a:txBody>
+                  <a:tcPr marL="91440" marR="91440" marT="45720" marB="45720">
+                    <a:lnL w="12700" cap="flat" cmpd="sng" algn="ctr">
+                      <a:solidFill>
+                        <a:srgbClr val="DDDDDD"/>
+                      </a:solidFill>
+                      <a:prstDash val="solid"/>
+                      <a:round/>
+                      <a:headEnd type="none" w="med" len="med"/>
+                      <a:tailEnd type="none" w="med" len="med"/>
+                    </a:lnL>
+                    <a:lnR w="12700" cap="flat" cmpd="sng" algn="ctr">
+                      <a:solidFill>
+                        <a:srgbClr val="DDDDDD"/>
+                      </a:solidFill>
+                      <a:prstDash val="solid"/>
+                      <a:round/>
+                      <a:headEnd type="none" w="med" len="med"/>
+                      <a:tailEnd type="none" w="med" len="med"/>
+                    </a:lnR>
+                    <a:lnT w="12700" cap="flat" cmpd="sng" algn="ctr">
+                      <a:solidFill>
+                        <a:srgbClr val="DDDDDD"/>
+                      </a:solidFill>
+                      <a:prstDash val="solid"/>
+                      <a:round/>
+                      <a:headEnd type="none" w="med" len="med"/>
+                      <a:tailEnd type="none" w="med" len="med"/>
+                    </a:lnT>
+                    <a:lnB w="12700" cap="flat" cmpd="sng" algn="ctr">
+                      <a:solidFill>
+                        <a:srgbClr val="DDDDDD"/>
+                      </a:solidFill>
+                      <a:prstDash val="solid"/>
+                      <a:round/>
+                      <a:headEnd type="none" w="med" len="med"/>
+                      <a:tailEnd type="none" w="med" len="med"/>
+                    </a:lnB>
+                    <a:solidFill>
+                      <a:srgbClr val="F5F5F5"/>
+                    </a:solidFill>
+                  </a:tcPr>
+                </a:tc>
+              </a:tr>
+            </a:tbl>
+          </a:graphicData>
+        </a:graphic>
+      </p:graphicFrame>
+      <p:sp>
+        <p:nvSpPr>
+          <p:cNvPr id="11" name="Shape 7"/>
+          <p:cNvSpPr/>
+          <p:nvPr/>
+        </p:nvSpPr>
+        <p:spPr>
+          <a:xfrm>
+            <a:off x="182880" y="5166360"/>
+            <a:ext cx="8778240" cy="320040"/>
+          </a:xfrm>
+          <a:prstGeom prst="rect">
+            <a:avLst/>
+          </a:prstGeom>
+          <a:solidFill>
+            <a:srgbClr val="FFF3CD"/>
+          </a:solidFill>
+          <a:ln w="12700">
+            <a:solidFill>
+              <a:srgbClr val="E6B800"/>
+            </a:solidFill>
+            <a:prstDash val="solid"/>
+          </a:ln>
+        </p:spPr>
+      </p:sp>
+      <p:sp>
+        <p:nvSpPr>
+          <p:cNvPr id="12" name="Text 8"/>
+          <p:cNvSpPr/>
+          <p:nvPr/>
+        </p:nvSpPr>
+        <p:spPr>
+          <a:xfrm>
+            <a:off x="182880" y="5184648"/>
+            <a:ext cx="8778240" cy="283464"/>
+          </a:xfrm>
+          <a:prstGeom prst="rect">
+            <a:avLst/>
+          </a:prstGeom>
+          <a:noFill/>
+          <a:ln/>
+        </p:spPr>
+        <p:txBody>
+          <a:bodyPr wrap="square" rtlCol="0" anchor="ctr"/>
+          <a:lstStyle/>
+          <a:p>
+            <a:pPr indent="0" marL="0">
+              <a:buNone/>
+            </a:pPr>
+            <a:r>
+              <a:rPr lang="en-US" sz="1100" b="1" dirty="0">
+                <a:solidFill>
+                  <a:srgbClr val="7A5000"/>
+                </a:solidFill>
+                <a:latin typeface="Malgun Gothic" pitchFamily="34" charset="0"/>
+                <a:ea typeface="Malgun Gothic" pitchFamily="34" charset="-122"/>
+                <a:cs typeface="Malgun Gothic" pitchFamily="34" charset="-120"/>
+              </a:rPr>
+              <a:t>원인 ③ Step 4 — DRAIN=2는 충전 없이도 목표 도달 가능 → Baseline도 스스로 수렴</a:t>
+            </a:r>
+            <a:endParaRPr lang="en-US" sz="1100" dirty="0"/>
+          </a:p>
+        </p:txBody>
+      </p:sp>
+      <p:graphicFrame>
+        <p:nvGraphicFramePr>
+          <p:cNvPr id="37" name="Table 2"/>
+          <p:cNvGraphicFramePr>
+            <a:graphicFrameLocks noGrp="1"/>
+          </p:cNvGraphicFramePr>
+          <p:nvPr>
+            <p:extLst>
+              <p:ext uri="{D42A27DB-BD31-4B8C-83A1-F6EECF244321}">
+                <p14:modId xmlns:p14="http://schemas.microsoft.com/office/powerpoint/2010/main" val="1579011935"/>
+              </p:ext>
+            </p:extLst>
+          </p:nvPr>
+        </p:nvGraphicFramePr>
+        <p:xfrm>
+          <a:off x="182880" y="5522976"/>
+          <a:ext cx="8778240" cy="914400"/>
+        </p:xfrm>
+        <a:graphic>
+          <a:graphicData uri="http://schemas.openxmlformats.org/drawingml/2006/table">
+            <a:tbl>
+              <a:tblPr/>
+              <a:tblGrid>
+                <a:gridCol w="2560320"/>
+                <a:gridCol w="6217920"/>
+              </a:tblGrid>
+              <a:tr h="292608">
+                <a:tc>
+                  <a:txBody>
+                    <a:bodyPr/>
+                    <a:lstStyle/>
+                    <a:p>
+                      <a:pPr indent="0" marL="0">
+                        <a:buNone/>
+                      </a:pPr>
+                      <a:r>
+                        <a:rPr lang="en-US" sz="1050" b="1" dirty="0">
+                          <a:solidFill>
+                            <a:srgbClr val="FFFFFF"/>
+                          </a:solidFill>
+                          <a:latin typeface="Malgun Gothic" pitchFamily="34" charset="0"/>
+                          <a:ea typeface="Malgun Gothic" pitchFamily="34" charset="-122"/>
+                          <a:cs typeface="Malgun Gothic" pitchFamily="34" charset="-120"/>
+                        </a:rPr>
+                        <a:t>분석 항목</a:t>
+                      </a:r>
+                      <a:endParaRPr lang="en-US" sz="1050" dirty="0">
+                        <a:latin typeface="Malgun Gothic" charset="0"/>
+                        <a:ea typeface="Malgun Gothic" charset="0"/>
+                        <a:cs typeface="Malgun Gothic" charset="0"/>
+                      </a:endParaRPr>
+                    </a:p>
+                  </a:txBody>
+                  <a:tcPr marL="91440" marR="91440" marT="45720" marB="45720">
+                    <a:lnL w="12700" cap="flat" cmpd="sng" algn="ctr">
+                      <a:solidFill>
+                        <a:srgbClr val="DDDDDD"/>
+                      </a:solidFill>
+                      <a:prstDash val="solid"/>
+                      <a:round/>
+                      <a:headEnd type="none" w="med" len="med"/>
+                      <a:tailEnd type="none" w="med" len="med"/>
+                    </a:lnL>
+                    <a:lnR w="12700" cap="flat" cmpd="sng" algn="ctr">
+                      <a:solidFill>
+                        <a:srgbClr val="DDDDDD"/>
+                      </a:solidFill>
+                      <a:prstDash val="solid"/>
+                      <a:round/>
+                      <a:headEnd type="none" w="med" len="med"/>
+                      <a:tailEnd type="none" w="med" len="med"/>
+                    </a:lnR>
+                    <a:lnT w="12700" cap="flat" cmpd="sng" algn="ctr">
+                      <a:solidFill>
+                        <a:srgbClr val="DDDDDD"/>
+                      </a:solidFill>
+                      <a:prstDash val="solid"/>
+                      <a:round/>
+                      <a:headEnd type="none" w="med" len="med"/>
+                      <a:tailEnd type="none" w="med" len="med"/>
+                    </a:lnT>
+                    <a:lnB w="12700" cap="flat" cmpd="sng" algn="ctr">
+                      <a:solidFill>
+                        <a:srgbClr val="DDDDDD"/>
+                      </a:solidFill>
+                      <a:prstDash val="solid"/>
+                      <a:round/>
+                      <a:headEnd type="none" w="med" len="med"/>
+                      <a:tailEnd type="none" w="med" len="med"/>
+                    </a:lnB>
+                    <a:solidFill>
+                      <a:srgbClr val="1A1A1A"/>
+                    </a:solidFill>
+                  </a:tcPr>
+                </a:tc>
+                <a:tc>
+                  <a:txBody>
+                    <a:bodyPr/>
+                    <a:lstStyle/>
+                    <a:p>
+                      <a:pPr indent="0" marL="0">
+                        <a:buNone/>
+                      </a:pPr>
+                      <a:r>
+                        <a:rPr lang="en-US" sz="1050" b="1" dirty="0">
+                          <a:solidFill>
+                            <a:srgbClr val="FFFFFF"/>
+                          </a:solidFill>
+                          <a:latin typeface="Malgun Gothic" pitchFamily="34" charset="0"/>
+                          <a:ea typeface="Malgun Gothic" pitchFamily="34" charset="-122"/>
+                          <a:cs typeface="Malgun Gothic" pitchFamily="34" charset="-120"/>
+                        </a:rPr>
+                        <a:t>내용</a:t>
+                      </a:r>
+                      <a:endParaRPr lang="en-US" sz="1050" dirty="0">
+                        <a:latin typeface="Malgun Gothic" charset="0"/>
+                        <a:ea typeface="Malgun Gothic" charset="0"/>
+                        <a:cs typeface="Malgun Gothic" charset="0"/>
+                      </a:endParaRPr>
+                    </a:p>
+                  </a:txBody>
+                  <a:tcPr marL="91440" marR="91440" marT="45720" marB="45720">
+                    <a:lnL w="12700" cap="flat" cmpd="sng" algn="ctr">
+                      <a:solidFill>
+                        <a:srgbClr val="DDDDDD"/>
+                      </a:solidFill>
+                      <a:prstDash val="solid"/>
+                      <a:round/>
+                      <a:headEnd type="none" w="med" len="med"/>
+                      <a:tailEnd type="none" w="med" len="med"/>
+                    </a:lnL>
+                    <a:lnR w="12700" cap="flat" cmpd="sng" algn="ctr">
+                      <a:solidFill>
+                        <a:srgbClr val="DDDDDD"/>
+                      </a:solidFill>
+                      <a:prstDash val="solid"/>
+                      <a:round/>
+                      <a:headEnd type="none" w="med" len="med"/>
+                      <a:tailEnd type="none" w="med" len="med"/>
+                    </a:lnR>
+                    <a:lnT w="12700" cap="flat" cmpd="sng" algn="ctr">
+                      <a:solidFill>
+                        <a:srgbClr val="DDDDDD"/>
+                      </a:solidFill>
+                      <a:prstDash val="solid"/>
+                      <a:round/>
+                      <a:headEnd type="none" w="med" len="med"/>
+                      <a:tailEnd type="none" w="med" len="med"/>
+                    </a:lnT>
+                    <a:lnB w="12700" cap="flat" cmpd="sng" algn="ctr">
+                      <a:solidFill>
+                        <a:srgbClr val="DDDDDD"/>
+                      </a:solidFill>
+                      <a:prstDash val="solid"/>
+                      <a:round/>
+                      <a:headEnd type="none" w="med" len="med"/>
+                      <a:tailEnd type="none" w="med" len="med"/>
+                    </a:lnB>
+                    <a:solidFill>
+                      <a:srgbClr val="1A1A1A"/>
+                    </a:solidFill>
+                  </a:tcPr>
+                </a:tc>
+              </a:tr>
+              <a:tr h="347472">
+                <a:tc>
+                  <a:txBody>
+                    <a:bodyPr/>
+                    <a:lstStyle/>
+                    <a:p>
+                      <a:pPr indent="0" marL="0">
+                        <a:buNone/>
+                      </a:pPr>
+                      <a:r>
+                        <a:rPr lang="en-US" sz="1050" dirty="0">
+                          <a:solidFill>
+                            <a:srgbClr val="000000"/>
+                          </a:solidFill>
+                          <a:latin typeface="Malgun Gothic" pitchFamily="34" charset="0"/>
+                          <a:ea typeface="Malgun Gothic" pitchFamily="34" charset="-122"/>
+                          <a:cs typeface="Malgun Gothic" pitchFamily="34" charset="-120"/>
+                        </a:rPr>
+                        <a:t>DRAIN=2 배터리 지속 시간</a:t>
+                      </a:r>
+                      <a:endParaRPr lang="en-US" sz="1050" dirty="0">
+                        <a:latin typeface="Malgun Gothic" charset="0"/>
+                        <a:ea typeface="Malgun Gothic" charset="0"/>
+                        <a:cs typeface="Malgun Gothic" charset="0"/>
+                      </a:endParaRPr>
+                    </a:p>
+                  </a:txBody>
+                  <a:tcPr marL="91440" marR="91440" marT="45720" marB="45720">
+                    <a:lnL w="12700" cap="flat" cmpd="sng" algn="ctr">
+                      <a:solidFill>
+                        <a:srgbClr val="DDDDDD"/>
+                      </a:solidFill>
+                      <a:prstDash val="solid"/>
+                      <a:round/>
+                      <a:headEnd type="none" w="med" len="med"/>
+                      <a:tailEnd type="none" w="med" len="med"/>
+                    </a:lnL>
+                    <a:lnR w="12700" cap="flat" cmpd="sng" algn="ctr">
+                      <a:solidFill>
+                        <a:srgbClr val="DDDDDD"/>
+                      </a:solidFill>
+                      <a:prstDash val="solid"/>
+                      <a:round/>
+                      <a:headEnd type="none" w="med" len="med"/>
+                      <a:tailEnd type="none" w="med" len="med"/>
+                    </a:lnR>
+                    <a:lnT w="12700" cap="flat" cmpd="sng" algn="ctr">
+                      <a:solidFill>
+                        <a:srgbClr val="DDDDDD"/>
+                      </a:solidFill>
+                      <a:prstDash val="solid"/>
+                      <a:round/>
+                      <a:headEnd type="none" w="med" len="med"/>
+                      <a:tailEnd type="none" w="med" len="med"/>
+                    </a:lnT>
+                    <a:lnB w="12700" cap="flat" cmpd="sng" algn="ctr">
+                      <a:solidFill>
+                        <a:srgbClr val="DDDDDD"/>
+                      </a:solidFill>
+                      <a:prstDash val="solid"/>
+                      <a:round/>
+                      <a:headEnd type="none" w="med" len="med"/>
+                      <a:tailEnd type="none" w="med" len="med"/>
+                    </a:lnB>
+                    <a:solidFill>
+                      <a:srgbClr val="FEFDE7"/>
+                    </a:solidFill>
+                  </a:tcPr>
+                </a:tc>
+                <a:tc>
+                  <a:txBody>
+                    <a:bodyPr/>
+                    <a:lstStyle/>
+                    <a:p>
+                      <a:pPr indent="0" marL="0">
+                        <a:buNone/>
+                      </a:pPr>
+                      <a:r>
+                        <a:rPr lang="en-US" sz="1050" dirty="0">
+                          <a:solidFill>
+                            <a:srgbClr val="000000"/>
+                          </a:solidFill>
+                          <a:latin typeface="Malgun Gothic" pitchFamily="34" charset="0"/>
+                          <a:ea typeface="Malgun Gothic" pitchFamily="34" charset="-122"/>
+                          <a:cs typeface="Malgun Gothic" pitchFamily="34" charset="-120"/>
+                        </a:rPr>
+                        <a:t>100 ÷ 2 = 50스텝 지속 — 7×7 최적 경로(4~12스텝)의 4~12배</a:t>
+                      </a:r>
+                      <a:endParaRPr lang="en-US" sz="1050" dirty="0">
+                        <a:latin typeface="Malgun Gothic" charset="0"/>
+                        <a:ea typeface="Malgun Gothic" charset="0"/>
+                        <a:cs typeface="Malgun Gothic" charset="0"/>
+                      </a:endParaRPr>
+                    </a:p>
+                  </a:txBody>
+                  <a:tcPr marL="91440" marR="91440" marT="45720" marB="45720">
+                    <a:lnL w="12700" cap="flat" cmpd="sng" algn="ctr">
+                      <a:solidFill>
+                        <a:srgbClr val="DDDDDD"/>
+                      </a:solidFill>
+                      <a:prstDash val="solid"/>
+                      <a:round/>
+                      <a:headEnd type="none" w="med" len="med"/>
+                      <a:tailEnd type="none" w="med" len="med"/>
+                    </a:lnL>
+                    <a:lnR w="12700" cap="flat" cmpd="sng" algn="ctr">
+                      <a:solidFill>
+                        <a:srgbClr val="DDDDDD"/>
+                      </a:solidFill>
+                      <a:prstDash val="solid"/>
+                      <a:round/>
+                      <a:headEnd type="none" w="med" len="med"/>
+                      <a:tailEnd type="none" w="med" len="med"/>
+                    </a:lnR>
+                    <a:lnT w="12700" cap="flat" cmpd="sng" algn="ctr">
+                      <a:solidFill>
+                        <a:srgbClr val="DDDDDD"/>
+                      </a:solidFill>
+                      <a:prstDash val="solid"/>
+                      <a:round/>
+                      <a:headEnd type="none" w="med" len="med"/>
+                      <a:tailEnd type="none" w="med" len="med"/>
+                    </a:lnT>
+                    <a:lnB w="12700" cap="flat" cmpd="sng" algn="ctr">
+                      <a:solidFill>
+                        <a:srgbClr val="DDDDDD"/>
+                      </a:solidFill>
+                      <a:prstDash val="solid"/>
+                      <a:round/>
+                      <a:headEnd type="none" w="med" len="med"/>
+                      <a:tailEnd type="none" w="med" len="med"/>
+                    </a:lnB>
+                    <a:solidFill>
+                      <a:srgbClr val="FEFDE7"/>
+                    </a:solidFill>
+                  </a:tcPr>
+                </a:tc>
+              </a:tr>
+              <a:tr h="384048">
+                <a:tc>
+                  <a:txBody>
+                    <a:bodyPr/>
+                    <a:lstStyle/>
+                    <a:p>
+                      <a:pPr indent="0" marL="0">
+                        <a:buNone/>
+                      </a:pPr>
+                      <a:r>
+                        <a:rPr lang="en-US" sz="1050" dirty="0">
+                          <a:solidFill>
+                            <a:srgbClr val="000000"/>
+                          </a:solidFill>
+                          <a:latin typeface="Malgun Gothic" pitchFamily="34" charset="0"/>
+                          <a:ea typeface="Malgun Gothic" pitchFamily="34" charset="-122"/>
+                          <a:cs typeface="Malgun Gothic" pitchFamily="34" charset="-120"/>
+                        </a:rPr>
+                        <a:t>Baseline의 자가 학습 능력</a:t>
+                      </a:r>
+                      <a:endParaRPr lang="en-US" sz="1050" dirty="0">
+                        <a:latin typeface="Malgun Gothic" charset="0"/>
+                        <a:ea typeface="Malgun Gothic" charset="0"/>
+                        <a:cs typeface="Malgun Gothic" charset="0"/>
+                      </a:endParaRPr>
+                    </a:p>
+                  </a:txBody>
+                  <a:tcPr marL="91440" marR="91440" marT="45720" marB="45720">
+                    <a:lnL w="12700" cap="flat" cmpd="sng" algn="ctr">
+                      <a:solidFill>
+                        <a:srgbClr val="DDDDDD"/>
+                      </a:solidFill>
+                      <a:prstDash val="solid"/>
+                      <a:round/>
+                      <a:headEnd type="none" w="med" len="med"/>
+                      <a:tailEnd type="none" w="med" len="med"/>
+                    </a:lnL>
+                    <a:lnR w="12700" cap="flat" cmpd="sng" algn="ctr">
+                      <a:solidFill>
+                        <a:srgbClr val="DDDDDD"/>
+                      </a:solidFill>
+                      <a:prstDash val="solid"/>
+                      <a:round/>
+                      <a:headEnd type="none" w="med" len="med"/>
+                      <a:tailEnd type="none" w="med" len="med"/>
+                    </a:lnR>
+                    <a:lnT w="12700" cap="flat" cmpd="sng" algn="ctr">
+                      <a:solidFill>
+                        <a:srgbClr val="DDDDDD"/>
+                      </a:solidFill>
+                      <a:prstDash val="solid"/>
+                      <a:round/>
+                      <a:headEnd type="none" w="med" len="med"/>
+                      <a:tailEnd type="none" w="med" len="med"/>
+                    </a:lnT>
+                    <a:lnB w="12700" cap="flat" cmpd="sng" algn="ctr">
+                      <a:solidFill>
+                        <a:srgbClr val="DDDDDD"/>
+                      </a:solidFill>
+                      <a:prstDash val="solid"/>
+                      <a:round/>
+                      <a:headEnd type="none" w="med" len="med"/>
+                      <a:tailEnd type="none" w="med" len="med"/>
+                    </a:lnB>
+                    <a:solidFill>
+                      <a:srgbClr val="FEFDE7"/>
+                    </a:solidFill>
+                  </a:tcPr>
+                </a:tc>
+                <a:tc>
+                  <a:txBody>
+                    <a:bodyPr/>
+                    <a:lstStyle/>
+                    <a:p>
+                      <a:pPr indent="0" marL="0">
+                        <a:buNone/>
+                      </a:pPr>
+                      <a:r>
+                        <a:rPr lang="en-US" sz="1050" dirty="0">
+                          <a:solidFill>
+                            <a:srgbClr val="000000"/>
+                          </a:solidFill>
+                          <a:latin typeface="Malgun Gothic" pitchFamily="34" charset="0"/>
+                          <a:ea typeface="Malgun Gothic" pitchFamily="34" charset="-122"/>
+                          <a:cs typeface="Malgun Gothic" pitchFamily="34" charset="-120"/>
+                        </a:rPr>
+                        <a:t>-200 방전 패널티만으로도 「충전 없이 빠르게 목표」 전략 수렴 가능 → Safety 보상의 추가 가치 소멸</a:t>
+                      </a:r>
+                      <a:endParaRPr lang="en-US" sz="1050" dirty="0">
+                        <a:latin typeface="Malgun Gothic" charset="0"/>
+                        <a:ea typeface="Malgun Gothic" charset="0"/>
+                        <a:cs typeface="Malgun Gothic" charset="0"/>
+                      </a:endParaRPr>
+                    </a:p>
+                  </a:txBody>
+                  <a:tcPr marL="91440" marR="91440" marT="45720" marB="45720">
+                    <a:lnL w="12700" cap="flat" cmpd="sng" algn="ctr">
+                      <a:solidFill>
+                        <a:srgbClr val="DDDDDD"/>
+                      </a:solidFill>
+                      <a:prstDash val="solid"/>
+                      <a:round/>
+                      <a:headEnd type="none" w="med" len="med"/>
+                      <a:tailEnd type="none" w="med" len="med"/>
+                    </a:lnL>
+                    <a:lnR w="12700" cap="flat" cmpd="sng" algn="ctr">
+                      <a:solidFill>
+                        <a:srgbClr val="DDDDDD"/>
+                      </a:solidFill>
+                      <a:prstDash val="solid"/>
+                      <a:round/>
+                      <a:headEnd type="none" w="med" len="med"/>
+                      <a:tailEnd type="none" w="med" len="med"/>
+                    </a:lnR>
+                    <a:lnT w="12700" cap="flat" cmpd="sng" algn="ctr">
+                      <a:solidFill>
+                        <a:srgbClr val="DDDDDD"/>
+                      </a:solidFill>
+                      <a:prstDash val="solid"/>
+                      <a:round/>
+                      <a:headEnd type="none" w="med" len="med"/>
+                      <a:tailEnd type="none" w="med" len="med"/>
+                    </a:lnT>
+                    <a:lnB w="12700" cap="flat" cmpd="sng" algn="ctr">
+                      <a:solidFill>
+                        <a:srgbClr val="DDDDDD"/>
+                      </a:solidFill>
+                      <a:prstDash val="solid"/>
+                      <a:round/>
+                      <a:headEnd type="none" w="med" len="med"/>
+                      <a:tailEnd type="none" w="med" len="med"/>
+                    </a:lnB>
+                    <a:solidFill>
+                      <a:srgbClr val="FEFDE7"/>
+                    </a:solidFill>
+                  </a:tcPr>
+                </a:tc>
+              </a:tr>
+              <a:tr h="347472">
+                <a:tc>
+                  <a:txBody>
+                    <a:bodyPr/>
+                    <a:lstStyle/>
+                    <a:p>
+                      <a:pPr indent="0" marL="0">
+                        <a:buNone/>
+                      </a:pPr>
+                      <a:r>
+                        <a:rPr lang="en-US" sz="1050" dirty="0">
+                          <a:solidFill>
+                            <a:srgbClr val="000000"/>
+                          </a:solidFill>
+                          <a:latin typeface="Malgun Gothic" pitchFamily="34" charset="0"/>
+                          <a:ea typeface="Malgun Gothic" pitchFamily="34" charset="-122"/>
+                          <a:cs typeface="Malgun Gothic" pitchFamily="34" charset="-120"/>
+                        </a:rPr>
+                        <a:t>결론</a:t>
+                      </a:r>
+                      <a:endParaRPr lang="en-US" sz="1050" dirty="0">
+                        <a:latin typeface="Malgun Gothic" charset="0"/>
+                        <a:ea typeface="Malgun Gothic" charset="0"/>
+                        <a:cs typeface="Malgun Gothic" charset="0"/>
+                      </a:endParaRPr>
+                    </a:p>
+                  </a:txBody>
+                  <a:tcPr marL="91440" marR="91440" marT="45720" marB="45720">
+                    <a:lnL w="12700" cap="flat" cmpd="sng" algn="ctr">
+                      <a:solidFill>
+                        <a:srgbClr val="DDDDDD"/>
+                      </a:solidFill>
+                      <a:prstDash val="solid"/>
+                      <a:round/>
+                      <a:headEnd type="none" w="med" len="med"/>
+                      <a:tailEnd type="none" w="med" len="med"/>
+                    </a:lnL>
+                    <a:lnR w="12700" cap="flat" cmpd="sng" algn="ctr">
+                      <a:solidFill>
+                        <a:srgbClr val="DDDDDD"/>
+                      </a:solidFill>
+                      <a:prstDash val="solid"/>
+                      <a:round/>
+                      <a:headEnd type="none" w="med" len="med"/>
+                      <a:tailEnd type="none" w="med" len="med"/>
+                    </a:lnR>
+                    <a:lnT w="12700" cap="flat" cmpd="sng" algn="ctr">
+                      <a:solidFill>
+                        <a:srgbClr val="DDDDDD"/>
+                      </a:solidFill>
+                      <a:prstDash val="solid"/>
+                      <a:round/>
+                      <a:headEnd type="none" w="med" len="med"/>
+                      <a:tailEnd type="none" w="med" len="med"/>
+                    </a:lnT>
+                    <a:lnB w="12700" cap="flat" cmpd="sng" algn="ctr">
+                      <a:solidFill>
+                        <a:srgbClr val="DDDDDD"/>
+                      </a:solidFill>
+                      <a:prstDash val="solid"/>
+                      <a:round/>
+                      <a:headEnd type="none" w="med" len="med"/>
+                      <a:tailEnd type="none" w="med" len="med"/>
+                    </a:lnB>
+                    <a:solidFill>
+                      <a:srgbClr val="FEFDE7"/>
+                    </a:solidFill>
+                  </a:tcPr>
+                </a:tc>
+                <a:tc>
+                  <a:txBody>
+                    <a:bodyPr/>
+                    <a:lstStyle/>
+                    <a:p>
+                      <a:pPr indent="0" marL="0">
+                        <a:buNone/>
+                      </a:pPr>
+                      <a:r>
+                        <a:rPr lang="en-US" sz="1050" dirty="0">
+                          <a:solidFill>
+                            <a:srgbClr val="000000"/>
+                          </a:solidFill>
+                          <a:latin typeface="Malgun Gothic" pitchFamily="34" charset="0"/>
+                          <a:ea typeface="Malgun Gothic" pitchFamily="34" charset="-122"/>
+                          <a:cs typeface="Malgun Gothic" pitchFamily="34" charset="-120"/>
+                        </a:rPr>
+                        <a:t>Safety Reward가 의미를 갖으려면 배터리가 실제 병목이어야 한다 → DRAIN=3 (33스텝)으로 압박 극대화</a:t>
+                      </a:r>
+                      <a:endParaRPr lang="en-US" sz="1050" dirty="0">
+                        <a:latin typeface="Malgun Gothic" charset="0"/>
+                        <a:ea typeface="Malgun Gothic" charset="0"/>
+                        <a:cs typeface="Malgun Gothic" charset="0"/>
+                      </a:endParaRPr>
+                    </a:p>
+                  </a:txBody>
+                  <a:tcPr marL="91440" marR="91440" marT="45720" marB="45720">
+                    <a:lnL w="12700" cap="flat" cmpd="sng" algn="ctr">
+                      <a:solidFill>
+                        <a:srgbClr val="DDDDDD"/>
+                      </a:solidFill>
+                      <a:prstDash val="solid"/>
+                      <a:round/>
+                      <a:headEnd type="none" w="med" len="med"/>
+                      <a:tailEnd type="none" w="med" len="med"/>
+                    </a:lnL>
+                    <a:lnR w="12700" cap="flat" cmpd="sng" algn="ctr">
+                      <a:solidFill>
+                        <a:srgbClr val="DDDDDD"/>
+                      </a:solidFill>
+                      <a:prstDash val="solid"/>
+                      <a:round/>
+                      <a:headEnd type="none" w="med" len="med"/>
+                      <a:tailEnd type="none" w="med" len="med"/>
+                    </a:lnR>
+                    <a:lnT w="12700" cap="flat" cmpd="sng" algn="ctr">
+                      <a:solidFill>
+                        <a:srgbClr val="DDDDDD"/>
+                      </a:solidFill>
+                      <a:prstDash val="solid"/>
+                      <a:round/>
+                      <a:headEnd type="none" w="med" len="med"/>
+                      <a:tailEnd type="none" w="med" len="med"/>
+                    </a:lnT>
+                    <a:lnB w="12700" cap="flat" cmpd="sng" algn="ctr">
+                      <a:solidFill>
+                        <a:srgbClr val="DDDDDD"/>
+                      </a:solidFill>
+                      <a:prstDash val="solid"/>
+                      <a:round/>
+                      <a:headEnd type="none" w="med" len="med"/>
+                      <a:tailEnd type="none" w="med" len="med"/>
+                    </a:lnB>
+                    <a:solidFill>
+                      <a:srgbClr val="FEFDE7"/>
+                    </a:solidFill>
+                  </a:tcPr>
+                </a:tc>
+              </a:tr>
+            </a:tbl>
+          </a:graphicData>
+        </a:graphic>
+      </p:graphicFrame>
+    </p:spTree>
+  </p:cSld>
+  <p:clrMapOvr>
+    <a:masterClrMapping/>
+  </p:clrMapOvr>
+</p:sld>
+</file>
+
+<file path=ppt/slides/slide13.xml><?xml version="1.0" encoding="utf-8"?>
+<p:sld xmlns:a="http://schemas.openxmlformats.org/drawingml/2006/main" xmlns:r="http://schemas.openxmlformats.org/officeDocument/2006/relationships" xmlns:p="http://schemas.openxmlformats.org/presentationml/2006/main">
+  <p:cSld name="Slide 13">
+    <p:spTree>
+      <p:nvGrpSpPr>
+        <p:cNvPr id="1" name=""/>
+        <p:cNvGrpSpPr/>
+        <p:nvPr/>
+      </p:nvGrpSpPr>
+      <p:grpSpPr>
+        <a:xfrm>
+          <a:off x="0" y="0"/>
+          <a:ext cx="0" cy="0"/>
+          <a:chOff x="0" y="0"/>
+          <a:chExt cx="0" cy="0"/>
+        </a:xfrm>
+      </p:grpSpPr>
+      <p:sp>
+        <p:nvSpPr>
+          <p:cNvPr id="2" name="Shape 0"/>
+          <p:cNvSpPr/>
+          <p:nvPr/>
+        </p:nvSpPr>
+        <p:spPr>
+          <a:xfrm>
+            <a:off x="0" y="0"/>
+            <a:ext cx="12192000" cy="685800"/>
+          </a:xfrm>
+          <a:prstGeom prst="rect">
+            <a:avLst/>
+          </a:prstGeom>
+          <a:solidFill>
+            <a:srgbClr val="1A1A1A"/>
+          </a:solidFill>
+          <a:ln w="12700">
+            <a:solidFill>
+              <a:srgbClr val="1A1A1A"/>
+            </a:solidFill>
+            <a:prstDash val="solid"/>
+          </a:ln>
+        </p:spPr>
+      </p:sp>
+      <p:sp>
+        <p:nvSpPr>
+          <p:cNvPr id="3" name="Shape 1"/>
+          <p:cNvSpPr/>
+          <p:nvPr/>
+        </p:nvSpPr>
+        <p:spPr>
+          <a:xfrm>
+            <a:off x="0" y="685800"/>
+            <a:ext cx="12192000" cy="45720"/>
+          </a:xfrm>
+          <a:prstGeom prst="rect">
+            <a:avLst/>
+          </a:prstGeom>
+          <a:solidFill>
+            <a:srgbClr val="C40000"/>
+          </a:solidFill>
+          <a:ln w="12700">
+            <a:solidFill>
+              <a:srgbClr val="C40000"/>
+            </a:solidFill>
+            <a:prstDash val="solid"/>
+          </a:ln>
+        </p:spPr>
+      </p:sp>
+      <p:sp>
+        <p:nvSpPr>
+          <p:cNvPr id="4" name="Text 2"/>
+          <p:cNvSpPr/>
+          <p:nvPr/>
+        </p:nvSpPr>
+        <p:spPr>
+          <a:xfrm>
+            <a:off x="365760" y="91440"/>
+            <a:ext cx="8412480" cy="502920"/>
+          </a:xfrm>
+          <a:prstGeom prst="rect">
+            <a:avLst/>
+          </a:prstGeom>
+          <a:noFill/>
+          <a:ln/>
+        </p:spPr>
+        <p:txBody>
+          <a:bodyPr wrap="square" rtlCol="0" anchor="ctr"/>
+          <a:lstStyle/>
+          <a:p>
+            <a:pPr indent="0" marL="0">
+              <a:buNone/>
+            </a:pPr>
+            <a:r>
+              <a:rPr lang="en-US" sz="1700" b="1" dirty="0">
+                <a:solidFill>
+                  <a:srgbClr val="FFFFFF"/>
+                </a:solidFill>
+                <a:latin typeface="Malgun Gothic" pitchFamily="34" charset="0"/>
+                <a:ea typeface="Malgun Gothic" pitchFamily="34" charset="-122"/>
+                <a:cs typeface="Malgun Gothic" pitchFamily="34" charset="-120"/>
+              </a:rPr>
+              <a:t>11  실험 조건 최적화 과정 ③ — Step 5 수렴 증거 (DRAIN=3)</a:t>
+            </a:r>
+            <a:endParaRPr lang="en-US" sz="1700" dirty="0"/>
+          </a:p>
+        </p:txBody>
+      </p:sp>
+      <p:sp>
+        <p:nvSpPr>
+          <p:cNvPr id="5" name="Text 3"/>
+          <p:cNvSpPr/>
+          <p:nvPr/>
+        </p:nvSpPr>
+        <p:spPr>
+          <a:xfrm>
+            <a:off x="274320" y="777240"/>
+            <a:ext cx="8595360" cy="292608"/>
+          </a:xfrm>
+          <a:prstGeom prst="rect">
+            <a:avLst/>
+          </a:prstGeom>
+          <a:noFill/>
+          <a:ln/>
+        </p:spPr>
+        <p:txBody>
+          <a:bodyPr wrap="square" rtlCol="0" anchor="ctr"/>
+          <a:lstStyle/>
+          <a:p>
+            <a:pPr indent="0" marL="0">
+              <a:buNone/>
+            </a:pPr>
+            <a:r>
+              <a:rPr lang="en-US" sz="1100" b="1" dirty="0">
+                <a:solidFill>
+                  <a:srgbClr val="005BAC"/>
+                </a:solidFill>
+                <a:latin typeface="Malgun Gothic" pitchFamily="34" charset="0"/>
+                <a:ea typeface="Malgun Gothic" pitchFamily="34" charset="-122"/>
+                <a:cs typeface="Malgun Gothic" pitchFamily="34" charset="-120"/>
+              </a:rPr>
+              <a:t>에포크 구간별 방전 횟수 분석 — Baseline 미수렴 vs Proposed 완전 수렴</a:t>
+            </a:r>
+            <a:endParaRPr lang="en-US" sz="1100" dirty="0"/>
+          </a:p>
+        </p:txBody>
+      </p:sp>
+      <p:graphicFrame>
+        <p:nvGraphicFramePr>
+          <p:cNvPr id="14" name="Table 0"/>
+          <p:cNvGraphicFramePr>
+            <a:graphicFrameLocks noGrp="1"/>
+          </p:cNvGraphicFramePr>
+          <p:nvPr>
+            <p:extLst>
+              <p:ext uri="{D42A27DB-BD31-4B8C-83A1-F6EECF244321}">
+                <p14:modId xmlns:p14="http://schemas.microsoft.com/office/powerpoint/2010/main" val="1579011935"/>
+              </p:ext>
+            </p:extLst>
+          </p:nvPr>
+        </p:nvGraphicFramePr>
+        <p:xfrm>
+          <a:off x="182880" y="1115568"/>
+          <a:ext cx="8778240" cy="914400"/>
+        </p:xfrm>
+        <a:graphic>
+          <a:graphicData uri="http://schemas.openxmlformats.org/drawingml/2006/table">
+            <a:tbl>
+              <a:tblPr/>
+              <a:tblGrid>
+                <a:gridCol w="1600200"/>
+                <a:gridCol w="1417320"/>
+                <a:gridCol w="1463040"/>
+                <a:gridCol w="1554480"/>
+                <a:gridCol w="2697480"/>
+              </a:tblGrid>
+              <a:tr h="347472">
+                <a:tc>
+                  <a:txBody>
+                    <a:bodyPr/>
+                    <a:lstStyle/>
+                    <a:p>
+                      <a:pPr indent="0" marL="0">
+                        <a:buNone/>
+                      </a:pPr>
+                      <a:r>
+                        <a:rPr lang="en-US" sz="1000" b="1" dirty="0">
+                          <a:solidFill>
+                            <a:srgbClr val="FFFFFF"/>
+                          </a:solidFill>
+                          <a:latin typeface="Malgun Gothic" pitchFamily="34" charset="0"/>
+                          <a:ea typeface="Malgun Gothic" pitchFamily="34" charset="-122"/>
+                          <a:cs typeface="Malgun Gothic" pitchFamily="34" charset="-120"/>
+                        </a:rPr>
+                        <a:t>에포크 구간</a:t>
+                      </a:r>
+                      <a:endParaRPr lang="en-US" sz="1000" dirty="0">
+                        <a:latin typeface="Malgun Gothic" charset="0"/>
+                        <a:ea typeface="Malgun Gothic" charset="0"/>
+                        <a:cs typeface="Malgun Gothic" charset="0"/>
+                      </a:endParaRPr>
+                    </a:p>
+                  </a:txBody>
+                  <a:tcPr marL="91440" marR="91440" marT="45720" marB="45720">
+                    <a:lnL w="12700" cap="flat" cmpd="sng" algn="ctr">
+                      <a:solidFill>
+                        <a:srgbClr val="DDDDDD"/>
+                      </a:solidFill>
+                      <a:prstDash val="solid"/>
+                      <a:round/>
+                      <a:headEnd type="none" w="med" len="med"/>
+                      <a:tailEnd type="none" w="med" len="med"/>
+                    </a:lnL>
+                    <a:lnR w="12700" cap="flat" cmpd="sng" algn="ctr">
+                      <a:solidFill>
+                        <a:srgbClr val="DDDDDD"/>
+                      </a:solidFill>
+                      <a:prstDash val="solid"/>
+                      <a:round/>
+                      <a:headEnd type="none" w="med" len="med"/>
+                      <a:tailEnd type="none" w="med" len="med"/>
+                    </a:lnR>
+                    <a:lnT w="12700" cap="flat" cmpd="sng" algn="ctr">
+                      <a:solidFill>
+                        <a:srgbClr val="DDDDDD"/>
+                      </a:solidFill>
+                      <a:prstDash val="solid"/>
+                      <a:round/>
+                      <a:headEnd type="none" w="med" len="med"/>
+                      <a:tailEnd type="none" w="med" len="med"/>
+                    </a:lnT>
+                    <a:lnB w="12700" cap="flat" cmpd="sng" algn="ctr">
+                      <a:solidFill>
+                        <a:srgbClr val="DDDDDD"/>
+                      </a:solidFill>
+                      <a:prstDash val="solid"/>
+                      <a:round/>
+                      <a:headEnd type="none" w="med" len="med"/>
+                      <a:tailEnd type="none" w="med" len="med"/>
+                    </a:lnB>
+                    <a:solidFill>
+                      <a:srgbClr val="1A1A1A"/>
+                    </a:solidFill>
+                  </a:tcPr>
+                </a:tc>
+                <a:tc>
+                  <a:txBody>
+                    <a:bodyPr/>
+                    <a:lstStyle/>
+                    <a:p>
+                      <a:pPr indent="0" marL="0">
+                        <a:buNone/>
+                      </a:pPr>
+                      <a:r>
+                        <a:rPr lang="en-US" sz="1000" b="1" dirty="0">
+                          <a:solidFill>
+                            <a:srgbClr val="FFFFFF"/>
+                          </a:solidFill>
+                          <a:latin typeface="Malgun Gothic" pitchFamily="34" charset="0"/>
+                          <a:ea typeface="Malgun Gothic" pitchFamily="34" charset="-122"/>
+                          <a:cs typeface="Malgun Gothic" pitchFamily="34" charset="-120"/>
+                        </a:rPr>
+                        <a:t>Baseline 방전 횟수</a:t>
+                      </a:r>
+                      <a:endParaRPr lang="en-US" sz="1000" dirty="0">
+                        <a:latin typeface="Malgun Gothic" charset="0"/>
+                        <a:ea typeface="Malgun Gothic" charset="0"/>
+                        <a:cs typeface="Malgun Gothic" charset="0"/>
+                      </a:endParaRPr>
+                    </a:p>
+                  </a:txBody>
+                  <a:tcPr marL="91440" marR="91440" marT="45720" marB="45720">
+                    <a:lnL w="12700" cap="flat" cmpd="sng" algn="ctr">
+                      <a:solidFill>
+                        <a:srgbClr val="DDDDDD"/>
+                      </a:solidFill>
+                      <a:prstDash val="solid"/>
+                      <a:round/>
+                      <a:headEnd type="none" w="med" len="med"/>
+                      <a:tailEnd type="none" w="med" len="med"/>
+                    </a:lnL>
+                    <a:lnR w="12700" cap="flat" cmpd="sng" algn="ctr">
+                      <a:solidFill>
+                        <a:srgbClr val="DDDDDD"/>
+                      </a:solidFill>
+                      <a:prstDash val="solid"/>
+                      <a:round/>
+                      <a:headEnd type="none" w="med" len="med"/>
+                      <a:tailEnd type="none" w="med" len="med"/>
+                    </a:lnR>
+                    <a:lnT w="12700" cap="flat" cmpd="sng" algn="ctr">
+                      <a:solidFill>
+                        <a:srgbClr val="DDDDDD"/>
+                      </a:solidFill>
+                      <a:prstDash val="solid"/>
+                      <a:round/>
+                      <a:headEnd type="none" w="med" len="med"/>
+                      <a:tailEnd type="none" w="med" len="med"/>
+                    </a:lnT>
+                    <a:lnB w="12700" cap="flat" cmpd="sng" algn="ctr">
+                      <a:solidFill>
+                        <a:srgbClr val="DDDDDD"/>
+                      </a:solidFill>
+                      <a:prstDash val="solid"/>
+                      <a:round/>
+                      <a:headEnd type="none" w="med" len="med"/>
+                      <a:tailEnd type="none" w="med" len="med"/>
+                    </a:lnB>
+                    <a:solidFill>
+                      <a:srgbClr val="CC3300"/>
+                    </a:solidFill>
+                  </a:tcPr>
+                </a:tc>
+                <a:tc>
+                  <a:txBody>
+                    <a:bodyPr/>
+                    <a:lstStyle/>
+                    <a:p>
+                      <a:pPr indent="0" marL="0">
+                        <a:buNone/>
+                      </a:pPr>
+                      <a:r>
+                        <a:rPr lang="en-US" sz="1000" b="1" dirty="0">
+                          <a:solidFill>
+                            <a:srgbClr val="FFFFFF"/>
+                          </a:solidFill>
+                          <a:latin typeface="Malgun Gothic" pitchFamily="34" charset="0"/>
+                          <a:ea typeface="Malgun Gothic" pitchFamily="34" charset="-122"/>
+                          <a:cs typeface="Malgun Gothic" pitchFamily="34" charset="-120"/>
+                        </a:rPr>
+                        <a:t>Proposed 방전 횟수</a:t>
+                      </a:r>
+                      <a:endParaRPr lang="en-US" sz="1000" dirty="0">
+                        <a:latin typeface="Malgun Gothic" charset="0"/>
+                        <a:ea typeface="Malgun Gothic" charset="0"/>
+                        <a:cs typeface="Malgun Gothic" charset="0"/>
+                      </a:endParaRPr>
+                    </a:p>
+                  </a:txBody>
+                  <a:tcPr marL="91440" marR="91440" marT="45720" marB="45720">
+                    <a:lnL w="12700" cap="flat" cmpd="sng" algn="ctr">
+                      <a:solidFill>
+                        <a:srgbClr val="DDDDDD"/>
+                      </a:solidFill>
+                      <a:prstDash val="solid"/>
+                      <a:round/>
+                      <a:headEnd type="none" w="med" len="med"/>
+                      <a:tailEnd type="none" w="med" len="med"/>
+                    </a:lnL>
+                    <a:lnR w="12700" cap="flat" cmpd="sng" algn="ctr">
+                      <a:solidFill>
+                        <a:srgbClr val="DDDDDD"/>
+                      </a:solidFill>
+                      <a:prstDash val="solid"/>
+                      <a:round/>
+                      <a:headEnd type="none" w="med" len="med"/>
+                      <a:tailEnd type="none" w="med" len="med"/>
+                    </a:lnR>
+                    <a:lnT w="12700" cap="flat" cmpd="sng" algn="ctr">
+                      <a:solidFill>
+                        <a:srgbClr val="DDDDDD"/>
+                      </a:solidFill>
+                      <a:prstDash val="solid"/>
+                      <a:round/>
+                      <a:headEnd type="none" w="med" len="med"/>
+                      <a:tailEnd type="none" w="med" len="med"/>
+                    </a:lnT>
+                    <a:lnB w="12700" cap="flat" cmpd="sng" algn="ctr">
+                      <a:solidFill>
+                        <a:srgbClr val="DDDDDD"/>
+                      </a:solidFill>
+                      <a:prstDash val="solid"/>
+                      <a:round/>
+                      <a:headEnd type="none" w="med" len="med"/>
+                      <a:tailEnd type="none" w="med" len="med"/>
+                    </a:lnB>
+                    <a:solidFill>
+                      <a:srgbClr val="005BAC"/>
+                    </a:solidFill>
+                  </a:tcPr>
+                </a:tc>
+                <a:tc>
+                  <a:txBody>
+                    <a:bodyPr/>
+                    <a:lstStyle/>
+                    <a:p>
+                      <a:pPr indent="0" marL="0">
+                        <a:buNone/>
+                      </a:pPr>
+                      <a:r>
+                        <a:rPr lang="en-US" sz="1000" b="1" dirty="0">
+                          <a:solidFill>
+                            <a:srgbClr val="FFFFFF"/>
+                          </a:solidFill>
+                          <a:latin typeface="Malgun Gothic" pitchFamily="34" charset="0"/>
+                          <a:ea typeface="Malgun Gothic" pitchFamily="34" charset="-122"/>
+                          <a:cs typeface="Malgun Gothic" pitchFamily="34" charset="-120"/>
+                        </a:rPr>
+                        <a:t>판정</a:t>
+                      </a:r>
+                      <a:endParaRPr lang="en-US" sz="1000" dirty="0">
+                        <a:latin typeface="Malgun Gothic" charset="0"/>
+                        <a:ea typeface="Malgun Gothic" charset="0"/>
+                        <a:cs typeface="Malgun Gothic" charset="0"/>
+                      </a:endParaRPr>
+                    </a:p>
+                  </a:txBody>
+                  <a:tcPr marL="91440" marR="91440" marT="45720" marB="45720">
+                    <a:lnL w="12700" cap="flat" cmpd="sng" algn="ctr">
+                      <a:solidFill>
+                        <a:srgbClr val="DDDDDD"/>
+                      </a:solidFill>
+                      <a:prstDash val="solid"/>
+                      <a:round/>
+                      <a:headEnd type="none" w="med" len="med"/>
+                      <a:tailEnd type="none" w="med" len="med"/>
+                    </a:lnL>
+                    <a:lnR w="12700" cap="flat" cmpd="sng" algn="ctr">
+                      <a:solidFill>
+                        <a:srgbClr val="DDDDDD"/>
+                      </a:solidFill>
+                      <a:prstDash val="solid"/>
+                      <a:round/>
+                      <a:headEnd type="none" w="med" len="med"/>
+                      <a:tailEnd type="none" w="med" len="med"/>
+                    </a:lnR>
+                    <a:lnT w="12700" cap="flat" cmpd="sng" algn="ctr">
+                      <a:solidFill>
+                        <a:srgbClr val="DDDDDD"/>
+                      </a:solidFill>
+                      <a:prstDash val="solid"/>
+                      <a:round/>
+                      <a:headEnd type="none" w="med" len="med"/>
+                      <a:tailEnd type="none" w="med" len="med"/>
+                    </a:lnT>
+                    <a:lnB w="12700" cap="flat" cmpd="sng" algn="ctr">
+                      <a:solidFill>
+                        <a:srgbClr val="DDDDDD"/>
+                      </a:solidFill>
+                      <a:prstDash val="solid"/>
+                      <a:round/>
+                      <a:headEnd type="none" w="med" len="med"/>
+                      <a:tailEnd type="none" w="med" len="med"/>
+                    </a:lnB>
+                    <a:solidFill>
+                      <a:srgbClr val="1A1A1A"/>
+                    </a:solidFill>
+                  </a:tcPr>
+                </a:tc>
+                <a:tc>
+                  <a:txBody>
+                    <a:bodyPr/>
+                    <a:lstStyle/>
+                    <a:p>
+                      <a:pPr indent="0" marL="0">
+                        <a:buNone/>
+                      </a:pPr>
+                      <a:r>
+                        <a:rPr lang="en-US" sz="1000" b="1" dirty="0">
+                          <a:solidFill>
+                            <a:srgbClr val="FFFFFF"/>
+                          </a:solidFill>
+                          <a:latin typeface="Malgun Gothic" pitchFamily="34" charset="0"/>
+                          <a:ea typeface="Malgun Gothic" pitchFamily="34" charset="-122"/>
+                          <a:cs typeface="Malgun Gothic" pitchFamily="34" charset="-120"/>
+                        </a:rPr>
+                        <a:t>해석</a:t>
+                      </a:r>
+                      <a:endParaRPr lang="en-US" sz="1000" dirty="0">
+                        <a:latin typeface="Malgun Gothic" charset="0"/>
+                        <a:ea typeface="Malgun Gothic" charset="0"/>
+                        <a:cs typeface="Malgun Gothic" charset="0"/>
+                      </a:endParaRPr>
+                    </a:p>
+                  </a:txBody>
+                  <a:tcPr marL="91440" marR="91440" marT="45720" marB="45720">
+                    <a:lnL w="12700" cap="flat" cmpd="sng" algn="ctr">
+                      <a:solidFill>
+                        <a:srgbClr val="DDDDDD"/>
+                      </a:solidFill>
+                      <a:prstDash val="solid"/>
+                      <a:round/>
+                      <a:headEnd type="none" w="med" len="med"/>
+                      <a:tailEnd type="none" w="med" len="med"/>
+                    </a:lnL>
+                    <a:lnR w="12700" cap="flat" cmpd="sng" algn="ctr">
+                      <a:solidFill>
+                        <a:srgbClr val="DDDDDD"/>
+                      </a:solidFill>
+                      <a:prstDash val="solid"/>
+                      <a:round/>
+                      <a:headEnd type="none" w="med" len="med"/>
+                      <a:tailEnd type="none" w="med" len="med"/>
+                    </a:lnR>
+                    <a:lnT w="12700" cap="flat" cmpd="sng" algn="ctr">
+                      <a:solidFill>
+                        <a:srgbClr val="DDDDDD"/>
+                      </a:solidFill>
+                      <a:prstDash val="solid"/>
+                      <a:round/>
+                      <a:headEnd type="none" w="med" len="med"/>
+                      <a:tailEnd type="none" w="med" len="med"/>
+                    </a:lnT>
+                    <a:lnB w="12700" cap="flat" cmpd="sng" algn="ctr">
+                      <a:solidFill>
+                        <a:srgbClr val="DDDDDD"/>
+                      </a:solidFill>
+                      <a:prstDash val="solid"/>
+                      <a:round/>
+                      <a:headEnd type="none" w="med" len="med"/>
+                      <a:tailEnd type="none" w="med" len="med"/>
+                    </a:lnB>
+                    <a:solidFill>
+                      <a:srgbClr val="1A1A1A"/>
+                    </a:solidFill>
+                  </a:tcPr>
+                </a:tc>
+              </a:tr>
+              <a:tr h="457200">
+                <a:tc>
+                  <a:txBody>
+                    <a:bodyPr/>
+                    <a:lstStyle/>
+                    <a:p>
+                      <a:pPr indent="0" marL="0">
+                        <a:buNone/>
+                      </a:pPr>
+                      <a:r>
+                        <a:rPr lang="en-US" sz="1000" dirty="0">
+                          <a:solidFill>
+                            <a:srgbClr val="000000"/>
+                          </a:solidFill>
+                          <a:latin typeface="Malgun Gothic" pitchFamily="34" charset="0"/>
+                          <a:ea typeface="Malgun Gothic" pitchFamily="34" charset="-122"/>
+                          <a:cs typeface="Malgun Gothic" pitchFamily="34" charset="-120"/>
+                        </a:rPr>
+                        <a:t>ep 1~100</a:t>
+                      </a:r>
+                      <a:endParaRPr lang="en-US" sz="1000" dirty="0">
+                        <a:latin typeface="Malgun Gothic" charset="0"/>
+                        <a:ea typeface="Malgun Gothic" charset="0"/>
+                        <a:cs typeface="Malgun Gothic" charset="0"/>
+                      </a:endParaRPr>
+                    </a:p>
+                    <a:p>
+                      <a:pPr indent="0" marL="0">
+                        <a:buNone/>
+                      </a:pPr>
+                      <a:r>
+                        <a:rPr lang="en-US" sz="1000" dirty="0">
+                          <a:solidFill>
+                            <a:srgbClr val="000000"/>
+                          </a:solidFill>
+                          <a:latin typeface="Malgun Gothic" pitchFamily="34" charset="0"/>
+                          <a:ea typeface="Malgun Gothic" pitchFamily="34" charset="-122"/>
+                          <a:cs typeface="Malgun Gothic" pitchFamily="34" charset="-120"/>
+                        </a:rPr>
+                        <a:t>(완전 탐색기)</a:t>
+                      </a:r>
+                      <a:endParaRPr lang="en-US" sz="1000" dirty="0">
+                        <a:latin typeface="Malgun Gothic" charset="0"/>
+                        <a:ea typeface="Malgun Gothic" charset="0"/>
+                        <a:cs typeface="Malgun Gothic" charset="0"/>
+                      </a:endParaRPr>
+                    </a:p>
+                  </a:txBody>
+                  <a:tcPr marL="91440" marR="91440" marT="45720" marB="45720">
+                    <a:lnL w="12700" cap="flat" cmpd="sng" algn="ctr">
+                      <a:solidFill>
+                        <a:srgbClr val="DDDDDD"/>
+                      </a:solidFill>
+                      <a:prstDash val="solid"/>
+                      <a:round/>
+                      <a:headEnd type="none" w="med" len="med"/>
+                      <a:tailEnd type="none" w="med" len="med"/>
+                    </a:lnL>
+                    <a:lnR w="12700" cap="flat" cmpd="sng" algn="ctr">
+                      <a:solidFill>
+                        <a:srgbClr val="DDDDDD"/>
+                      </a:solidFill>
+                      <a:prstDash val="solid"/>
+                      <a:round/>
+                      <a:headEnd type="none" w="med" len="med"/>
+                      <a:tailEnd type="none" w="med" len="med"/>
+                    </a:lnR>
+                    <a:lnT w="12700" cap="flat" cmpd="sng" algn="ctr">
+                      <a:solidFill>
+                        <a:srgbClr val="DDDDDD"/>
+                      </a:solidFill>
+                      <a:prstDash val="solid"/>
+                      <a:round/>
+                      <a:headEnd type="none" w="med" len="med"/>
+                      <a:tailEnd type="none" w="med" len="med"/>
+                    </a:lnT>
+                    <a:lnB w="12700" cap="flat" cmpd="sng" algn="ctr">
+                      <a:solidFill>
+                        <a:srgbClr val="DDDDDD"/>
+                      </a:solidFill>
+                      <a:prstDash val="solid"/>
+                      <a:round/>
+                      <a:headEnd type="none" w="med" len="med"/>
+                      <a:tailEnd type="none" w="med" len="med"/>
+                    </a:lnB>
+                    <a:solidFill>
+                      <a:srgbClr val="F5F5F5"/>
+                    </a:solidFill>
+                  </a:tcPr>
+                </a:tc>
+                <a:tc>
+                  <a:txBody>
+                    <a:bodyPr/>
+                    <a:lstStyle/>
+                    <a:p>
+                      <a:pPr indent="0" marL="0">
+                        <a:buNone/>
+                      </a:pPr>
+                      <a:r>
+                        <a:rPr lang="en-US" sz="1000" dirty="0">
+                          <a:solidFill>
+                            <a:srgbClr val="000000"/>
+                          </a:solidFill>
+                          <a:latin typeface="Malgun Gothic" pitchFamily="34" charset="0"/>
+                          <a:ea typeface="Malgun Gothic" pitchFamily="34" charset="-122"/>
+                          <a:cs typeface="Malgun Gothic" pitchFamily="34" charset="-120"/>
+                        </a:rPr>
+                        <a:t>52.0회</a:t>
+                      </a:r>
+                      <a:endParaRPr lang="en-US" sz="1000" dirty="0">
+                        <a:latin typeface="Malgun Gothic" charset="0"/>
+                        <a:ea typeface="Malgun Gothic" charset="0"/>
+                        <a:cs typeface="Malgun Gothic" charset="0"/>
+                      </a:endParaRPr>
+                    </a:p>
+                  </a:txBody>
+                  <a:tcPr marL="91440" marR="91440" marT="45720" marB="45720">
+                    <a:lnL w="12700" cap="flat" cmpd="sng" algn="ctr">
+                      <a:solidFill>
+                        <a:srgbClr val="DDDDDD"/>
+                      </a:solidFill>
+                      <a:prstDash val="solid"/>
+                      <a:round/>
+                      <a:headEnd type="none" w="med" len="med"/>
+                      <a:tailEnd type="none" w="med" len="med"/>
+                    </a:lnL>
+                    <a:lnR w="12700" cap="flat" cmpd="sng" algn="ctr">
+                      <a:solidFill>
+                        <a:srgbClr val="DDDDDD"/>
+                      </a:solidFill>
+                      <a:prstDash val="solid"/>
+                      <a:round/>
+                      <a:headEnd type="none" w="med" len="med"/>
+                      <a:tailEnd type="none" w="med" len="med"/>
+                    </a:lnR>
+                    <a:lnT w="12700" cap="flat" cmpd="sng" algn="ctr">
+                      <a:solidFill>
+                        <a:srgbClr val="DDDDDD"/>
+                      </a:solidFill>
+                      <a:prstDash val="solid"/>
+                      <a:round/>
+                      <a:headEnd type="none" w="med" len="med"/>
+                      <a:tailEnd type="none" w="med" len="med"/>
+                    </a:lnT>
+                    <a:lnB w="12700" cap="flat" cmpd="sng" algn="ctr">
+                      <a:solidFill>
+                        <a:srgbClr val="DDDDDD"/>
+                      </a:solidFill>
+                      <a:prstDash val="solid"/>
+                      <a:round/>
+                      <a:headEnd type="none" w="med" len="med"/>
+                      <a:tailEnd type="none" w="med" len="med"/>
+                    </a:lnB>
+                    <a:solidFill>
+                      <a:srgbClr val="F5F5F5"/>
+                    </a:solidFill>
+                  </a:tcPr>
+                </a:tc>
+                <a:tc>
+                  <a:txBody>
+                    <a:bodyPr/>
+                    <a:lstStyle/>
+                    <a:p>
+                      <a:pPr indent="0" marL="0">
+                        <a:buNone/>
+                      </a:pPr>
+                      <a:r>
+                        <a:rPr lang="en-US" sz="1000" dirty="0">
+                          <a:solidFill>
+                            <a:srgbClr val="000000"/>
+                          </a:solidFill>
+                          <a:latin typeface="Malgun Gothic" pitchFamily="34" charset="0"/>
+                          <a:ea typeface="Malgun Gothic" pitchFamily="34" charset="-122"/>
+                          <a:cs typeface="Malgun Gothic" pitchFamily="34" charset="-120"/>
+                        </a:rPr>
+                        <a:t>48.8회</a:t>
+                      </a:r>
+                      <a:endParaRPr lang="en-US" sz="1000" dirty="0">
+                        <a:latin typeface="Malgun Gothic" charset="0"/>
+                        <a:ea typeface="Malgun Gothic" charset="0"/>
+                        <a:cs typeface="Malgun Gothic" charset="0"/>
+                      </a:endParaRPr>
+                    </a:p>
+                  </a:txBody>
+                  <a:tcPr marL="91440" marR="91440" marT="45720" marB="45720">
+                    <a:lnL w="12700" cap="flat" cmpd="sng" algn="ctr">
+                      <a:solidFill>
+                        <a:srgbClr val="DDDDDD"/>
+                      </a:solidFill>
+                      <a:prstDash val="solid"/>
+                      <a:round/>
+                      <a:headEnd type="none" w="med" len="med"/>
+                      <a:tailEnd type="none" w="med" len="med"/>
+                    </a:lnL>
+                    <a:lnR w="12700" cap="flat" cmpd="sng" algn="ctr">
+                      <a:solidFill>
+                        <a:srgbClr val="DDDDDD"/>
+                      </a:solidFill>
+                      <a:prstDash val="solid"/>
+                      <a:round/>
+                      <a:headEnd type="none" w="med" len="med"/>
+                      <a:tailEnd type="none" w="med" len="med"/>
+                    </a:lnR>
+                    <a:lnT w="12700" cap="flat" cmpd="sng" algn="ctr">
+                      <a:solidFill>
+                        <a:srgbClr val="DDDDDD"/>
+                      </a:solidFill>
+                      <a:prstDash val="solid"/>
+                      <a:round/>
+                      <a:headEnd type="none" w="med" len="med"/>
+                      <a:tailEnd type="none" w="med" len="med"/>
+                    </a:lnT>
+                    <a:lnB w="12700" cap="flat" cmpd="sng" algn="ctr">
+                      <a:solidFill>
+                        <a:srgbClr val="DDDDDD"/>
+                      </a:solidFill>
+                      <a:prstDash val="solid"/>
+                      <a:round/>
+                      <a:headEnd type="none" w="med" len="med"/>
+                      <a:tailEnd type="none" w="med" len="med"/>
+                    </a:lnB>
+                    <a:solidFill>
+                      <a:srgbClr val="F5F5F5"/>
+                    </a:solidFill>
+                  </a:tcPr>
+                </a:tc>
+                <a:tc>
+                  <a:txBody>
+                    <a:bodyPr/>
+                    <a:lstStyle/>
+                    <a:p>
+                      <a:pPr indent="0" marL="0">
+                        <a:buNone/>
+                      </a:pPr>
+                      <a:r>
+                        <a:rPr lang="en-US" sz="1000" dirty="0">
+                          <a:solidFill>
+                            <a:srgbClr val="767676"/>
+                          </a:solidFill>
+                          <a:latin typeface="Malgun Gothic" pitchFamily="34" charset="0"/>
+                          <a:ea typeface="Malgun Gothic" pitchFamily="34" charset="-122"/>
+                          <a:cs typeface="Malgun Gothic" pitchFamily="34" charset="-120"/>
+                        </a:rPr>
+                        <a:t>≈ 동일</a:t>
+                      </a:r>
+                      <a:endParaRPr lang="en-US" sz="1000" dirty="0">
+                        <a:latin typeface="Malgun Gothic" charset="0"/>
+                        <a:ea typeface="Malgun Gothic" charset="0"/>
+                        <a:cs typeface="Malgun Gothic" charset="0"/>
+                      </a:endParaRPr>
+                    </a:p>
+                  </a:txBody>
+                  <a:tcPr marL="91440" marR="91440" marT="45720" marB="45720">
+                    <a:lnL w="12700" cap="flat" cmpd="sng" algn="ctr">
+                      <a:solidFill>
+                        <a:srgbClr val="DDDDDD"/>
+                      </a:solidFill>
+                      <a:prstDash val="solid"/>
+                      <a:round/>
+                      <a:headEnd type="none" w="med" len="med"/>
+                      <a:tailEnd type="none" w="med" len="med"/>
+                    </a:lnL>
+                    <a:lnR w="12700" cap="flat" cmpd="sng" algn="ctr">
+                      <a:solidFill>
+                        <a:srgbClr val="DDDDDD"/>
+                      </a:solidFill>
+                      <a:prstDash val="solid"/>
+                      <a:round/>
+                      <a:headEnd type="none" w="med" len="med"/>
+                      <a:tailEnd type="none" w="med" len="med"/>
+                    </a:lnR>
+                    <a:lnT w="12700" cap="flat" cmpd="sng" algn="ctr">
+                      <a:solidFill>
+                        <a:srgbClr val="DDDDDD"/>
+                      </a:solidFill>
+                      <a:prstDash val="solid"/>
+                      <a:round/>
+                      <a:headEnd type="none" w="med" len="med"/>
+                      <a:tailEnd type="none" w="med" len="med"/>
+                    </a:lnT>
+                    <a:lnB w="12700" cap="flat" cmpd="sng" algn="ctr">
+                      <a:solidFill>
+                        <a:srgbClr val="DDDDDD"/>
+                      </a:solidFill>
+                      <a:prstDash val="solid"/>
+                      <a:round/>
+                      <a:headEnd type="none" w="med" len="med"/>
+                      <a:tailEnd type="none" w="med" len="med"/>
+                    </a:lnB>
+                    <a:solidFill>
+                      <a:srgbClr val="F5F5F5"/>
+                    </a:solidFill>
+                  </a:tcPr>
+                </a:tc>
+                <a:tc>
+                  <a:txBody>
+                    <a:bodyPr/>
+                    <a:lstStyle/>
+                    <a:p>
+                      <a:pPr indent="0" marL="0">
+                        <a:buNone/>
+                      </a:pPr>
+                      <a:r>
+                        <a:rPr lang="en-US" sz="1000" dirty="0">
+                          <a:solidFill>
+                            <a:srgbClr val="000000"/>
+                          </a:solidFill>
+                          <a:latin typeface="Malgun Gothic" pitchFamily="34" charset="0"/>
+                          <a:ea typeface="Malgun Gothic" pitchFamily="34" charset="-122"/>
+                          <a:cs typeface="Malgun Gothic" pitchFamily="34" charset="-120"/>
+                        </a:rPr>
+                        <a:t>epsilon=1.0, 완전 랜덤 행동 — 차이 없음</a:t>
+                      </a:r>
+                      <a:endParaRPr lang="en-US" sz="1000" dirty="0">
+                        <a:latin typeface="Malgun Gothic" charset="0"/>
+                        <a:ea typeface="Malgun Gothic" charset="0"/>
+                        <a:cs typeface="Malgun Gothic" charset="0"/>
+                      </a:endParaRPr>
+                    </a:p>
+                  </a:txBody>
+                  <a:tcPr marL="91440" marR="91440" marT="45720" marB="45720">
+                    <a:lnL w="12700" cap="flat" cmpd="sng" algn="ctr">
+                      <a:solidFill>
+                        <a:srgbClr val="DDDDDD"/>
+                      </a:solidFill>
+                      <a:prstDash val="solid"/>
+                      <a:round/>
+                      <a:headEnd type="none" w="med" len="med"/>
+                      <a:tailEnd type="none" w="med" len="med"/>
+                    </a:lnL>
+                    <a:lnR w="12700" cap="flat" cmpd="sng" algn="ctr">
+                      <a:solidFill>
+                        <a:srgbClr val="DDDDDD"/>
+                      </a:solidFill>
+                      <a:prstDash val="solid"/>
+                      <a:round/>
+                      <a:headEnd type="none" w="med" len="med"/>
+                      <a:tailEnd type="none" w="med" len="med"/>
+                    </a:lnR>
+                    <a:lnT w="12700" cap="flat" cmpd="sng" algn="ctr">
+                      <a:solidFill>
+                        <a:srgbClr val="DDDDDD"/>
+                      </a:solidFill>
+                      <a:prstDash val="solid"/>
+                      <a:round/>
+                      <a:headEnd type="none" w="med" len="med"/>
+                      <a:tailEnd type="none" w="med" len="med"/>
+                    </a:lnT>
+                    <a:lnB w="12700" cap="flat" cmpd="sng" algn="ctr">
+                      <a:solidFill>
+                        <a:srgbClr val="DDDDDD"/>
+                      </a:solidFill>
+                      <a:prstDash val="solid"/>
+                      <a:round/>
+                      <a:headEnd type="none" w="med" len="med"/>
+                      <a:tailEnd type="none" w="med" len="med"/>
+                    </a:lnB>
+                    <a:solidFill>
+                      <a:srgbClr val="F5F5F5"/>
+                    </a:solidFill>
+                  </a:tcPr>
+                </a:tc>
+              </a:tr>
+              <a:tr h="457200">
+                <a:tc>
+                  <a:txBody>
+                    <a:bodyPr/>
+                    <a:lstStyle/>
+                    <a:p>
+                      <a:pPr indent="0" marL="0">
+                        <a:buNone/>
+                      </a:pPr>
+                      <a:r>
+                        <a:rPr lang="en-US" sz="1000" dirty="0">
+                          <a:solidFill>
+                            <a:srgbClr val="000000"/>
+                          </a:solidFill>
+                          <a:latin typeface="Malgun Gothic" pitchFamily="34" charset="0"/>
+                          <a:ea typeface="Malgun Gothic" pitchFamily="34" charset="-122"/>
+                          <a:cs typeface="Malgun Gothic" pitchFamily="34" charset="-120"/>
+                        </a:rPr>
+                        <a:t>ep 101~200</a:t>
+                      </a:r>
+                      <a:endParaRPr lang="en-US" sz="1000" dirty="0">
+                        <a:latin typeface="Malgun Gothic" charset="0"/>
+                        <a:ea typeface="Malgun Gothic" charset="0"/>
+                        <a:cs typeface="Malgun Gothic" charset="0"/>
+                      </a:endParaRPr>
+                    </a:p>
+                    <a:p>
+                      <a:pPr indent="0" marL="0">
+                        <a:buNone/>
+                      </a:pPr>
+                      <a:r>
+                        <a:rPr lang="en-US" sz="1000" dirty="0">
+                          <a:solidFill>
+                            <a:srgbClr val="000000"/>
+                          </a:solidFill>
+                          <a:latin typeface="Malgun Gothic" pitchFamily="34" charset="0"/>
+                          <a:ea typeface="Malgun Gothic" pitchFamily="34" charset="-122"/>
+                          <a:cs typeface="Malgun Gothic" pitchFamily="34" charset="-120"/>
+                        </a:rPr>
+                        <a:t>(초기 학습)</a:t>
+                      </a:r>
+                      <a:endParaRPr lang="en-US" sz="1000" dirty="0">
+                        <a:latin typeface="Malgun Gothic" charset="0"/>
+                        <a:ea typeface="Malgun Gothic" charset="0"/>
+                        <a:cs typeface="Malgun Gothic" charset="0"/>
+                      </a:endParaRPr>
+                    </a:p>
+                  </a:txBody>
+                  <a:tcPr marL="91440" marR="91440" marT="45720" marB="45720">
+                    <a:lnL w="12700" cap="flat" cmpd="sng" algn="ctr">
+                      <a:solidFill>
+                        <a:srgbClr val="DDDDDD"/>
+                      </a:solidFill>
+                      <a:prstDash val="solid"/>
+                      <a:round/>
+                      <a:headEnd type="none" w="med" len="med"/>
+                      <a:tailEnd type="none" w="med" len="med"/>
+                    </a:lnL>
+                    <a:lnR w="12700" cap="flat" cmpd="sng" algn="ctr">
+                      <a:solidFill>
+                        <a:srgbClr val="DDDDDD"/>
+                      </a:solidFill>
+                      <a:prstDash val="solid"/>
+                      <a:round/>
+                      <a:headEnd type="none" w="med" len="med"/>
+                      <a:tailEnd type="none" w="med" len="med"/>
+                    </a:lnR>
+                    <a:lnT w="12700" cap="flat" cmpd="sng" algn="ctr">
+                      <a:solidFill>
+                        <a:srgbClr val="DDDDDD"/>
+                      </a:solidFill>
+                      <a:prstDash val="solid"/>
+                      <a:round/>
+                      <a:headEnd type="none" w="med" len="med"/>
+                      <a:tailEnd type="none" w="med" len="med"/>
+                    </a:lnT>
+                    <a:lnB w="12700" cap="flat" cmpd="sng" algn="ctr">
+                      <a:solidFill>
+                        <a:srgbClr val="DDDDDD"/>
+                      </a:solidFill>
+                      <a:prstDash val="solid"/>
+                      <a:round/>
+                      <a:headEnd type="none" w="med" len="med"/>
+                      <a:tailEnd type="none" w="med" len="med"/>
+                    </a:lnB>
+                    <a:solidFill>
+                      <a:srgbClr val="F5F5F5"/>
+                    </a:solidFill>
+                  </a:tcPr>
+                </a:tc>
+                <a:tc>
+                  <a:txBody>
+                    <a:bodyPr/>
+                    <a:lstStyle/>
+                    <a:p>
+                      <a:pPr indent="0" marL="0">
+                        <a:buNone/>
+                      </a:pPr>
+                      <a:r>
+                        <a:rPr lang="en-US" sz="1000" dirty="0">
+                          <a:solidFill>
+                            <a:srgbClr val="000000"/>
+                          </a:solidFill>
+                          <a:latin typeface="Malgun Gothic" pitchFamily="34" charset="0"/>
+                          <a:ea typeface="Malgun Gothic" pitchFamily="34" charset="-122"/>
+                          <a:cs typeface="Malgun Gothic" pitchFamily="34" charset="-120"/>
+                        </a:rPr>
+                        <a:t>20.6회</a:t>
+                      </a:r>
+                      <a:endParaRPr lang="en-US" sz="1000" dirty="0">
+                        <a:latin typeface="Malgun Gothic" charset="0"/>
+                        <a:ea typeface="Malgun Gothic" charset="0"/>
+                        <a:cs typeface="Malgun Gothic" charset="0"/>
+                      </a:endParaRPr>
+                    </a:p>
+                  </a:txBody>
+                  <a:tcPr marL="91440" marR="91440" marT="45720" marB="45720">
+                    <a:lnL w="12700" cap="flat" cmpd="sng" algn="ctr">
+                      <a:solidFill>
+                        <a:srgbClr val="DDDDDD"/>
+                      </a:solidFill>
+                      <a:prstDash val="solid"/>
+                      <a:round/>
+                      <a:headEnd type="none" w="med" len="med"/>
+                      <a:tailEnd type="none" w="med" len="med"/>
+                    </a:lnL>
+                    <a:lnR w="12700" cap="flat" cmpd="sng" algn="ctr">
+                      <a:solidFill>
+                        <a:srgbClr val="DDDDDD"/>
+                      </a:solidFill>
+                      <a:prstDash val="solid"/>
+                      <a:round/>
+                      <a:headEnd type="none" w="med" len="med"/>
+                      <a:tailEnd type="none" w="med" len="med"/>
+                    </a:lnR>
+                    <a:lnT w="12700" cap="flat" cmpd="sng" algn="ctr">
+                      <a:solidFill>
+                        <a:srgbClr val="DDDDDD"/>
+                      </a:solidFill>
+                      <a:prstDash val="solid"/>
+                      <a:round/>
+                      <a:headEnd type="none" w="med" len="med"/>
+                      <a:tailEnd type="none" w="med" len="med"/>
+                    </a:lnT>
+                    <a:lnB w="12700" cap="flat" cmpd="sng" algn="ctr">
+                      <a:solidFill>
+                        <a:srgbClr val="DDDDDD"/>
+                      </a:solidFill>
+                      <a:prstDash val="solid"/>
+                      <a:round/>
+                      <a:headEnd type="none" w="med" len="med"/>
+                      <a:tailEnd type="none" w="med" len="med"/>
+                    </a:lnB>
+                    <a:solidFill>
+                      <a:srgbClr val="F5F5F5"/>
+                    </a:solidFill>
+                  </a:tcPr>
+                </a:tc>
+                <a:tc>
+                  <a:txBody>
+                    <a:bodyPr/>
+                    <a:lstStyle/>
+                    <a:p>
+                      <a:pPr indent="0" marL="0">
+                        <a:buNone/>
+                      </a:pPr>
+                      <a:r>
+                        <a:rPr lang="en-US" sz="1000" dirty="0">
+                          <a:solidFill>
+                            <a:srgbClr val="000000"/>
+                          </a:solidFill>
+                          <a:latin typeface="Malgun Gothic" pitchFamily="34" charset="0"/>
+                          <a:ea typeface="Malgun Gothic" pitchFamily="34" charset="-122"/>
+                          <a:cs typeface="Malgun Gothic" pitchFamily="34" charset="-120"/>
+                        </a:rPr>
+                        <a:t>19.4회</a:t>
+                      </a:r>
+                      <a:endParaRPr lang="en-US" sz="1000" dirty="0">
+                        <a:latin typeface="Malgun Gothic" charset="0"/>
+                        <a:ea typeface="Malgun Gothic" charset="0"/>
+                        <a:cs typeface="Malgun Gothic" charset="0"/>
+                      </a:endParaRPr>
+                    </a:p>
+                  </a:txBody>
+                  <a:tcPr marL="91440" marR="91440" marT="45720" marB="45720">
+                    <a:lnL w="12700" cap="flat" cmpd="sng" algn="ctr">
+                      <a:solidFill>
+                        <a:srgbClr val="DDDDDD"/>
+                      </a:solidFill>
+                      <a:prstDash val="solid"/>
+                      <a:round/>
+                      <a:headEnd type="none" w="med" len="med"/>
+                      <a:tailEnd type="none" w="med" len="med"/>
+                    </a:lnL>
+                    <a:lnR w="12700" cap="flat" cmpd="sng" algn="ctr">
+                      <a:solidFill>
+                        <a:srgbClr val="DDDDDD"/>
+                      </a:solidFill>
+                      <a:prstDash val="solid"/>
+                      <a:round/>
+                      <a:headEnd type="none" w="med" len="med"/>
+                      <a:tailEnd type="none" w="med" len="med"/>
+                    </a:lnR>
+                    <a:lnT w="12700" cap="flat" cmpd="sng" algn="ctr">
+                      <a:solidFill>
+                        <a:srgbClr val="DDDDDD"/>
+                      </a:solidFill>
+                      <a:prstDash val="solid"/>
+                      <a:round/>
+                      <a:headEnd type="none" w="med" len="med"/>
+                      <a:tailEnd type="none" w="med" len="med"/>
+                    </a:lnT>
+                    <a:lnB w="12700" cap="flat" cmpd="sng" algn="ctr">
+                      <a:solidFill>
+                        <a:srgbClr val="DDDDDD"/>
+                      </a:solidFill>
+                      <a:prstDash val="solid"/>
+                      <a:round/>
+                      <a:headEnd type="none" w="med" len="med"/>
+                      <a:tailEnd type="none" w="med" len="med"/>
+                    </a:lnB>
+                    <a:solidFill>
+                      <a:srgbClr val="F5F5F5"/>
+                    </a:solidFill>
+                  </a:tcPr>
+                </a:tc>
+                <a:tc>
+                  <a:txBody>
+                    <a:bodyPr/>
+                    <a:lstStyle/>
+                    <a:p>
+                      <a:pPr indent="0" marL="0">
+                        <a:buNone/>
+                      </a:pPr>
+                      <a:r>
+                        <a:rPr lang="en-US" sz="1000" dirty="0">
+                          <a:solidFill>
+                            <a:srgbClr val="767676"/>
+                          </a:solidFill>
+                          <a:latin typeface="Malgun Gothic" pitchFamily="34" charset="0"/>
+                          <a:ea typeface="Malgun Gothic" pitchFamily="34" charset="-122"/>
+                          <a:cs typeface="Malgun Gothic" pitchFamily="34" charset="-120"/>
+                        </a:rPr>
+                        <a:t>≈ 동일</a:t>
+                      </a:r>
+                      <a:endParaRPr lang="en-US" sz="1000" dirty="0">
+                        <a:latin typeface="Malgun Gothic" charset="0"/>
+                        <a:ea typeface="Malgun Gothic" charset="0"/>
+                        <a:cs typeface="Malgun Gothic" charset="0"/>
+                      </a:endParaRPr>
+                    </a:p>
+                  </a:txBody>
+                  <a:tcPr marL="91440" marR="91440" marT="45720" marB="45720">
+                    <a:lnL w="12700" cap="flat" cmpd="sng" algn="ctr">
+                      <a:solidFill>
+                        <a:srgbClr val="DDDDDD"/>
+                      </a:solidFill>
+                      <a:prstDash val="solid"/>
+                      <a:round/>
+                      <a:headEnd type="none" w="med" len="med"/>
+                      <a:tailEnd type="none" w="med" len="med"/>
+                    </a:lnL>
+                    <a:lnR w="12700" cap="flat" cmpd="sng" algn="ctr">
+                      <a:solidFill>
+                        <a:srgbClr val="DDDDDD"/>
+                      </a:solidFill>
+                      <a:prstDash val="solid"/>
+                      <a:round/>
+                      <a:headEnd type="none" w="med" len="med"/>
+                      <a:tailEnd type="none" w="med" len="med"/>
+                    </a:lnR>
+                    <a:lnT w="12700" cap="flat" cmpd="sng" algn="ctr">
+                      <a:solidFill>
+                        <a:srgbClr val="DDDDDD"/>
+                      </a:solidFill>
+                      <a:prstDash val="solid"/>
+                      <a:round/>
+                      <a:headEnd type="none" w="med" len="med"/>
+                      <a:tailEnd type="none" w="med" len="med"/>
+                    </a:lnT>
+                    <a:lnB w="12700" cap="flat" cmpd="sng" algn="ctr">
+                      <a:solidFill>
+                        <a:srgbClr val="DDDDDD"/>
+                      </a:solidFill>
+                      <a:prstDash val="solid"/>
+                      <a:round/>
+                      <a:headEnd type="none" w="med" len="med"/>
+                      <a:tailEnd type="none" w="med" len="med"/>
+                    </a:lnB>
+                    <a:solidFill>
+                      <a:srgbClr val="F5F5F5"/>
+                    </a:solidFill>
+                  </a:tcPr>
+                </a:tc>
+                <a:tc>
+                  <a:txBody>
+                    <a:bodyPr/>
+                    <a:lstStyle/>
+                    <a:p>
+                      <a:pPr indent="0" marL="0">
+                        <a:buNone/>
+                      </a:pPr>
+                      <a:r>
+                        <a:rPr lang="en-US" sz="1000" dirty="0">
+                          <a:solidFill>
+                            <a:srgbClr val="000000"/>
+                          </a:solidFill>
+                          <a:latin typeface="Malgun Gothic" pitchFamily="34" charset="0"/>
+                          <a:ea typeface="Malgun Gothic" pitchFamily="34" charset="-122"/>
+                          <a:cs typeface="Malgun Gothic" pitchFamily="34" charset="-120"/>
+                        </a:rPr>
+                        <a:t>Safety 신호 학습 시작 — 아직 차이 미미</a:t>
+                      </a:r>
+                      <a:endParaRPr lang="en-US" sz="1000" dirty="0">
+                        <a:latin typeface="Malgun Gothic" charset="0"/>
+                        <a:ea typeface="Malgun Gothic" charset="0"/>
+                        <a:cs typeface="Malgun Gothic" charset="0"/>
+                      </a:endParaRPr>
+                    </a:p>
+                  </a:txBody>
+                  <a:tcPr marL="91440" marR="91440" marT="45720" marB="45720">
+                    <a:lnL w="12700" cap="flat" cmpd="sng" algn="ctr">
+                      <a:solidFill>
+                        <a:srgbClr val="DDDDDD"/>
+                      </a:solidFill>
+                      <a:prstDash val="solid"/>
+                      <a:round/>
+                      <a:headEnd type="none" w="med" len="med"/>
+                      <a:tailEnd type="none" w="med" len="med"/>
+                    </a:lnL>
+                    <a:lnR w="12700" cap="flat" cmpd="sng" algn="ctr">
+                      <a:solidFill>
+                        <a:srgbClr val="DDDDDD"/>
+                      </a:solidFill>
+                      <a:prstDash val="solid"/>
+                      <a:round/>
+                      <a:headEnd type="none" w="med" len="med"/>
+                      <a:tailEnd type="none" w="med" len="med"/>
+                    </a:lnR>
+                    <a:lnT w="12700" cap="flat" cmpd="sng" algn="ctr">
+                      <a:solidFill>
+                        <a:srgbClr val="DDDDDD"/>
+                      </a:solidFill>
+                      <a:prstDash val="solid"/>
+                      <a:round/>
+                      <a:headEnd type="none" w="med" len="med"/>
+                      <a:tailEnd type="none" w="med" len="med"/>
+                    </a:lnT>
+                    <a:lnB w="12700" cap="flat" cmpd="sng" algn="ctr">
+                      <a:solidFill>
+                        <a:srgbClr val="DDDDDD"/>
+                      </a:solidFill>
+                      <a:prstDash val="solid"/>
+                      <a:round/>
+                      <a:headEnd type="none" w="med" len="med"/>
+                      <a:tailEnd type="none" w="med" len="med"/>
+                    </a:lnB>
+                    <a:solidFill>
+                      <a:srgbClr val="F5F5F5"/>
+                    </a:solidFill>
+                  </a:tcPr>
+                </a:tc>
+              </a:tr>
+              <a:tr h="457200">
+                <a:tc>
+                  <a:txBody>
+                    <a:bodyPr/>
+                    <a:lstStyle/>
+                    <a:p>
+                      <a:pPr indent="0" marL="0">
+                        <a:buNone/>
+                      </a:pPr>
+                      <a:r>
+                        <a:rPr lang="en-US" sz="1000" dirty="0">
+                          <a:solidFill>
+                            <a:srgbClr val="000000"/>
+                          </a:solidFill>
+                          <a:latin typeface="Malgun Gothic" pitchFamily="34" charset="0"/>
+                          <a:ea typeface="Malgun Gothic" pitchFamily="34" charset="-122"/>
+                          <a:cs typeface="Malgun Gothic" pitchFamily="34" charset="-120"/>
+                        </a:rPr>
+                        <a:t>ep 201~300</a:t>
+                      </a:r>
+                      <a:endParaRPr lang="en-US" sz="1000" dirty="0">
+                        <a:latin typeface="Malgun Gothic" charset="0"/>
+                        <a:ea typeface="Malgun Gothic" charset="0"/>
+                        <a:cs typeface="Malgun Gothic" charset="0"/>
+                      </a:endParaRPr>
+                    </a:p>
+                    <a:p>
+                      <a:pPr indent="0" marL="0">
+                        <a:buNone/>
+                      </a:pPr>
+                      <a:r>
+                        <a:rPr lang="en-US" sz="1000" dirty="0">
+                          <a:solidFill>
+                            <a:srgbClr val="000000"/>
+                          </a:solidFill>
+                          <a:latin typeface="Malgun Gothic" pitchFamily="34" charset="0"/>
+                          <a:ea typeface="Malgun Gothic" pitchFamily="34" charset="-122"/>
+                          <a:cs typeface="Malgun Gothic" pitchFamily="34" charset="-120"/>
+                        </a:rPr>
+                        <a:t>(중기 학습)</a:t>
+                      </a:r>
+                      <a:endParaRPr lang="en-US" sz="1000" dirty="0">
+                        <a:latin typeface="Malgun Gothic" charset="0"/>
+                        <a:ea typeface="Malgun Gothic" charset="0"/>
+                        <a:cs typeface="Malgun Gothic" charset="0"/>
+                      </a:endParaRPr>
+                    </a:p>
+                  </a:txBody>
+                  <a:tcPr marL="91440" marR="91440" marT="45720" marB="45720">
+                    <a:lnL w="12700" cap="flat" cmpd="sng" algn="ctr">
+                      <a:solidFill>
+                        <a:srgbClr val="DDDDDD"/>
+                      </a:solidFill>
+                      <a:prstDash val="solid"/>
+                      <a:round/>
+                      <a:headEnd type="none" w="med" len="med"/>
+                      <a:tailEnd type="none" w="med" len="med"/>
+                    </a:lnL>
+                    <a:lnR w="12700" cap="flat" cmpd="sng" algn="ctr">
+                      <a:solidFill>
+                        <a:srgbClr val="DDDDDD"/>
+                      </a:solidFill>
+                      <a:prstDash val="solid"/>
+                      <a:round/>
+                      <a:headEnd type="none" w="med" len="med"/>
+                      <a:tailEnd type="none" w="med" len="med"/>
+                    </a:lnR>
+                    <a:lnT w="12700" cap="flat" cmpd="sng" algn="ctr">
+                      <a:solidFill>
+                        <a:srgbClr val="DDDDDD"/>
+                      </a:solidFill>
+                      <a:prstDash val="solid"/>
+                      <a:round/>
+                      <a:headEnd type="none" w="med" len="med"/>
+                      <a:tailEnd type="none" w="med" len="med"/>
+                    </a:lnT>
+                    <a:lnB w="12700" cap="flat" cmpd="sng" algn="ctr">
+                      <a:solidFill>
+                        <a:srgbClr val="DDDDDD"/>
+                      </a:solidFill>
+                      <a:prstDash val="solid"/>
+                      <a:round/>
+                      <a:headEnd type="none" w="med" len="med"/>
+                      <a:tailEnd type="none" w="med" len="med"/>
+                    </a:lnB>
+                    <a:solidFill>
+                      <a:srgbClr val="F5F5F5"/>
+                    </a:solidFill>
+                  </a:tcPr>
+                </a:tc>
+                <a:tc>
+                  <a:txBody>
+                    <a:bodyPr/>
+                    <a:lstStyle/>
+                    <a:p>
+                      <a:pPr indent="0" marL="0">
+                        <a:buNone/>
+                      </a:pPr>
+                      <a:r>
+                        <a:rPr lang="en-US" sz="1000" dirty="0">
+                          <a:solidFill>
+                            <a:srgbClr val="1E8A47"/>
+                          </a:solidFill>
+                          <a:latin typeface="Malgun Gothic" pitchFamily="34" charset="0"/>
+                          <a:ea typeface="Malgun Gothic" pitchFamily="34" charset="-122"/>
+                          <a:cs typeface="Malgun Gothic" pitchFamily="34" charset="-120"/>
+                        </a:rPr>
+                        <a:t>6.8회</a:t>
+                      </a:r>
+                      <a:endParaRPr lang="en-US" sz="1000" dirty="0">
+                        <a:latin typeface="Malgun Gothic" charset="0"/>
+                        <a:ea typeface="Malgun Gothic" charset="0"/>
+                        <a:cs typeface="Malgun Gothic" charset="0"/>
+                      </a:endParaRPr>
+                    </a:p>
+                  </a:txBody>
+                  <a:tcPr marL="91440" marR="91440" marT="45720" marB="45720">
+                    <a:lnL w="12700" cap="flat" cmpd="sng" algn="ctr">
+                      <a:solidFill>
+                        <a:srgbClr val="DDDDDD"/>
+                      </a:solidFill>
+                      <a:prstDash val="solid"/>
+                      <a:round/>
+                      <a:headEnd type="none" w="med" len="med"/>
+                      <a:tailEnd type="none" w="med" len="med"/>
+                    </a:lnL>
+                    <a:lnR w="12700" cap="flat" cmpd="sng" algn="ctr">
+                      <a:solidFill>
+                        <a:srgbClr val="DDDDDD"/>
+                      </a:solidFill>
+                      <a:prstDash val="solid"/>
+                      <a:round/>
+                      <a:headEnd type="none" w="med" len="med"/>
+                      <a:tailEnd type="none" w="med" len="med"/>
+                    </a:lnR>
+                    <a:lnT w="12700" cap="flat" cmpd="sng" algn="ctr">
+                      <a:solidFill>
+                        <a:srgbClr val="DDDDDD"/>
+                      </a:solidFill>
+                      <a:prstDash val="solid"/>
+                      <a:round/>
+                      <a:headEnd type="none" w="med" len="med"/>
+                      <a:tailEnd type="none" w="med" len="med"/>
+                    </a:lnT>
+                    <a:lnB w="12700" cap="flat" cmpd="sng" algn="ctr">
+                      <a:solidFill>
+                        <a:srgbClr val="DDDDDD"/>
+                      </a:solidFill>
+                      <a:prstDash val="solid"/>
+                      <a:round/>
+                      <a:headEnd type="none" w="med" len="med"/>
+                      <a:tailEnd type="none" w="med" len="med"/>
+                    </a:lnB>
+                    <a:solidFill>
+                      <a:srgbClr val="F5F5F5"/>
+                    </a:solidFill>
+                  </a:tcPr>
+                </a:tc>
+                <a:tc>
+                  <a:txBody>
+                    <a:bodyPr/>
+                    <a:lstStyle/>
+                    <a:p>
+                      <a:pPr indent="0" marL="0">
+                        <a:buNone/>
+                      </a:pPr>
+                      <a:r>
+                        <a:rPr lang="en-US" sz="1000" dirty="0">
+                          <a:solidFill>
+                            <a:srgbClr val="CC0000"/>
+                          </a:solidFill>
+                          <a:latin typeface="Malgun Gothic" pitchFamily="34" charset="0"/>
+                          <a:ea typeface="Malgun Gothic" pitchFamily="34" charset="-122"/>
+                          <a:cs typeface="Malgun Gothic" pitchFamily="34" charset="-120"/>
+                        </a:rPr>
+                        <a:t>10.0회</a:t>
+                      </a:r>
+                      <a:endParaRPr lang="en-US" sz="1000" dirty="0">
+                        <a:latin typeface="Malgun Gothic" charset="0"/>
+                        <a:ea typeface="Malgun Gothic" charset="0"/>
+                        <a:cs typeface="Malgun Gothic" charset="0"/>
+                      </a:endParaRPr>
+                    </a:p>
+                  </a:txBody>
+                  <a:tcPr marL="91440" marR="91440" marT="45720" marB="45720">
+                    <a:lnL w="12700" cap="flat" cmpd="sng" algn="ctr">
+                      <a:solidFill>
+                        <a:srgbClr val="DDDDDD"/>
+                      </a:solidFill>
+                      <a:prstDash val="solid"/>
+                      <a:round/>
+                      <a:headEnd type="none" w="med" len="med"/>
+                      <a:tailEnd type="none" w="med" len="med"/>
+                    </a:lnL>
+                    <a:lnR w="12700" cap="flat" cmpd="sng" algn="ctr">
+                      <a:solidFill>
+                        <a:srgbClr val="DDDDDD"/>
+                      </a:solidFill>
+                      <a:prstDash val="solid"/>
+                      <a:round/>
+                      <a:headEnd type="none" w="med" len="med"/>
+                      <a:tailEnd type="none" w="med" len="med"/>
+                    </a:lnR>
+                    <a:lnT w="12700" cap="flat" cmpd="sng" algn="ctr">
+                      <a:solidFill>
+                        <a:srgbClr val="DDDDDD"/>
+                      </a:solidFill>
+                      <a:prstDash val="solid"/>
+                      <a:round/>
+                      <a:headEnd type="none" w="med" len="med"/>
+                      <a:tailEnd type="none" w="med" len="med"/>
+                    </a:lnT>
+                    <a:lnB w="12700" cap="flat" cmpd="sng" algn="ctr">
+                      <a:solidFill>
+                        <a:srgbClr val="DDDDDD"/>
+                      </a:solidFill>
+                      <a:prstDash val="solid"/>
+                      <a:round/>
+                      <a:headEnd type="none" w="med" len="med"/>
+                      <a:tailEnd type="none" w="med" len="med"/>
+                    </a:lnB>
+                    <a:solidFill>
+                      <a:srgbClr val="F5F5F5"/>
+                    </a:solidFill>
+                  </a:tcPr>
+                </a:tc>
+                <a:tc>
+                  <a:txBody>
+                    <a:bodyPr/>
+                    <a:lstStyle/>
+                    <a:p>
+                      <a:pPr indent="0" marL="0">
+                        <a:buNone/>
+                      </a:pPr>
+                      <a:r>
+                        <a:rPr lang="en-US" sz="1000" b="1" dirty="0">
+                          <a:solidFill>
+                            <a:srgbClr val="CC6600"/>
+                          </a:solidFill>
+                          <a:latin typeface="Malgun Gothic" pitchFamily="34" charset="0"/>
+                          <a:ea typeface="Malgun Gothic" pitchFamily="34" charset="-122"/>
+                          <a:cs typeface="Malgun Gothic" pitchFamily="34" charset="-120"/>
+                        </a:rPr>
+                        <a:t>Baseline 우세</a:t>
+                      </a:r>
+                      <a:endParaRPr lang="en-US" sz="1000" dirty="0">
+                        <a:latin typeface="Malgun Gothic" charset="0"/>
+                        <a:ea typeface="Malgun Gothic" charset="0"/>
+                        <a:cs typeface="Malgun Gothic" charset="0"/>
+                      </a:endParaRPr>
+                    </a:p>
+                  </a:txBody>
+                  <a:tcPr marL="91440" marR="91440" marT="45720" marB="45720">
+                    <a:lnL w="12700" cap="flat" cmpd="sng" algn="ctr">
+                      <a:solidFill>
+                        <a:srgbClr val="DDDDDD"/>
+                      </a:solidFill>
+                      <a:prstDash val="solid"/>
+                      <a:round/>
+                      <a:headEnd type="none" w="med" len="med"/>
+                      <a:tailEnd type="none" w="med" len="med"/>
+                    </a:lnL>
+                    <a:lnR w="12700" cap="flat" cmpd="sng" algn="ctr">
+                      <a:solidFill>
+                        <a:srgbClr val="DDDDDD"/>
+                      </a:solidFill>
+                      <a:prstDash val="solid"/>
+                      <a:round/>
+                      <a:headEnd type="none" w="med" len="med"/>
+                      <a:tailEnd type="none" w="med" len="med"/>
+                    </a:lnR>
+                    <a:lnT w="12700" cap="flat" cmpd="sng" algn="ctr">
+                      <a:solidFill>
+                        <a:srgbClr val="DDDDDD"/>
+                      </a:solidFill>
+                      <a:prstDash val="solid"/>
+                      <a:round/>
+                      <a:headEnd type="none" w="med" len="med"/>
+                      <a:tailEnd type="none" w="med" len="med"/>
+                    </a:lnT>
+                    <a:lnB w="12700" cap="flat" cmpd="sng" algn="ctr">
+                      <a:solidFill>
+                        <a:srgbClr val="DDDDDD"/>
+                      </a:solidFill>
+                      <a:prstDash val="solid"/>
+                      <a:round/>
+                      <a:headEnd type="none" w="med" len="med"/>
+                      <a:tailEnd type="none" w="med" len="med"/>
+                    </a:lnB>
+                    <a:solidFill>
+                      <a:srgbClr val="F5F5F5"/>
+                    </a:solidFill>
+                  </a:tcPr>
+                </a:tc>
+                <a:tc>
+                  <a:txBody>
+                    <a:bodyPr/>
+                    <a:lstStyle/>
+                    <a:p>
+                      <a:pPr indent="0" marL="0">
+                        <a:buNone/>
+                      </a:pPr>
+                      <a:r>
+                        <a:rPr lang="en-US" sz="1000" dirty="0">
+                          <a:solidFill>
+                            <a:srgbClr val="000000"/>
+                          </a:solidFill>
+                          <a:latin typeface="Malgun Gothic" pitchFamily="34" charset="0"/>
+                          <a:ea typeface="Malgun Gothic" pitchFamily="34" charset="-122"/>
+                          <a:cs typeface="Malgun Gothic" pitchFamily="34" charset="-120"/>
+                        </a:rPr>
+                        <a:t>Baseline이 단순 회피 전략 먼저 수렴 — 일시적 역전</a:t>
+                      </a:r>
+                      <a:endParaRPr lang="en-US" sz="1000" dirty="0">
+                        <a:latin typeface="Malgun Gothic" charset="0"/>
+                        <a:ea typeface="Malgun Gothic" charset="0"/>
+                        <a:cs typeface="Malgun Gothic" charset="0"/>
+                      </a:endParaRPr>
+                    </a:p>
+                  </a:txBody>
+                  <a:tcPr marL="91440" marR="91440" marT="45720" marB="45720">
+                    <a:lnL w="12700" cap="flat" cmpd="sng" algn="ctr">
+                      <a:solidFill>
+                        <a:srgbClr val="DDDDDD"/>
+                      </a:solidFill>
+                      <a:prstDash val="solid"/>
+                      <a:round/>
+                      <a:headEnd type="none" w="med" len="med"/>
+                      <a:tailEnd type="none" w="med" len="med"/>
+                    </a:lnL>
+                    <a:lnR w="12700" cap="flat" cmpd="sng" algn="ctr">
+                      <a:solidFill>
+                        <a:srgbClr val="DDDDDD"/>
+                      </a:solidFill>
+                      <a:prstDash val="solid"/>
+                      <a:round/>
+                      <a:headEnd type="none" w="med" len="med"/>
+                      <a:tailEnd type="none" w="med" len="med"/>
+                    </a:lnR>
+                    <a:lnT w="12700" cap="flat" cmpd="sng" algn="ctr">
+                      <a:solidFill>
+                        <a:srgbClr val="DDDDDD"/>
+                      </a:solidFill>
+                      <a:prstDash val="solid"/>
+                      <a:round/>
+                      <a:headEnd type="none" w="med" len="med"/>
+                      <a:tailEnd type="none" w="med" len="med"/>
+                    </a:lnT>
+                    <a:lnB w="12700" cap="flat" cmpd="sng" algn="ctr">
+                      <a:solidFill>
+                        <a:srgbClr val="DDDDDD"/>
+                      </a:solidFill>
+                      <a:prstDash val="solid"/>
+                      <a:round/>
+                      <a:headEnd type="none" w="med" len="med"/>
+                      <a:tailEnd type="none" w="med" len="med"/>
+                    </a:lnB>
+                    <a:solidFill>
+                      <a:srgbClr val="F5F5F5"/>
+                    </a:solidFill>
+                  </a:tcPr>
+                </a:tc>
+              </a:tr>
+              <a:tr h="457200">
+                <a:tc>
+                  <a:txBody>
+                    <a:bodyPr/>
+                    <a:lstStyle/>
+                    <a:p>
+                      <a:pPr indent="0" marL="0">
+                        <a:buNone/>
+                      </a:pPr>
+                      <a:r>
+                        <a:rPr lang="en-US" sz="1000" dirty="0">
+                          <a:solidFill>
+                            <a:srgbClr val="000000"/>
+                          </a:solidFill>
+                          <a:latin typeface="Malgun Gothic" pitchFamily="34" charset="0"/>
+                          <a:ea typeface="Malgun Gothic" pitchFamily="34" charset="-122"/>
+                          <a:cs typeface="Malgun Gothic" pitchFamily="34" charset="-120"/>
+                        </a:rPr>
+                        <a:t>ep 301~500</a:t>
+                      </a:r>
+                      <a:endParaRPr lang="en-US" sz="1000" dirty="0">
+                        <a:latin typeface="Malgun Gothic" charset="0"/>
+                        <a:ea typeface="Malgun Gothic" charset="0"/>
+                        <a:cs typeface="Malgun Gothic" charset="0"/>
+                      </a:endParaRPr>
+                    </a:p>
+                    <a:p>
+                      <a:pPr indent="0" marL="0">
+                        <a:buNone/>
+                      </a:pPr>
+                      <a:r>
+                        <a:rPr lang="en-US" sz="1000" dirty="0">
+                          <a:solidFill>
+                            <a:srgbClr val="000000"/>
+                          </a:solidFill>
+                          <a:latin typeface="Malgun Gothic" pitchFamily="34" charset="0"/>
+                          <a:ea typeface="Malgun Gothic" pitchFamily="34" charset="-122"/>
+                          <a:cs typeface="Malgun Gothic" pitchFamily="34" charset="-120"/>
+                        </a:rPr>
+                        <a:t>(역전 구간)</a:t>
+                      </a:r>
+                      <a:endParaRPr lang="en-US" sz="1000" dirty="0">
+                        <a:latin typeface="Malgun Gothic" charset="0"/>
+                        <a:ea typeface="Malgun Gothic" charset="0"/>
+                        <a:cs typeface="Malgun Gothic" charset="0"/>
+                      </a:endParaRPr>
+                    </a:p>
+                  </a:txBody>
+                  <a:tcPr marL="91440" marR="91440" marT="45720" marB="45720">
+                    <a:lnL w="12700" cap="flat" cmpd="sng" algn="ctr">
+                      <a:solidFill>
+                        <a:srgbClr val="DDDDDD"/>
+                      </a:solidFill>
+                      <a:prstDash val="solid"/>
+                      <a:round/>
+                      <a:headEnd type="none" w="med" len="med"/>
+                      <a:tailEnd type="none" w="med" len="med"/>
+                    </a:lnL>
+                    <a:lnR w="12700" cap="flat" cmpd="sng" algn="ctr">
+                      <a:solidFill>
+                        <a:srgbClr val="DDDDDD"/>
+                      </a:solidFill>
+                      <a:prstDash val="solid"/>
+                      <a:round/>
+                      <a:headEnd type="none" w="med" len="med"/>
+                      <a:tailEnd type="none" w="med" len="med"/>
+                    </a:lnR>
+                    <a:lnT w="12700" cap="flat" cmpd="sng" algn="ctr">
+                      <a:solidFill>
+                        <a:srgbClr val="DDDDDD"/>
+                      </a:solidFill>
+                      <a:prstDash val="solid"/>
+                      <a:round/>
+                      <a:headEnd type="none" w="med" len="med"/>
+                      <a:tailEnd type="none" w="med" len="med"/>
+                    </a:lnT>
+                    <a:lnB w="12700" cap="flat" cmpd="sng" algn="ctr">
+                      <a:solidFill>
+                        <a:srgbClr val="DDDDDD"/>
+                      </a:solidFill>
+                      <a:prstDash val="solid"/>
+                      <a:round/>
+                      <a:headEnd type="none" w="med" len="med"/>
+                      <a:tailEnd type="none" w="med" len="med"/>
+                    </a:lnB>
+                    <a:solidFill>
+                      <a:srgbClr val="F5F5F5"/>
+                    </a:solidFill>
+                  </a:tcPr>
+                </a:tc>
+                <a:tc>
+                  <a:txBody>
+                    <a:bodyPr/>
+                    <a:lstStyle/>
+                    <a:p>
+                      <a:pPr indent="0" marL="0">
+                        <a:buNone/>
+                      </a:pPr>
+                      <a:r>
+                        <a:rPr lang="en-US" sz="1000" dirty="0">
+                          <a:solidFill>
+                            <a:srgbClr val="000000"/>
+                          </a:solidFill>
+                          <a:latin typeface="Malgun Gothic" pitchFamily="34" charset="0"/>
+                          <a:ea typeface="Malgun Gothic" pitchFamily="34" charset="-122"/>
+                          <a:cs typeface="Malgun Gothic" pitchFamily="34" charset="-120"/>
+                        </a:rPr>
+                        <a:t>4.6회</a:t>
+                      </a:r>
+                      <a:endParaRPr lang="en-US" sz="1000" dirty="0">
+                        <a:latin typeface="Malgun Gothic" charset="0"/>
+                        <a:ea typeface="Malgun Gothic" charset="0"/>
+                        <a:cs typeface="Malgun Gothic" charset="0"/>
+                      </a:endParaRPr>
+                    </a:p>
+                  </a:txBody>
+                  <a:tcPr marL="91440" marR="91440" marT="45720" marB="45720">
+                    <a:lnL w="12700" cap="flat" cmpd="sng" algn="ctr">
+                      <a:solidFill>
+                        <a:srgbClr val="DDDDDD"/>
+                      </a:solidFill>
+                      <a:prstDash val="solid"/>
+                      <a:round/>
+                      <a:headEnd type="none" w="med" len="med"/>
+                      <a:tailEnd type="none" w="med" len="med"/>
+                    </a:lnL>
+                    <a:lnR w="12700" cap="flat" cmpd="sng" algn="ctr">
+                      <a:solidFill>
+                        <a:srgbClr val="DDDDDD"/>
+                      </a:solidFill>
+                      <a:prstDash val="solid"/>
+                      <a:round/>
+                      <a:headEnd type="none" w="med" len="med"/>
+                      <a:tailEnd type="none" w="med" len="med"/>
+                    </a:lnR>
+                    <a:lnT w="12700" cap="flat" cmpd="sng" algn="ctr">
+                      <a:solidFill>
+                        <a:srgbClr val="DDDDDD"/>
+                      </a:solidFill>
+                      <a:prstDash val="solid"/>
+                      <a:round/>
+                      <a:headEnd type="none" w="med" len="med"/>
+                      <a:tailEnd type="none" w="med" len="med"/>
+                    </a:lnT>
+                    <a:lnB w="12700" cap="flat" cmpd="sng" algn="ctr">
+                      <a:solidFill>
+                        <a:srgbClr val="DDDDDD"/>
+                      </a:solidFill>
+                      <a:prstDash val="solid"/>
+                      <a:round/>
+                      <a:headEnd type="none" w="med" len="med"/>
+                      <a:tailEnd type="none" w="med" len="med"/>
+                    </a:lnB>
+                    <a:solidFill>
+                      <a:srgbClr val="F5F5F5"/>
+                    </a:solidFill>
+                  </a:tcPr>
+                </a:tc>
+                <a:tc>
+                  <a:txBody>
+                    <a:bodyPr/>
+                    <a:lstStyle/>
+                    <a:p>
+                      <a:pPr indent="0" marL="0">
+                        <a:buNone/>
+                      </a:pPr>
+                      <a:r>
+                        <a:rPr lang="en-US" sz="1000" b="1" dirty="0">
+                          <a:solidFill>
+                            <a:srgbClr val="005BAC"/>
+                          </a:solidFill>
+                          <a:latin typeface="Malgun Gothic" pitchFamily="34" charset="0"/>
+                          <a:ea typeface="Malgun Gothic" pitchFamily="34" charset="-122"/>
+                          <a:cs typeface="Malgun Gothic" pitchFamily="34" charset="-120"/>
+                        </a:rPr>
+                        <a:t>1.0회</a:t>
+                      </a:r>
+                      <a:endParaRPr lang="en-US" sz="1000" dirty="0">
+                        <a:latin typeface="Malgun Gothic" charset="0"/>
+                        <a:ea typeface="Malgun Gothic" charset="0"/>
+                        <a:cs typeface="Malgun Gothic" charset="0"/>
+                      </a:endParaRPr>
+                    </a:p>
+                  </a:txBody>
+                  <a:tcPr marL="91440" marR="91440" marT="45720" marB="45720">
+                    <a:lnL w="12700" cap="flat" cmpd="sng" algn="ctr">
+                      <a:solidFill>
+                        <a:srgbClr val="DDDDDD"/>
+                      </a:solidFill>
+                      <a:prstDash val="solid"/>
+                      <a:round/>
+                      <a:headEnd type="none" w="med" len="med"/>
+                      <a:tailEnd type="none" w="med" len="med"/>
+                    </a:lnL>
+                    <a:lnR w="12700" cap="flat" cmpd="sng" algn="ctr">
+                      <a:solidFill>
+                        <a:srgbClr val="DDDDDD"/>
+                      </a:solidFill>
+                      <a:prstDash val="solid"/>
+                      <a:round/>
+                      <a:headEnd type="none" w="med" len="med"/>
+                      <a:tailEnd type="none" w="med" len="med"/>
+                    </a:lnR>
+                    <a:lnT w="12700" cap="flat" cmpd="sng" algn="ctr">
+                      <a:solidFill>
+                        <a:srgbClr val="DDDDDD"/>
+                      </a:solidFill>
+                      <a:prstDash val="solid"/>
+                      <a:round/>
+                      <a:headEnd type="none" w="med" len="med"/>
+                      <a:tailEnd type="none" w="med" len="med"/>
+                    </a:lnT>
+                    <a:lnB w="12700" cap="flat" cmpd="sng" algn="ctr">
+                      <a:solidFill>
+                        <a:srgbClr val="DDDDDD"/>
+                      </a:solidFill>
+                      <a:prstDash val="solid"/>
+                      <a:round/>
+                      <a:headEnd type="none" w="med" len="med"/>
+                      <a:tailEnd type="none" w="med" len="med"/>
+                    </a:lnB>
+                    <a:solidFill>
+                      <a:srgbClr val="F5F5F5"/>
+                    </a:solidFill>
+                  </a:tcPr>
+                </a:tc>
+                <a:tc>
+                  <a:txBody>
+                    <a:bodyPr/>
+                    <a:lstStyle/>
+                    <a:p>
+                      <a:pPr indent="0" marL="0">
+                        <a:buNone/>
+                      </a:pPr>
+                      <a:r>
+                        <a:rPr lang="en-US" sz="1000" b="1" dirty="0">
+                          <a:solidFill>
+                            <a:srgbClr val="1E8A47"/>
+                          </a:solidFill>
+                          <a:latin typeface="Malgun Gothic" pitchFamily="34" charset="0"/>
+                          <a:ea typeface="Malgun Gothic" pitchFamily="34" charset="-122"/>
+                          <a:cs typeface="Malgun Gothic" pitchFamily="34" charset="-120"/>
+                        </a:rPr>
+                        <a:t>★ Proposed 역전</a:t>
+                      </a:r>
+                      <a:endParaRPr lang="en-US" sz="1000" dirty="0">
+                        <a:latin typeface="Malgun Gothic" charset="0"/>
+                        <a:ea typeface="Malgun Gothic" charset="0"/>
+                        <a:cs typeface="Malgun Gothic" charset="0"/>
+                      </a:endParaRPr>
+                    </a:p>
+                  </a:txBody>
+                  <a:tcPr marL="91440" marR="91440" marT="45720" marB="45720">
+                    <a:lnL w="12700" cap="flat" cmpd="sng" algn="ctr">
+                      <a:solidFill>
+                        <a:srgbClr val="DDDDDD"/>
+                      </a:solidFill>
+                      <a:prstDash val="solid"/>
+                      <a:round/>
+                      <a:headEnd type="none" w="med" len="med"/>
+                      <a:tailEnd type="none" w="med" len="med"/>
+                    </a:lnL>
+                    <a:lnR w="12700" cap="flat" cmpd="sng" algn="ctr">
+                      <a:solidFill>
+                        <a:srgbClr val="DDDDDD"/>
+                      </a:solidFill>
+                      <a:prstDash val="solid"/>
+                      <a:round/>
+                      <a:headEnd type="none" w="med" len="med"/>
+                      <a:tailEnd type="none" w="med" len="med"/>
+                    </a:lnR>
+                    <a:lnT w="12700" cap="flat" cmpd="sng" algn="ctr">
+                      <a:solidFill>
+                        <a:srgbClr val="DDDDDD"/>
+                      </a:solidFill>
+                      <a:prstDash val="solid"/>
+                      <a:round/>
+                      <a:headEnd type="none" w="med" len="med"/>
+                      <a:tailEnd type="none" w="med" len="med"/>
+                    </a:lnT>
+                    <a:lnB w="12700" cap="flat" cmpd="sng" algn="ctr">
+                      <a:solidFill>
+                        <a:srgbClr val="DDDDDD"/>
+                      </a:solidFill>
+                      <a:prstDash val="solid"/>
+                      <a:round/>
+                      <a:headEnd type="none" w="med" len="med"/>
+                      <a:tailEnd type="none" w="med" len="med"/>
+                    </a:lnB>
+                    <a:solidFill>
+                      <a:srgbClr val="F5F5F5"/>
+                    </a:solidFill>
+                  </a:tcPr>
+                </a:tc>
+                <a:tc>
+                  <a:txBody>
+                    <a:bodyPr/>
+                    <a:lstStyle/>
+                    <a:p>
+                      <a:pPr indent="0" marL="0">
+                        <a:buNone/>
+                      </a:pPr>
+                      <a:r>
+                        <a:rPr lang="en-US" sz="1000" dirty="0">
+                          <a:solidFill>
+                            <a:srgbClr val="000000"/>
+                          </a:solidFill>
+                          <a:latin typeface="Malgun Gothic" pitchFamily="34" charset="0"/>
+                          <a:ea typeface="Malgun Gothic" pitchFamily="34" charset="-122"/>
+                          <a:cs typeface="Malgun Gothic" pitchFamily="34" charset="-120"/>
+                        </a:rPr>
+                        <a:t>Safety Reward 내재화 완료 → 충전 전략 선제적 실행</a:t>
+                      </a:r>
+                      <a:endParaRPr lang="en-US" sz="1000" dirty="0">
+                        <a:latin typeface="Malgun Gothic" charset="0"/>
+                        <a:ea typeface="Malgun Gothic" charset="0"/>
+                        <a:cs typeface="Malgun Gothic" charset="0"/>
+                      </a:endParaRPr>
+                    </a:p>
+                  </a:txBody>
+                  <a:tcPr marL="91440" marR="91440" marT="45720" marB="45720">
+                    <a:lnL w="12700" cap="flat" cmpd="sng" algn="ctr">
+                      <a:solidFill>
+                        <a:srgbClr val="DDDDDD"/>
+                      </a:solidFill>
+                      <a:prstDash val="solid"/>
+                      <a:round/>
+                      <a:headEnd type="none" w="med" len="med"/>
+                      <a:tailEnd type="none" w="med" len="med"/>
+                    </a:lnL>
+                    <a:lnR w="12700" cap="flat" cmpd="sng" algn="ctr">
+                      <a:solidFill>
+                        <a:srgbClr val="DDDDDD"/>
+                      </a:solidFill>
+                      <a:prstDash val="solid"/>
+                      <a:round/>
+                      <a:headEnd type="none" w="med" len="med"/>
+                      <a:tailEnd type="none" w="med" len="med"/>
+                    </a:lnR>
+                    <a:lnT w="12700" cap="flat" cmpd="sng" algn="ctr">
+                      <a:solidFill>
+                        <a:srgbClr val="DDDDDD"/>
+                      </a:solidFill>
+                      <a:prstDash val="solid"/>
+                      <a:round/>
+                      <a:headEnd type="none" w="med" len="med"/>
+                      <a:tailEnd type="none" w="med" len="med"/>
+                    </a:lnT>
+                    <a:lnB w="12700" cap="flat" cmpd="sng" algn="ctr">
+                      <a:solidFill>
+                        <a:srgbClr val="DDDDDD"/>
+                      </a:solidFill>
+                      <a:prstDash val="solid"/>
+                      <a:round/>
+                      <a:headEnd type="none" w="med" len="med"/>
+                      <a:tailEnd type="none" w="med" len="med"/>
+                    </a:lnB>
+                    <a:solidFill>
+                      <a:srgbClr val="F5F5F5"/>
+                    </a:solidFill>
+                  </a:tcPr>
+                </a:tc>
+              </a:tr>
+              <a:tr h="457200">
+                <a:tc>
+                  <a:txBody>
+                    <a:bodyPr/>
+                    <a:lstStyle/>
+                    <a:p>
+                      <a:pPr indent="0" marL="0">
+                        <a:buNone/>
+                      </a:pPr>
+                      <a:r>
+                        <a:rPr lang="en-US" sz="1000" dirty="0">
+                          <a:solidFill>
+                            <a:srgbClr val="000000"/>
+                          </a:solidFill>
+                          <a:latin typeface="Malgun Gothic" pitchFamily="34" charset="0"/>
+                          <a:ea typeface="Malgun Gothic" pitchFamily="34" charset="-122"/>
+                          <a:cs typeface="Malgun Gothic" pitchFamily="34" charset="-120"/>
+                        </a:rPr>
+                        <a:t>ep 501~700</a:t>
+                      </a:r>
+                      <a:endParaRPr lang="en-US" sz="1000" dirty="0">
+                        <a:latin typeface="Malgun Gothic" charset="0"/>
+                        <a:ea typeface="Malgun Gothic" charset="0"/>
+                        <a:cs typeface="Malgun Gothic" charset="0"/>
+                      </a:endParaRPr>
+                    </a:p>
+                    <a:p>
+                      <a:pPr indent="0" marL="0">
+                        <a:buNone/>
+                      </a:pPr>
+                      <a:r>
+                        <a:rPr lang="en-US" sz="1000" dirty="0">
+                          <a:solidFill>
+                            <a:srgbClr val="000000"/>
+                          </a:solidFill>
+                          <a:latin typeface="Malgun Gothic" pitchFamily="34" charset="0"/>
+                          <a:ea typeface="Malgun Gothic" pitchFamily="34" charset="-122"/>
+                          <a:cs typeface="Malgun Gothic" pitchFamily="34" charset="-120"/>
+                        </a:rPr>
+                        <a:t>(수렴 완성)</a:t>
+                      </a:r>
+                      <a:endParaRPr lang="en-US" sz="1000" dirty="0">
+                        <a:latin typeface="Malgun Gothic" charset="0"/>
+                        <a:ea typeface="Malgun Gothic" charset="0"/>
+                        <a:cs typeface="Malgun Gothic" charset="0"/>
+                      </a:endParaRPr>
+                    </a:p>
+                  </a:txBody>
+                  <a:tcPr marL="91440" marR="91440" marT="45720" marB="45720">
+                    <a:lnL w="12700" cap="flat" cmpd="sng" algn="ctr">
+                      <a:solidFill>
+                        <a:srgbClr val="DDDDDD"/>
+                      </a:solidFill>
+                      <a:prstDash val="solid"/>
+                      <a:round/>
+                      <a:headEnd type="none" w="med" len="med"/>
+                      <a:tailEnd type="none" w="med" len="med"/>
+                    </a:lnL>
+                    <a:lnR w="12700" cap="flat" cmpd="sng" algn="ctr">
+                      <a:solidFill>
+                        <a:srgbClr val="DDDDDD"/>
+                      </a:solidFill>
+                      <a:prstDash val="solid"/>
+                      <a:round/>
+                      <a:headEnd type="none" w="med" len="med"/>
+                      <a:tailEnd type="none" w="med" len="med"/>
+                    </a:lnR>
+                    <a:lnT w="12700" cap="flat" cmpd="sng" algn="ctr">
+                      <a:solidFill>
+                        <a:srgbClr val="DDDDDD"/>
+                      </a:solidFill>
+                      <a:prstDash val="solid"/>
+                      <a:round/>
+                      <a:headEnd type="none" w="med" len="med"/>
+                      <a:tailEnd type="none" w="med" len="med"/>
+                    </a:lnT>
+                    <a:lnB w="12700" cap="flat" cmpd="sng" algn="ctr">
+                      <a:solidFill>
+                        <a:srgbClr val="DDDDDD"/>
+                      </a:solidFill>
+                      <a:prstDash val="solid"/>
+                      <a:round/>
+                      <a:headEnd type="none" w="med" len="med"/>
+                      <a:tailEnd type="none" w="med" len="med"/>
+                    </a:lnB>
+                    <a:solidFill>
+                      <a:srgbClr val="F5F5F5"/>
+                    </a:solidFill>
+                  </a:tcPr>
+                </a:tc>
+                <a:tc>
+                  <a:txBody>
+                    <a:bodyPr/>
+                    <a:lstStyle/>
+                    <a:p>
+                      <a:pPr indent="0" marL="0">
+                        <a:buNone/>
+                      </a:pPr>
+                      <a:r>
+                        <a:rPr lang="en-US" sz="1000" dirty="0">
+                          <a:solidFill>
+                            <a:srgbClr val="000000"/>
+                          </a:solidFill>
+                          <a:latin typeface="Malgun Gothic" pitchFamily="34" charset="0"/>
+                          <a:ea typeface="Malgun Gothic" pitchFamily="34" charset="-122"/>
+                          <a:cs typeface="Malgun Gothic" pitchFamily="34" charset="-120"/>
+                        </a:rPr>
+                        <a:t>3.2회</a:t>
+                      </a:r>
+                      <a:endParaRPr lang="en-US" sz="1000" dirty="0">
+                        <a:latin typeface="Malgun Gothic" charset="0"/>
+                        <a:ea typeface="Malgun Gothic" charset="0"/>
+                        <a:cs typeface="Malgun Gothic" charset="0"/>
+                      </a:endParaRPr>
+                    </a:p>
+                  </a:txBody>
+                  <a:tcPr marL="91440" marR="91440" marT="45720" marB="45720">
+                    <a:lnL w="12700" cap="flat" cmpd="sng" algn="ctr">
+                      <a:solidFill>
+                        <a:srgbClr val="DDDDDD"/>
+                      </a:solidFill>
+                      <a:prstDash val="solid"/>
+                      <a:round/>
+                      <a:headEnd type="none" w="med" len="med"/>
+                      <a:tailEnd type="none" w="med" len="med"/>
+                    </a:lnL>
+                    <a:lnR w="12700" cap="flat" cmpd="sng" algn="ctr">
+                      <a:solidFill>
+                        <a:srgbClr val="DDDDDD"/>
+                      </a:solidFill>
+                      <a:prstDash val="solid"/>
+                      <a:round/>
+                      <a:headEnd type="none" w="med" len="med"/>
+                      <a:tailEnd type="none" w="med" len="med"/>
+                    </a:lnR>
+                    <a:lnT w="12700" cap="flat" cmpd="sng" algn="ctr">
+                      <a:solidFill>
+                        <a:srgbClr val="DDDDDD"/>
+                      </a:solidFill>
+                      <a:prstDash val="solid"/>
+                      <a:round/>
+                      <a:headEnd type="none" w="med" len="med"/>
+                      <a:tailEnd type="none" w="med" len="med"/>
+                    </a:lnT>
+                    <a:lnB w="12700" cap="flat" cmpd="sng" algn="ctr">
+                      <a:solidFill>
+                        <a:srgbClr val="DDDDDD"/>
+                      </a:solidFill>
+                      <a:prstDash val="solid"/>
+                      <a:round/>
+                      <a:headEnd type="none" w="med" len="med"/>
+                      <a:tailEnd type="none" w="med" len="med"/>
+                    </a:lnB>
+                    <a:solidFill>
+                      <a:srgbClr val="F5F5F5"/>
+                    </a:solidFill>
+                  </a:tcPr>
+                </a:tc>
+                <a:tc>
+                  <a:txBody>
+                    <a:bodyPr/>
+                    <a:lstStyle/>
+                    <a:p>
+                      <a:pPr indent="0" marL="0">
+                        <a:buNone/>
+                      </a:pPr>
+                      <a:r>
+                        <a:rPr lang="en-US" sz="1000" b="1" dirty="0">
+                          <a:solidFill>
+                            <a:srgbClr val="005BAC"/>
+                          </a:solidFill>
+                          <a:latin typeface="Malgun Gothic" pitchFamily="34" charset="0"/>
+                          <a:ea typeface="Malgun Gothic" pitchFamily="34" charset="-122"/>
+                          <a:cs typeface="Malgun Gothic" pitchFamily="34" charset="-120"/>
+                        </a:rPr>
+                        <a:t>0.2회</a:t>
+                      </a:r>
+                      <a:endParaRPr lang="en-US" sz="1000" dirty="0">
+                        <a:latin typeface="Malgun Gothic" charset="0"/>
+                        <a:ea typeface="Malgun Gothic" charset="0"/>
+                        <a:cs typeface="Malgun Gothic" charset="0"/>
+                      </a:endParaRPr>
+                    </a:p>
+                  </a:txBody>
+                  <a:tcPr marL="91440" marR="91440" marT="45720" marB="45720">
+                    <a:lnL w="12700" cap="flat" cmpd="sng" algn="ctr">
+                      <a:solidFill>
+                        <a:srgbClr val="DDDDDD"/>
+                      </a:solidFill>
+                      <a:prstDash val="solid"/>
+                      <a:round/>
+                      <a:headEnd type="none" w="med" len="med"/>
+                      <a:tailEnd type="none" w="med" len="med"/>
+                    </a:lnL>
+                    <a:lnR w="12700" cap="flat" cmpd="sng" algn="ctr">
+                      <a:solidFill>
+                        <a:srgbClr val="DDDDDD"/>
+                      </a:solidFill>
+                      <a:prstDash val="solid"/>
+                      <a:round/>
+                      <a:headEnd type="none" w="med" len="med"/>
+                      <a:tailEnd type="none" w="med" len="med"/>
+                    </a:lnR>
+                    <a:lnT w="12700" cap="flat" cmpd="sng" algn="ctr">
+                      <a:solidFill>
+                        <a:srgbClr val="DDDDDD"/>
+                      </a:solidFill>
+                      <a:prstDash val="solid"/>
+                      <a:round/>
+                      <a:headEnd type="none" w="med" len="med"/>
+                      <a:tailEnd type="none" w="med" len="med"/>
+                    </a:lnT>
+                    <a:lnB w="12700" cap="flat" cmpd="sng" algn="ctr">
+                      <a:solidFill>
+                        <a:srgbClr val="DDDDDD"/>
+                      </a:solidFill>
+                      <a:prstDash val="solid"/>
+                      <a:round/>
+                      <a:headEnd type="none" w="med" len="med"/>
+                      <a:tailEnd type="none" w="med" len="med"/>
+                    </a:lnB>
+                    <a:solidFill>
+                      <a:srgbClr val="F5F5F5"/>
+                    </a:solidFill>
+                  </a:tcPr>
+                </a:tc>
+                <a:tc>
+                  <a:txBody>
+                    <a:bodyPr/>
+                    <a:lstStyle/>
+                    <a:p>
+                      <a:pPr indent="0" marL="0">
+                        <a:buNone/>
+                      </a:pPr>
+                      <a:r>
+                        <a:rPr lang="en-US" sz="1000" b="1" dirty="0">
+                          <a:solidFill>
+                            <a:srgbClr val="1E8A47"/>
+                          </a:solidFill>
+                          <a:latin typeface="Malgun Gothic" pitchFamily="34" charset="0"/>
+                          <a:ea typeface="Malgun Gothic" pitchFamily="34" charset="-122"/>
+                          <a:cs typeface="Malgun Gothic" pitchFamily="34" charset="-120"/>
+                        </a:rPr>
+                        <a:t>Proposed 압도</a:t>
+                      </a:r>
+                      <a:endParaRPr lang="en-US" sz="1000" dirty="0">
+                        <a:latin typeface="Malgun Gothic" charset="0"/>
+                        <a:ea typeface="Malgun Gothic" charset="0"/>
+                        <a:cs typeface="Malgun Gothic" charset="0"/>
+                      </a:endParaRPr>
+                    </a:p>
+                  </a:txBody>
+                  <a:tcPr marL="91440" marR="91440" marT="45720" marB="45720">
+                    <a:lnL w="12700" cap="flat" cmpd="sng" algn="ctr">
+                      <a:solidFill>
+                        <a:srgbClr val="DDDDDD"/>
+                      </a:solidFill>
+                      <a:prstDash val="solid"/>
+                      <a:round/>
+                      <a:headEnd type="none" w="med" len="med"/>
+                      <a:tailEnd type="none" w="med" len="med"/>
+                    </a:lnL>
+                    <a:lnR w="12700" cap="flat" cmpd="sng" algn="ctr">
+                      <a:solidFill>
+                        <a:srgbClr val="DDDDDD"/>
+                      </a:solidFill>
+                      <a:prstDash val="solid"/>
+                      <a:round/>
+                      <a:headEnd type="none" w="med" len="med"/>
+                      <a:tailEnd type="none" w="med" len="med"/>
+                    </a:lnR>
+                    <a:lnT w="12700" cap="flat" cmpd="sng" algn="ctr">
+                      <a:solidFill>
+                        <a:srgbClr val="DDDDDD"/>
+                      </a:solidFill>
+                      <a:prstDash val="solid"/>
+                      <a:round/>
+                      <a:headEnd type="none" w="med" len="med"/>
+                      <a:tailEnd type="none" w="med" len="med"/>
+                    </a:lnT>
+                    <a:lnB w="12700" cap="flat" cmpd="sng" algn="ctr">
+                      <a:solidFill>
+                        <a:srgbClr val="DDDDDD"/>
+                      </a:solidFill>
+                      <a:prstDash val="solid"/>
+                      <a:round/>
+                      <a:headEnd type="none" w="med" len="med"/>
+                      <a:tailEnd type="none" w="med" len="med"/>
+                    </a:lnB>
+                    <a:solidFill>
+                      <a:srgbClr val="F5F5F5"/>
+                    </a:solidFill>
+                  </a:tcPr>
+                </a:tc>
+                <a:tc>
+                  <a:txBody>
+                    <a:bodyPr/>
+                    <a:lstStyle/>
+                    <a:p>
+                      <a:pPr indent="0" marL="0">
+                        <a:buNone/>
+                      </a:pPr>
+                      <a:r>
+                        <a:rPr lang="en-US" sz="1000" dirty="0">
+                          <a:solidFill>
+                            <a:srgbClr val="000000"/>
+                          </a:solidFill>
+                          <a:latin typeface="Malgun Gothic" pitchFamily="34" charset="0"/>
+                          <a:ea typeface="Malgun Gothic" pitchFamily="34" charset="-122"/>
+                          <a:cs typeface="Malgun Gothic" pitchFamily="34" charset="-120"/>
+                        </a:rPr>
+                        <a:t>Baseline: 여전히 사후 대응 / Proposed: 예방적 충전 완성</a:t>
+                      </a:r>
+                      <a:endParaRPr lang="en-US" sz="1000" dirty="0">
+                        <a:latin typeface="Malgun Gothic" charset="0"/>
+                        <a:ea typeface="Malgun Gothic" charset="0"/>
+                        <a:cs typeface="Malgun Gothic" charset="0"/>
+                      </a:endParaRPr>
+                    </a:p>
+                  </a:txBody>
+                  <a:tcPr marL="91440" marR="91440" marT="45720" marB="45720">
+                    <a:lnL w="12700" cap="flat" cmpd="sng" algn="ctr">
+                      <a:solidFill>
+                        <a:srgbClr val="DDDDDD"/>
+                      </a:solidFill>
+                      <a:prstDash val="solid"/>
+                      <a:round/>
+                      <a:headEnd type="none" w="med" len="med"/>
+                      <a:tailEnd type="none" w="med" len="med"/>
+                    </a:lnL>
+                    <a:lnR w="12700" cap="flat" cmpd="sng" algn="ctr">
+                      <a:solidFill>
+                        <a:srgbClr val="DDDDDD"/>
+                      </a:solidFill>
+                      <a:prstDash val="solid"/>
+                      <a:round/>
+                      <a:headEnd type="none" w="med" len="med"/>
+                      <a:tailEnd type="none" w="med" len="med"/>
+                    </a:lnR>
+                    <a:lnT w="12700" cap="flat" cmpd="sng" algn="ctr">
+                      <a:solidFill>
+                        <a:srgbClr val="DDDDDD"/>
+                      </a:solidFill>
+                      <a:prstDash val="solid"/>
+                      <a:round/>
+                      <a:headEnd type="none" w="med" len="med"/>
+                      <a:tailEnd type="none" w="med" len="med"/>
+                    </a:lnT>
+                    <a:lnB w="12700" cap="flat" cmpd="sng" algn="ctr">
+                      <a:solidFill>
+                        <a:srgbClr val="DDDDDD"/>
+                      </a:solidFill>
+                      <a:prstDash val="solid"/>
+                      <a:round/>
+                      <a:headEnd type="none" w="med" len="med"/>
+                      <a:tailEnd type="none" w="med" len="med"/>
+                    </a:lnB>
+                    <a:solidFill>
+                      <a:srgbClr val="F5F5F5"/>
+                    </a:solidFill>
+                  </a:tcPr>
+                </a:tc>
+              </a:tr>
+              <a:tr h="457200">
+                <a:tc>
+                  <a:txBody>
+                    <a:bodyPr/>
+                    <a:lstStyle/>
+                    <a:p>
+                      <a:pPr indent="0" marL="0">
+                        <a:buNone/>
+                      </a:pPr>
+                      <a:r>
+                        <a:rPr lang="en-US" sz="1000" dirty="0">
+                          <a:solidFill>
+                            <a:srgbClr val="000000"/>
+                          </a:solidFill>
+                          <a:latin typeface="Malgun Gothic" pitchFamily="34" charset="0"/>
+                          <a:ea typeface="Malgun Gothic" pitchFamily="34" charset="-122"/>
+                          <a:cs typeface="Malgun Gothic" pitchFamily="34" charset="-120"/>
+                        </a:rPr>
+                        <a:t>ep 700~1500</a:t>
+                      </a:r>
+                      <a:endParaRPr lang="en-US" sz="1000" dirty="0">
+                        <a:latin typeface="Malgun Gothic" charset="0"/>
+                        <a:ea typeface="Malgun Gothic" charset="0"/>
+                        <a:cs typeface="Malgun Gothic" charset="0"/>
+                      </a:endParaRPr>
+                    </a:p>
+                    <a:p>
+                      <a:pPr indent="0" marL="0">
+                        <a:buNone/>
+                      </a:pPr>
+                      <a:r>
+                        <a:rPr lang="en-US" sz="1000" dirty="0">
+                          <a:solidFill>
+                            <a:srgbClr val="000000"/>
+                          </a:solidFill>
+                          <a:latin typeface="Malgun Gothic" pitchFamily="34" charset="0"/>
+                          <a:ea typeface="Malgun Gothic" pitchFamily="34" charset="-122"/>
+                          <a:cs typeface="Malgun Gothic" pitchFamily="34" charset="-120"/>
+                        </a:rPr>
+                        <a:t>(후반 안정기)</a:t>
+                      </a:r>
+                      <a:endParaRPr lang="en-US" sz="1000" dirty="0">
+                        <a:latin typeface="Malgun Gothic" charset="0"/>
+                        <a:ea typeface="Malgun Gothic" charset="0"/>
+                        <a:cs typeface="Malgun Gothic" charset="0"/>
+                      </a:endParaRPr>
+                    </a:p>
+                  </a:txBody>
+                  <a:tcPr marL="91440" marR="91440" marT="45720" marB="45720">
+                    <a:lnL w="12700" cap="flat" cmpd="sng" algn="ctr">
+                      <a:solidFill>
+                        <a:srgbClr val="DDDDDD"/>
+                      </a:solidFill>
+                      <a:prstDash val="solid"/>
+                      <a:round/>
+                      <a:headEnd type="none" w="med" len="med"/>
+                      <a:tailEnd type="none" w="med" len="med"/>
+                    </a:lnL>
+                    <a:lnR w="12700" cap="flat" cmpd="sng" algn="ctr">
+                      <a:solidFill>
+                        <a:srgbClr val="DDDDDD"/>
+                      </a:solidFill>
+                      <a:prstDash val="solid"/>
+                      <a:round/>
+                      <a:headEnd type="none" w="med" len="med"/>
+                      <a:tailEnd type="none" w="med" len="med"/>
+                    </a:lnR>
+                    <a:lnT w="12700" cap="flat" cmpd="sng" algn="ctr">
+                      <a:solidFill>
+                        <a:srgbClr val="DDDDDD"/>
+                      </a:solidFill>
+                      <a:prstDash val="solid"/>
+                      <a:round/>
+                      <a:headEnd type="none" w="med" len="med"/>
+                      <a:tailEnd type="none" w="med" len="med"/>
+                    </a:lnT>
+                    <a:lnB w="12700" cap="flat" cmpd="sng" algn="ctr">
+                      <a:solidFill>
+                        <a:srgbClr val="DDDDDD"/>
+                      </a:solidFill>
+                      <a:prstDash val="solid"/>
+                      <a:round/>
+                      <a:headEnd type="none" w="med" len="med"/>
+                      <a:tailEnd type="none" w="med" len="med"/>
+                    </a:lnB>
+                    <a:solidFill>
+                      <a:srgbClr val="F5F5F5"/>
+                    </a:solidFill>
+                  </a:tcPr>
+                </a:tc>
+                <a:tc>
+                  <a:txBody>
+                    <a:bodyPr/>
+                    <a:lstStyle/>
+                    <a:p>
+                      <a:pPr indent="0" marL="0">
+                        <a:buNone/>
+                      </a:pPr>
+                      <a:r>
+                        <a:rPr lang="en-US" sz="1000" b="1" dirty="0">
+                          <a:solidFill>
+                            <a:srgbClr val="CC0000"/>
+                          </a:solidFill>
+                          <a:latin typeface="Malgun Gothic" pitchFamily="34" charset="0"/>
+                          <a:ea typeface="Malgun Gothic" pitchFamily="34" charset="-122"/>
+                          <a:cs typeface="Malgun Gothic" pitchFamily="34" charset="-120"/>
+                        </a:rPr>
+                        <a:t>4.6회 / 800ep</a:t>
+                      </a:r>
+                      <a:endParaRPr lang="en-US" sz="1000" dirty="0">
+                        <a:latin typeface="Malgun Gothic" charset="0"/>
+                        <a:ea typeface="Malgun Gothic" charset="0"/>
+                        <a:cs typeface="Malgun Gothic" charset="0"/>
+                      </a:endParaRPr>
+                    </a:p>
+                  </a:txBody>
+                  <a:tcPr marL="91440" marR="91440" marT="45720" marB="45720">
+                    <a:lnL w="12700" cap="flat" cmpd="sng" algn="ctr">
+                      <a:solidFill>
+                        <a:srgbClr val="DDDDDD"/>
+                      </a:solidFill>
+                      <a:prstDash val="solid"/>
+                      <a:round/>
+                      <a:headEnd type="none" w="med" len="med"/>
+                      <a:tailEnd type="none" w="med" len="med"/>
+                    </a:lnL>
+                    <a:lnR w="12700" cap="flat" cmpd="sng" algn="ctr">
+                      <a:solidFill>
+                        <a:srgbClr val="DDDDDD"/>
+                      </a:solidFill>
+                      <a:prstDash val="solid"/>
+                      <a:round/>
+                      <a:headEnd type="none" w="med" len="med"/>
+                      <a:tailEnd type="none" w="med" len="med"/>
+                    </a:lnR>
+                    <a:lnT w="12700" cap="flat" cmpd="sng" algn="ctr">
+                      <a:solidFill>
+                        <a:srgbClr val="DDDDDD"/>
+                      </a:solidFill>
+                      <a:prstDash val="solid"/>
+                      <a:round/>
+                      <a:headEnd type="none" w="med" len="med"/>
+                      <a:tailEnd type="none" w="med" len="med"/>
+                    </a:lnT>
+                    <a:lnB w="12700" cap="flat" cmpd="sng" algn="ctr">
+                      <a:solidFill>
+                        <a:srgbClr val="DDDDDD"/>
+                      </a:solidFill>
+                      <a:prstDash val="solid"/>
+                      <a:round/>
+                      <a:headEnd type="none" w="med" len="med"/>
+                      <a:tailEnd type="none" w="med" len="med"/>
+                    </a:lnB>
+                    <a:solidFill>
+                      <a:srgbClr val="F5F5F5"/>
+                    </a:solidFill>
+                  </a:tcPr>
+                </a:tc>
+                <a:tc>
+                  <a:txBody>
+                    <a:bodyPr/>
+                    <a:lstStyle/>
+                    <a:p>
+                      <a:pPr indent="0" marL="0">
+                        <a:buNone/>
+                      </a:pPr>
+                      <a:r>
+                        <a:rPr lang="en-US" sz="1000" b="1" dirty="0">
+                          <a:solidFill>
+                            <a:srgbClr val="005BAC"/>
+                          </a:solidFill>
+                          <a:latin typeface="Malgun Gothic" pitchFamily="34" charset="0"/>
+                          <a:ea typeface="Malgun Gothic" pitchFamily="34" charset="-122"/>
+                          <a:cs typeface="Malgun Gothic" pitchFamily="34" charset="-120"/>
+                        </a:rPr>
+                        <a:t>1.6회 / 800ep</a:t>
+                      </a:r>
+                      <a:endParaRPr lang="en-US" sz="1000" dirty="0">
+                        <a:latin typeface="Malgun Gothic" charset="0"/>
+                        <a:ea typeface="Malgun Gothic" charset="0"/>
+                        <a:cs typeface="Malgun Gothic" charset="0"/>
+                      </a:endParaRPr>
+                    </a:p>
+                  </a:txBody>
+                  <a:tcPr marL="91440" marR="91440" marT="45720" marB="45720">
+                    <a:lnL w="12700" cap="flat" cmpd="sng" algn="ctr">
+                      <a:solidFill>
+                        <a:srgbClr val="DDDDDD"/>
+                      </a:solidFill>
+                      <a:prstDash val="solid"/>
+                      <a:round/>
+                      <a:headEnd type="none" w="med" len="med"/>
+                      <a:tailEnd type="none" w="med" len="med"/>
+                    </a:lnL>
+                    <a:lnR w="12700" cap="flat" cmpd="sng" algn="ctr">
+                      <a:solidFill>
+                        <a:srgbClr val="DDDDDD"/>
+                      </a:solidFill>
+                      <a:prstDash val="solid"/>
+                      <a:round/>
+                      <a:headEnd type="none" w="med" len="med"/>
+                      <a:tailEnd type="none" w="med" len="med"/>
+                    </a:lnR>
+                    <a:lnT w="12700" cap="flat" cmpd="sng" algn="ctr">
+                      <a:solidFill>
+                        <a:srgbClr val="DDDDDD"/>
+                      </a:solidFill>
+                      <a:prstDash val="solid"/>
+                      <a:round/>
+                      <a:headEnd type="none" w="med" len="med"/>
+                      <a:tailEnd type="none" w="med" len="med"/>
+                    </a:lnT>
+                    <a:lnB w="12700" cap="flat" cmpd="sng" algn="ctr">
+                      <a:solidFill>
+                        <a:srgbClr val="DDDDDD"/>
+                      </a:solidFill>
+                      <a:prstDash val="solid"/>
+                      <a:round/>
+                      <a:headEnd type="none" w="med" len="med"/>
+                      <a:tailEnd type="none" w="med" len="med"/>
+                    </a:lnB>
+                    <a:solidFill>
+                      <a:srgbClr val="F5F5F5"/>
+                    </a:solidFill>
+                  </a:tcPr>
+                </a:tc>
+                <a:tc>
+                  <a:txBody>
+                    <a:bodyPr/>
+                    <a:lstStyle/>
+                    <a:p>
+                      <a:pPr indent="0" marL="0">
+                        <a:buNone/>
+                      </a:pPr>
+                      <a:r>
+                        <a:rPr lang="en-US" sz="1000" b="1" dirty="0">
+                          <a:solidFill>
+                            <a:srgbClr val="1E8A47"/>
+                          </a:solidFill>
+                          <a:latin typeface="Malgun Gothic" pitchFamily="34" charset="0"/>
+                          <a:ea typeface="Malgun Gothic" pitchFamily="34" charset="-122"/>
+                          <a:cs typeface="Malgun Gothic" pitchFamily="34" charset="-120"/>
+                        </a:rPr>
+                        <a:t>격차 유지</a:t>
+                      </a:r>
+                      <a:endParaRPr lang="en-US" sz="1000" dirty="0">
+                        <a:latin typeface="Malgun Gothic" charset="0"/>
+                        <a:ea typeface="Malgun Gothic" charset="0"/>
+                        <a:cs typeface="Malgun Gothic" charset="0"/>
+                      </a:endParaRPr>
+                    </a:p>
+                  </a:txBody>
+                  <a:tcPr marL="91440" marR="91440" marT="45720" marB="45720">
+                    <a:lnL w="12700" cap="flat" cmpd="sng" algn="ctr">
+                      <a:solidFill>
+                        <a:srgbClr val="DDDDDD"/>
+                      </a:solidFill>
+                      <a:prstDash val="solid"/>
+                      <a:round/>
+                      <a:headEnd type="none" w="med" len="med"/>
+                      <a:tailEnd type="none" w="med" len="med"/>
+                    </a:lnL>
+                    <a:lnR w="12700" cap="flat" cmpd="sng" algn="ctr">
+                      <a:solidFill>
+                        <a:srgbClr val="DDDDDD"/>
+                      </a:solidFill>
+                      <a:prstDash val="solid"/>
+                      <a:round/>
+                      <a:headEnd type="none" w="med" len="med"/>
+                      <a:tailEnd type="none" w="med" len="med"/>
+                    </a:lnR>
+                    <a:lnT w="12700" cap="flat" cmpd="sng" algn="ctr">
+                      <a:solidFill>
+                        <a:srgbClr val="DDDDDD"/>
+                      </a:solidFill>
+                      <a:prstDash val="solid"/>
+                      <a:round/>
+                      <a:headEnd type="none" w="med" len="med"/>
+                      <a:tailEnd type="none" w="med" len="med"/>
+                    </a:lnT>
+                    <a:lnB w="12700" cap="flat" cmpd="sng" algn="ctr">
+                      <a:solidFill>
+                        <a:srgbClr val="DDDDDD"/>
+                      </a:solidFill>
+                      <a:prstDash val="solid"/>
+                      <a:round/>
+                      <a:headEnd type="none" w="med" len="med"/>
+                      <a:tailEnd type="none" w="med" len="med"/>
+                    </a:lnB>
+                    <a:solidFill>
+                      <a:srgbClr val="F5F5F5"/>
+                    </a:solidFill>
+                  </a:tcPr>
+                </a:tc>
+                <a:tc>
+                  <a:txBody>
+                    <a:bodyPr/>
+                    <a:lstStyle/>
+                    <a:p>
+                      <a:pPr indent="0" marL="0">
+                        <a:buNone/>
+                      </a:pPr>
+                      <a:r>
+                        <a:rPr lang="en-US" sz="1000" dirty="0">
+                          <a:solidFill>
+                            <a:srgbClr val="000000"/>
+                          </a:solidFill>
+                          <a:latin typeface="Malgun Gothic" pitchFamily="34" charset="0"/>
+                          <a:ea typeface="Malgun Gothic" pitchFamily="34" charset="-122"/>
+                          <a:cs typeface="Malgun Gothic" pitchFamily="34" charset="-120"/>
+                        </a:rPr>
+                        <a:t>Baseline 미수렴(방전 지속) vs Proposed 안정적 유지</a:t>
+                      </a:r>
+                      <a:endParaRPr lang="en-US" sz="1000" dirty="0">
+                        <a:latin typeface="Malgun Gothic" charset="0"/>
+                        <a:ea typeface="Malgun Gothic" charset="0"/>
+                        <a:cs typeface="Malgun Gothic" charset="0"/>
+                      </a:endParaRPr>
+                    </a:p>
+                  </a:txBody>
+                  <a:tcPr marL="91440" marR="91440" marT="45720" marB="45720">
+                    <a:lnL w="12700" cap="flat" cmpd="sng" algn="ctr">
+                      <a:solidFill>
+                        <a:srgbClr val="DDDDDD"/>
+                      </a:solidFill>
+                      <a:prstDash val="solid"/>
+                      <a:round/>
+                      <a:headEnd type="none" w="med" len="med"/>
+                      <a:tailEnd type="none" w="med" len="med"/>
+                    </a:lnL>
+                    <a:lnR w="12700" cap="flat" cmpd="sng" algn="ctr">
+                      <a:solidFill>
+                        <a:srgbClr val="DDDDDD"/>
+                      </a:solidFill>
+                      <a:prstDash val="solid"/>
+                      <a:round/>
+                      <a:headEnd type="none" w="med" len="med"/>
+                      <a:tailEnd type="none" w="med" len="med"/>
+                    </a:lnR>
+                    <a:lnT w="12700" cap="flat" cmpd="sng" algn="ctr">
+                      <a:solidFill>
+                        <a:srgbClr val="DDDDDD"/>
+                      </a:solidFill>
+                      <a:prstDash val="solid"/>
+                      <a:round/>
+                      <a:headEnd type="none" w="med" len="med"/>
+                      <a:tailEnd type="none" w="med" len="med"/>
+                    </a:lnT>
+                    <a:lnB w="12700" cap="flat" cmpd="sng" algn="ctr">
+                      <a:solidFill>
+                        <a:srgbClr val="DDDDDD"/>
+                      </a:solidFill>
+                      <a:prstDash val="solid"/>
+                      <a:round/>
+                      <a:headEnd type="none" w="med" len="med"/>
+                      <a:tailEnd type="none" w="med" len="med"/>
+                    </a:lnB>
+                    <a:solidFill>
+                      <a:srgbClr val="F5F5F5"/>
+                    </a:solidFill>
+                  </a:tcPr>
+                </a:tc>
+              </a:tr>
+              <a:tr h="411480">
+                <a:tc>
+                  <a:txBody>
+                    <a:bodyPr/>
+                    <a:lstStyle/>
+                    <a:p>
+                      <a:pPr indent="0" marL="0">
+                        <a:buNone/>
+                      </a:pPr>
+                      <a:r>
+                        <a:rPr lang="en-US" sz="1000" b="1" dirty="0">
+                          <a:solidFill>
+                            <a:srgbClr val="000000"/>
+                          </a:solidFill>
+                          <a:latin typeface="Malgun Gothic" pitchFamily="34" charset="0"/>
+                          <a:ea typeface="Malgun Gothic" pitchFamily="34" charset="-122"/>
+                          <a:cs typeface="Malgun Gothic" pitchFamily="34" charset="-120"/>
+                        </a:rPr>
+                        <a:t>5 seed 총계</a:t>
+                      </a:r>
+                      <a:endParaRPr lang="en-US" sz="1000" dirty="0">
+                        <a:latin typeface="Malgun Gothic" charset="0"/>
+                        <a:ea typeface="Malgun Gothic" charset="0"/>
+                        <a:cs typeface="Malgun Gothic" charset="0"/>
+                      </a:endParaRPr>
+                    </a:p>
+                  </a:txBody>
+                  <a:tcPr marL="91440" marR="91440" marT="45720" marB="45720">
+                    <a:lnL w="12700" cap="flat" cmpd="sng" algn="ctr">
+                      <a:solidFill>
+                        <a:srgbClr val="DDDDDD"/>
+                      </a:solidFill>
+                      <a:prstDash val="solid"/>
+                      <a:round/>
+                      <a:headEnd type="none" w="med" len="med"/>
+                      <a:tailEnd type="none" w="med" len="med"/>
+                    </a:lnL>
+                    <a:lnR w="12700" cap="flat" cmpd="sng" algn="ctr">
+                      <a:solidFill>
+                        <a:srgbClr val="DDDDDD"/>
+                      </a:solidFill>
+                      <a:prstDash val="solid"/>
+                      <a:round/>
+                      <a:headEnd type="none" w="med" len="med"/>
+                      <a:tailEnd type="none" w="med" len="med"/>
+                    </a:lnR>
+                    <a:lnT w="12700" cap="flat" cmpd="sng" algn="ctr">
+                      <a:solidFill>
+                        <a:srgbClr val="DDDDDD"/>
+                      </a:solidFill>
+                      <a:prstDash val="solid"/>
+                      <a:round/>
+                      <a:headEnd type="none" w="med" len="med"/>
+                      <a:tailEnd type="none" w="med" len="med"/>
+                    </a:lnT>
+                    <a:lnB w="12700" cap="flat" cmpd="sng" algn="ctr">
+                      <a:solidFill>
+                        <a:srgbClr val="DDDDDD"/>
+                      </a:solidFill>
+                      <a:prstDash val="solid"/>
+                      <a:round/>
+                      <a:headEnd type="none" w="med" len="med"/>
+                      <a:tailEnd type="none" w="med" len="med"/>
+                    </a:lnB>
+                    <a:solidFill>
+                      <a:srgbClr val="F5F5F5"/>
+                    </a:solidFill>
+                  </a:tcPr>
+                </a:tc>
+                <a:tc>
+                  <a:txBody>
+                    <a:bodyPr/>
+                    <a:lstStyle/>
+                    <a:p>
+                      <a:pPr indent="0" marL="0">
+                        <a:buNone/>
+                      </a:pPr>
+                      <a:r>
+                        <a:rPr lang="en-US" sz="1000" b="1" dirty="0">
+                          <a:solidFill>
+                            <a:srgbClr val="CC0000"/>
+                          </a:solidFill>
+                          <a:latin typeface="Malgun Gothic" pitchFamily="34" charset="0"/>
+                          <a:ea typeface="Malgun Gothic" pitchFamily="34" charset="-122"/>
+                          <a:cs typeface="Malgun Gothic" pitchFamily="34" charset="-120"/>
+                        </a:rPr>
+                        <a:t>471회</a:t>
+                      </a:r>
+                      <a:endParaRPr lang="en-US" sz="1000" dirty="0">
+                        <a:latin typeface="Malgun Gothic" charset="0"/>
+                        <a:ea typeface="Malgun Gothic" charset="0"/>
+                        <a:cs typeface="Malgun Gothic" charset="0"/>
+                      </a:endParaRPr>
+                    </a:p>
+                  </a:txBody>
+                  <a:tcPr marL="91440" marR="91440" marT="45720" marB="45720">
+                    <a:lnL w="12700" cap="flat" cmpd="sng" algn="ctr">
+                      <a:solidFill>
+                        <a:srgbClr val="DDDDDD"/>
+                      </a:solidFill>
+                      <a:prstDash val="solid"/>
+                      <a:round/>
+                      <a:headEnd type="none" w="med" len="med"/>
+                      <a:tailEnd type="none" w="med" len="med"/>
+                    </a:lnL>
+                    <a:lnR w="12700" cap="flat" cmpd="sng" algn="ctr">
+                      <a:solidFill>
+                        <a:srgbClr val="DDDDDD"/>
+                      </a:solidFill>
+                      <a:prstDash val="solid"/>
+                      <a:round/>
+                      <a:headEnd type="none" w="med" len="med"/>
+                      <a:tailEnd type="none" w="med" len="med"/>
+                    </a:lnR>
+                    <a:lnT w="12700" cap="flat" cmpd="sng" algn="ctr">
+                      <a:solidFill>
+                        <a:srgbClr val="DDDDDD"/>
+                      </a:solidFill>
+                      <a:prstDash val="solid"/>
+                      <a:round/>
+                      <a:headEnd type="none" w="med" len="med"/>
+                      <a:tailEnd type="none" w="med" len="med"/>
+                    </a:lnT>
+                    <a:lnB w="12700" cap="flat" cmpd="sng" algn="ctr">
+                      <a:solidFill>
+                        <a:srgbClr val="DDDDDD"/>
+                      </a:solidFill>
+                      <a:prstDash val="solid"/>
+                      <a:round/>
+                      <a:headEnd type="none" w="med" len="med"/>
+                      <a:tailEnd type="none" w="med" len="med"/>
+                    </a:lnB>
+                    <a:solidFill>
+                      <a:srgbClr val="F5F5F5"/>
+                    </a:solidFill>
+                  </a:tcPr>
+                </a:tc>
+                <a:tc>
+                  <a:txBody>
+                    <a:bodyPr/>
+                    <a:lstStyle/>
+                    <a:p>
+                      <a:pPr indent="0" marL="0">
+                        <a:buNone/>
+                      </a:pPr>
+                      <a:r>
+                        <a:rPr lang="en-US" sz="1000" b="1" dirty="0">
+                          <a:solidFill>
+                            <a:srgbClr val="005BAC"/>
+                          </a:solidFill>
+                          <a:latin typeface="Malgun Gothic" pitchFamily="34" charset="0"/>
+                          <a:ea typeface="Malgun Gothic" pitchFamily="34" charset="-122"/>
+                          <a:cs typeface="Malgun Gothic" pitchFamily="34" charset="-120"/>
+                        </a:rPr>
+                        <a:t>415회</a:t>
+                      </a:r>
+                      <a:endParaRPr lang="en-US" sz="1000" dirty="0">
+                        <a:latin typeface="Malgun Gothic" charset="0"/>
+                        <a:ea typeface="Malgun Gothic" charset="0"/>
+                        <a:cs typeface="Malgun Gothic" charset="0"/>
+                      </a:endParaRPr>
+                    </a:p>
+                  </a:txBody>
+                  <a:tcPr marL="91440" marR="91440" marT="45720" marB="45720">
+                    <a:lnL w="12700" cap="flat" cmpd="sng" algn="ctr">
+                      <a:solidFill>
+                        <a:srgbClr val="DDDDDD"/>
+                      </a:solidFill>
+                      <a:prstDash val="solid"/>
+                      <a:round/>
+                      <a:headEnd type="none" w="med" len="med"/>
+                      <a:tailEnd type="none" w="med" len="med"/>
+                    </a:lnL>
+                    <a:lnR w="12700" cap="flat" cmpd="sng" algn="ctr">
+                      <a:solidFill>
+                        <a:srgbClr val="DDDDDD"/>
+                      </a:solidFill>
+                      <a:prstDash val="solid"/>
+                      <a:round/>
+                      <a:headEnd type="none" w="med" len="med"/>
+                      <a:tailEnd type="none" w="med" len="med"/>
+                    </a:lnR>
+                    <a:lnT w="12700" cap="flat" cmpd="sng" algn="ctr">
+                      <a:solidFill>
+                        <a:srgbClr val="DDDDDD"/>
+                      </a:solidFill>
+                      <a:prstDash val="solid"/>
+                      <a:round/>
+                      <a:headEnd type="none" w="med" len="med"/>
+                      <a:tailEnd type="none" w="med" len="med"/>
+                    </a:lnT>
+                    <a:lnB w="12700" cap="flat" cmpd="sng" algn="ctr">
+                      <a:solidFill>
+                        <a:srgbClr val="DDDDDD"/>
+                      </a:solidFill>
+                      <a:prstDash val="solid"/>
+                      <a:round/>
+                      <a:headEnd type="none" w="med" len="med"/>
+                      <a:tailEnd type="none" w="med" len="med"/>
+                    </a:lnB>
+                    <a:solidFill>
+                      <a:srgbClr val="F5F5F5"/>
+                    </a:solidFill>
+                  </a:tcPr>
+                </a:tc>
+                <a:tc>
+                  <a:txBody>
+                    <a:bodyPr/>
+                    <a:lstStyle/>
+                    <a:p>
+                      <a:pPr indent="0" marL="0">
+                        <a:buNone/>
+                      </a:pPr>
+                      <a:r>
+                        <a:rPr lang="en-US" sz="1000" b="1" dirty="0">
+                          <a:solidFill>
+                            <a:srgbClr val="1E8A47"/>
+                          </a:solidFill>
+                          <a:latin typeface="Malgun Gothic" pitchFamily="34" charset="0"/>
+                          <a:ea typeface="Malgun Gothic" pitchFamily="34" charset="-122"/>
+                          <a:cs typeface="Malgun Gothic" pitchFamily="34" charset="-120"/>
+                        </a:rPr>
+                        <a:t>56회 감소</a:t>
+                      </a:r>
+                      <a:endParaRPr lang="en-US" sz="1000" dirty="0">
+                        <a:latin typeface="Malgun Gothic" charset="0"/>
+                        <a:ea typeface="Malgun Gothic" charset="0"/>
+                        <a:cs typeface="Malgun Gothic" charset="0"/>
+                      </a:endParaRPr>
+                    </a:p>
+                  </a:txBody>
+                  <a:tcPr marL="91440" marR="91440" marT="45720" marB="45720">
+                    <a:lnL w="12700" cap="flat" cmpd="sng" algn="ctr">
+                      <a:solidFill>
+                        <a:srgbClr val="DDDDDD"/>
+                      </a:solidFill>
+                      <a:prstDash val="solid"/>
+                      <a:round/>
+                      <a:headEnd type="none" w="med" len="med"/>
+                      <a:tailEnd type="none" w="med" len="med"/>
+                    </a:lnL>
+                    <a:lnR w="12700" cap="flat" cmpd="sng" algn="ctr">
+                      <a:solidFill>
+                        <a:srgbClr val="DDDDDD"/>
+                      </a:solidFill>
+                      <a:prstDash val="solid"/>
+                      <a:round/>
+                      <a:headEnd type="none" w="med" len="med"/>
+                      <a:tailEnd type="none" w="med" len="med"/>
+                    </a:lnR>
+                    <a:lnT w="12700" cap="flat" cmpd="sng" algn="ctr">
+                      <a:solidFill>
+                        <a:srgbClr val="DDDDDD"/>
+                      </a:solidFill>
+                      <a:prstDash val="solid"/>
+                      <a:round/>
+                      <a:headEnd type="none" w="med" len="med"/>
+                      <a:tailEnd type="none" w="med" len="med"/>
+                    </a:lnT>
+                    <a:lnB w="12700" cap="flat" cmpd="sng" algn="ctr">
+                      <a:solidFill>
+                        <a:srgbClr val="DDDDDD"/>
+                      </a:solidFill>
+                      <a:prstDash val="solid"/>
+                      <a:round/>
+                      <a:headEnd type="none" w="med" len="med"/>
+                      <a:tailEnd type="none" w="med" len="med"/>
+                    </a:lnB>
+                    <a:solidFill>
+                      <a:srgbClr val="F5F5F5"/>
+                    </a:solidFill>
+                  </a:tcPr>
+                </a:tc>
+                <a:tc>
+                  <a:txBody>
+                    <a:bodyPr/>
+                    <a:lstStyle/>
+                    <a:p>
+                      <a:pPr indent="0" marL="0">
+                        <a:buNone/>
+                      </a:pPr>
+                      <a:r>
+                        <a:rPr lang="en-US" sz="1000" b="1" dirty="0">
+                          <a:solidFill>
+                            <a:srgbClr val="000000"/>
+                          </a:solidFill>
+                          <a:latin typeface="Malgun Gothic" pitchFamily="34" charset="0"/>
+                          <a:ea typeface="Malgun Gothic" pitchFamily="34" charset="-122"/>
+                          <a:cs typeface="Malgun Gothic" pitchFamily="34" charset="-120"/>
+                        </a:rPr>
+                        <a:t>말기 방전율: 2.0 → 0.6 (70% 개선)</a:t>
+                      </a:r>
+                      <a:endParaRPr lang="en-US" sz="1000" dirty="0">
+                        <a:latin typeface="Malgun Gothic" charset="0"/>
+                        <a:ea typeface="Malgun Gothic" charset="0"/>
+                        <a:cs typeface="Malgun Gothic" charset="0"/>
+                      </a:endParaRPr>
+                    </a:p>
+                  </a:txBody>
+                  <a:tcPr marL="91440" marR="91440" marT="45720" marB="45720">
+                    <a:lnL w="12700" cap="flat" cmpd="sng" algn="ctr">
+                      <a:solidFill>
+                        <a:srgbClr val="DDDDDD"/>
+                      </a:solidFill>
+                      <a:prstDash val="solid"/>
+                      <a:round/>
+                      <a:headEnd type="none" w="med" len="med"/>
+                      <a:tailEnd type="none" w="med" len="med"/>
+                    </a:lnL>
+                    <a:lnR w="12700" cap="flat" cmpd="sng" algn="ctr">
+                      <a:solidFill>
+                        <a:srgbClr val="DDDDDD"/>
+                      </a:solidFill>
+                      <a:prstDash val="solid"/>
+                      <a:round/>
+                      <a:headEnd type="none" w="med" len="med"/>
+                      <a:tailEnd type="none" w="med" len="med"/>
+                    </a:lnR>
+                    <a:lnT w="12700" cap="flat" cmpd="sng" algn="ctr">
+                      <a:solidFill>
+                        <a:srgbClr val="DDDDDD"/>
+                      </a:solidFill>
+                      <a:prstDash val="solid"/>
+                      <a:round/>
+                      <a:headEnd type="none" w="med" len="med"/>
+                      <a:tailEnd type="none" w="med" len="med"/>
+                    </a:lnT>
+                    <a:lnB w="12700" cap="flat" cmpd="sng" algn="ctr">
+                      <a:solidFill>
+                        <a:srgbClr val="DDDDDD"/>
+                      </a:solidFill>
+                      <a:prstDash val="solid"/>
+                      <a:round/>
+                      <a:headEnd type="none" w="med" len="med"/>
+                      <a:tailEnd type="none" w="med" len="med"/>
+                    </a:lnB>
+                    <a:solidFill>
+                      <a:srgbClr val="F5F5F5"/>
+                    </a:solidFill>
+                  </a:tcPr>
+                </a:tc>
+              </a:tr>
+            </a:tbl>
+          </a:graphicData>
+        </a:graphic>
+      </p:graphicFrame>
+      <p:sp>
+        <p:nvSpPr>
+          <p:cNvPr id="7" name="Shape 4"/>
+          <p:cNvSpPr/>
+          <p:nvPr/>
+        </p:nvSpPr>
+        <p:spPr>
+          <a:xfrm>
+            <a:off x="182880" y="5349240"/>
+            <a:ext cx="8778240" cy="292608"/>
+          </a:xfrm>
+          <a:prstGeom prst="rect">
+            <a:avLst/>
+          </a:prstGeom>
+          <a:solidFill>
+            <a:srgbClr val="005BAC"/>
+          </a:solidFill>
+          <a:ln w="12700">
+            <a:solidFill>
+              <a:srgbClr val="005BAC"/>
+            </a:solidFill>
+            <a:prstDash val="solid"/>
+          </a:ln>
+        </p:spPr>
+      </p:sp>
+      <p:sp>
+        <p:nvSpPr>
+          <p:cNvPr id="8" name="Text 5"/>
+          <p:cNvSpPr/>
+          <p:nvPr/>
+        </p:nvSpPr>
+        <p:spPr>
+          <a:xfrm>
+            <a:off x="182880" y="5367528"/>
+            <a:ext cx="8778240" cy="256032"/>
+          </a:xfrm>
+          <a:prstGeom prst="rect">
+            <a:avLst/>
+          </a:prstGeom>
+          <a:noFill/>
+          <a:ln/>
+        </p:spPr>
+        <p:txBody>
+          <a:bodyPr wrap="square" rtlCol="0" anchor="ctr"/>
+          <a:lstStyle/>
+          <a:p>
+            <a:pPr indent="0" marL="0">
+              <a:buNone/>
+            </a:pPr>
+            <a:r>
+              <a:rPr lang="en-US" sz="1100" b="1" dirty="0">
+                <a:solidFill>
+                  <a:srgbClr val="FFFFFF"/>
+                </a:solidFill>
+                <a:latin typeface="Malgun Gothic" pitchFamily="34" charset="0"/>
+                <a:ea typeface="Malgun Gothic" pitchFamily="34" charset="-122"/>
+                <a:cs typeface="Malgun Gothic" pitchFamily="34" charset="-120"/>
+              </a:rPr>
+              <a:t>최종 채택 파라미터</a:t>
+            </a:r>
+            <a:endParaRPr lang="en-US" sz="1100" dirty="0"/>
+          </a:p>
+        </p:txBody>
+      </p:sp>
+      <p:graphicFrame>
+        <p:nvGraphicFramePr>
+          <p:cNvPr id="27" name="Table 1"/>
+          <p:cNvGraphicFramePr>
+            <a:graphicFrameLocks noGrp="1"/>
+          </p:cNvGraphicFramePr>
+          <p:nvPr>
+            <p:extLst>
+              <p:ext uri="{D42A27DB-BD31-4B8C-83A1-F6EECF244321}">
+                <p14:modId xmlns:p14="http://schemas.microsoft.com/office/powerpoint/2010/main" val="1579011935"/>
+              </p:ext>
+            </p:extLst>
+          </p:nvPr>
+        </p:nvGraphicFramePr>
+        <p:xfrm>
+          <a:off x="182880" y="5678424"/>
+          <a:ext cx="8778240" cy="914400"/>
+        </p:xfrm>
+        <a:graphic>
+          <a:graphicData uri="http://schemas.openxmlformats.org/drawingml/2006/table">
+            <a:tbl>
+              <a:tblPr/>
+              <a:tblGrid>
+                <a:gridCol w="1737360"/>
+                <a:gridCol w="1965960"/>
+                <a:gridCol w="1737360"/>
+                <a:gridCol w="1783080"/>
+                <a:gridCol w="1554480"/>
+              </a:tblGrid>
+              <a:tr h="384048">
+                <a:tc>
+                  <a:txBody>
+                    <a:bodyPr/>
+                    <a:lstStyle/>
+                    <a:p>
+                      <a:pPr indent="0" marL="0">
+                        <a:buNone/>
+                      </a:pPr>
+                      <a:r>
+                        <a:rPr lang="en-US" sz="1100" b="1" dirty="0">
+                          <a:solidFill>
+                            <a:srgbClr val="000000"/>
+                          </a:solidFill>
+                          <a:latin typeface="Malgun Gothic" pitchFamily="34" charset="0"/>
+                          <a:ea typeface="Malgun Gothic" pitchFamily="34" charset="-122"/>
+                          <a:cs typeface="Malgun Gothic" pitchFamily="34" charset="-120"/>
+                        </a:rPr>
+                        <a:t>DRAIN_PER_STEP = 3</a:t>
+                      </a:r>
+                      <a:endParaRPr lang="en-US" sz="1100" dirty="0">
+                        <a:latin typeface="Malgun Gothic" charset="0"/>
+                        <a:ea typeface="Malgun Gothic" charset="0"/>
+                        <a:cs typeface="Malgun Gothic" charset="0"/>
+                      </a:endParaRPr>
+                    </a:p>
+                  </a:txBody>
+                  <a:tcPr marL="91440" marR="91440" marT="45720" marB="45720">
+                    <a:lnL w="12700" cap="flat" cmpd="sng" algn="ctr">
+                      <a:solidFill>
+                        <a:srgbClr val="DDDDDD"/>
+                      </a:solidFill>
+                      <a:prstDash val="solid"/>
+                      <a:round/>
+                      <a:headEnd type="none" w="med" len="med"/>
+                      <a:tailEnd type="none" w="med" len="med"/>
+                    </a:lnL>
+                    <a:lnR w="12700" cap="flat" cmpd="sng" algn="ctr">
+                      <a:solidFill>
+                        <a:srgbClr val="DDDDDD"/>
+                      </a:solidFill>
+                      <a:prstDash val="solid"/>
+                      <a:round/>
+                      <a:headEnd type="none" w="med" len="med"/>
+                      <a:tailEnd type="none" w="med" len="med"/>
+                    </a:lnR>
+                    <a:lnT w="12700" cap="flat" cmpd="sng" algn="ctr">
+                      <a:solidFill>
+                        <a:srgbClr val="DDDDDD"/>
+                      </a:solidFill>
+                      <a:prstDash val="solid"/>
+                      <a:round/>
+                      <a:headEnd type="none" w="med" len="med"/>
+                      <a:tailEnd type="none" w="med" len="med"/>
+                    </a:lnT>
+                    <a:lnB w="12700" cap="flat" cmpd="sng" algn="ctr">
+                      <a:solidFill>
+                        <a:srgbClr val="DDDDDD"/>
+                      </a:solidFill>
+                      <a:prstDash val="solid"/>
+                      <a:round/>
+                      <a:headEnd type="none" w="med" len="med"/>
+                      <a:tailEnd type="none" w="med" len="med"/>
+                    </a:lnB>
+                    <a:solidFill>
+                      <a:srgbClr val="EAF4FF"/>
+                    </a:solidFill>
+                  </a:tcPr>
+                </a:tc>
+                <a:tc>
+                  <a:txBody>
+                    <a:bodyPr/>
+                    <a:lstStyle/>
+                    <a:p>
+                      <a:pPr indent="0" marL="0">
+                        <a:buNone/>
+                      </a:pPr>
+                      <a:r>
+                        <a:rPr lang="en-US" sz="1100" b="1" dirty="0">
+                          <a:solidFill>
+                            <a:srgbClr val="000000"/>
+                          </a:solidFill>
+                          <a:latin typeface="Malgun Gothic" pitchFamily="34" charset="0"/>
+                          <a:ea typeface="Malgun Gothic" pitchFamily="34" charset="-122"/>
+                          <a:cs typeface="Malgun Gothic" pitchFamily="34" charset="-120"/>
+                        </a:rPr>
+                        <a:t>WARNING_THRESHOLD = 40</a:t>
+                      </a:r>
+                      <a:endParaRPr lang="en-US" sz="1100" dirty="0">
+                        <a:latin typeface="Malgun Gothic" charset="0"/>
+                        <a:ea typeface="Malgun Gothic" charset="0"/>
+                        <a:cs typeface="Malgun Gothic" charset="0"/>
+                      </a:endParaRPr>
+                    </a:p>
+                  </a:txBody>
+                  <a:tcPr marL="91440" marR="91440" marT="45720" marB="45720">
+                    <a:lnL w="12700" cap="flat" cmpd="sng" algn="ctr">
+                      <a:solidFill>
+                        <a:srgbClr val="DDDDDD"/>
+                      </a:solidFill>
+                      <a:prstDash val="solid"/>
+                      <a:round/>
+                      <a:headEnd type="none" w="med" len="med"/>
+                      <a:tailEnd type="none" w="med" len="med"/>
+                    </a:lnL>
+                    <a:lnR w="12700" cap="flat" cmpd="sng" algn="ctr">
+                      <a:solidFill>
+                        <a:srgbClr val="DDDDDD"/>
+                      </a:solidFill>
+                      <a:prstDash val="solid"/>
+                      <a:round/>
+                      <a:headEnd type="none" w="med" len="med"/>
+                      <a:tailEnd type="none" w="med" len="med"/>
+                    </a:lnR>
+                    <a:lnT w="12700" cap="flat" cmpd="sng" algn="ctr">
+                      <a:solidFill>
+                        <a:srgbClr val="DDDDDD"/>
+                      </a:solidFill>
+                      <a:prstDash val="solid"/>
+                      <a:round/>
+                      <a:headEnd type="none" w="med" len="med"/>
+                      <a:tailEnd type="none" w="med" len="med"/>
+                    </a:lnT>
+                    <a:lnB w="12700" cap="flat" cmpd="sng" algn="ctr">
+                      <a:solidFill>
+                        <a:srgbClr val="DDDDDD"/>
+                      </a:solidFill>
+                      <a:prstDash val="solid"/>
+                      <a:round/>
+                      <a:headEnd type="none" w="med" len="med"/>
+                      <a:tailEnd type="none" w="med" len="med"/>
+                    </a:lnB>
+                    <a:solidFill>
+                      <a:srgbClr val="EAF4FF"/>
+                    </a:solidFill>
+                  </a:tcPr>
+                </a:tc>
+                <a:tc>
+                  <a:txBody>
+                    <a:bodyPr/>
+                    <a:lstStyle/>
+                    <a:p>
+                      <a:pPr indent="0" marL="0">
+                        <a:buNone/>
+                      </a:pPr>
+                      <a:r>
+                        <a:rPr lang="en-US" sz="1100" b="1" dirty="0">
+                          <a:solidFill>
+                            <a:srgbClr val="000000"/>
+                          </a:solidFill>
+                          <a:latin typeface="Malgun Gothic" pitchFamily="34" charset="0"/>
+                          <a:ea typeface="Malgun Gothic" pitchFamily="34" charset="-122"/>
+                          <a:cs typeface="Malgun Gothic" pitchFamily="34" charset="-120"/>
+                        </a:rPr>
+                        <a:t>R_CHARGE_LOW = +50</a:t>
+                      </a:r>
+                      <a:endParaRPr lang="en-US" sz="1100" dirty="0">
+                        <a:latin typeface="Malgun Gothic" charset="0"/>
+                        <a:ea typeface="Malgun Gothic" charset="0"/>
+                        <a:cs typeface="Malgun Gothic" charset="0"/>
+                      </a:endParaRPr>
+                    </a:p>
+                  </a:txBody>
+                  <a:tcPr marL="91440" marR="91440" marT="45720" marB="45720">
+                    <a:lnL w="12700" cap="flat" cmpd="sng" algn="ctr">
+                      <a:solidFill>
+                        <a:srgbClr val="DDDDDD"/>
+                      </a:solidFill>
+                      <a:prstDash val="solid"/>
+                      <a:round/>
+                      <a:headEnd type="none" w="med" len="med"/>
+                      <a:tailEnd type="none" w="med" len="med"/>
+                    </a:lnL>
+                    <a:lnR w="12700" cap="flat" cmpd="sng" algn="ctr">
+                      <a:solidFill>
+                        <a:srgbClr val="DDDDDD"/>
+                      </a:solidFill>
+                      <a:prstDash val="solid"/>
+                      <a:round/>
+                      <a:headEnd type="none" w="med" len="med"/>
+                      <a:tailEnd type="none" w="med" len="med"/>
+                    </a:lnR>
+                    <a:lnT w="12700" cap="flat" cmpd="sng" algn="ctr">
+                      <a:solidFill>
+                        <a:srgbClr val="DDDDDD"/>
+                      </a:solidFill>
+                      <a:prstDash val="solid"/>
+                      <a:round/>
+                      <a:headEnd type="none" w="med" len="med"/>
+                      <a:tailEnd type="none" w="med" len="med"/>
+                    </a:lnT>
+                    <a:lnB w="12700" cap="flat" cmpd="sng" algn="ctr">
+                      <a:solidFill>
+                        <a:srgbClr val="DDDDDD"/>
+                      </a:solidFill>
+                      <a:prstDash val="solid"/>
+                      <a:round/>
+                      <a:headEnd type="none" w="med" len="med"/>
+                      <a:tailEnd type="none" w="med" len="med"/>
+                    </a:lnB>
+                    <a:solidFill>
+                      <a:srgbClr val="EAF4FF"/>
+                    </a:solidFill>
+                  </a:tcPr>
+                </a:tc>
+                <a:tc>
+                  <a:txBody>
+                    <a:bodyPr/>
+                    <a:lstStyle/>
+                    <a:p>
+                      <a:pPr indent="0" marL="0">
+                        <a:buNone/>
+                      </a:pPr>
+                      <a:r>
+                        <a:rPr lang="en-US" sz="1100" b="1" dirty="0">
+                          <a:solidFill>
+                            <a:srgbClr val="000000"/>
+                          </a:solidFill>
+                          <a:latin typeface="Malgun Gothic" pitchFamily="34" charset="0"/>
+                          <a:ea typeface="Malgun Gothic" pitchFamily="34" charset="-122"/>
+                          <a:cs typeface="Malgun Gothic" pitchFamily="34" charset="-120"/>
+                        </a:rPr>
+                        <a:t>R_CHARGE_WASTE = 제거</a:t>
+                      </a:r>
+                      <a:endParaRPr lang="en-US" sz="1100" dirty="0">
+                        <a:latin typeface="Malgun Gothic" charset="0"/>
+                        <a:ea typeface="Malgun Gothic" charset="0"/>
+                        <a:cs typeface="Malgun Gothic" charset="0"/>
+                      </a:endParaRPr>
+                    </a:p>
+                  </a:txBody>
+                  <a:tcPr marL="91440" marR="91440" marT="45720" marB="45720">
+                    <a:lnL w="12700" cap="flat" cmpd="sng" algn="ctr">
+                      <a:solidFill>
+                        <a:srgbClr val="DDDDDD"/>
+                      </a:solidFill>
+                      <a:prstDash val="solid"/>
+                      <a:round/>
+                      <a:headEnd type="none" w="med" len="med"/>
+                      <a:tailEnd type="none" w="med" len="med"/>
+                    </a:lnL>
+                    <a:lnR w="12700" cap="flat" cmpd="sng" algn="ctr">
+                      <a:solidFill>
+                        <a:srgbClr val="DDDDDD"/>
+                      </a:solidFill>
+                      <a:prstDash val="solid"/>
+                      <a:round/>
+                      <a:headEnd type="none" w="med" len="med"/>
+                      <a:tailEnd type="none" w="med" len="med"/>
+                    </a:lnR>
+                    <a:lnT w="12700" cap="flat" cmpd="sng" algn="ctr">
+                      <a:solidFill>
+                        <a:srgbClr val="DDDDDD"/>
+                      </a:solidFill>
+                      <a:prstDash val="solid"/>
+                      <a:round/>
+                      <a:headEnd type="none" w="med" len="med"/>
+                      <a:tailEnd type="none" w="med" len="med"/>
+                    </a:lnT>
+                    <a:lnB w="12700" cap="flat" cmpd="sng" algn="ctr">
+                      <a:solidFill>
+                        <a:srgbClr val="DDDDDD"/>
+                      </a:solidFill>
+                      <a:prstDash val="solid"/>
+                      <a:round/>
+                      <a:headEnd type="none" w="med" len="med"/>
+                      <a:tailEnd type="none" w="med" len="med"/>
+                    </a:lnB>
+                    <a:solidFill>
+                      <a:srgbClr val="EAF4FF"/>
+                    </a:solidFill>
+                  </a:tcPr>
+                </a:tc>
+                <a:tc>
+                  <a:txBody>
+                    <a:bodyPr/>
+                    <a:lstStyle/>
+                    <a:p>
+                      <a:pPr indent="0" marL="0">
+                        <a:buNone/>
+                      </a:pPr>
+                      <a:r>
+                        <a:rPr lang="en-US" sz="1100" b="1" dirty="0">
+                          <a:solidFill>
+                            <a:srgbClr val="000000"/>
+                          </a:solidFill>
+                          <a:latin typeface="Malgun Gothic" pitchFamily="34" charset="0"/>
+                          <a:ea typeface="Malgun Gothic" pitchFamily="34" charset="-122"/>
+                          <a:cs typeface="Malgun Gothic" pitchFamily="34" charset="-120"/>
+                        </a:rPr>
+                        <a:t>R_DEAD = −200</a:t>
+                      </a:r>
+                      <a:endParaRPr lang="en-US" sz="1100" dirty="0">
+                        <a:latin typeface="Malgun Gothic" charset="0"/>
+                        <a:ea typeface="Malgun Gothic" charset="0"/>
+                        <a:cs typeface="Malgun Gothic" charset="0"/>
+                      </a:endParaRPr>
+                    </a:p>
+                  </a:txBody>
+                  <a:tcPr marL="91440" marR="91440" marT="45720" marB="45720">
+                    <a:lnL w="12700" cap="flat" cmpd="sng" algn="ctr">
+                      <a:solidFill>
+                        <a:srgbClr val="DDDDDD"/>
+                      </a:solidFill>
+                      <a:prstDash val="solid"/>
+                      <a:round/>
+                      <a:headEnd type="none" w="med" len="med"/>
+                      <a:tailEnd type="none" w="med" len="med"/>
+                    </a:lnL>
+                    <a:lnR w="12700" cap="flat" cmpd="sng" algn="ctr">
+                      <a:solidFill>
+                        <a:srgbClr val="DDDDDD"/>
+                      </a:solidFill>
+                      <a:prstDash val="solid"/>
+                      <a:round/>
+                      <a:headEnd type="none" w="med" len="med"/>
+                      <a:tailEnd type="none" w="med" len="med"/>
+                    </a:lnR>
+                    <a:lnT w="12700" cap="flat" cmpd="sng" algn="ctr">
+                      <a:solidFill>
+                        <a:srgbClr val="DDDDDD"/>
+                      </a:solidFill>
+                      <a:prstDash val="solid"/>
+                      <a:round/>
+                      <a:headEnd type="none" w="med" len="med"/>
+                      <a:tailEnd type="none" w="med" len="med"/>
+                    </a:lnT>
+                    <a:lnB w="12700" cap="flat" cmpd="sng" algn="ctr">
+                      <a:solidFill>
+                        <a:srgbClr val="DDDDDD"/>
+                      </a:solidFill>
+                      <a:prstDash val="solid"/>
+                      <a:round/>
+                      <a:headEnd type="none" w="med" len="med"/>
+                      <a:tailEnd type="none" w="med" len="med"/>
+                    </a:lnB>
+                    <a:solidFill>
+                      <a:srgbClr val="EAF4FF"/>
+                    </a:solidFill>
+                  </a:tcPr>
+                </a:tc>
+              </a:tr>
+            </a:tbl>
+          </a:graphicData>
+        </a:graphic>
+      </p:graphicFrame>
+      <p:sp>
+        <p:nvSpPr>
+          <p:cNvPr id="10" name="Shape 6"/>
+          <p:cNvSpPr/>
+          <p:nvPr/>
+        </p:nvSpPr>
+        <p:spPr>
+          <a:xfrm>
+            <a:off x="182880" y="6099048"/>
+            <a:ext cx="8778240" cy="502920"/>
+          </a:xfrm>
+          <a:prstGeom prst="rect">
+            <a:avLst/>
+          </a:prstGeom>
+          <a:solidFill>
+            <a:srgbClr val="1A1A1A"/>
+          </a:solidFill>
+          <a:ln w="12700">
+            <a:solidFill>
+              <a:srgbClr val="1A1A1A"/>
+            </a:solidFill>
+            <a:prstDash val="solid"/>
+          </a:ln>
+        </p:spPr>
+      </p:sp>
+      <p:sp>
+        <p:nvSpPr>
+          <p:cNvPr id="11" name="Text 7"/>
+          <p:cNvSpPr/>
+          <p:nvPr/>
+        </p:nvSpPr>
+        <p:spPr>
+          <a:xfrm>
+            <a:off x="182880" y="6117336"/>
+            <a:ext cx="8778240" cy="466344"/>
+          </a:xfrm>
+          <a:prstGeom prst="rect">
+            <a:avLst/>
+          </a:prstGeom>
+          <a:noFill/>
+          <a:ln/>
+        </p:spPr>
+        <p:txBody>
+          <a:bodyPr wrap="square" rtlCol="0" anchor="ctr"/>
+          <a:lstStyle/>
+          <a:p>
+            <a:pPr algn="ctr" indent="0" marL="0">
+              <a:buNone/>
+            </a:pPr>
+            <a:r>
+              <a:rPr lang="en-US" sz="1000" dirty="0">
+                <a:solidFill>
+                  <a:srgbClr val="FFFFFF"/>
+                </a:solidFill>
+                <a:latin typeface="Malgun Gothic" pitchFamily="34" charset="0"/>
+                <a:ea typeface="Malgun Gothic" pitchFamily="34" charset="-122"/>
+                <a:cs typeface="Malgun Gothic" pitchFamily="34" charset="-120"/>
+              </a:rPr>
+              <a:t>Baseline은 ep 1,500까지 방전이 사라지지 않음 (미수렴 상태 유지).</a:t>
+            </a:r>
+            <a:endParaRPr lang="en-US" sz="1000" dirty="0"/>
+          </a:p>
+          <a:p>
+            <a:pPr algn="ctr" indent="0" marL="0">
+              <a:buNone/>
+            </a:pPr>
+            <a:r>
+              <a:rPr lang="en-US" sz="1000" dirty="0">
+                <a:solidFill>
+                  <a:srgbClr val="FFFFFF"/>
+                </a:solidFill>
+                <a:latin typeface="Malgun Gothic" pitchFamily="34" charset="0"/>
+                <a:ea typeface="Malgun Gothic" pitchFamily="34" charset="-122"/>
+                <a:cs typeface="Malgun Gothic" pitchFamily="34" charset="-120"/>
+              </a:rPr>
+              <a:t>Proposed는 ep 500 이후 방전율이 거의 0으로 수렴 — Safety 정책이 완전히 내재화됨을 실험으로 증명.</a:t>
+            </a:r>
+            <a:endParaRPr lang="en-US" sz="1000" dirty="0"/>
+          </a:p>
+        </p:txBody>
+      </p:sp>
+    </p:spTree>
+  </p:cSld>
+  <p:clrMapOvr>
+    <a:masterClrMapping/>
+  </p:clrMapOvr>
+</p:sld>
+</file>
+
+<file path=ppt/slides/slide14.xml><?xml version="1.0" encoding="utf-8"?>
+<p:sld xmlns:a="http://schemas.openxmlformats.org/drawingml/2006/main" xmlns:r="http://schemas.openxmlformats.org/officeDocument/2006/relationships" xmlns:p="http://schemas.openxmlformats.org/presentationml/2006/main">
+  <p:cSld name="Slide 14">
+    <p:spTree>
+      <p:nvGrpSpPr>
+        <p:cNvPr id="1" name=""/>
+        <p:cNvGrpSpPr/>
+        <p:nvPr/>
+      </p:nvGrpSpPr>
+      <p:grpSpPr>
+        <a:xfrm>
+          <a:off x="0" y="0"/>
+          <a:ext cx="0" cy="0"/>
+          <a:chOff x="0" y="0"/>
+          <a:chExt cx="0" cy="0"/>
+        </a:xfrm>
+      </p:grpSpPr>
+      <p:sp>
+        <p:nvSpPr>
+          <p:cNvPr id="2" name="Shape 0"/>
+          <p:cNvSpPr/>
+          <p:nvPr/>
+        </p:nvSpPr>
+        <p:spPr>
+          <a:xfrm>
+            <a:off x="0" y="0"/>
+            <a:ext cx="12192000" cy="685800"/>
+          </a:xfrm>
+          <a:prstGeom prst="rect">
+            <a:avLst/>
+          </a:prstGeom>
+          <a:solidFill>
+            <a:srgbClr val="1A1A1A"/>
+          </a:solidFill>
+          <a:ln w="12700">
+            <a:solidFill>
+              <a:srgbClr val="1A1A1A"/>
+            </a:solidFill>
+            <a:prstDash val="solid"/>
+          </a:ln>
+        </p:spPr>
+      </p:sp>
+      <p:sp>
+        <p:nvSpPr>
+          <p:cNvPr id="3" name="Shape 1"/>
+          <p:cNvSpPr/>
+          <p:nvPr/>
+        </p:nvSpPr>
+        <p:spPr>
+          <a:xfrm>
+            <a:off x="0" y="685800"/>
+            <a:ext cx="12192000" cy="45720"/>
+          </a:xfrm>
+          <a:prstGeom prst="rect">
+            <a:avLst/>
+          </a:prstGeom>
+          <a:solidFill>
+            <a:srgbClr val="C40000"/>
+          </a:solidFill>
+          <a:ln w="12700">
+            <a:solidFill>
+              <a:srgbClr val="C40000"/>
+            </a:solidFill>
+            <a:prstDash val="solid"/>
+          </a:ln>
+        </p:spPr>
+      </p:sp>
+      <p:sp>
+        <p:nvSpPr>
+          <p:cNvPr id="4" name="Text 2"/>
+          <p:cNvSpPr/>
+          <p:nvPr/>
+        </p:nvSpPr>
+        <p:spPr>
+          <a:xfrm>
+            <a:off x="365760" y="91440"/>
+            <a:ext cx="8412480" cy="502920"/>
+          </a:xfrm>
+          <a:prstGeom prst="rect">
+            <a:avLst/>
+          </a:prstGeom>
+          <a:noFill/>
+          <a:ln/>
+        </p:spPr>
+        <p:txBody>
+          <a:bodyPr wrap="square" rtlCol="0" anchor="ctr"/>
+          <a:lstStyle/>
+          <a:p>
+            <a:pPr indent="0" marL="0">
+              <a:buNone/>
+            </a:pPr>
+            <a:r>
+              <a:rPr lang="en-US" sz="1700" b="1" dirty="0">
+                <a:solidFill>
+                  <a:srgbClr val="FFFFFF"/>
+                </a:solidFill>
+                <a:latin typeface="Malgun Gothic" pitchFamily="34" charset="0"/>
+                <a:ea typeface="Malgun Gothic" pitchFamily="34" charset="-122"/>
+                <a:cs typeface="Malgun Gothic" pitchFamily="34" charset="-120"/>
+              </a:rPr>
+              <a:t>12  토의 — Safe RL 관점 해석</a:t>
             </a:r>
             <a:endParaRPr lang="en-US" sz="1700" dirty="0"/>
           </a:p>
@@ -8232,9 +14932,9 @@
 </p:sld>
 </file>
 
-<file path=ppt/slides/slide13.xml><?xml version="1.0" encoding="utf-8"?>
+<file path=ppt/slides/slide15.xml><?xml version="1.0" encoding="utf-8"?>
 <p:sld xmlns:a="http://schemas.openxmlformats.org/drawingml/2006/main" xmlns:r="http://schemas.openxmlformats.org/officeDocument/2006/relationships" xmlns:p="http://schemas.openxmlformats.org/presentationml/2006/main">
-  <p:cSld name="Slide 13">
+  <p:cSld name="Slide 15">
     <p:spTree>
       <p:nvGrpSpPr>
         <p:cNvPr id="1" name=""/>
@@ -8332,7 +15032,7 @@
                 <a:ea typeface="Malgun Gothic" pitchFamily="34" charset="-122"/>
                 <a:cs typeface="Malgun Gothic" pitchFamily="34" charset="-120"/>
               </a:rPr>
-              <a:t>11  결론 및 향후 연구</a:t>
+              <a:t>13  결론 및 향후 연구</a:t>
             </a:r>
             <a:endParaRPr lang="en-US" sz="1700" dirty="0"/>
           </a:p>
@@ -8875,8 +15575,8 @@
         </p:nvSpPr>
         <p:spPr>
           <a:xfrm>
-            <a:off x="914400" y="1143000"/>
-            <a:ext cx="7498080" cy="402336"/>
+            <a:off x="914400" y="1005840"/>
+            <a:ext cx="7498080" cy="347472"/>
           </a:xfrm>
           <a:prstGeom prst="rect">
             <a:avLst/>
@@ -8892,7 +15592,7 @@
               <a:buNone/>
             </a:pPr>
             <a:r>
-              <a:rPr lang="en-US" sz="1300" dirty="0">
+              <a:rPr lang="en-US" sz="1200" dirty="0">
                 <a:solidFill>
                   <a:srgbClr val="1A1A1A"/>
                 </a:solidFill>
@@ -8902,7 +15602,7 @@
               </a:rPr>
               <a:t>01  프로젝트 주제 및 목표</a:t>
             </a:r>
-            <a:endParaRPr lang="en-US" sz="1300" dirty="0"/>
+            <a:endParaRPr lang="en-US" sz="1200" dirty="0"/>
           </a:p>
         </p:txBody>
       </p:sp>
@@ -8914,8 +15614,8 @@
         </p:nvSpPr>
         <p:spPr>
           <a:xfrm>
-            <a:off x="914400" y="1600200"/>
-            <a:ext cx="7498080" cy="402336"/>
+            <a:off x="914400" y="1389888"/>
+            <a:ext cx="7498080" cy="347472"/>
           </a:xfrm>
           <a:prstGeom prst="rect">
             <a:avLst/>
@@ -8931,7 +15631,7 @@
               <a:buNone/>
             </a:pPr>
             <a:r>
-              <a:rPr lang="en-US" sz="1300" dirty="0">
+              <a:rPr lang="en-US" sz="1200" dirty="0">
                 <a:solidFill>
                   <a:srgbClr val="767676"/>
                 </a:solidFill>
@@ -8941,7 +15641,7 @@
               </a:rPr>
               <a:t>02  환경 설명 — 7×7 GridWorld · State / Action / Reward</a:t>
             </a:r>
-            <a:endParaRPr lang="en-US" sz="1300" dirty="0"/>
+            <a:endParaRPr lang="en-US" sz="1200" dirty="0"/>
           </a:p>
         </p:txBody>
       </p:sp>
@@ -8953,8 +15653,8 @@
         </p:nvSpPr>
         <p:spPr>
           <a:xfrm>
-            <a:off x="914400" y="2057400"/>
-            <a:ext cx="7498080" cy="402336"/>
+            <a:off x="914400" y="1773936"/>
+            <a:ext cx="7498080" cy="347472"/>
           </a:xfrm>
           <a:prstGeom prst="rect">
             <a:avLst/>
@@ -8970,7 +15670,7 @@
               <a:buNone/>
             </a:pPr>
             <a:r>
-              <a:rPr lang="en-US" sz="1300" dirty="0">
+              <a:rPr lang="en-US" sz="1200" dirty="0">
                 <a:solidFill>
                   <a:srgbClr val="1A1A1A"/>
                 </a:solidFill>
@@ -8980,7 +15680,7 @@
               </a:rPr>
               <a:t>03  Reward Shaping 설계 (Safety-Aware)</a:t>
             </a:r>
-            <a:endParaRPr lang="en-US" sz="1300" dirty="0"/>
+            <a:endParaRPr lang="en-US" sz="1200" dirty="0"/>
           </a:p>
         </p:txBody>
       </p:sp>
@@ -8992,8 +15692,8 @@
         </p:nvSpPr>
         <p:spPr>
           <a:xfrm>
-            <a:off x="914400" y="2514600"/>
-            <a:ext cx="7498080" cy="402336"/>
+            <a:off x="914400" y="2157984"/>
+            <a:ext cx="7498080" cy="347472"/>
           </a:xfrm>
           <a:prstGeom prst="rect">
             <a:avLst/>
@@ -9009,7 +15709,7 @@
               <a:buNone/>
             </a:pPr>
             <a:r>
-              <a:rPr lang="en-US" sz="1300" dirty="0">
+              <a:rPr lang="en-US" sz="1200" dirty="0">
                 <a:solidFill>
                   <a:srgbClr val="767676"/>
                 </a:solidFill>
@@ -9019,7 +15719,7 @@
               </a:rPr>
               <a:t>04  소스코드 비교 — Baseline vs Proposed</a:t>
             </a:r>
-            <a:endParaRPr lang="en-US" sz="1300" dirty="0"/>
+            <a:endParaRPr lang="en-US" sz="1200" dirty="0"/>
           </a:p>
         </p:txBody>
       </p:sp>
@@ -9031,8 +15731,8 @@
         </p:nvSpPr>
         <p:spPr>
           <a:xfrm>
-            <a:off x="914400" y="2971800"/>
-            <a:ext cx="7498080" cy="402336"/>
+            <a:off x="914400" y="2542032"/>
+            <a:ext cx="7498080" cy="347472"/>
           </a:xfrm>
           <a:prstGeom prst="rect">
             <a:avLst/>
@@ -9048,7 +15748,7 @@
               <a:buNone/>
             </a:pPr>
             <a:r>
-              <a:rPr lang="en-US" sz="1300" dirty="0">
+              <a:rPr lang="en-US" sz="1200" dirty="0">
                 <a:solidFill>
                   <a:srgbClr val="1A1A1A"/>
                 </a:solidFill>
@@ -9058,7 +15758,7 @@
               </a:rPr>
               <a:t>05  알고리즘 및 하이퍼파라미터</a:t>
             </a:r>
-            <a:endParaRPr lang="en-US" sz="1300" dirty="0"/>
+            <a:endParaRPr lang="en-US" sz="1200" dirty="0"/>
           </a:p>
         </p:txBody>
       </p:sp>
@@ -9070,8 +15770,8 @@
         </p:nvSpPr>
         <p:spPr>
           <a:xfrm>
-            <a:off x="914400" y="3429000"/>
-            <a:ext cx="7498080" cy="402336"/>
+            <a:off x="914400" y="2926080"/>
+            <a:ext cx="7498080" cy="347472"/>
           </a:xfrm>
           <a:prstGeom prst="rect">
             <a:avLst/>
@@ -9087,7 +15787,7 @@
               <a:buNone/>
             </a:pPr>
             <a:r>
-              <a:rPr lang="en-US" sz="1300" dirty="0">
+              <a:rPr lang="en-US" sz="1200" dirty="0">
                 <a:solidFill>
                   <a:srgbClr val="767676"/>
                 </a:solidFill>
@@ -9097,7 +15797,7 @@
               </a:rPr>
               <a:t>06  실험 셋업</a:t>
             </a:r>
-            <a:endParaRPr lang="en-US" sz="1300" dirty="0"/>
+            <a:endParaRPr lang="en-US" sz="1200" dirty="0"/>
           </a:p>
         </p:txBody>
       </p:sp>
@@ -9109,8 +15809,8 @@
         </p:nvSpPr>
         <p:spPr>
           <a:xfrm>
-            <a:off x="914400" y="3886200"/>
-            <a:ext cx="7498080" cy="402336"/>
+            <a:off x="914400" y="3310128"/>
+            <a:ext cx="7498080" cy="347472"/>
           </a:xfrm>
           <a:prstGeom prst="rect">
             <a:avLst/>
@@ -9126,7 +15826,7 @@
               <a:buNone/>
             </a:pPr>
             <a:r>
-              <a:rPr lang="en-US" sz="1300" dirty="0">
+              <a:rPr lang="en-US" sz="1200" dirty="0">
                 <a:solidFill>
                   <a:srgbClr val="1A1A1A"/>
                 </a:solidFill>
@@ -9136,7 +15836,7 @@
               </a:rPr>
               <a:t>07  실험 결과 ① — 학습 곡선 · 방전 횟수</a:t>
             </a:r>
-            <a:endParaRPr lang="en-US" sz="1300" dirty="0"/>
+            <a:endParaRPr lang="en-US" sz="1200" dirty="0"/>
           </a:p>
         </p:txBody>
       </p:sp>
@@ -9148,8 +15848,8 @@
         </p:nvSpPr>
         <p:spPr>
           <a:xfrm>
-            <a:off x="914400" y="4343400"/>
-            <a:ext cx="7498080" cy="402336"/>
+            <a:off x="914400" y="3694176"/>
+            <a:ext cx="7498080" cy="347472"/>
           </a:xfrm>
           <a:prstGeom prst="rect">
             <a:avLst/>
@@ -9165,7 +15865,7 @@
               <a:buNone/>
             </a:pPr>
             <a:r>
-              <a:rPr lang="en-US" sz="1300" dirty="0">
+              <a:rPr lang="en-US" sz="1200" dirty="0">
                 <a:solidFill>
                   <a:srgbClr val="767676"/>
                 </a:solidFill>
@@ -9175,7 +15875,7 @@
               </a:rPr>
               <a:t>08  실험 결과 ② — 최종 성능 비교 테이블</a:t>
             </a:r>
-            <a:endParaRPr lang="en-US" sz="1300" dirty="0"/>
+            <a:endParaRPr lang="en-US" sz="1200" dirty="0"/>
           </a:p>
         </p:txBody>
       </p:sp>
@@ -9187,8 +15887,8 @@
         </p:nvSpPr>
         <p:spPr>
           <a:xfrm>
-            <a:off x="914400" y="4800600"/>
-            <a:ext cx="7498080" cy="402336"/>
+            <a:off x="914400" y="4078224"/>
+            <a:ext cx="7498080" cy="347472"/>
           </a:xfrm>
           <a:prstGeom prst="rect">
             <a:avLst/>
@@ -9204,7 +15904,7 @@
               <a:buNone/>
             </a:pPr>
             <a:r>
-              <a:rPr lang="en-US" sz="1300" dirty="0">
+              <a:rPr lang="en-US" sz="1200" dirty="0">
                 <a:solidFill>
                   <a:srgbClr val="1A1A1A"/>
                 </a:solidFill>
@@ -9212,9 +15912,9 @@
                 <a:ea typeface="Malgun Gothic" pitchFamily="34" charset="-122"/>
                 <a:cs typeface="Malgun Gothic" pitchFamily="34" charset="-120"/>
               </a:rPr>
-              <a:t>09  실험 조건 최적화 과정 — Step 0→5 수정 이력</a:t>
+              <a:t>09  실험 조건 최적화 과정 ① — Step 0→5 타임라인</a:t>
             </a:r>
-            <a:endParaRPr lang="en-US" sz="1300" dirty="0"/>
+            <a:endParaRPr lang="en-US" sz="1200" dirty="0"/>
           </a:p>
         </p:txBody>
       </p:sp>
@@ -9226,8 +15926,8 @@
         </p:nvSpPr>
         <p:spPr>
           <a:xfrm>
-            <a:off x="914400" y="5257800"/>
-            <a:ext cx="7498080" cy="402336"/>
+            <a:off x="914400" y="4462272"/>
+            <a:ext cx="7498080" cy="347472"/>
           </a:xfrm>
           <a:prstGeom prst="rect">
             <a:avLst/>
@@ -9243,7 +15943,7 @@
               <a:buNone/>
             </a:pPr>
             <a:r>
-              <a:rPr lang="en-US" sz="1300" dirty="0">
+              <a:rPr lang="en-US" sz="1200" dirty="0">
                 <a:solidFill>
                   <a:srgbClr val="767676"/>
                 </a:solidFill>
@@ -9251,9 +15951,9 @@
                 <a:ea typeface="Malgun Gothic" pitchFamily="34" charset="-122"/>
                 <a:cs typeface="Malgun Gothic" pitchFamily="34" charset="-120"/>
               </a:rPr>
-              <a:t>10  토의 — Safe RL 관점 해석</a:t>
+              <a:t>10  실험 조건 최적화 과정 ② — 핵심 실패 원인 분석</a:t>
             </a:r>
-            <a:endParaRPr lang="en-US" sz="1300" dirty="0"/>
+            <a:endParaRPr lang="en-US" sz="1200" dirty="0"/>
           </a:p>
         </p:txBody>
       </p:sp>
@@ -9265,8 +15965,8 @@
         </p:nvSpPr>
         <p:spPr>
           <a:xfrm>
-            <a:off x="914400" y="5715000"/>
-            <a:ext cx="7498080" cy="402336"/>
+            <a:off x="914400" y="4846320"/>
+            <a:ext cx="7498080" cy="347472"/>
           </a:xfrm>
           <a:prstGeom prst="rect">
             <a:avLst/>
@@ -9282,7 +15982,7 @@
               <a:buNone/>
             </a:pPr>
             <a:r>
-              <a:rPr lang="en-US" sz="1300" dirty="0">
+              <a:rPr lang="en-US" sz="1200" dirty="0">
                 <a:solidFill>
                   <a:srgbClr val="1A1A1A"/>
                 </a:solidFill>
@@ -9290,9 +15990,87 @@
                 <a:ea typeface="Malgun Gothic" pitchFamily="34" charset="-122"/>
                 <a:cs typeface="Malgun Gothic" pitchFamily="34" charset="-120"/>
               </a:rPr>
-              <a:t>11  결론 및 향후 연구</a:t>
+              <a:t>11  실험 조건 최적화 과정 ③ — Step 5 수렴 증거</a:t>
             </a:r>
-            <a:endParaRPr lang="en-US" sz="1300" dirty="0"/>
+            <a:endParaRPr lang="en-US" sz="1200" dirty="0"/>
+          </a:p>
+        </p:txBody>
+      </p:sp>
+      <p:sp>
+        <p:nvSpPr>
+          <p:cNvPr id="16" name="Text 14"/>
+          <p:cNvSpPr/>
+          <p:nvPr/>
+        </p:nvSpPr>
+        <p:spPr>
+          <a:xfrm>
+            <a:off x="914400" y="5230368"/>
+            <a:ext cx="7498080" cy="347472"/>
+          </a:xfrm>
+          <a:prstGeom prst="rect">
+            <a:avLst/>
+          </a:prstGeom>
+          <a:noFill/>
+          <a:ln/>
+        </p:spPr>
+        <p:txBody>
+          <a:bodyPr wrap="square" rtlCol="0" anchor="ctr"/>
+          <a:lstStyle/>
+          <a:p>
+            <a:pPr indent="0" marL="0">
+              <a:buNone/>
+            </a:pPr>
+            <a:r>
+              <a:rPr lang="en-US" sz="1200" dirty="0">
+                <a:solidFill>
+                  <a:srgbClr val="767676"/>
+                </a:solidFill>
+                <a:latin typeface="Malgun Gothic" pitchFamily="34" charset="0"/>
+                <a:ea typeface="Malgun Gothic" pitchFamily="34" charset="-122"/>
+                <a:cs typeface="Malgun Gothic" pitchFamily="34" charset="-120"/>
+              </a:rPr>
+              <a:t>12  토의 — Safe RL 관점 해석</a:t>
+            </a:r>
+            <a:endParaRPr lang="en-US" sz="1200" dirty="0"/>
+          </a:p>
+        </p:txBody>
+      </p:sp>
+      <p:sp>
+        <p:nvSpPr>
+          <p:cNvPr id="17" name="Text 15"/>
+          <p:cNvSpPr/>
+          <p:nvPr/>
+        </p:nvSpPr>
+        <p:spPr>
+          <a:xfrm>
+            <a:off x="914400" y="5614416"/>
+            <a:ext cx="7498080" cy="347472"/>
+          </a:xfrm>
+          <a:prstGeom prst="rect">
+            <a:avLst/>
+          </a:prstGeom>
+          <a:noFill/>
+          <a:ln/>
+        </p:spPr>
+        <p:txBody>
+          <a:bodyPr wrap="square" rtlCol="0" anchor="ctr"/>
+          <a:lstStyle/>
+          <a:p>
+            <a:pPr indent="0" marL="0">
+              <a:buNone/>
+            </a:pPr>
+            <a:r>
+              <a:rPr lang="en-US" sz="1200" dirty="0">
+                <a:solidFill>
+                  <a:srgbClr val="1A1A1A"/>
+                </a:solidFill>
+                <a:latin typeface="Malgun Gothic" pitchFamily="34" charset="0"/>
+                <a:ea typeface="Malgun Gothic" pitchFamily="34" charset="-122"/>
+                <a:cs typeface="Malgun Gothic" pitchFamily="34" charset="-120"/>
+              </a:rPr>
+              <a:t>13  결론 및 향후 연구</a:t>
+            </a:r>
+            <a:endParaRPr lang="en-US" sz="1200" dirty="0"/>
           </a:p>
         </p:txBody>
       </p:sp>
@@ -12275,7 +19053,7 @@
                           <a:ea typeface="Malgun Gothic" pitchFamily="34" charset="-122"/>
                           <a:cs typeface="Malgun Gothic" pitchFamily="34" charset="-120"/>
                         </a:rPr>
-                        <a:t>배터리 &lt; 40% + 충전소 도달</a:t>
+                        <a:t>배터리 &lt; 40% + 충전소 도달 (긴급 충전)</a:t>
                       </a:r>
                       <a:endParaRPr lang="en-US" sz="1200" dirty="0">
                         <a:latin typeface="Malgun Gothic" charset="0"/>
@@ -12470,201 +19248,6 @@
                           <a:ea typeface="Malgun Gothic" pitchFamily="34" charset="-122"/>
                           <a:cs typeface="Malgun Gothic" pitchFamily="34" charset="-120"/>
                         </a:rPr>
-                        <a:t>배터리 ≥ 40% + 충전소 도달 (시간 낭비)</a:t>
-                      </a:r>
-                      <a:endParaRPr lang="en-US" sz="1200" dirty="0">
-                        <a:latin typeface="Malgun Gothic" charset="0"/>
-                        <a:ea typeface="Malgun Gothic" charset="0"/>
-                        <a:cs typeface="Malgun Gothic" charset="0"/>
-                      </a:endParaRPr>
-                    </a:p>
-                  </a:txBody>
-                  <a:tcPr marL="91440" marR="91440" marT="45720" marB="45720">
-                    <a:lnL w="12700" cap="flat" cmpd="sng" algn="ctr">
-                      <a:solidFill>
-                        <a:srgbClr val="DDDDDD"/>
-                      </a:solidFill>
-                      <a:prstDash val="solid"/>
-                      <a:round/>
-                      <a:headEnd type="none" w="med" len="med"/>
-                      <a:tailEnd type="none" w="med" len="med"/>
-                    </a:lnL>
-                    <a:lnR w="12700" cap="flat" cmpd="sng" algn="ctr">
-                      <a:solidFill>
-                        <a:srgbClr val="DDDDDD"/>
-                      </a:solidFill>
-                      <a:prstDash val="solid"/>
-                      <a:round/>
-                      <a:headEnd type="none" w="med" len="med"/>
-                      <a:tailEnd type="none" w="med" len="med"/>
-                    </a:lnR>
-                    <a:lnT w="12700" cap="flat" cmpd="sng" algn="ctr">
-                      <a:solidFill>
-                        <a:srgbClr val="DDDDDD"/>
-                      </a:solidFill>
-                      <a:prstDash val="solid"/>
-                      <a:round/>
-                      <a:headEnd type="none" w="med" len="med"/>
-                      <a:tailEnd type="none" w="med" len="med"/>
-                    </a:lnT>
-                    <a:lnB w="12700" cap="flat" cmpd="sng" algn="ctr">
-                      <a:solidFill>
-                        <a:srgbClr val="DDDDDD"/>
-                      </a:solidFill>
-                      <a:prstDash val="solid"/>
-                      <a:round/>
-                      <a:headEnd type="none" w="med" len="med"/>
-                      <a:tailEnd type="none" w="med" len="med"/>
-                    </a:lnB>
-                    <a:solidFill>
-                      <a:srgbClr val="F5F5F5"/>
-                    </a:solidFill>
-                  </a:tcPr>
-                </a:tc>
-                <a:tc>
-                  <a:txBody>
-                    <a:bodyPr/>
-                    <a:lstStyle/>
-                    <a:p>
-                      <a:pPr indent="0" marL="0">
-                        <a:buNone/>
-                      </a:pPr>
-                      <a:r>
-                        <a:rPr lang="en-US" sz="1200" dirty="0">
-                          <a:solidFill>
-                            <a:srgbClr val="000000"/>
-                          </a:solidFill>
-                          <a:latin typeface="Malgun Gothic" pitchFamily="34" charset="0"/>
-                          <a:ea typeface="Malgun Gothic" pitchFamily="34" charset="-122"/>
-                          <a:cs typeface="Malgun Gothic" pitchFamily="34" charset="-120"/>
-                        </a:rPr>
-                        <a:t>−10</a:t>
-                      </a:r>
-                      <a:endParaRPr lang="en-US" sz="1200" dirty="0">
-                        <a:latin typeface="Malgun Gothic" charset="0"/>
-                        <a:ea typeface="Malgun Gothic" charset="0"/>
-                        <a:cs typeface="Malgun Gothic" charset="0"/>
-                      </a:endParaRPr>
-                    </a:p>
-                  </a:txBody>
-                  <a:tcPr marL="91440" marR="91440" marT="45720" marB="45720">
-                    <a:lnL w="12700" cap="flat" cmpd="sng" algn="ctr">
-                      <a:solidFill>
-                        <a:srgbClr val="DDDDDD"/>
-                      </a:solidFill>
-                      <a:prstDash val="solid"/>
-                      <a:round/>
-                      <a:headEnd type="none" w="med" len="med"/>
-                      <a:tailEnd type="none" w="med" len="med"/>
-                    </a:lnL>
-                    <a:lnR w="12700" cap="flat" cmpd="sng" algn="ctr">
-                      <a:solidFill>
-                        <a:srgbClr val="DDDDDD"/>
-                      </a:solidFill>
-                      <a:prstDash val="solid"/>
-                      <a:round/>
-                      <a:headEnd type="none" w="med" len="med"/>
-                      <a:tailEnd type="none" w="med" len="med"/>
-                    </a:lnR>
-                    <a:lnT w="12700" cap="flat" cmpd="sng" algn="ctr">
-                      <a:solidFill>
-                        <a:srgbClr val="DDDDDD"/>
-                      </a:solidFill>
-                      <a:prstDash val="solid"/>
-                      <a:round/>
-                      <a:headEnd type="none" w="med" len="med"/>
-                      <a:tailEnd type="none" w="med" len="med"/>
-                    </a:lnT>
-                    <a:lnB w="12700" cap="flat" cmpd="sng" algn="ctr">
-                      <a:solidFill>
-                        <a:srgbClr val="DDDDDD"/>
-                      </a:solidFill>
-                      <a:prstDash val="solid"/>
-                      <a:round/>
-                      <a:headEnd type="none" w="med" len="med"/>
-                      <a:tailEnd type="none" w="med" len="med"/>
-                    </a:lnB>
-                    <a:solidFill>
-                      <a:srgbClr val="F5F5F5"/>
-                    </a:solidFill>
-                  </a:tcPr>
-                </a:tc>
-              </a:tr>
-              <a:tr h="0">
-                <a:tc>
-                  <a:txBody>
-                    <a:bodyPr/>
-                    <a:lstStyle/>
-                    <a:p>
-                      <a:pPr indent="0" marL="0">
-                        <a:buNone/>
-                      </a:pPr>
-                      <a:endParaRPr lang="en-US" sz="1200" dirty="0">
-                        <a:latin typeface="Malgun Gothic" charset="0"/>
-                        <a:ea typeface="Malgun Gothic" charset="0"/>
-                        <a:cs typeface="Malgun Gothic" charset="0"/>
-                      </a:endParaRPr>
-                    </a:p>
-                  </a:txBody>
-                  <a:tcPr marL="91440" marR="91440" marT="45720" marB="45720">
-                    <a:lnL w="12700" cap="flat" cmpd="sng" algn="ctr">
-                      <a:solidFill>
-                        <a:srgbClr val="DDDDDD"/>
-                      </a:solidFill>
-                      <a:prstDash val="solid"/>
-                      <a:round/>
-                      <a:headEnd type="none" w="med" len="med"/>
-                      <a:tailEnd type="none" w="med" len="med"/>
-                    </a:lnL>
-                    <a:lnR w="12700" cap="flat" cmpd="sng" algn="ctr">
-                      <a:solidFill>
-                        <a:srgbClr val="DDDDDD"/>
-                      </a:solidFill>
-                      <a:prstDash val="solid"/>
-                      <a:round/>
-                      <a:headEnd type="none" w="med" len="med"/>
-                      <a:tailEnd type="none" w="med" len="med"/>
-                    </a:lnR>
-                    <a:lnT w="12700" cap="flat" cmpd="sng" algn="ctr">
-                      <a:solidFill>
-                        <a:srgbClr val="DDDDDD"/>
-                      </a:solidFill>
-                      <a:prstDash val="solid"/>
-                      <a:round/>
-                      <a:headEnd type="none" w="med" len="med"/>
-                      <a:tailEnd type="none" w="med" len="med"/>
-                    </a:lnT>
-                    <a:lnB w="12700" cap="flat" cmpd="sng" algn="ctr">
-                      <a:solidFill>
-                        <a:srgbClr val="DDDDDD"/>
-                      </a:solidFill>
-                      <a:prstDash val="solid"/>
-                      <a:round/>
-                      <a:headEnd type="none" w="med" len="med"/>
-                      <a:tailEnd type="none" w="med" len="med"/>
-                    </a:lnB>
-                    <a:solidFill>
-                      <a:srgbClr val="F5F5F5"/>
-                    </a:solidFill>
-                  </a:tcPr>
-                </a:tc>
-                <a:tc>
-                  <a:txBody>
-                    <a:bodyPr/>
-                    <a:lstStyle/>
-                    <a:p>
-                      <a:pPr indent="0" marL="0">
-                        <a:buNone/>
-                      </a:pPr>
-                      <a:r>
-                        <a:rPr lang="en-US" sz="1200" dirty="0">
-                          <a:solidFill>
-                            <a:srgbClr val="000000"/>
-                          </a:solidFill>
-                          <a:latin typeface="Malgun Gothic" pitchFamily="34" charset="0"/>
-                          <a:ea typeface="Malgun Gothic" pitchFamily="34" charset="-122"/>
-                          <a:cs typeface="Malgun Gothic" pitchFamily="34" charset="-120"/>
-                        </a:rPr>
                         <a:t>배터리 = 0% (방전) — 대형 사고</a:t>
                       </a:r>
                       <a:endParaRPr lang="en-US" sz="1200" dirty="0">
@@ -12791,7 +19374,71 @@
       </p:graphicFrame>
       <p:sp>
         <p:nvSpPr>
-          <p:cNvPr id="7" name="Text 4"/>
+          <p:cNvPr id="7" name="Shape 4"/>
+          <p:cNvSpPr/>
+          <p:nvPr/>
+        </p:nvSpPr>
+        <p:spPr>
+          <a:xfrm>
+            <a:off x="457200" y="3337560"/>
+            <a:ext cx="8229600" cy="411480"/>
+          </a:xfrm>
+          <a:prstGeom prst="rect">
+            <a:avLst/>
+          </a:prstGeom>
+          <a:solidFill>
+            <a:srgbClr val="FFF3CD"/>
+          </a:solidFill>
+          <a:ln w="12700">
+            <a:solidFill>
+              <a:srgbClr val="E6B800"/>
+            </a:solidFill>
+            <a:prstDash val="solid"/>
+          </a:ln>
+        </p:spPr>
+      </p:sp>
+      <p:sp>
+        <p:nvSpPr>
+          <p:cNvPr id="8" name="Text 5"/>
+          <p:cNvSpPr/>
+          <p:nvPr/>
+        </p:nvSpPr>
+        <p:spPr>
+          <a:xfrm>
+            <a:off x="457200" y="3355848"/>
+            <a:ext cx="8229600" cy="374904"/>
+          </a:xfrm>
+          <a:prstGeom prst="rect">
+            <a:avLst/>
+          </a:prstGeom>
+          <a:noFill/>
+          <a:ln/>
+        </p:spPr>
+        <p:txBody>
+          <a:bodyPr wrap="square" rtlCol="0" anchor="ctr"/>
+          <a:lstStyle/>
+          <a:p>
+            <a:pPr indent="0" marL="0">
+              <a:buNone/>
+            </a:pPr>
+            <a:r>
+              <a:rPr lang="en-US" sz="1000" dirty="0">
+                <a:solidFill>
+                  <a:srgbClr val="7A5000"/>
+                </a:solidFill>
+                <a:latin typeface="Malgun Gothic" pitchFamily="34" charset="0"/>
+                <a:ea typeface="Malgun Gothic" pitchFamily="34" charset="-122"/>
+                <a:cs typeface="Malgun Gothic" pitchFamily="34" charset="-120"/>
+              </a:rPr>
+              <a:t>⚠  R_CHARGE_WASTE(-10) 초기 설계 → Step 3 실험에서 학습 초기 충전소 회피 행동 유발 확인 → 제거 (results/modify.md 참조)</a:t>
+            </a:r>
+            <a:endParaRPr lang="en-US" sz="1000" dirty="0"/>
+          </a:p>
+        </p:txBody>
+      </p:sp>
+      <p:sp>
+        <p:nvSpPr>
+          <p:cNvPr id="9" name="Text 6"/>
           <p:cNvSpPr/>
           <p:nvPr/>
         </p:nvSpPr>
@@ -14069,7 +20716,7 @@
                 <a:ea typeface="Courier New" pitchFamily="34" charset="-122"/>
                 <a:cs typeface="Courier New" pitchFamily="34" charset="-120"/>
               </a:rPr>
-              <a:t>  # 배터리 소모</a:t>
+              <a:t>  # 배터리 소모 (DRAIN=3)</a:t>
             </a:r>
             <a:endParaRPr lang="en-US" sz="900" dirty="0"/>
           </a:p>
@@ -14086,7 +20733,7 @@
                 <a:ea typeface="Courier New" pitchFamily="34" charset="-122"/>
                 <a:cs typeface="Courier New" pitchFamily="34" charset="-120"/>
               </a:rPr>
-              <a:t>  self.battery -= 1</a:t>
+              <a:t>  self.battery -= 3</a:t>
             </a:r>
             <a:endParaRPr lang="en-US" sz="900" dirty="0"/>
           </a:p>
@@ -14126,7 +20773,7 @@
                 <a:ea typeface="Courier New" pitchFamily="34" charset="-122"/>
                 <a:cs typeface="Courier New" pitchFamily="34" charset="-120"/>
               </a:rPr>
-              <a:t>  # ★ 충전소 Reward Shaping</a:t>
+              <a:t>  # ★ 충전소 Safety Reward</a:t>
             </a:r>
             <a:endParaRPr lang="en-US" sz="900" dirty="0"/>
           </a:p>
@@ -14194,7 +20841,7 @@
                 <a:ea typeface="Courier New" pitchFamily="34" charset="-122"/>
                 <a:cs typeface="Courier New" pitchFamily="34" charset="-120"/>
               </a:rPr>
-              <a:t>    else:  # 시간 낭비</a:t>
+              <a:t>    # R_CHARGE_WASTE 제거 (Step4)</a:t>
             </a:r>
             <a:endParaRPr lang="en-US" sz="900" dirty="0"/>
           </a:p>
@@ -14211,7 +20858,7 @@
                 <a:ea typeface="Courier New" pitchFamily="34" charset="-122"/>
                 <a:cs typeface="Courier New" pitchFamily="34" charset="-120"/>
               </a:rPr>
-              <a:t>      reward += R_CHARGE_WASTE  # -10</a:t>
+              <a:t>    # → 충전 회피 행동 유발 방지</a:t>
             </a:r>
             <a:endParaRPr lang="en-US" sz="900" dirty="0"/>
           </a:p>
@@ -14268,7 +20915,7 @@
                 <a:ea typeface="Courier New" pitchFamily="34" charset="-122"/>
                 <a:cs typeface="Courier New" pitchFamily="34" charset="-120"/>
               </a:rPr>
-              <a:t>  if self.battery == 0:</a:t>
+              <a:t>  if self.battery &lt;= 0:</a:t>
             </a:r>
             <a:endParaRPr lang="en-US" sz="900" dirty="0"/>
           </a:p>
